--- a/site/showcase/exports/podcast.pptx
+++ b/site/showcase/exports/podcast.pptx
@@ -1163,17 +1163,17 @@
           </a:p>
           <a:p>
             <a:r>
-              <a:t>Claude Analysis | Style strongly resembles AI-generated two-host podcast audio (e.g. NotebookLM 'deep dive' format): stock phrases like 'Okay, let's unpack this', 'If we connect this to the bigger picture', 'the mission for our deep dive today', 'a quick heads-up to you, the listener', a formulaic impartiality disclaimer, constant affirmations ('Exactly', 'Perfectly said'), vivid metaphors ('real-time MRI of society'), and inserted fillers, all suggesting a likely synthetic origin.</a:t>
-            </a:r>
-          </a:p>
-          <a:p>
-            <a:r>
-              <a:t>OpenAI Analysis | The highly regular question-answer scaffolding, repetitive affirmations, staged discoveries, and polished explanatory transitions strongly suggest AI-generated or AI-edited dialogue.</a:t>
-            </a:r>
-          </a:p>
-          <a:p>
-            <a:r>
-              <a:t>Gemini Analysis | Highly synthetic structure exhibiting classic patterns of AI-generated podcast dialogues (such as NotebookLM Audio Overviews) with formulaic back-and-forth banter and simulated natural disfluencies.</a:t>
+              <a:t>Claude Analysis | Style closely matches AI-generated two-host 'deep dive' audio overviews (e.g. NotebookLM): stock openers ('Imagine holding...', 'Okay, let's unpack this', 'If we connect this to the bigger picture'), constant affirmations ('Exactly', 'Perfectly said'), scripted neutrality disclaimer and a staged host challenge, suggesting likely synthetic origin.</a:t>
+            </a:r>
+          </a:p>
+          <a:p>
+            <a:r>
+              <a:t>OpenAI Analysis | The highly regular two-host exchanges, repetitive affirmations, scripted explanatory prompts, and formulaic transitions strongly suggest synthetic generation or editing.</a:t>
+            </a:r>
+          </a:p>
+          <a:p>
+            <a:r>
+              <a:t>Gemini Analysis | The text displays the classic conversational tropes, rapid turn-taking, and synthetic cadence characteristic of an automated AI podcast generator like NotebookLM.</a:t>
             </a:r>
           </a:p>
         </p:txBody>
@@ -1333,7 +1333,7 @@
           </a:p>
           <a:p>
             <a:r>
-              <a:t>Recorded text | Imagine holding uh like a simple piece of cloth in your hand. Let's say it's 2019, and it's just a standard surgical mask. Right, just a boring, everyday medical supply. Something you'd really only see at the dentist's office. Exactly. But then fast forward to the end of 2020, and that exact same piece of cloth had morphed into like a literal measure of your morality. Oh, absolutely. It became a symbol of your political affiliation, your patriotism, even. It's just wild to think about. I mean, today we are looking at the exact digital moment a basic health mandate turned into a full-blown ideological war. It really is one of the most compressed, intense sociological shifts we've ever witnessed. Yeah. I mean we went from a public that largely didn't think about epidemiology at all to a society where every single person was forced to take a public, highly visible stance on a global health crisis. And usually, you know, when we talk about a massive global event like that, we have to rely on historians decades later to piece together the public mood. Right, digging through old newspaper clippings, or uh, diary entries. Exactly. But for the COVID-19 pandemic, we have this complete, real-time, behavioral laboratory. So, we are grounding our conversation today in this fascinating peer-reviewed study from the journal, Vaccine. Yes, authored by Sam Martin and Samantha Vanderslott from the Oxford Vaccine Group. And the scale of their research here is what makes it so robust, right? Oh, totally. They analyzed this massive data set of 7.89 million English-language tweets, Wow. Yeah, from the US and the UK spanning a very specific window, basically, June 1st, 2020 to June 1st, 2021. And they didn't just like count how many times the word "mask" or "vaccine" was used, which is what I would have assumed. No, they went way deeper. They utilized media monitoring software called Meltwater and text network analysis software called InfraNodus. Which uh, we should probably explain how those tools work, because it's vital for understanding the whole study. Please do. So, Meltwater acts like this giant net scraping the internet and pulling in every public conversation based on specific keywords. Right. But InfraNodus acts as the brain. It actually maps relationships between words. So, if the word "mask" is constantly sitting right next to the word "tyranny" or "sheep" in millions of tweets, The software draws a thick digital line between them. Exactly, it lets researchers see the exact architecture of public sentiment. It's almost like looking at a real-time MRI of society's collective anxiety. That's a really great way to visualize it. Yeah. It moves us past just individual anecdotes, Yeah. and shows us the actual structural flow of ideas. Yeah, so the mission for our deep dive today is to explore a very specific phenomenon uncovered in this flow. We want to see how pre-existing anti-vaccine groups and newly formed anti-mask groups actually merged into this massive digital powerhouse. And to understand the psychological, social, and political drivers behind how the public reacted to these mandates. Exactly. Now, uh, a very quick heads-up to you, the listener, before we dive into the timeline. The data we are analyzing today is heavily political. Very heavily. Yeah, it involves major figures from the left and the right. We're talking President Joe Biden, former President Donald Trump, Vice President Kamala Harris, along with a bunch of conservative and liberal viewpoints. Right. So, I have to be clear here. We aren't taking sides today. We aren't endorsing any of the politics discussed. We're just impartially reading the digital footprint left behind to help you understand the mechanics of this social media evolution. Our focus is strictly on the mechanics of the discourse. You know, what the data reflects, what was said, and how it spread. Okay, let's unpack this. To really understand the explosion of outrage and compliance in 2020, we have to reco</a:t>
+              <a:t>Recorded text | Imagine holding a like a simple piece of cloth in your hand. Let's say it's 2019, and it's just a standard surgical mask. Right, just a boring everyday medical supply, something you'd really only see at the dentist office. Exactly. But then fast-forward to the end of 2020, and that exact same piece of cloth had morphed into like a literal measure of your morality. Oh, absolutely. It became a symbol of your political affiliation, your patriotism, even. It's just wild to think about. I mean, today we are looking at the exact digital moment a basic health mandate turned into a full-blown ideological war. It really is one of the most compressed, intense sociological shifts we've ever witnessed. Yeah. We went from a public that largely didn't think about epidemiology at all to a society where every single person was forced to take a public, highly visible stance on a global health crisis. And usually, you know, when we talk about a massive global event like that, we have to rely on historians decades later to piece together the public mood. Right, digging through old newspaper clippings or a diary entries. Exactly. But for the COVID-19 pandemic, we have this complete, real-time behavioral laboratory. So, we are grounding our conversation today in this fascinating peer-reviewed study from the journal Vaccine. Yes, authored by Sam Martin and Samantha Vanderslott from the Oxford Vaccine Group. And the scale of their research here is what makes it so robust, right? Oh, totally. They analyzed this massive data set of 7.89 million English-language tweets. Wow. Yeah, from the US and the UK, spanning a very specific window, basically June 1st, 2020 to June 1st, 2021. And they didn't just like count how many times the word mask or vaccine was used, which is what I would have assumed. No, they went way deeper. They utilized media monitoring software called Meltwater and text network analysis software called InfraNodus. Which uh we should probably explain how those tools work because it's vital for understanding the whole study. Please do. So Meltwater acts like this giant net scraping the internet and pulling in every public conversation based on specific keywords. Right. But InfraNodus acts as the brain. It actually maps relationships between words. So if the word mask is constantly sitting right next to the word tyranny or sheep in millions of tweets, The software draws a thick digital line between them. Exactly. It lets researchers see the exact architecture of public sentiment. It's almost like looking at a real-time MRI of society's collective anxiety. That's a really great way to visualize it. It moves us past just individual anecdotes, Yeah. Yeah. and it shows us the actual structural flow of ideas. Yeah. So, the mission for our deep dive today is to explore a very specific phenomenon uncovered in this flow. We want to see how pre-existing anti-vaccine groups and newly formed anti-mask groups actually merged into this massive digital powerhouse. And to understand the psychological, social, and political drivers behind how the public reacted to these mandates. Exactly. Now uh a very quick heads up to you the listener before we dive into the timeline, the data we are analyzing today is heavily political. Very heavily. Yeah, it involves major figures from the left and the right. We're talking President Joe Biden, former President Donald Trump, Vice President Kamala Harris along with a bunch of conservative and liberal viewpoints. Right. So, I have to be clear here. We aren't taking sides today. We aren't endorsing any of the politics discussed. We're just impartially reading the digital footprint left behind to help you understand the mechanics of this social media evolution. Our focus is strictly on the mechanics of the discourse. You know, what the data reflects, what was said, and how it spread. Okay, let's unpack this. To really understand the explosion of outrage and compliance in 2020, we have to recognize that human pushback again</a:t>
             </a:r>
           </a:p>
         </p:txBody>
@@ -1413,7 +1413,7 @@
           </a:p>
           <a:p>
             <a:r>
-              <a:t>Recorded text | Imagine holding uh like a simple piece of cloth in your hand. Let's say it's 2019, and it's just a standard surgical mask. Right, just a boring, everyday medical supply. Something you'd really only see at the dentist's office. Exactly. But then fast forward to the end of 2020, and that exact same piece of cloth had morphed into like a literal measure of your morality. Oh, absolutely. It became a symbol of your political affiliation, your patriotism, even. It's just wild to think about. I mean, today we are looking at the exact digital moment a basic health mandate turned into a full-blown ideological war. It really is one of the most compressed, intense sociological shifts we've ever witnessed. Yeah. I mean we went from a public that largely didn't think about epidemiology at all to a society where every single person was forced to take a public, highly visible stance on a global health crisis. And usually, you know, when we talk about a massive global event like that, we have to rely on historians decades later to piece together the public mood. Right, digging through old newspaper clippings, or uh, diary entries. Exactly. But for the COVID-19 pandemic, we have this complete, real-time, behavioral laboratory. So, we are grounding our conversation today in this fascinating peer-reviewed study from the journal, Vaccine. Yes, authored by Sam Martin and Samantha Vanderslott from the Oxford Vaccine Group. And the scale of their research here is what makes it so robust, right? Oh, totally. They analyzed this massive data set of 7.89 million English-language tweets, Wow. Yeah, from the US and the UK spanning a very specific window, basically, June 1st, 2020 to June 1st, 2021. And they didn't just like count how many times the word "mask" or "vaccine" was used, which is what I would have assumed. No, they went way deeper. They utilized media monitoring software called Meltwater and text network analysis software called InfraNodus. Which uh, we should probably explain how those tools work, because it's vital for understanding the whole study. Please do. So, Meltwater acts like this giant net scraping the internet and pulling in every public conversation based on specific keywords. Right. But InfraNodus acts as the brain. It actually maps relationships between words. So, if the word "mask" is constantly sitting right next to the word "tyranny" or "sheep" in millions of tweets, The software draws a thick digital line between them. Exactly, it lets researchers see the exact architecture of public sentiment. It's almost like looking at a real-time MRI of society's collective anxiety. That's a really great way to visualize it. Yeah. It moves us past just individual anecdotes, Yeah. and shows us the actual structural flow of ideas. Yeah, so the mission for our deep dive today is to explore a very specific phenomenon uncovered in this flow. We want to see how pre-existing anti-vaccine groups and newly formed anti-mask groups actually merged into this massive digital powerhouse. And to understand the psychological, social, and political drivers behind how the public reacted to these mandates. Exactly. Now, uh, a very quick heads-up to you, the listener, before we dive into the timeline. The data we are analyzing today is heavily political. Very heavily. Yeah, it involves major figures from the left and the right. We're talking President Joe Biden, former President Donald Trump, Vice President Kamala Harris, along with a bunch of conservative and liberal viewpoints. Right. So, I have to be clear here. We aren't taking sides today. We aren't endorsing any of the politics discussed. We're just impartially reading the digital footprint left behind to help you understand the mechanics of this social media evolution. Our focus is strictly on the mechanics of the discourse. You know, what the data reflects, what was said, and how it spread. Okay, let's unpack this. To really understand the explosion of outrage and compliance in 2020, we have to reco</a:t>
+              <a:t>Recorded text | Imagine holding a like a simple piece of cloth in your hand. Let's say it's 2019, and it's just a standard surgical mask. Right, just a boring everyday medical supply, something you'd really only see at the dentist office. Exactly. But then fast-forward to the end of 2020, and that exact same piece of cloth had morphed into like a literal measure of your morality. Oh, absolutely. It became a symbol of your political affiliation, your patriotism, even. It's just wild to think about. I mean, today we are looking at the exact digital moment a basic health mandate turned into a full-blown ideological war. It really is one of the most compressed, intense sociological shifts we've ever witnessed. Yeah. We went from a public that largely didn't think about epidemiology at all to a society where every single person was forced to take a public, highly visible stance on a global health crisis. And usually, you know, when we talk about a massive global event like that, we have to rely on historians decades later to piece together the public mood. Right, digging through old newspaper clippings or a diary entries. Exactly. But for the COVID-19 pandemic, we have this complete, real-time behavioral laboratory. So, we are grounding our conversation today in this fascinating peer-reviewed study from the journal Vaccine. Yes, authored by Sam Martin and Samantha Vanderslott from the Oxford Vaccine Group. And the scale of their research here is what makes it so robust, right? Oh, totally. They analyzed this massive data set of 7.89 million English-language tweets. Wow. Yeah, from the US and the UK, spanning a very specific window, basically June 1st, 2020 to June 1st, 2021. And they didn't just like count how many times the word mask or vaccine was used, which is what I would have assumed. No, they went way deeper. They utilized media monitoring software called Meltwater and text network analysis software called InfraNodus. Which uh we should probably explain how those tools work because it's vital for understanding the whole study. Please do. So Meltwater acts like this giant net scraping the internet and pulling in every public conversation based on specific keywords. Right. But InfraNodus acts as the brain. It actually maps relationships between words. So if the word mask is constantly sitting right next to the word tyranny or sheep in millions of tweets, The software draws a thick digital line between them. Exactly. It lets researchers see the exact architecture of public sentiment. It's almost like looking at a real-time MRI of society's collective anxiety. That's a really great way to visualize it. It moves us past just individual anecdotes, Yeah. Yeah. and it shows us the actual structural flow of ideas. Yeah. So, the mission for our deep dive today is to explore a very specific phenomenon uncovered in this flow. We want to see how pre-existing anti-vaccine groups and newly formed anti-mask groups actually merged into this massive digital powerhouse. And to understand the psychological, social, and political drivers behind how the public reacted to these mandates. Exactly. Now uh a very quick heads up to you the listener before we dive into the timeline, the data we are analyzing today is heavily political. Very heavily. Yeah, it involves major figures from the left and the right. We're talking President Joe Biden, former President Donald Trump, Vice President Kamala Harris along with a bunch of conservative and liberal viewpoints. Right. So, I have to be clear here. We aren't taking sides today. We aren't endorsing any of the politics discussed. We're just impartially reading the digital footprint left behind to help you understand the mechanics of this social media evolution. Our focus is strictly on the mechanics of the discourse. You know, what the data reflects, what was said, and how it spread. Okay, let's unpack this. To really understand the explosion of outrage and compliance in 2020, we have to recognize that human pushback again</a:t>
             </a:r>
           </a:p>
         </p:txBody>
@@ -1493,7 +1493,7 @@
           </a:p>
           <a:p>
             <a:r>
-              <a:t>Recorded text | Imagine holding uh like a simple piece of cloth in your hand. Let's say it's 2019, and it's just a standard surgical mask. Right, just a boring, everyday medical supply. Something you'd really only see at the dentist's office. Exactly. But then fast forward to the end of 2020, and that exact same piece of cloth had morphed into like a literal measure of your morality. Oh, absolutely. It became a symbol of your political affiliation, your patriotism, even. It's just wild to think about. I mean, today we are looking at the exact digital moment a basic health mandate turned into a full-blown ideological war. It really is one of the most compressed, intense sociological shifts we've ever witnessed. Yeah. I mean we went from a public that largely didn't think about epidemiology at all to a society where every single person was forced to take a public, highly visible stance on a global health crisis. And usually, you know, when we talk about a massive global event like that, we have to rely on historians decades later to piece together the public mood. Right, digging through old newspaper clippings, or uh, diary entries. Exactly. But for the COVID-19 pandemic, we have this complete, real-time, behavioral laboratory. So, we are grounding our conversation today in this fascinating peer-reviewed study from the journal, Vaccine. Yes, authored by Sam Martin and Samantha Vanderslott from the Oxford Vaccine Group. And the scale of their research here is what makes it so robust, right? Oh, totally. They analyzed this massive data set of 7.89 million English-language tweets, Wow. Yeah, from the US and the UK spanning a very specific window, basically, June 1st, 2020 to June 1st, 2021. And they didn't just like count how many times the word "mask" or "vaccine" was used, which is what I would have assumed. No, they went way deeper. They utilized media monitoring software called Meltwater and text network analysis software called InfraNodus. Which uh, we should probably explain how those tools work, because it's vital for understanding the whole study. Please do. So, Meltwater acts like this giant net scraping the internet and pulling in every public conversation based on specific keywords. Right. But InfraNodus acts as the brain. It actually maps relationships between words. So, if the word "mask" is constantly sitting right next to the word "tyranny" or "sheep" in millions of tweets, The software draws a thick digital line between them. Exactly, it lets researchers see the exact architecture of public sentiment. It's almost like looking at a real-time MRI of society's collective anxiety. That's a really great way to visualize it. Yeah. It moves us past just individual anecdotes, Yeah. and shows us the actual structural flow of ideas. Yeah, so the mission for our deep dive today is to explore a very specific phenomenon uncovered in this flow. We want to see how pre-existing anti-vaccine groups and newly formed anti-mask groups actually merged into this massive digital powerhouse. And to understand the psychological, social, and political drivers behind how the public reacted to these mandates. Exactly. Now, uh, a very quick heads-up to you, the listener, before we dive into the timeline. The data we are analyzing today is heavily political. Very heavily. Yeah, it involves major figures from the left and the right. We're talking President Joe Biden, former President Donald Trump, Vice President Kamala Harris, along with a bunch of conservative and liberal viewpoints. Right. So, I have to be clear here. We aren't taking sides today. We aren't endorsing any of the politics discussed. We're just impartially reading the digital footprint left behind to help you understand the mechanics of this social media evolution. Our focus is strictly on the mechanics of the discourse. You know, what the data reflects, what was said, and how it spread. Okay, let's unpack this. To really understand the explosion of outrage and compliance in 2020, we have to reco</a:t>
+              <a:t>Recorded text | Imagine holding a like a simple piece of cloth in your hand. Let's say it's 2019, and it's just a standard surgical mask. Right, just a boring everyday medical supply, something you'd really only see at the dentist office. Exactly. But then fast-forward to the end of 2020, and that exact same piece of cloth had morphed into like a literal measure of your morality. Oh, absolutely. It became a symbol of your political affiliation, your patriotism, even. It's just wild to think about. I mean, today we are looking at the exact digital moment a basic health mandate turned into a full-blown ideological war. It really is one of the most compressed, intense sociological shifts we've ever witnessed. Yeah. We went from a public that largely didn't think about epidemiology at all to a society where every single person was forced to take a public, highly visible stance on a global health crisis. And usually, you know, when we talk about a massive global event like that, we have to rely on historians decades later to piece together the public mood. Right, digging through old newspaper clippings or a diary entries. Exactly. But for the COVID-19 pandemic, we have this complete, real-time behavioral laboratory. So, we are grounding our conversation today in this fascinating peer-reviewed study from the journal Vaccine. Yes, authored by Sam Martin and Samantha Vanderslott from the Oxford Vaccine Group. And the scale of their research here is what makes it so robust, right? Oh, totally. They analyzed this massive data set of 7.89 million English-language tweets. Wow. Yeah, from the US and the UK, spanning a very specific window, basically June 1st, 2020 to June 1st, 2021. And they didn't just like count how many times the word mask or vaccine was used, which is what I would have assumed. No, they went way deeper. They utilized media monitoring software called Meltwater and text network analysis software called InfraNodus. Which uh we should probably explain how those tools work because it's vital for understanding the whole study. Please do. So Meltwater acts like this giant net scraping the internet and pulling in every public conversation based on specific keywords. Right. But InfraNodus acts as the brain. It actually maps relationships between words. So if the word mask is constantly sitting right next to the word tyranny or sheep in millions of tweets, The software draws a thick digital line between them. Exactly. It lets researchers see the exact architecture of public sentiment. It's almost like looking at a real-time MRI of society's collective anxiety. That's a really great way to visualize it. It moves us past just individual anecdotes, Yeah. Yeah. and it shows us the actual structural flow of ideas. Yeah. So, the mission for our deep dive today is to explore a very specific phenomenon uncovered in this flow. We want to see how pre-existing anti-vaccine groups and newly formed anti-mask groups actually merged into this massive digital powerhouse. And to understand the psychological, social, and political drivers behind how the public reacted to these mandates. Exactly. Now uh a very quick heads up to you the listener before we dive into the timeline, the data we are analyzing today is heavily political. Very heavily. Yeah, it involves major figures from the left and the right. We're talking President Joe Biden, former President Donald Trump, Vice President Kamala Harris along with a bunch of conservative and liberal viewpoints. Right. So, I have to be clear here. We aren't taking sides today. We aren't endorsing any of the politics discussed. We're just impartially reading the digital footprint left behind to help you understand the mechanics of this social media evolution. Our focus is strictly on the mechanics of the discourse. You know, what the data reflects, what was said, and how it spread. Okay, let's unpack this. To really understand the explosion of outrage and compliance in 2020, we have to recognize that human pushback again</a:t>
             </a:r>
           </a:p>
         </p:txBody>
@@ -1588,7 +1588,7 @@
           </a:p>
           <a:p>
             <a:r>
-              <a:t>Indicative rating | 85/100</a:t>
+              <a:t>Indicative rating | 90/100</a:t>
             </a:r>
           </a:p>
           <a:p>
@@ -1783,12 +1783,12 @@
           </a:p>
           <a:p>
             <a:r>
-              <a:t>Analysis ID | b6fa93e8-0de4-4ed9-b106-d6b642a9a901</a:t>
-            </a:r>
-          </a:p>
-          <a:p>
-            <a:r>
-              <a:t>Generated | 2026-09-26T20:30:11+00:00</a:t>
+              <a:t>Analysis ID | 7e1a6917-52a1-453d-8dda-9c4842232f31</a:t>
+            </a:r>
+          </a:p>
+          <a:p>
+            <a:r>
+              <a:t>Generated | 2026-09-26T22:31:07+00:00</a:t>
             </a:r>
           </a:p>
           <a:p>
@@ -1803,7 +1803,7 @@
           </a:p>
           <a:p>
             <a:r>
-              <a:t>Method version | verdict-consistency-2026-09-26.1</a:t>
+              <a:t>Method version | pdf-preparation-2026-09-26.1</a:t>
             </a:r>
           </a:p>
           <a:p>
@@ -1818,22 +1818,37 @@
           </a:p>
           <a:p>
             <a:r>
-              <a:t>Ingestion note 1 | Saved transcript excerpt reused for display (4,000 characters); the full original transcript is not retained in the saved report. The three model replies were acquired in the original transcript run, not generated from this excerpt. No new transcription or provider request.</a:t>
-            </a:r>
-          </a:p>
-          <a:p>
-            <a:r>
-              <a:t>Ingestion note 2 | Standalone-audio content assessment covers the transcript. AI-origin detection from sound is outside this assessment. Original-file C2PA was checked locally while assembling this saved-results copy and is reported separately.</a:t>
-            </a:r>
-          </a:p>
-          <a:p>
-            <a:r>
-              <a:t>Ingestion note 3 | Audio tracks inspected locally. Soundtrack uploads require a separate optional check; AI-origin detection from sound is outside this workflow.</a:t>
-            </a:r>
-          </a:p>
-          <a:p>
-            <a:r>
-              <a:t>Ingestion note 4 | Reassembled locally from saved transcript-model replies acquired at 2026-09-24T15:10:51+00:00 under method publication-repair-2026-09-24.1. Original report d5e5a924-6232-4fb4-a4ef-d991655062cc is preserved. The original run used a source-labelled filename. Local audio-track and original-file credential checks were repeated; model replies were not rerun. Original run notes: Transcoded to 5737 KB mono 16 kHz (≤1800s).; Transcribed with Gemini.</a:t>
+              <a:t>Ingestion note 1 | Transcoded to 5737 KB mono 16 kHz (≤1800s).</a:t>
+            </a:r>
+          </a:p>
+          <a:p>
+            <a:r>
+              <a:t>Ingestion note 2 | Transcribed with Gemini.</a:t>
+            </a:r>
+          </a:p>
+          <a:p>
+            <a:r>
+              <a:t>Ingestion note 3 | Standalone-audio content assessment covers the transcript. AI-origin detection from sound is outside this assessment. Original-file C2PA was checked before transcription and is reported separately.</a:t>
+            </a:r>
+          </a:p>
+          <a:p>
+            <a:r>
+              <a:t>Ingestion note 4 | Audio tracks inspected locally. Soundtrack uploads require a separate optional check; AI-origin detection from sound is outside this workflow.</a:t>
+            </a:r>
+          </a:p>
+          <a:p>
+            <a:r>
+              <a:t>Ingestion note 5 | Fresh provider replies acquired for eleven-examples-refresh-20260926-r1; report assembled locally from the saved responses without further API calls.</a:t>
+            </a:r>
+          </a:p>
+          <a:p>
+            <a:r>
+              <a:t>Ingestion note 6 | Transcript analysis used the first 12000 characters of a fresh 25985-character transcription; this report retains its first 4000 characters. Sound-origin detection is outside this check.</a:t>
+            </a:r>
+          </a:p>
+          <a:p>
+            <a:r>
+              <a:t>Ingestion note 7 | Provider latency values are restored from the acquisition receipts (maximum sampled-frame latency per provider); raw replies and assessment results are unchanged by this bookkeeping step.</a:t>
             </a:r>
           </a:p>
         </p:txBody>
@@ -1918,12 +1933,12 @@
           </a:p>
           <a:p>
             <a:r>
-              <a:t>Analysis ID | b6fa93e8-0de4-4ed9-b106-d6b642a9a901</a:t>
-            </a:r>
-          </a:p>
-          <a:p>
-            <a:r>
-              <a:t>Generated | 2026-09-26T20:30:11+00:00</a:t>
+              <a:t>Analysis ID | 7e1a6917-52a1-453d-8dda-9c4842232f31</a:t>
+            </a:r>
+          </a:p>
+          <a:p>
+            <a:r>
+              <a:t>Generated | 2026-09-26T22:31:07+00:00</a:t>
             </a:r>
           </a:p>
           <a:p>
@@ -1938,7 +1953,7 @@
           </a:p>
           <a:p>
             <a:r>
-              <a:t>Method version | verdict-consistency-2026-09-26.1</a:t>
+              <a:t>Method version | pdf-preparation-2026-09-26.1</a:t>
             </a:r>
           </a:p>
           <a:p>
@@ -1953,22 +1968,37 @@
           </a:p>
           <a:p>
             <a:r>
-              <a:t>Ingestion note 1 | Saved transcript excerpt reused for display (4,000 characters); the full original transcript is not retained in the saved report. The three model replies were acquired in the original transcript run, not generated from this excerpt. No new transcription or provider request.</a:t>
-            </a:r>
-          </a:p>
-          <a:p>
-            <a:r>
-              <a:t>Ingestion note 2 | Standalone-audio content assessment covers the transcript. AI-origin detection from sound is outside this assessment. Original-file C2PA was checked locally while assembling this saved-results copy and is reported separately.</a:t>
-            </a:r>
-          </a:p>
-          <a:p>
-            <a:r>
-              <a:t>Ingestion note 3 | Audio tracks inspected locally. Soundtrack uploads require a separate optional check; AI-origin detection from sound is outside this workflow.</a:t>
-            </a:r>
-          </a:p>
-          <a:p>
-            <a:r>
-              <a:t>Ingestion note 4 | Reassembled locally from saved transcript-model replies acquired at 2026-09-24T15:10:51+00:00 under method publication-repair-2026-09-24.1. Original report d5e5a924-6232-4fb4-a4ef-d991655062cc is preserved. The original run used a source-labelled filename. Local audio-track and original-file credential checks were repeated; model replies were not rerun. Original run notes: Transcoded to 5737 KB mono 16 kHz (≤1800s).; Transcribed with Gemini.</a:t>
+              <a:t>Ingestion note 1 | Transcoded to 5737 KB mono 16 kHz (≤1800s).</a:t>
+            </a:r>
+          </a:p>
+          <a:p>
+            <a:r>
+              <a:t>Ingestion note 2 | Transcribed with Gemini.</a:t>
+            </a:r>
+          </a:p>
+          <a:p>
+            <a:r>
+              <a:t>Ingestion note 3 | Standalone-audio content assessment covers the transcript. AI-origin detection from sound is outside this assessment. Original-file C2PA was checked before transcription and is reported separately.</a:t>
+            </a:r>
+          </a:p>
+          <a:p>
+            <a:r>
+              <a:t>Ingestion note 4 | Audio tracks inspected locally. Soundtrack uploads require a separate optional check; AI-origin detection from sound is outside this workflow.</a:t>
+            </a:r>
+          </a:p>
+          <a:p>
+            <a:r>
+              <a:t>Ingestion note 5 | Fresh provider replies acquired for eleven-examples-refresh-20260926-r1; report assembled locally from the saved responses without further API calls.</a:t>
+            </a:r>
+          </a:p>
+          <a:p>
+            <a:r>
+              <a:t>Ingestion note 6 | Transcript analysis used the first 12000 characters of a fresh 25985-character transcription; this report retains its first 4000 characters. Sound-origin detection is outside this check.</a:t>
+            </a:r>
+          </a:p>
+          <a:p>
+            <a:r>
+              <a:t>Ingestion note 7 | Provider latency values are restored from the acquisition receipts (maximum sampled-frame latency per provider); raw replies and assessment results are unchanged by this bookkeeping step.</a:t>
             </a:r>
           </a:p>
         </p:txBody>
@@ -2048,17 +2078,17 @@
           </a:p>
           <a:p>
             <a:r>
-              <a:t>Claude Analysis | analysis / ok | synthetic likely | 80/100</a:t>
-            </a:r>
-          </a:p>
-          <a:p>
-            <a:r>
-              <a:t>OpenAI Analysis | analysis / ok | synthetic likely | 88/100</a:t>
-            </a:r>
-          </a:p>
-          <a:p>
-            <a:r>
-              <a:t>Gemini Analysis | analysis / ok | synthetic likely | 85/100</a:t>
+              <a:t>Claude Analysis | analysis / ok | synthetic likely | 78/100</a:t>
+            </a:r>
+          </a:p>
+          <a:p>
+            <a:r>
+              <a:t>OpenAI Analysis | analysis / ok | synthetic likely | 90/100</a:t>
+            </a:r>
+          </a:p>
+          <a:p>
+            <a:r>
+              <a:t>Gemini Analysis | analysis / ok | synthetic likely | 95/100</a:t>
             </a:r>
           </a:p>
           <a:p>
@@ -2178,12 +2208,12 @@
           </a:p>
           <a:p>
             <a:r>
-              <a:t>Provider summary | Style strongly resembles AI-generated two-host podcast audio (e.g. NotebookLM 'deep dive' format): stock phrases like 'Okay, let's unpack this', 'If we connect this to the bigger picture', 'the mission for our deep dive today', 'a quick heads-up to you, the listener', a formulaic impartiality disclaimer, constant affirmations ('Exactly', 'Perfectly said'), vivid metaphors ('real-time MRI of society'), and inserted fillers, all suggesting a likely synthetic origin.</a:t>
-            </a:r>
-          </a:p>
-          <a:p>
-            <a:r>
-              <a:t>Evidence 1 | Synthetic origin framing: Two-host explainer-podcast dialogue summarizing a peer-reviewed study, with explicit neutrality disclaimer, historical context, and sociological interpretation of pro-mask discourse.</a:t>
+              <a:t>Provider summary | Style closely matches AI-generated two-host 'deep dive' audio overviews (e.g. NotebookLM): stock openers ('Imagine holding...', 'Okay, let's unpack this', 'If we connect this to the bigger picture'), constant affirmations ('Exactly', 'Perfectly said'), scripted neutrality disclaimer and a staged host challenge, suggesting likely synthetic origin.</a:t>
+            </a:r>
+          </a:p>
+          <a:p>
+            <a:r>
+              <a:t>Evidence 1 | Synthetic origin framing: Two-host explainer podcast summarising a peer-reviewed study, with historical context, a stated neutrality disclaimer and interpretive commentary on polarisation</a:t>
             </a:r>
           </a:p>
           <a:p>
@@ -2193,27 +2223,27 @@
           </a:p>
           <a:p>
             <a:r>
-              <a:t>Evidence 3 | Study by Sam Martin and Samantha Vanderslott, Oxford Vaccine Group, published in journal Vaccine</a:t>
-            </a:r>
-          </a:p>
-          <a:p>
-            <a:r>
-              <a:t>Evidence 4 | Analyzed 7.89 million English-language US/UK tweets, June 2020 to June 2021</a:t>
-            </a:r>
-          </a:p>
-          <a:p>
-            <a:r>
-              <a:t>Evidence 5 | Used Meltwater and InfraNodus software for data collection and text network analysis</a:t>
-            </a:r>
-          </a:p>
-          <a:p>
-            <a:r>
-              <a:t>Evidence 6 | 5.91 million tweets on masks versus 1.98 million on vaccines</a:t>
-            </a:r>
-          </a:p>
-          <a:p>
-            <a:r>
-              <a:t>Evidence 7 | Caveat: Human podcasters can use similar conversational tics and scripted structure, and the transcription may have added or smoothed fillers. Audio or provenance data would be needed to confirm origin.</a:t>
+              <a:t>Evidence 3 | Study by Sam Martin and Samantha Vanderslott (Oxford Vaccine Group) published in journal Vaccine</a:t>
+            </a:r>
+          </a:p>
+          <a:p>
+            <a:r>
+              <a:t>Evidence 4 | Analysed 7.89 million English-language US/UK tweets, June 2020 to June 2021</a:t>
+            </a:r>
+          </a:p>
+          <a:p>
+            <a:r>
+              <a:t>Evidence 5 | Used Meltwater for collection and InfraNodus for text network analysis</a:t>
+            </a:r>
+          </a:p>
+          <a:p>
+            <a:r>
+              <a:t>Evidence 6 | 5.91 million tweets on masks, 1.98 million on vaccines</a:t>
+            </a:r>
+          </a:p>
+          <a:p>
+            <a:r>
+              <a:t>Evidence 7 | Caveat: Human podcasters can use similar conventions, and transcription artefacts may mask or mimic synthetic patterns; source audio and provenance should be checked.</a:t>
             </a:r>
           </a:p>
         </p:txBody>
@@ -2323,12 +2353,12 @@
           </a:p>
           <a:p>
             <a:r>
-              <a:t>Provider summary | Style strongly resembles AI-generated two-host podcast audio (e.g. NotebookLM 'deep dive' format): stock phrases like 'Okay, let's unpack this', 'If we connect this to the bigger picture', 'the mission for our deep dive today', 'a quick heads-up to you, the listener', a formulaic impartiality disclaimer, constant affirmations ('Exactly', 'Perfectly said'), vivid metaphors ('real-time MRI of society'), and inserted fillers, all suggesting a likely synthetic origin.</a:t>
-            </a:r>
-          </a:p>
-          <a:p>
-            <a:r>
-              <a:t>Evidence 1 | Synthetic origin framing: Two-host explainer-podcast dialogue summarizing a peer-reviewed study, with explicit neutrality disclaimer, historical context, and sociological interpretation of pro-mask discourse.</a:t>
+              <a:t>Provider summary | Style closely matches AI-generated two-host 'deep dive' audio overviews (e.g. NotebookLM): stock openers ('Imagine holding...', 'Okay, let's unpack this', 'If we connect this to the bigger picture'), constant affirmations ('Exactly', 'Perfectly said'), scripted neutrality disclaimer and a staged host challenge, suggesting likely synthetic origin.</a:t>
+            </a:r>
+          </a:p>
+          <a:p>
+            <a:r>
+              <a:t>Evidence 1 | Synthetic origin framing: Two-host explainer podcast summarising a peer-reviewed study, with historical context, a stated neutrality disclaimer and interpretive commentary on polarisation</a:t>
             </a:r>
           </a:p>
           <a:p>
@@ -2338,27 +2368,27 @@
           </a:p>
           <a:p>
             <a:r>
-              <a:t>Evidence 3 | Study by Sam Martin and Samantha Vanderslott, Oxford Vaccine Group, published in journal Vaccine</a:t>
-            </a:r>
-          </a:p>
-          <a:p>
-            <a:r>
-              <a:t>Evidence 4 | Analyzed 7.89 million English-language US/UK tweets, June 2020 to June 2021</a:t>
-            </a:r>
-          </a:p>
-          <a:p>
-            <a:r>
-              <a:t>Evidence 5 | Used Meltwater and InfraNodus software for data collection and text network analysis</a:t>
-            </a:r>
-          </a:p>
-          <a:p>
-            <a:r>
-              <a:t>Evidence 6 | 5.91 million tweets on masks versus 1.98 million on vaccines</a:t>
-            </a:r>
-          </a:p>
-          <a:p>
-            <a:r>
-              <a:t>Evidence 7 | Caveat: Human podcasters can use similar conversational tics and scripted structure, and the transcription may have added or smoothed fillers. Audio or provenance data would be needed to confirm origin.</a:t>
+              <a:t>Evidence 3 | Study by Sam Martin and Samantha Vanderslott (Oxford Vaccine Group) published in journal Vaccine</a:t>
+            </a:r>
+          </a:p>
+          <a:p>
+            <a:r>
+              <a:t>Evidence 4 | Analysed 7.89 million English-language US/UK tweets, June 2020 to June 2021</a:t>
+            </a:r>
+          </a:p>
+          <a:p>
+            <a:r>
+              <a:t>Evidence 5 | Used Meltwater for collection and InfraNodus for text network analysis</a:t>
+            </a:r>
+          </a:p>
+          <a:p>
+            <a:r>
+              <a:t>Evidence 6 | 5.91 million tweets on masks, 1.98 million on vaccines</a:t>
+            </a:r>
+          </a:p>
+          <a:p>
+            <a:r>
+              <a:t>Evidence 7 | Caveat: Human podcasters can use similar conventions, and transcription artefacts may mask or mimic synthetic patterns; source audio and provenance should be checked.</a:t>
             </a:r>
           </a:p>
         </p:txBody>
@@ -2468,12 +2498,12 @@
           </a:p>
           <a:p>
             <a:r>
-              <a:t>Provider summary | The highly regular question-answer scaffolding, repetitive affirmations, staged discoveries, and polished explanatory transitions strongly suggest AI-generated or AI-edited dialogue.</a:t>
-            </a:r>
-          </a:p>
-          <a:p>
-            <a:r>
-              <a:t>Evidence 1 | Synthetic origin framing: Conversational research explainer using two-host banter, historical parallels, vivid analogies, and stated political neutrality.</a:t>
+              <a:t>Provider summary | The highly regular two-host exchanges, repetitive affirmations, scripted explanatory prompts, and formulaic transitions strongly suggest synthetic generation or editing.</a:t>
+            </a:r>
+          </a:p>
+          <a:p>
+            <a:r>
+              <a:t>Evidence 1 | Synthetic origin framing: Conversational research explainer using staged questions, emphatic agreement, historical parallels, and sociological interpretations.</a:t>
             </a:r>
           </a:p>
           <a:p>
@@ -2483,27 +2513,27 @@
           </a:p>
           <a:p>
             <a:r>
-              <a:t>Evidence 3 | The cited study analyzed 7.89 million US and UK tweets from June 2020 to June 2021.</a:t>
-            </a:r>
-          </a:p>
-          <a:p>
-            <a:r>
-              <a:t>Evidence 4 | Researchers reportedly used Meltwater and InfraNodus to collect tweets and map word relationships.</a:t>
-            </a:r>
-          </a:p>
-          <a:p>
-            <a:r>
-              <a:t>Evidence 5 | The text describes convergence between anti-vaccine and anti-mask groups online.</a:t>
-            </a:r>
-          </a:p>
-          <a:p>
-            <a:r>
-              <a:t>Evidence 6 | Reported mask-related negative sentiment was 28% in the UK and 22% in the US.</a:t>
-            </a:r>
-          </a:p>
-          <a:p>
-            <a:r>
-              <a:t>Evidence 7 | Caveat: Scripted human podcasts can share these features; transcript style alone cannot establish authorship.</a:t>
+              <a:t>Evidence 3 | The cited study reportedly analyzed 7.89 million English-language tweets from June 2020 to June 2021.</a:t>
+            </a:r>
+          </a:p>
+          <a:p>
+            <a:r>
+              <a:t>Evidence 4 | Researchers reportedly used Meltwater and InfraNodus to examine mask and vaccine discourse in the US and UK.</a:t>
+            </a:r>
+          </a:p>
+          <a:p>
+            <a:r>
+              <a:t>Evidence 5 | The text describes convergence between anti-vaccine and anti-mask groups.</a:t>
+            </a:r>
+          </a:p>
+          <a:p>
+            <a:r>
+              <a:t>Evidence 6 | It reports greater negative mask sentiment in the UK than the US.</a:t>
+            </a:r>
+          </a:p>
+          <a:p>
+            <a:r>
+              <a:t>Evidence 7 | Caveat: A human-scripted podcast could share these features; transcript artifacts and absent provenance limit attribution.</a:t>
             </a:r>
           </a:p>
         </p:txBody>
@@ -2613,12 +2643,12 @@
           </a:p>
           <a:p>
             <a:r>
-              <a:t>Provider summary | The highly regular question-answer scaffolding, repetitive affirmations, staged discoveries, and polished explanatory transitions strongly suggest AI-generated or AI-edited dialogue.</a:t>
-            </a:r>
-          </a:p>
-          <a:p>
-            <a:r>
-              <a:t>Evidence 1 | Synthetic origin framing: Conversational research explainer using two-host banter, historical parallels, vivid analogies, and stated political neutrality.</a:t>
+              <a:t>Provider summary | The highly regular two-host exchanges, repetitive affirmations, scripted explanatory prompts, and formulaic transitions strongly suggest synthetic generation or editing.</a:t>
+            </a:r>
+          </a:p>
+          <a:p>
+            <a:r>
+              <a:t>Evidence 1 | Synthetic origin framing: Conversational research explainer using staged questions, emphatic agreement, historical parallels, and sociological interpretations.</a:t>
             </a:r>
           </a:p>
           <a:p>
@@ -2628,27 +2658,27 @@
           </a:p>
           <a:p>
             <a:r>
-              <a:t>Evidence 3 | The cited study analyzed 7.89 million US and UK tweets from June 2020 to June 2021.</a:t>
-            </a:r>
-          </a:p>
-          <a:p>
-            <a:r>
-              <a:t>Evidence 4 | Researchers reportedly used Meltwater and InfraNodus to collect tweets and map word relationships.</a:t>
-            </a:r>
-          </a:p>
-          <a:p>
-            <a:r>
-              <a:t>Evidence 5 | The text describes convergence between anti-vaccine and anti-mask groups online.</a:t>
-            </a:r>
-          </a:p>
-          <a:p>
-            <a:r>
-              <a:t>Evidence 6 | Reported mask-related negative sentiment was 28% in the UK and 22% in the US.</a:t>
-            </a:r>
-          </a:p>
-          <a:p>
-            <a:r>
-              <a:t>Evidence 7 | Caveat: Scripted human podcasts can share these features; transcript style alone cannot establish authorship.</a:t>
+              <a:t>Evidence 3 | The cited study reportedly analyzed 7.89 million English-language tweets from June 2020 to June 2021.</a:t>
+            </a:r>
+          </a:p>
+          <a:p>
+            <a:r>
+              <a:t>Evidence 4 | Researchers reportedly used Meltwater and InfraNodus to examine mask and vaccine discourse in the US and UK.</a:t>
+            </a:r>
+          </a:p>
+          <a:p>
+            <a:r>
+              <a:t>Evidence 5 | The text describes convergence between anti-vaccine and anti-mask groups.</a:t>
+            </a:r>
+          </a:p>
+          <a:p>
+            <a:r>
+              <a:t>Evidence 6 | It reports greater negative mask sentiment in the UK than the US.</a:t>
+            </a:r>
+          </a:p>
+          <a:p>
+            <a:r>
+              <a:t>Evidence 7 | Caveat: A human-scripted podcast could share these features; transcript artifacts and absent provenance limit attribution.</a:t>
             </a:r>
           </a:p>
         </p:txBody>
@@ -2758,12 +2788,12 @@
           </a:p>
           <a:p>
             <a:r>
-              <a:t>Provider summary | Highly synthetic structure exhibiting classic patterns of AI-generated podcast dialogues (such as NotebookLM Audio Overviews) with formulaic back-and-forth banter and simulated natural disfluencies.</a:t>
-            </a:r>
-          </a:p>
-          <a:p>
-            <a:r>
-              <a:t>Evidence 1 | Synthetic origin framing: Conversational podcast-style dialogue reviewing academic research on pandemic social dynamics and digital discourse.</a:t>
+              <a:t>Provider summary | The text displays the classic conversational tropes, rapid turn-taking, and synthetic cadence characteristic of an automated AI podcast generator like NotebookLM.</a:t>
+            </a:r>
+          </a:p>
+          <a:p>
+            <a:r>
+              <a:t>Evidence 1 | Synthetic origin framing: An informal two-host podcast script discussing academic research on social media discourse and health mandates.</a:t>
             </a:r>
           </a:p>
           <a:p>
@@ -2773,27 +2803,27 @@
           </a:p>
           <a:p>
             <a:r>
-              <a:t>Evidence 3 | Oxford Vaccine Group study analyzed 7.89 million tweets from June 2020 to June 2021</a:t>
-            </a:r>
-          </a:p>
-          <a:p>
-            <a:r>
-              <a:t>Evidence 4 | 5.91 million tweets focused on masks while 1.98 million focused on vaccines</a:t>
-            </a:r>
-          </a:p>
-          <a:p>
-            <a:r>
-              <a:t>Evidence 5 | UK tweets showed 28 percent negative sentiment on masks compared to 22 percent in US</a:t>
-            </a:r>
-          </a:p>
-          <a:p>
-            <a:r>
-              <a:t>Evidence 6 | Negative sentiment toward vaccines was 17 percent in the US and 15 percent in the UK</a:t>
-            </a:r>
-          </a:p>
-          <a:p>
-            <a:r>
-              <a:t>Evidence 7 | Caveat: Real human podcast transcripts can display similar conversational cadence and informal conversational fillers.</a:t>
+              <a:t>Evidence 3 | Oxford Vaccine Group researchers analyzed 7.89 million English-language tweets from the US and UK between June 2020 and June 2021</a:t>
+            </a:r>
+          </a:p>
+          <a:p>
+            <a:r>
+              <a:t>Evidence 4 | Study used Meltwater and InfraNodus network analysis software to examine sentiment around masks and vaccines</a:t>
+            </a:r>
+          </a:p>
+          <a:p>
+            <a:r>
+              <a:t>Evidence 5 | 5.91 million analyzed tweets focused on masks, while 1.98 million focused on vaccines</a:t>
+            </a:r>
+          </a:p>
+          <a:p>
+            <a:r>
+              <a:t>Evidence 6 | Negative sentiment toward masks was 28% in the UK compared to 22% in the US</a:t>
+            </a:r>
+          </a:p>
+          <a:p>
+            <a:r>
+              <a:t>Evidence 7 | Caveat: Human podcast hosts discussing academic papers can occasionally use similar rehearsed, highly structured banter.</a:t>
             </a:r>
           </a:p>
         </p:txBody>
@@ -2903,12 +2933,12 @@
           </a:p>
           <a:p>
             <a:r>
-              <a:t>Provider summary | Highly synthetic structure exhibiting classic patterns of AI-generated podcast dialogues (such as NotebookLM Audio Overviews) with formulaic back-and-forth banter and simulated natural disfluencies.</a:t>
-            </a:r>
-          </a:p>
-          <a:p>
-            <a:r>
-              <a:t>Evidence 1 | Synthetic origin framing: Conversational podcast-style dialogue reviewing academic research on pandemic social dynamics and digital discourse.</a:t>
+              <a:t>Provider summary | The text displays the classic conversational tropes, rapid turn-taking, and synthetic cadence characteristic of an automated AI podcast generator like NotebookLM.</a:t>
+            </a:r>
+          </a:p>
+          <a:p>
+            <a:r>
+              <a:t>Evidence 1 | Synthetic origin framing: An informal two-host podcast script discussing academic research on social media discourse and health mandates.</a:t>
             </a:r>
           </a:p>
           <a:p>
@@ -2918,27 +2948,27 @@
           </a:p>
           <a:p>
             <a:r>
-              <a:t>Evidence 3 | Oxford Vaccine Group study analyzed 7.89 million tweets from June 2020 to June 2021</a:t>
-            </a:r>
-          </a:p>
-          <a:p>
-            <a:r>
-              <a:t>Evidence 4 | 5.91 million tweets focused on masks while 1.98 million focused on vaccines</a:t>
-            </a:r>
-          </a:p>
-          <a:p>
-            <a:r>
-              <a:t>Evidence 5 | UK tweets showed 28 percent negative sentiment on masks compared to 22 percent in US</a:t>
-            </a:r>
-          </a:p>
-          <a:p>
-            <a:r>
-              <a:t>Evidence 6 | Negative sentiment toward vaccines was 17 percent in the US and 15 percent in the UK</a:t>
-            </a:r>
-          </a:p>
-          <a:p>
-            <a:r>
-              <a:t>Evidence 7 | Caveat: Real human podcast transcripts can display similar conversational cadence and informal conversational fillers.</a:t>
+              <a:t>Evidence 3 | Oxford Vaccine Group researchers analyzed 7.89 million English-language tweets from the US and UK between June 2020 and June 2021</a:t>
+            </a:r>
+          </a:p>
+          <a:p>
+            <a:r>
+              <a:t>Evidence 4 | Study used Meltwater and InfraNodus network analysis software to examine sentiment around masks and vaccines</a:t>
+            </a:r>
+          </a:p>
+          <a:p>
+            <a:r>
+              <a:t>Evidence 5 | 5.91 million analyzed tweets focused on masks, while 1.98 million focused on vaccines</a:t>
+            </a:r>
+          </a:p>
+          <a:p>
+            <a:r>
+              <a:t>Evidence 6 | Negative sentiment toward masks was 28% in the UK compared to 22% in the US</a:t>
+            </a:r>
+          </a:p>
+          <a:p>
+            <a:r>
+              <a:t>Evidence 7 | Caveat: Human podcast hosts discussing academic papers can occasionally use similar rehearsed, highly structured banter.</a:t>
             </a:r>
           </a:p>
         </p:txBody>
@@ -10241,7 +10271,7 @@
         </p:nvGraphicFramePr>
         <p:xfrm>
           <a:off x="365760" y="1700784"/>
-          <a:ext cx="8412479" cy="1365503"/>
+          <a:ext cx="8412479" cy="1162304"/>
         </p:xfrm>
         <a:graphic>
           <a:graphicData uri="http://schemas.openxmlformats.org/drawingml/2006/table">
@@ -10253,7 +10283,7 @@
                 <a:gridCol w="2271369"/>
                 <a:gridCol w="6141110"/>
               </a:tblGrid>
-              <a:tr h="1365503">
+              <a:tr h="1162304">
                 <a:tc>
                   <a:txBody>
                     <a:bodyPr wrap="none"/>
@@ -10304,102 +10334,83 @@
                         </a:defRPr>
                       </a:pPr>
                       <a:r>
-                        <a:t>Style strongly resembles AI-generated two-host podcast audio (e.g. NotebookLM</a:t>
-                      </a:r>
-                    </a:p>
-                    <a:p>
-                      <a:pPr>
-                        <a:lnSpc>
-                          <a:spcPts val="1600"/>
-                        </a:lnSpc>
-                        <a:spcAft>
-                          <a:spcPts val="0"/>
-                        </a:spcAft>
-                        <a:defRPr sz="1200" b="0">
-                          <a:solidFill>
-                            <a:srgbClr val="21243A"/>
-                          </a:solidFill>
-                          <a:latin typeface="Arial"/>
-                        </a:defRPr>
-                      </a:pPr>
-                      <a:r>
-                        <a:t>'deep dive' format): stock phrases like 'Okay, let's unpack this', 'If we connect this</a:t>
-                      </a:r>
-                    </a:p>
-                    <a:p>
-                      <a:pPr>
-                        <a:lnSpc>
-                          <a:spcPts val="1600"/>
-                        </a:lnSpc>
-                        <a:spcAft>
-                          <a:spcPts val="0"/>
-                        </a:spcAft>
-                        <a:defRPr sz="1200" b="0">
-                          <a:solidFill>
-                            <a:srgbClr val="21243A"/>
-                          </a:solidFill>
-                          <a:latin typeface="Arial"/>
-                        </a:defRPr>
-                      </a:pPr>
-                      <a:r>
-                        <a:t>to the bigger picture', 'the mission for our deep dive today', 'a quick heads-up to</a:t>
-                      </a:r>
-                    </a:p>
-                    <a:p>
-                      <a:pPr>
-                        <a:lnSpc>
-                          <a:spcPts val="1600"/>
-                        </a:lnSpc>
-                        <a:spcAft>
-                          <a:spcPts val="0"/>
-                        </a:spcAft>
-                        <a:defRPr sz="1200" b="0">
-                          <a:solidFill>
-                            <a:srgbClr val="21243A"/>
-                          </a:solidFill>
-                          <a:latin typeface="Arial"/>
-                        </a:defRPr>
-                      </a:pPr>
-                      <a:r>
-                        <a:t>you, the listener', a formulaic impartiality disclaimer, constant affirmations</a:t>
-                      </a:r>
-                    </a:p>
-                    <a:p>
-                      <a:pPr>
-                        <a:lnSpc>
-                          <a:spcPts val="1600"/>
-                        </a:lnSpc>
-                        <a:spcAft>
-                          <a:spcPts val="0"/>
-                        </a:spcAft>
-                        <a:defRPr sz="1200" b="0">
-                          <a:solidFill>
-                            <a:srgbClr val="21243A"/>
-                          </a:solidFill>
-                          <a:latin typeface="Arial"/>
-                        </a:defRPr>
-                      </a:pPr>
-                      <a:r>
-                        <a:t>('Exactly', 'Perfectly said'), vivid metaphors ('real-time MRI of society'), and inserted</a:t>
-                      </a:r>
-                    </a:p>
-                    <a:p>
-                      <a:pPr>
-                        <a:lnSpc>
-                          <a:spcPts val="1600"/>
-                        </a:lnSpc>
-                        <a:spcAft>
-                          <a:spcPts val="0"/>
-                        </a:spcAft>
-                        <a:defRPr sz="1200" b="0">
-                          <a:solidFill>
-                            <a:srgbClr val="21243A"/>
-                          </a:solidFill>
-                          <a:latin typeface="Arial"/>
-                        </a:defRPr>
-                      </a:pPr>
-                      <a:r>
-                        <a:t>fillers, all suggesting a likely synthetic origin.</a:t>
+                        <a:t>Style closely matches AI-generated two-host 'deep dive' audio overviews (e.g.</a:t>
+                      </a:r>
+                    </a:p>
+                    <a:p>
+                      <a:pPr>
+                        <a:lnSpc>
+                          <a:spcPts val="1600"/>
+                        </a:lnSpc>
+                        <a:spcAft>
+                          <a:spcPts val="0"/>
+                        </a:spcAft>
+                        <a:defRPr sz="1200" b="0">
+                          <a:solidFill>
+                            <a:srgbClr val="21243A"/>
+                          </a:solidFill>
+                          <a:latin typeface="Arial"/>
+                        </a:defRPr>
+                      </a:pPr>
+                      <a:r>
+                        <a:t>NotebookLM): stock openers ('Imagine holding...', 'Okay, let's unpack this', 'If we</a:t>
+                      </a:r>
+                    </a:p>
+                    <a:p>
+                      <a:pPr>
+                        <a:lnSpc>
+                          <a:spcPts val="1600"/>
+                        </a:lnSpc>
+                        <a:spcAft>
+                          <a:spcPts val="0"/>
+                        </a:spcAft>
+                        <a:defRPr sz="1200" b="0">
+                          <a:solidFill>
+                            <a:srgbClr val="21243A"/>
+                          </a:solidFill>
+                          <a:latin typeface="Arial"/>
+                        </a:defRPr>
+                      </a:pPr>
+                      <a:r>
+                        <a:t>connect this to the bigger picture'), constant affirmations ('Exactly', 'Perfectly</a:t>
+                      </a:r>
+                    </a:p>
+                    <a:p>
+                      <a:pPr>
+                        <a:lnSpc>
+                          <a:spcPts val="1600"/>
+                        </a:lnSpc>
+                        <a:spcAft>
+                          <a:spcPts val="0"/>
+                        </a:spcAft>
+                        <a:defRPr sz="1200" b="0">
+                          <a:solidFill>
+                            <a:srgbClr val="21243A"/>
+                          </a:solidFill>
+                          <a:latin typeface="Arial"/>
+                        </a:defRPr>
+                      </a:pPr>
+                      <a:r>
+                        <a:t>said'), scripted neutrality disclaimer and a staged host challenge, suggesting likely</a:t>
+                      </a:r>
+                    </a:p>
+                    <a:p>
+                      <a:pPr>
+                        <a:lnSpc>
+                          <a:spcPts val="1600"/>
+                        </a:lnSpc>
+                        <a:spcAft>
+                          <a:spcPts val="0"/>
+                        </a:spcAft>
+                        <a:defRPr sz="1200" b="0">
+                          <a:solidFill>
+                            <a:srgbClr val="21243A"/>
+                          </a:solidFill>
+                          <a:latin typeface="Arial"/>
+                        </a:defRPr>
+                      </a:pPr>
+                      <a:r>
+                        <a:t>synthetic origin.</a:t>
                       </a:r>
                     </a:p>
                   </a:txBody>
@@ -10423,7 +10434,7 @@
           <p:nvPr/>
         </p:nvGraphicFramePr>
         <p:xfrm>
-          <a:off x="365760" y="3066288"/>
+          <a:off x="365760" y="2863088"/>
           <a:ext cx="8412479" cy="755904"/>
         </p:xfrm>
         <a:graphic>
@@ -10487,45 +10498,45 @@
                         </a:defRPr>
                       </a:pPr>
                       <a:r>
-                        <a:t>The highly regular question-answer scaffolding, repetitive affirmations, staged</a:t>
-                      </a:r>
-                    </a:p>
-                    <a:p>
-                      <a:pPr>
-                        <a:lnSpc>
-                          <a:spcPts val="1600"/>
-                        </a:lnSpc>
-                        <a:spcAft>
-                          <a:spcPts val="0"/>
-                        </a:spcAft>
-                        <a:defRPr sz="1200" b="0">
-                          <a:solidFill>
-                            <a:srgbClr val="21243A"/>
-                          </a:solidFill>
-                          <a:latin typeface="Arial"/>
-                        </a:defRPr>
-                      </a:pPr>
-                      <a:r>
-                        <a:t>discoveries, and polished explanatory transitions strongly suggest AI-generated</a:t>
-                      </a:r>
-                    </a:p>
-                    <a:p>
-                      <a:pPr>
-                        <a:lnSpc>
-                          <a:spcPts val="1600"/>
-                        </a:lnSpc>
-                        <a:spcAft>
-                          <a:spcPts val="0"/>
-                        </a:spcAft>
-                        <a:defRPr sz="1200" b="0">
-                          <a:solidFill>
-                            <a:srgbClr val="21243A"/>
-                          </a:solidFill>
-                          <a:latin typeface="Arial"/>
-                        </a:defRPr>
-                      </a:pPr>
-                      <a:r>
-                        <a:t>or AI-edited dialogue.</a:t>
+                        <a:t>The highly regular two-host exchanges, repetitive affirmations, scripted</a:t>
+                      </a:r>
+                    </a:p>
+                    <a:p>
+                      <a:pPr>
+                        <a:lnSpc>
+                          <a:spcPts val="1600"/>
+                        </a:lnSpc>
+                        <a:spcAft>
+                          <a:spcPts val="0"/>
+                        </a:spcAft>
+                        <a:defRPr sz="1200" b="0">
+                          <a:solidFill>
+                            <a:srgbClr val="21243A"/>
+                          </a:solidFill>
+                          <a:latin typeface="Arial"/>
+                        </a:defRPr>
+                      </a:pPr>
+                      <a:r>
+                        <a:t>explanatory prompts, and formulaic transitions strongly suggest synthetic</a:t>
+                      </a:r>
+                    </a:p>
+                    <a:p>
+                      <a:pPr>
+                        <a:lnSpc>
+                          <a:spcPts val="1600"/>
+                        </a:lnSpc>
+                        <a:spcAft>
+                          <a:spcPts val="0"/>
+                        </a:spcAft>
+                        <a:defRPr sz="1200" b="0">
+                          <a:solidFill>
+                            <a:srgbClr val="21243A"/>
+                          </a:solidFill>
+                          <a:latin typeface="Arial"/>
+                        </a:defRPr>
+                      </a:pPr>
+                      <a:r>
+                        <a:t>generation or editing.</a:t>
                       </a:r>
                     </a:p>
                   </a:txBody>
@@ -10549,7 +10560,7 @@
           <p:nvPr/>
         </p:nvGraphicFramePr>
         <p:xfrm>
-          <a:off x="365760" y="3822191"/>
+          <a:off x="365760" y="3618992"/>
           <a:ext cx="8412479" cy="755904"/>
         </p:xfrm>
         <a:graphic>
@@ -10613,45 +10624,45 @@
                         </a:defRPr>
                       </a:pPr>
                       <a:r>
-                        <a:t>Highly synthetic structure exhibiting classic patterns of AI-generated podcast</a:t>
-                      </a:r>
-                    </a:p>
-                    <a:p>
-                      <a:pPr>
-                        <a:lnSpc>
-                          <a:spcPts val="1600"/>
-                        </a:lnSpc>
-                        <a:spcAft>
-                          <a:spcPts val="0"/>
-                        </a:spcAft>
-                        <a:defRPr sz="1200" b="0">
-                          <a:solidFill>
-                            <a:srgbClr val="21243A"/>
-                          </a:solidFill>
-                          <a:latin typeface="Arial"/>
-                        </a:defRPr>
-                      </a:pPr>
-                      <a:r>
-                        <a:t>dialogues (such as NotebookLM Audio Overviews) with formulaic back-and-forth</a:t>
-                      </a:r>
-                    </a:p>
-                    <a:p>
-                      <a:pPr>
-                        <a:lnSpc>
-                          <a:spcPts val="1600"/>
-                        </a:lnSpc>
-                        <a:spcAft>
-                          <a:spcPts val="0"/>
-                        </a:spcAft>
-                        <a:defRPr sz="1200" b="0">
-                          <a:solidFill>
-                            <a:srgbClr val="21243A"/>
-                          </a:solidFill>
-                          <a:latin typeface="Arial"/>
-                        </a:defRPr>
-                      </a:pPr>
-                      <a:r>
-                        <a:t>banter and simulated natural disfluencies.</a:t>
+                        <a:t>The text displays the classic conversational tropes, rapid turn-taking, and</a:t>
+                      </a:r>
+                    </a:p>
+                    <a:p>
+                      <a:pPr>
+                        <a:lnSpc>
+                          <a:spcPts val="1600"/>
+                        </a:lnSpc>
+                        <a:spcAft>
+                          <a:spcPts val="0"/>
+                        </a:spcAft>
+                        <a:defRPr sz="1200" b="0">
+                          <a:solidFill>
+                            <a:srgbClr val="21243A"/>
+                          </a:solidFill>
+                          <a:latin typeface="Arial"/>
+                        </a:defRPr>
+                      </a:pPr>
+                      <a:r>
+                        <a:t>synthetic cadence characteristic of an automated AI podcast generator like</a:t>
+                      </a:r>
+                    </a:p>
+                    <a:p>
+                      <a:pPr>
+                        <a:lnSpc>
+                          <a:spcPts val="1600"/>
+                        </a:lnSpc>
+                        <a:spcAft>
+                          <a:spcPts val="0"/>
+                        </a:spcAft>
+                        <a:defRPr sz="1200" b="0">
+                          <a:solidFill>
+                            <a:srgbClr val="21243A"/>
+                          </a:solidFill>
+                          <a:latin typeface="Arial"/>
+                        </a:defRPr>
+                      </a:pPr>
+                      <a:r>
+                        <a:t>NotebookLM.</a:t>
                       </a:r>
                     </a:p>
                   </a:txBody>
@@ -11375,102 +11386,102 @@
                         </a:defRPr>
                       </a:pPr>
                       <a:r>
-                        <a:t>Imagine holding uh like a simple piece of cloth in your hand. Let's say it's 2019,</a:t>
-                      </a:r>
-                    </a:p>
-                    <a:p>
-                      <a:pPr>
-                        <a:lnSpc>
-                          <a:spcPts val="1600"/>
-                        </a:lnSpc>
-                        <a:spcAft>
-                          <a:spcPts val="0"/>
-                        </a:spcAft>
-                        <a:defRPr sz="1200" b="0">
-                          <a:solidFill>
-                            <a:srgbClr val="21243A"/>
-                          </a:solidFill>
-                          <a:latin typeface="Arial"/>
-                        </a:defRPr>
-                      </a:pPr>
-                      <a:r>
-                        <a:t>and it's just a standard surgical mask. Right, just a boring, everyday medical</a:t>
-                      </a:r>
-                    </a:p>
-                    <a:p>
-                      <a:pPr>
-                        <a:lnSpc>
-                          <a:spcPts val="1600"/>
-                        </a:lnSpc>
-                        <a:spcAft>
-                          <a:spcPts val="0"/>
-                        </a:spcAft>
-                        <a:defRPr sz="1200" b="0">
-                          <a:solidFill>
-                            <a:srgbClr val="21243A"/>
-                          </a:solidFill>
-                          <a:latin typeface="Arial"/>
-                        </a:defRPr>
-                      </a:pPr>
-                      <a:r>
-                        <a:t>supply. Something you'd really only see at the dentist's office. Exactly. But then</a:t>
-                      </a:r>
-                    </a:p>
-                    <a:p>
-                      <a:pPr>
-                        <a:lnSpc>
-                          <a:spcPts val="1600"/>
-                        </a:lnSpc>
-                        <a:spcAft>
-                          <a:spcPts val="0"/>
-                        </a:spcAft>
-                        <a:defRPr sz="1200" b="0">
-                          <a:solidFill>
-                            <a:srgbClr val="21243A"/>
-                          </a:solidFill>
-                          <a:latin typeface="Arial"/>
-                        </a:defRPr>
-                      </a:pPr>
-                      <a:r>
-                        <a:t>fast forward to the end of 2020, and that exact same piece of cloth had morphed</a:t>
-                      </a:r>
-                    </a:p>
-                    <a:p>
-                      <a:pPr>
-                        <a:lnSpc>
-                          <a:spcPts val="1600"/>
-                        </a:lnSpc>
-                        <a:spcAft>
-                          <a:spcPts val="0"/>
-                        </a:spcAft>
-                        <a:defRPr sz="1200" b="0">
-                          <a:solidFill>
-                            <a:srgbClr val="21243A"/>
-                          </a:solidFill>
-                          <a:latin typeface="Arial"/>
-                        </a:defRPr>
-                      </a:pPr>
-                      <a:r>
-                        <a:t>into like a literal measure of your morality. Oh, absolutely. It became a symbol of</a:t>
-                      </a:r>
-                    </a:p>
-                    <a:p>
-                      <a:pPr>
-                        <a:lnSpc>
-                          <a:spcPts val="1600"/>
-                        </a:lnSpc>
-                        <a:spcAft>
-                          <a:spcPts val="0"/>
-                        </a:spcAft>
-                        <a:defRPr sz="1200" b="0">
-                          <a:solidFill>
-                            <a:srgbClr val="21243A"/>
-                          </a:solidFill>
-                          <a:latin typeface="Arial"/>
-                        </a:defRPr>
-                      </a:pPr>
-                      <a:r>
-                        <a:t>your political affiliation, your patriotism, even. It's just wild to think about. I mean,</a:t>
+                        <a:t>Imagine holding a like a simple piece of cloth in your hand. Let's say it's 2019, and</a:t>
+                      </a:r>
+                    </a:p>
+                    <a:p>
+                      <a:pPr>
+                        <a:lnSpc>
+                          <a:spcPts val="1600"/>
+                        </a:lnSpc>
+                        <a:spcAft>
+                          <a:spcPts val="0"/>
+                        </a:spcAft>
+                        <a:defRPr sz="1200" b="0">
+                          <a:solidFill>
+                            <a:srgbClr val="21243A"/>
+                          </a:solidFill>
+                          <a:latin typeface="Arial"/>
+                        </a:defRPr>
+                      </a:pPr>
+                      <a:r>
+                        <a:t>it's just a standard surgical mask. Right, just a boring everyday medical supply,</a:t>
+                      </a:r>
+                    </a:p>
+                    <a:p>
+                      <a:pPr>
+                        <a:lnSpc>
+                          <a:spcPts val="1600"/>
+                        </a:lnSpc>
+                        <a:spcAft>
+                          <a:spcPts val="0"/>
+                        </a:spcAft>
+                        <a:defRPr sz="1200" b="0">
+                          <a:solidFill>
+                            <a:srgbClr val="21243A"/>
+                          </a:solidFill>
+                          <a:latin typeface="Arial"/>
+                        </a:defRPr>
+                      </a:pPr>
+                      <a:r>
+                        <a:t>something you'd really only see at the dentist office. Exactly. But then fast-forward</a:t>
+                      </a:r>
+                    </a:p>
+                    <a:p>
+                      <a:pPr>
+                        <a:lnSpc>
+                          <a:spcPts val="1600"/>
+                        </a:lnSpc>
+                        <a:spcAft>
+                          <a:spcPts val="0"/>
+                        </a:spcAft>
+                        <a:defRPr sz="1200" b="0">
+                          <a:solidFill>
+                            <a:srgbClr val="21243A"/>
+                          </a:solidFill>
+                          <a:latin typeface="Arial"/>
+                        </a:defRPr>
+                      </a:pPr>
+                      <a:r>
+                        <a:t>to the end of 2020, and that exact same piece of cloth had morphed into like a</a:t>
+                      </a:r>
+                    </a:p>
+                    <a:p>
+                      <a:pPr>
+                        <a:lnSpc>
+                          <a:spcPts val="1600"/>
+                        </a:lnSpc>
+                        <a:spcAft>
+                          <a:spcPts val="0"/>
+                        </a:spcAft>
+                        <a:defRPr sz="1200" b="0">
+                          <a:solidFill>
+                            <a:srgbClr val="21243A"/>
+                          </a:solidFill>
+                          <a:latin typeface="Arial"/>
+                        </a:defRPr>
+                      </a:pPr>
+                      <a:r>
+                        <a:t>literal measure of your morality. Oh, absolutely. It became a symbol of your</a:t>
+                      </a:r>
+                    </a:p>
+                    <a:p>
+                      <a:pPr>
+                        <a:lnSpc>
+                          <a:spcPts val="1600"/>
+                        </a:lnSpc>
+                        <a:spcAft>
+                          <a:spcPts val="0"/>
+                        </a:spcAft>
+                        <a:defRPr sz="1200" b="0">
+                          <a:solidFill>
+                            <a:srgbClr val="21243A"/>
+                          </a:solidFill>
+                          <a:latin typeface="Arial"/>
+                        </a:defRPr>
+                      </a:pPr>
+                      <a:r>
+                        <a:t>political affiliation, your patriotism, even. It's just wild to think about. I mean,</a:t>
                       </a:r>
                     </a:p>
                     <a:p>
@@ -11527,216 +11538,216 @@
                         </a:defRPr>
                       </a:pPr>
                       <a:r>
-                        <a:t>sociological shifts we've ever witnessed. Yeah. I mean we went from a public that</a:t>
-                      </a:r>
-                    </a:p>
-                    <a:p>
-                      <a:pPr>
-                        <a:lnSpc>
-                          <a:spcPts val="1600"/>
-                        </a:lnSpc>
-                        <a:spcAft>
-                          <a:spcPts val="0"/>
-                        </a:spcAft>
-                        <a:defRPr sz="1200" b="0">
-                          <a:solidFill>
-                            <a:srgbClr val="21243A"/>
-                          </a:solidFill>
-                          <a:latin typeface="Arial"/>
-                        </a:defRPr>
-                      </a:pPr>
-                      <a:r>
-                        <a:t>largely didn't think about epidemiology at all to a society where every single</a:t>
-                      </a:r>
-                    </a:p>
-                    <a:p>
-                      <a:pPr>
-                        <a:lnSpc>
-                          <a:spcPts val="1600"/>
-                        </a:lnSpc>
-                        <a:spcAft>
-                          <a:spcPts val="0"/>
-                        </a:spcAft>
-                        <a:defRPr sz="1200" b="0">
-                          <a:solidFill>
-                            <a:srgbClr val="21243A"/>
-                          </a:solidFill>
-                          <a:latin typeface="Arial"/>
-                        </a:defRPr>
-                      </a:pPr>
-                      <a:r>
-                        <a:t>person was forced to take a public, highly visible stance on a global health crisis.</a:t>
-                      </a:r>
-                    </a:p>
-                    <a:p>
-                      <a:pPr>
-                        <a:lnSpc>
-                          <a:spcPts val="1600"/>
-                        </a:lnSpc>
-                        <a:spcAft>
-                          <a:spcPts val="0"/>
-                        </a:spcAft>
-                        <a:defRPr sz="1200" b="0">
-                          <a:solidFill>
-                            <a:srgbClr val="21243A"/>
-                          </a:solidFill>
-                          <a:latin typeface="Arial"/>
-                        </a:defRPr>
-                      </a:pPr>
-                      <a:r>
-                        <a:t>And usually, you know, when we talk about a massive global event like that, we</a:t>
-                      </a:r>
-                    </a:p>
-                    <a:p>
-                      <a:pPr>
-                        <a:lnSpc>
-                          <a:spcPts val="1600"/>
-                        </a:lnSpc>
-                        <a:spcAft>
-                          <a:spcPts val="0"/>
-                        </a:spcAft>
-                        <a:defRPr sz="1200" b="0">
-                          <a:solidFill>
-                            <a:srgbClr val="21243A"/>
-                          </a:solidFill>
-                          <a:latin typeface="Arial"/>
-                        </a:defRPr>
-                      </a:pPr>
-                      <a:r>
-                        <a:t>have to rely on historians decades later to piece together the public mood. Right,</a:t>
-                      </a:r>
-                    </a:p>
-                    <a:p>
-                      <a:pPr>
-                        <a:lnSpc>
-                          <a:spcPts val="1600"/>
-                        </a:lnSpc>
-                        <a:spcAft>
-                          <a:spcPts val="0"/>
-                        </a:spcAft>
-                        <a:defRPr sz="1200" b="0">
-                          <a:solidFill>
-                            <a:srgbClr val="21243A"/>
-                          </a:solidFill>
-                          <a:latin typeface="Arial"/>
-                        </a:defRPr>
-                      </a:pPr>
-                      <a:r>
-                        <a:t>digging through old newspaper clippings, or uh, diary entries. Exactly. But for the</a:t>
-                      </a:r>
-                    </a:p>
-                    <a:p>
-                      <a:pPr>
-                        <a:lnSpc>
-                          <a:spcPts val="1600"/>
-                        </a:lnSpc>
-                        <a:spcAft>
-                          <a:spcPts val="0"/>
-                        </a:spcAft>
-                        <a:defRPr sz="1200" b="0">
-                          <a:solidFill>
-                            <a:srgbClr val="21243A"/>
-                          </a:solidFill>
-                          <a:latin typeface="Arial"/>
-                        </a:defRPr>
-                      </a:pPr>
-                      <a:r>
-                        <a:t>COVID-19 pandemic, we have this complete, real-time, behavioral laboratory. So,</a:t>
-                      </a:r>
-                    </a:p>
-                    <a:p>
-                      <a:pPr>
-                        <a:lnSpc>
-                          <a:spcPts val="1600"/>
-                        </a:lnSpc>
-                        <a:spcAft>
-                          <a:spcPts val="0"/>
-                        </a:spcAft>
-                        <a:defRPr sz="1200" b="0">
-                          <a:solidFill>
-                            <a:srgbClr val="21243A"/>
-                          </a:solidFill>
-                          <a:latin typeface="Arial"/>
-                        </a:defRPr>
-                      </a:pPr>
-                      <a:r>
-                        <a:t>we are grounding our conversation today in this fascinating peer-reviewed study</a:t>
-                      </a:r>
-                    </a:p>
-                    <a:p>
-                      <a:pPr>
-                        <a:lnSpc>
-                          <a:spcPts val="1600"/>
-                        </a:lnSpc>
-                        <a:spcAft>
-                          <a:spcPts val="0"/>
-                        </a:spcAft>
-                        <a:defRPr sz="1200" b="0">
-                          <a:solidFill>
-                            <a:srgbClr val="21243A"/>
-                          </a:solidFill>
-                          <a:latin typeface="Arial"/>
-                        </a:defRPr>
-                      </a:pPr>
-                      <a:r>
-                        <a:t>from the journal, Vaccine. Yes, authored by Sam Martin and Samantha Vanderslott</a:t>
-                      </a:r>
-                    </a:p>
-                    <a:p>
-                      <a:pPr>
-                        <a:lnSpc>
-                          <a:spcPts val="1600"/>
-                        </a:lnSpc>
-                        <a:spcAft>
-                          <a:spcPts val="0"/>
-                        </a:spcAft>
-                        <a:defRPr sz="1200" b="0">
-                          <a:solidFill>
-                            <a:srgbClr val="21243A"/>
-                          </a:solidFill>
-                          <a:latin typeface="Arial"/>
-                        </a:defRPr>
-                      </a:pPr>
-                      <a:r>
-                        <a:t>from the Oxford Vaccine Group. And the scale of their research here is what</a:t>
-                      </a:r>
-                    </a:p>
-                    <a:p>
-                      <a:pPr>
-                        <a:lnSpc>
-                          <a:spcPts val="1600"/>
-                        </a:lnSpc>
-                        <a:spcAft>
-                          <a:spcPts val="0"/>
-                        </a:spcAft>
-                        <a:defRPr sz="1200" b="0">
-                          <a:solidFill>
-                            <a:srgbClr val="21243A"/>
-                          </a:solidFill>
-                          <a:latin typeface="Arial"/>
-                        </a:defRPr>
-                      </a:pPr>
-                      <a:r>
-                        <a:t>makes it so robust, right? Oh, totally. They analyzed this massive data set of 7.89</a:t>
-                      </a:r>
-                    </a:p>
-                    <a:p>
-                      <a:pPr>
-                        <a:lnSpc>
-                          <a:spcPts val="1600"/>
-                        </a:lnSpc>
-                        <a:spcAft>
-                          <a:spcPts val="0"/>
-                        </a:spcAft>
-                        <a:defRPr sz="1200" b="0">
-                          <a:solidFill>
-                            <a:srgbClr val="21243A"/>
-                          </a:solidFill>
-                          <a:latin typeface="Arial"/>
-                        </a:defRPr>
-                      </a:pPr>
-                      <a:r>
-                        <a:t>million English-language tweets, Wow. Yeah, from the US and the UK spanning a</a:t>
+                        <a:t>sociological shifts we've ever witnessed. Yeah. We went from a public that largely</a:t>
+                      </a:r>
+                    </a:p>
+                    <a:p>
+                      <a:pPr>
+                        <a:lnSpc>
+                          <a:spcPts val="1600"/>
+                        </a:lnSpc>
+                        <a:spcAft>
+                          <a:spcPts val="0"/>
+                        </a:spcAft>
+                        <a:defRPr sz="1200" b="0">
+                          <a:solidFill>
+                            <a:srgbClr val="21243A"/>
+                          </a:solidFill>
+                          <a:latin typeface="Arial"/>
+                        </a:defRPr>
+                      </a:pPr>
+                      <a:r>
+                        <a:t>didn't think about epidemiology at all to a society where every single person was</a:t>
+                      </a:r>
+                    </a:p>
+                    <a:p>
+                      <a:pPr>
+                        <a:lnSpc>
+                          <a:spcPts val="1600"/>
+                        </a:lnSpc>
+                        <a:spcAft>
+                          <a:spcPts val="0"/>
+                        </a:spcAft>
+                        <a:defRPr sz="1200" b="0">
+                          <a:solidFill>
+                            <a:srgbClr val="21243A"/>
+                          </a:solidFill>
+                          <a:latin typeface="Arial"/>
+                        </a:defRPr>
+                      </a:pPr>
+                      <a:r>
+                        <a:t>forced to take a public, highly visible stance on a global health crisis. And usually,</a:t>
+                      </a:r>
+                    </a:p>
+                    <a:p>
+                      <a:pPr>
+                        <a:lnSpc>
+                          <a:spcPts val="1600"/>
+                        </a:lnSpc>
+                        <a:spcAft>
+                          <a:spcPts val="0"/>
+                        </a:spcAft>
+                        <a:defRPr sz="1200" b="0">
+                          <a:solidFill>
+                            <a:srgbClr val="21243A"/>
+                          </a:solidFill>
+                          <a:latin typeface="Arial"/>
+                        </a:defRPr>
+                      </a:pPr>
+                      <a:r>
+                        <a:t>you know, when we talk about a massive global event like that, we have to rely on</a:t>
+                      </a:r>
+                    </a:p>
+                    <a:p>
+                      <a:pPr>
+                        <a:lnSpc>
+                          <a:spcPts val="1600"/>
+                        </a:lnSpc>
+                        <a:spcAft>
+                          <a:spcPts val="0"/>
+                        </a:spcAft>
+                        <a:defRPr sz="1200" b="0">
+                          <a:solidFill>
+                            <a:srgbClr val="21243A"/>
+                          </a:solidFill>
+                          <a:latin typeface="Arial"/>
+                        </a:defRPr>
+                      </a:pPr>
+                      <a:r>
+                        <a:t>historians decades later to piece together the public mood. Right, digging through</a:t>
+                      </a:r>
+                    </a:p>
+                    <a:p>
+                      <a:pPr>
+                        <a:lnSpc>
+                          <a:spcPts val="1600"/>
+                        </a:lnSpc>
+                        <a:spcAft>
+                          <a:spcPts val="0"/>
+                        </a:spcAft>
+                        <a:defRPr sz="1200" b="0">
+                          <a:solidFill>
+                            <a:srgbClr val="21243A"/>
+                          </a:solidFill>
+                          <a:latin typeface="Arial"/>
+                        </a:defRPr>
+                      </a:pPr>
+                      <a:r>
+                        <a:t>old newspaper clippings or a diary entries. Exactly. But for the COVID-19</a:t>
+                      </a:r>
+                    </a:p>
+                    <a:p>
+                      <a:pPr>
+                        <a:lnSpc>
+                          <a:spcPts val="1600"/>
+                        </a:lnSpc>
+                        <a:spcAft>
+                          <a:spcPts val="0"/>
+                        </a:spcAft>
+                        <a:defRPr sz="1200" b="0">
+                          <a:solidFill>
+                            <a:srgbClr val="21243A"/>
+                          </a:solidFill>
+                          <a:latin typeface="Arial"/>
+                        </a:defRPr>
+                      </a:pPr>
+                      <a:r>
+                        <a:t>pandemic, we have this complete, real-time behavioral laboratory. So, we are</a:t>
+                      </a:r>
+                    </a:p>
+                    <a:p>
+                      <a:pPr>
+                        <a:lnSpc>
+                          <a:spcPts val="1600"/>
+                        </a:lnSpc>
+                        <a:spcAft>
+                          <a:spcPts val="0"/>
+                        </a:spcAft>
+                        <a:defRPr sz="1200" b="0">
+                          <a:solidFill>
+                            <a:srgbClr val="21243A"/>
+                          </a:solidFill>
+                          <a:latin typeface="Arial"/>
+                        </a:defRPr>
+                      </a:pPr>
+                      <a:r>
+                        <a:t>grounding our conversation today in this fascinating peer-reviewed study from</a:t>
+                      </a:r>
+                    </a:p>
+                    <a:p>
+                      <a:pPr>
+                        <a:lnSpc>
+                          <a:spcPts val="1600"/>
+                        </a:lnSpc>
+                        <a:spcAft>
+                          <a:spcPts val="0"/>
+                        </a:spcAft>
+                        <a:defRPr sz="1200" b="0">
+                          <a:solidFill>
+                            <a:srgbClr val="21243A"/>
+                          </a:solidFill>
+                          <a:latin typeface="Arial"/>
+                        </a:defRPr>
+                      </a:pPr>
+                      <a:r>
+                        <a:t>the journal Vaccine. Yes, authored by Sam Martin and Samantha Vanderslott from</a:t>
+                      </a:r>
+                    </a:p>
+                    <a:p>
+                      <a:pPr>
+                        <a:lnSpc>
+                          <a:spcPts val="1600"/>
+                        </a:lnSpc>
+                        <a:spcAft>
+                          <a:spcPts val="0"/>
+                        </a:spcAft>
+                        <a:defRPr sz="1200" b="0">
+                          <a:solidFill>
+                            <a:srgbClr val="21243A"/>
+                          </a:solidFill>
+                          <a:latin typeface="Arial"/>
+                        </a:defRPr>
+                      </a:pPr>
+                      <a:r>
+                        <a:t>the Oxford Vaccine Group. And the scale of their research here is what makes it so</a:t>
+                      </a:r>
+                    </a:p>
+                    <a:p>
+                      <a:pPr>
+                        <a:lnSpc>
+                          <a:spcPts val="1600"/>
+                        </a:lnSpc>
+                        <a:spcAft>
+                          <a:spcPts val="0"/>
+                        </a:spcAft>
+                        <a:defRPr sz="1200" b="0">
+                          <a:solidFill>
+                            <a:srgbClr val="21243A"/>
+                          </a:solidFill>
+                          <a:latin typeface="Arial"/>
+                        </a:defRPr>
+                      </a:pPr>
+                      <a:r>
+                        <a:t>robust, right? Oh, totally. They analyzed this massive data set of 7.89 million</a:t>
+                      </a:r>
+                    </a:p>
+                    <a:p>
+                      <a:pPr>
+                        <a:lnSpc>
+                          <a:spcPts val="1600"/>
+                        </a:lnSpc>
+                        <a:spcAft>
+                          <a:spcPts val="0"/>
+                        </a:spcAft>
+                        <a:defRPr sz="1200" b="0">
+                          <a:solidFill>
+                            <a:srgbClr val="21243A"/>
+                          </a:solidFill>
+                          <a:latin typeface="Arial"/>
+                        </a:defRPr>
+                      </a:pPr>
+                      <a:r>
+                        <a:t>English-language tweets. Wow. Yeah, from the US and the UK, spanning a very</a:t>
                       </a:r>
                     </a:p>
                   </a:txBody>
@@ -12098,273 +12109,273 @@
                         </a:defRPr>
                       </a:pPr>
                       <a:r>
-                        <a:t>very specific window, basically, June 1st, 2020 to June 1st, 2021. And they didn't</a:t>
-                      </a:r>
-                    </a:p>
-                    <a:p>
-                      <a:pPr>
-                        <a:lnSpc>
-                          <a:spcPts val="1600"/>
-                        </a:lnSpc>
-                        <a:spcAft>
-                          <a:spcPts val="0"/>
-                        </a:spcAft>
-                        <a:defRPr sz="1200" b="0">
-                          <a:solidFill>
-                            <a:srgbClr val="21243A"/>
-                          </a:solidFill>
-                          <a:latin typeface="Arial"/>
-                        </a:defRPr>
-                      </a:pPr>
-                      <a:r>
-                        <a:t>just like count how many times the word "mask" or "vaccine" was used, which is</a:t>
-                      </a:r>
-                    </a:p>
-                    <a:p>
-                      <a:pPr>
-                        <a:lnSpc>
-                          <a:spcPts val="1600"/>
-                        </a:lnSpc>
-                        <a:spcAft>
-                          <a:spcPts val="0"/>
-                        </a:spcAft>
-                        <a:defRPr sz="1200" b="0">
-                          <a:solidFill>
-                            <a:srgbClr val="21243A"/>
-                          </a:solidFill>
-                          <a:latin typeface="Arial"/>
-                        </a:defRPr>
-                      </a:pPr>
-                      <a:r>
-                        <a:t>what I would have assumed. No, they went way deeper. They utilized media</a:t>
-                      </a:r>
-                    </a:p>
-                    <a:p>
-                      <a:pPr>
-                        <a:lnSpc>
-                          <a:spcPts val="1600"/>
-                        </a:lnSpc>
-                        <a:spcAft>
-                          <a:spcPts val="0"/>
-                        </a:spcAft>
-                        <a:defRPr sz="1200" b="0">
-                          <a:solidFill>
-                            <a:srgbClr val="21243A"/>
-                          </a:solidFill>
-                          <a:latin typeface="Arial"/>
-                        </a:defRPr>
-                      </a:pPr>
-                      <a:r>
-                        <a:t>monitoring software called Meltwater and text network analysis software called</a:t>
-                      </a:r>
-                    </a:p>
-                    <a:p>
-                      <a:pPr>
-                        <a:lnSpc>
-                          <a:spcPts val="1600"/>
-                        </a:lnSpc>
-                        <a:spcAft>
-                          <a:spcPts val="0"/>
-                        </a:spcAft>
-                        <a:defRPr sz="1200" b="0">
-                          <a:solidFill>
-                            <a:srgbClr val="21243A"/>
-                          </a:solidFill>
-                          <a:latin typeface="Arial"/>
-                        </a:defRPr>
-                      </a:pPr>
-                      <a:r>
-                        <a:t>InfraNodus. Which uh, we should probably explain how those tools work, because</a:t>
-                      </a:r>
-                    </a:p>
-                    <a:p>
-                      <a:pPr>
-                        <a:lnSpc>
-                          <a:spcPts val="1600"/>
-                        </a:lnSpc>
-                        <a:spcAft>
-                          <a:spcPts val="0"/>
-                        </a:spcAft>
-                        <a:defRPr sz="1200" b="0">
-                          <a:solidFill>
-                            <a:srgbClr val="21243A"/>
-                          </a:solidFill>
-                          <a:latin typeface="Arial"/>
-                        </a:defRPr>
-                      </a:pPr>
-                      <a:r>
-                        <a:t>it's vital for understanding the whole study. Please do. So, Meltwater acts like this</a:t>
-                      </a:r>
-                    </a:p>
-                    <a:p>
-                      <a:pPr>
-                        <a:lnSpc>
-                          <a:spcPts val="1600"/>
-                        </a:lnSpc>
-                        <a:spcAft>
-                          <a:spcPts val="0"/>
-                        </a:spcAft>
-                        <a:defRPr sz="1200" b="0">
-                          <a:solidFill>
-                            <a:srgbClr val="21243A"/>
-                          </a:solidFill>
-                          <a:latin typeface="Arial"/>
-                        </a:defRPr>
-                      </a:pPr>
-                      <a:r>
-                        <a:t>giant net scraping the internet and pulling in every public conversation based on</a:t>
-                      </a:r>
-                    </a:p>
-                    <a:p>
-                      <a:pPr>
-                        <a:lnSpc>
-                          <a:spcPts val="1600"/>
-                        </a:lnSpc>
-                        <a:spcAft>
-                          <a:spcPts val="0"/>
-                        </a:spcAft>
-                        <a:defRPr sz="1200" b="0">
-                          <a:solidFill>
-                            <a:srgbClr val="21243A"/>
-                          </a:solidFill>
-                          <a:latin typeface="Arial"/>
-                        </a:defRPr>
-                      </a:pPr>
-                      <a:r>
-                        <a:t>specific keywords. Right. But InfraNodus acts as the brain. It actually maps</a:t>
-                      </a:r>
-                    </a:p>
-                    <a:p>
-                      <a:pPr>
-                        <a:lnSpc>
-                          <a:spcPts val="1600"/>
-                        </a:lnSpc>
-                        <a:spcAft>
-                          <a:spcPts val="0"/>
-                        </a:spcAft>
-                        <a:defRPr sz="1200" b="0">
-                          <a:solidFill>
-                            <a:srgbClr val="21243A"/>
-                          </a:solidFill>
-                          <a:latin typeface="Arial"/>
-                        </a:defRPr>
-                      </a:pPr>
-                      <a:r>
-                        <a:t>relationships between words. So, if the word "mask" is constantly sitting right next</a:t>
-                      </a:r>
-                    </a:p>
-                    <a:p>
-                      <a:pPr>
-                        <a:lnSpc>
-                          <a:spcPts val="1600"/>
-                        </a:lnSpc>
-                        <a:spcAft>
-                          <a:spcPts val="0"/>
-                        </a:spcAft>
-                        <a:defRPr sz="1200" b="0">
-                          <a:solidFill>
-                            <a:srgbClr val="21243A"/>
-                          </a:solidFill>
-                          <a:latin typeface="Arial"/>
-                        </a:defRPr>
-                      </a:pPr>
-                      <a:r>
-                        <a:t>to the word "tyranny" or "sheep" in millions of tweets, The software draws a thick</a:t>
-                      </a:r>
-                    </a:p>
-                    <a:p>
-                      <a:pPr>
-                        <a:lnSpc>
-                          <a:spcPts val="1600"/>
-                        </a:lnSpc>
-                        <a:spcAft>
-                          <a:spcPts val="0"/>
-                        </a:spcAft>
-                        <a:defRPr sz="1200" b="0">
-                          <a:solidFill>
-                            <a:srgbClr val="21243A"/>
-                          </a:solidFill>
-                          <a:latin typeface="Arial"/>
-                        </a:defRPr>
-                      </a:pPr>
-                      <a:r>
-                        <a:t>digital line between them. Exactly, it lets researchers see the exact architecture of</a:t>
-                      </a:r>
-                    </a:p>
-                    <a:p>
-                      <a:pPr>
-                        <a:lnSpc>
-                          <a:spcPts val="1600"/>
-                        </a:lnSpc>
-                        <a:spcAft>
-                          <a:spcPts val="0"/>
-                        </a:spcAft>
-                        <a:defRPr sz="1200" b="0">
-                          <a:solidFill>
-                            <a:srgbClr val="21243A"/>
-                          </a:solidFill>
-                          <a:latin typeface="Arial"/>
-                        </a:defRPr>
-                      </a:pPr>
-                      <a:r>
-                        <a:t>public sentiment. It's almost like looking at a real-time MRI of society's collective</a:t>
-                      </a:r>
-                    </a:p>
-                    <a:p>
-                      <a:pPr>
-                        <a:lnSpc>
-                          <a:spcPts val="1600"/>
-                        </a:lnSpc>
-                        <a:spcAft>
-                          <a:spcPts val="0"/>
-                        </a:spcAft>
-                        <a:defRPr sz="1200" b="0">
-                          <a:solidFill>
-                            <a:srgbClr val="21243A"/>
-                          </a:solidFill>
-                          <a:latin typeface="Arial"/>
-                        </a:defRPr>
-                      </a:pPr>
-                      <a:r>
-                        <a:t>anxiety. That's a really great way to visualize it. Yeah. It moves us past just</a:t>
-                      </a:r>
-                    </a:p>
-                    <a:p>
-                      <a:pPr>
-                        <a:lnSpc>
-                          <a:spcPts val="1600"/>
-                        </a:lnSpc>
-                        <a:spcAft>
-                          <a:spcPts val="0"/>
-                        </a:spcAft>
-                        <a:defRPr sz="1200" b="0">
-                          <a:solidFill>
-                            <a:srgbClr val="21243A"/>
-                          </a:solidFill>
-                          <a:latin typeface="Arial"/>
-                        </a:defRPr>
-                      </a:pPr>
-                      <a:r>
-                        <a:t>individual anecdotes, Yeah. and shows us the actual structural flow of ideas. Yeah,</a:t>
-                      </a:r>
-                    </a:p>
-                    <a:p>
-                      <a:pPr>
-                        <a:lnSpc>
-                          <a:spcPts val="1600"/>
-                        </a:lnSpc>
-                        <a:spcAft>
-                          <a:spcPts val="0"/>
-                        </a:spcAft>
-                        <a:defRPr sz="1200" b="0">
-                          <a:solidFill>
-                            <a:srgbClr val="21243A"/>
-                          </a:solidFill>
-                          <a:latin typeface="Arial"/>
-                        </a:defRPr>
-                      </a:pPr>
-                      <a:r>
-                        <a:t>so the mission for our deep dive today is to explore a very specific phenomenon</a:t>
+                        <a:t>specific window, basically June 1st, 2020 to June 1st, 2021. And they didn't just like</a:t>
+                      </a:r>
+                    </a:p>
+                    <a:p>
+                      <a:pPr>
+                        <a:lnSpc>
+                          <a:spcPts val="1600"/>
+                        </a:lnSpc>
+                        <a:spcAft>
+                          <a:spcPts val="0"/>
+                        </a:spcAft>
+                        <a:defRPr sz="1200" b="0">
+                          <a:solidFill>
+                            <a:srgbClr val="21243A"/>
+                          </a:solidFill>
+                          <a:latin typeface="Arial"/>
+                        </a:defRPr>
+                      </a:pPr>
+                      <a:r>
+                        <a:t>count how many times the word mask or vaccine was used, which is what I would</a:t>
+                      </a:r>
+                    </a:p>
+                    <a:p>
+                      <a:pPr>
+                        <a:lnSpc>
+                          <a:spcPts val="1600"/>
+                        </a:lnSpc>
+                        <a:spcAft>
+                          <a:spcPts val="0"/>
+                        </a:spcAft>
+                        <a:defRPr sz="1200" b="0">
+                          <a:solidFill>
+                            <a:srgbClr val="21243A"/>
+                          </a:solidFill>
+                          <a:latin typeface="Arial"/>
+                        </a:defRPr>
+                      </a:pPr>
+                      <a:r>
+                        <a:t>have assumed. No, they went way deeper. They utilized media monitoring</a:t>
+                      </a:r>
+                    </a:p>
+                    <a:p>
+                      <a:pPr>
+                        <a:lnSpc>
+                          <a:spcPts val="1600"/>
+                        </a:lnSpc>
+                        <a:spcAft>
+                          <a:spcPts val="0"/>
+                        </a:spcAft>
+                        <a:defRPr sz="1200" b="0">
+                          <a:solidFill>
+                            <a:srgbClr val="21243A"/>
+                          </a:solidFill>
+                          <a:latin typeface="Arial"/>
+                        </a:defRPr>
+                      </a:pPr>
+                      <a:r>
+                        <a:t>software called Meltwater and text network analysis software called InfraNodus.</a:t>
+                      </a:r>
+                    </a:p>
+                    <a:p>
+                      <a:pPr>
+                        <a:lnSpc>
+                          <a:spcPts val="1600"/>
+                        </a:lnSpc>
+                        <a:spcAft>
+                          <a:spcPts val="0"/>
+                        </a:spcAft>
+                        <a:defRPr sz="1200" b="0">
+                          <a:solidFill>
+                            <a:srgbClr val="21243A"/>
+                          </a:solidFill>
+                          <a:latin typeface="Arial"/>
+                        </a:defRPr>
+                      </a:pPr>
+                      <a:r>
+                        <a:t>Which uh we should probably explain how those tools work because it's vital for</a:t>
+                      </a:r>
+                    </a:p>
+                    <a:p>
+                      <a:pPr>
+                        <a:lnSpc>
+                          <a:spcPts val="1600"/>
+                        </a:lnSpc>
+                        <a:spcAft>
+                          <a:spcPts val="0"/>
+                        </a:spcAft>
+                        <a:defRPr sz="1200" b="0">
+                          <a:solidFill>
+                            <a:srgbClr val="21243A"/>
+                          </a:solidFill>
+                          <a:latin typeface="Arial"/>
+                        </a:defRPr>
+                      </a:pPr>
+                      <a:r>
+                        <a:t>understanding the whole study. Please do. So Meltwater acts like this giant net</a:t>
+                      </a:r>
+                    </a:p>
+                    <a:p>
+                      <a:pPr>
+                        <a:lnSpc>
+                          <a:spcPts val="1600"/>
+                        </a:lnSpc>
+                        <a:spcAft>
+                          <a:spcPts val="0"/>
+                        </a:spcAft>
+                        <a:defRPr sz="1200" b="0">
+                          <a:solidFill>
+                            <a:srgbClr val="21243A"/>
+                          </a:solidFill>
+                          <a:latin typeface="Arial"/>
+                        </a:defRPr>
+                      </a:pPr>
+                      <a:r>
+                        <a:t>scraping the internet and pulling in every public conversation based on specific</a:t>
+                      </a:r>
+                    </a:p>
+                    <a:p>
+                      <a:pPr>
+                        <a:lnSpc>
+                          <a:spcPts val="1600"/>
+                        </a:lnSpc>
+                        <a:spcAft>
+                          <a:spcPts val="0"/>
+                        </a:spcAft>
+                        <a:defRPr sz="1200" b="0">
+                          <a:solidFill>
+                            <a:srgbClr val="21243A"/>
+                          </a:solidFill>
+                          <a:latin typeface="Arial"/>
+                        </a:defRPr>
+                      </a:pPr>
+                      <a:r>
+                        <a:t>keywords. Right. But InfraNodus acts as the brain. It actually maps relationships</a:t>
+                      </a:r>
+                    </a:p>
+                    <a:p>
+                      <a:pPr>
+                        <a:lnSpc>
+                          <a:spcPts val="1600"/>
+                        </a:lnSpc>
+                        <a:spcAft>
+                          <a:spcPts val="0"/>
+                        </a:spcAft>
+                        <a:defRPr sz="1200" b="0">
+                          <a:solidFill>
+                            <a:srgbClr val="21243A"/>
+                          </a:solidFill>
+                          <a:latin typeface="Arial"/>
+                        </a:defRPr>
+                      </a:pPr>
+                      <a:r>
+                        <a:t>between words. So if the word mask is constantly sitting right next to the word</a:t>
+                      </a:r>
+                    </a:p>
+                    <a:p>
+                      <a:pPr>
+                        <a:lnSpc>
+                          <a:spcPts val="1600"/>
+                        </a:lnSpc>
+                        <a:spcAft>
+                          <a:spcPts val="0"/>
+                        </a:spcAft>
+                        <a:defRPr sz="1200" b="0">
+                          <a:solidFill>
+                            <a:srgbClr val="21243A"/>
+                          </a:solidFill>
+                          <a:latin typeface="Arial"/>
+                        </a:defRPr>
+                      </a:pPr>
+                      <a:r>
+                        <a:t>tyranny or sheep in millions of tweets, The software draws a thick digital line</a:t>
+                      </a:r>
+                    </a:p>
+                    <a:p>
+                      <a:pPr>
+                        <a:lnSpc>
+                          <a:spcPts val="1600"/>
+                        </a:lnSpc>
+                        <a:spcAft>
+                          <a:spcPts val="0"/>
+                        </a:spcAft>
+                        <a:defRPr sz="1200" b="0">
+                          <a:solidFill>
+                            <a:srgbClr val="21243A"/>
+                          </a:solidFill>
+                          <a:latin typeface="Arial"/>
+                        </a:defRPr>
+                      </a:pPr>
+                      <a:r>
+                        <a:t>between them. Exactly. It lets researchers see the exact architecture of public</a:t>
+                      </a:r>
+                    </a:p>
+                    <a:p>
+                      <a:pPr>
+                        <a:lnSpc>
+                          <a:spcPts val="1600"/>
+                        </a:lnSpc>
+                        <a:spcAft>
+                          <a:spcPts val="0"/>
+                        </a:spcAft>
+                        <a:defRPr sz="1200" b="0">
+                          <a:solidFill>
+                            <a:srgbClr val="21243A"/>
+                          </a:solidFill>
+                          <a:latin typeface="Arial"/>
+                        </a:defRPr>
+                      </a:pPr>
+                      <a:r>
+                        <a:t>sentiment. It's almost like looking at a real-time MRI of society's collective anxiety.</a:t>
+                      </a:r>
+                    </a:p>
+                    <a:p>
+                      <a:pPr>
+                        <a:lnSpc>
+                          <a:spcPts val="1600"/>
+                        </a:lnSpc>
+                        <a:spcAft>
+                          <a:spcPts val="0"/>
+                        </a:spcAft>
+                        <a:defRPr sz="1200" b="0">
+                          <a:solidFill>
+                            <a:srgbClr val="21243A"/>
+                          </a:solidFill>
+                          <a:latin typeface="Arial"/>
+                        </a:defRPr>
+                      </a:pPr>
+                      <a:r>
+                        <a:t>That's a really great way to visualize it. It moves us past just individual anecdotes,</a:t>
+                      </a:r>
+                    </a:p>
+                    <a:p>
+                      <a:pPr>
+                        <a:lnSpc>
+                          <a:spcPts val="1600"/>
+                        </a:lnSpc>
+                        <a:spcAft>
+                          <a:spcPts val="0"/>
+                        </a:spcAft>
+                        <a:defRPr sz="1200" b="0">
+                          <a:solidFill>
+                            <a:srgbClr val="21243A"/>
+                          </a:solidFill>
+                          <a:latin typeface="Arial"/>
+                        </a:defRPr>
+                      </a:pPr>
+                      <a:r>
+                        <a:t>Yeah. Yeah. and it shows us the actual structural flow of ideas. Yeah. So, the</a:t>
+                      </a:r>
+                    </a:p>
+                    <a:p>
+                      <a:pPr>
+                        <a:lnSpc>
+                          <a:spcPts val="1600"/>
+                        </a:lnSpc>
+                        <a:spcAft>
+                          <a:spcPts val="0"/>
+                        </a:spcAft>
+                        <a:defRPr sz="1200" b="0">
+                          <a:solidFill>
+                            <a:srgbClr val="21243A"/>
+                          </a:solidFill>
+                          <a:latin typeface="Arial"/>
+                        </a:defRPr>
+                      </a:pPr>
+                      <a:r>
+                        <a:t>mission for our deep dive today is to explore a very specific phenomenon</a:t>
                       </a:r>
                     </a:p>
                     <a:p>
@@ -12440,26 +12451,26 @@
                         </a:defRPr>
                       </a:pPr>
                       <a:r>
-                        <a:t>behind how the public reacted to these mandates. Exactly. Now, uh, a very quick</a:t>
-                      </a:r>
-                    </a:p>
-                    <a:p>
-                      <a:pPr>
-                        <a:lnSpc>
-                          <a:spcPts val="1600"/>
-                        </a:lnSpc>
-                        <a:spcAft>
-                          <a:spcPts val="0"/>
-                        </a:spcAft>
-                        <a:defRPr sz="1200" b="0">
-                          <a:solidFill>
-                            <a:srgbClr val="21243A"/>
-                          </a:solidFill>
-                          <a:latin typeface="Arial"/>
-                        </a:defRPr>
-                      </a:pPr>
-                      <a:r>
-                        <a:t>heads-up to you, the listener, before we dive into the timeline. The data we are</a:t>
+                        <a:t>behind how the public reacted to these mandates. Exactly. Now uh a very quick</a:t>
+                      </a:r>
+                    </a:p>
+                    <a:p>
+                      <a:pPr>
+                        <a:lnSpc>
+                          <a:spcPts val="1600"/>
+                        </a:lnSpc>
+                        <a:spcAft>
+                          <a:spcPts val="0"/>
+                        </a:spcAft>
+                        <a:defRPr sz="1200" b="0">
+                          <a:solidFill>
+                            <a:srgbClr val="21243A"/>
+                          </a:solidFill>
+                          <a:latin typeface="Arial"/>
+                        </a:defRPr>
+                      </a:pPr>
+                      <a:r>
+                        <a:t>heads up to you the listener before we dive into the timeline, the data we are</a:t>
                       </a:r>
                     </a:p>
                   </a:txBody>
@@ -12859,7 +12870,7 @@
                         </a:defRPr>
                       </a:pPr>
                       <a:r>
-                        <a:t>Donald Trump, Vice President Kamala Harris, along with a bunch of conservative</a:t>
+                        <a:t>Donald Trump, Vice President Kamala Harris along with a bunch of conservative</a:t>
                       </a:r>
                     </a:p>
                     <a:p>
@@ -12992,7 +13003,7 @@
                         </a:defRPr>
                       </a:pPr>
                       <a:r>
-                        <a:t>2020, we have to reco</a:t>
+                        <a:t>2020, we have to recognize that human pushback again</a:t>
                       </a:r>
                     </a:p>
                   </a:txBody>
@@ -13618,7 +13629,7 @@
                         </a:defRPr>
                       </a:pPr>
                       <a:r>
-                        <a:t>85/100</a:t>
+                        <a:t>90/100</a:t>
                       </a:r>
                     </a:p>
                   </a:txBody>
@@ -15053,7 +15064,7 @@
                         </a:defRPr>
                       </a:pPr>
                       <a:r>
-                        <a:t>b6fa93e8-0de4-4ed9-b106-d6b642a9a901</a:t>
+                        <a:t>7e1a6917-52a1-453d-8dda-9c4842232f31</a:t>
                       </a:r>
                     </a:p>
                   </a:txBody>
@@ -15141,7 +15152,7 @@
                         </a:defRPr>
                       </a:pPr>
                       <a:r>
-                        <a:t>2026-09-26T20:30:11+00:00</a:t>
+                        <a:t>2026-09-26T22:31:07+00:00</a:t>
                       </a:r>
                     </a:p>
                   </a:txBody>
@@ -15405,7 +15416,7 @@
                         </a:defRPr>
                       </a:pPr>
                       <a:r>
-                        <a:t>verdict-consistency-2026-09-26.1</a:t>
+                        <a:t>pdf-preparation-2026-09-26.1</a:t>
                       </a:r>
                     </a:p>
                   </a:txBody>
@@ -15606,7 +15617,7 @@
         </p:nvGraphicFramePr>
         <p:xfrm>
           <a:off x="365760" y="4496816"/>
-          <a:ext cx="8412479" cy="959103"/>
+          <a:ext cx="8412479" cy="349504"/>
         </p:xfrm>
         <a:graphic>
           <a:graphicData uri="http://schemas.openxmlformats.org/drawingml/2006/table">
@@ -15618,7 +15629,7 @@
                 <a:gridCol w="2271369"/>
                 <a:gridCol w="6141110"/>
               </a:tblGrid>
-              <a:tr h="959103">
+              <a:tr h="349504">
                 <a:tc>
                   <a:txBody>
                     <a:bodyPr wrap="none"/>
@@ -15669,64 +15680,7 @@
                         </a:defRPr>
                       </a:pPr>
                       <a:r>
-                        <a:t>Saved transcript excerpt reused for display (4,000 characters); the full original</a:t>
-                      </a:r>
-                    </a:p>
-                    <a:p>
-                      <a:pPr>
-                        <a:lnSpc>
-                          <a:spcPts val="1600"/>
-                        </a:lnSpc>
-                        <a:spcAft>
-                          <a:spcPts val="0"/>
-                        </a:spcAft>
-                        <a:defRPr sz="1200" b="0">
-                          <a:solidFill>
-                            <a:srgbClr val="21243A"/>
-                          </a:solidFill>
-                          <a:latin typeface="Arial"/>
-                        </a:defRPr>
-                      </a:pPr>
-                      <a:r>
-                        <a:t>transcript is not retained in the saved report. The three model replies were</a:t>
-                      </a:r>
-                    </a:p>
-                    <a:p>
-                      <a:pPr>
-                        <a:lnSpc>
-                          <a:spcPts val="1600"/>
-                        </a:lnSpc>
-                        <a:spcAft>
-                          <a:spcPts val="0"/>
-                        </a:spcAft>
-                        <a:defRPr sz="1200" b="0">
-                          <a:solidFill>
-                            <a:srgbClr val="21243A"/>
-                          </a:solidFill>
-                          <a:latin typeface="Arial"/>
-                        </a:defRPr>
-                      </a:pPr>
-                      <a:r>
-                        <a:t>acquired in the original transcript run, not generated from this excerpt. No new</a:t>
-                      </a:r>
-                    </a:p>
-                    <a:p>
-                      <a:pPr>
-                        <a:lnSpc>
-                          <a:spcPts val="1600"/>
-                        </a:lnSpc>
-                        <a:spcAft>
-                          <a:spcPts val="0"/>
-                        </a:spcAft>
-                        <a:defRPr sz="1200" b="0">
-                          <a:solidFill>
-                            <a:srgbClr val="21243A"/>
-                          </a:solidFill>
-                          <a:latin typeface="Arial"/>
-                        </a:defRPr>
-                      </a:pPr>
-                      <a:r>
-                        <a:t>transcription or provider request.</a:t>
+                        <a:t>Transcoded to 5737 KB mono 16 kHz (≤1800s).</a:t>
                       </a:r>
                     </a:p>
                   </a:txBody>
@@ -15750,8 +15704,8 @@
           <p:nvPr/>
         </p:nvGraphicFramePr>
         <p:xfrm>
-          <a:off x="365760" y="5455920"/>
-          <a:ext cx="8412479" cy="552704"/>
+          <a:off x="365760" y="4846320"/>
+          <a:ext cx="8412479" cy="349504"/>
         </p:xfrm>
         <a:graphic>
           <a:graphicData uri="http://schemas.openxmlformats.org/drawingml/2006/table">
@@ -15763,7 +15717,7 @@
                 <a:gridCol w="2271369"/>
                 <a:gridCol w="6141110"/>
               </a:tblGrid>
-              <a:tr h="552704">
+              <a:tr h="349504">
                 <a:tc>
                   <a:txBody>
                     <a:bodyPr wrap="none"/>
@@ -15814,6 +15768,94 @@
                         </a:defRPr>
                       </a:pPr>
                       <a:r>
+                        <a:t>Transcribed with Gemini.</a:t>
+                      </a:r>
+                    </a:p>
+                  </a:txBody>
+                  <a:tcPr marL="82296" marR="82296" marT="64008" marB="64008">
+                    <a:solidFill>
+                      <a:srgbClr val="FFFFFF"/>
+                    </a:solidFill>
+                  </a:tcPr>
+                </a:tc>
+              </a:tr>
+            </a:tbl>
+          </a:graphicData>
+        </a:graphic>
+      </p:graphicFrame>
+      <p:graphicFrame>
+        <p:nvGraphicFramePr>
+          <p:cNvPr id="17" name="Table 16"/>
+          <p:cNvGraphicFramePr>
+            <a:graphicFrameLocks noGrp="1"/>
+          </p:cNvGraphicFramePr>
+          <p:nvPr/>
+        </p:nvGraphicFramePr>
+        <p:xfrm>
+          <a:off x="365760" y="5195824"/>
+          <a:ext cx="8412479" cy="755904"/>
+        </p:xfrm>
+        <a:graphic>
+          <a:graphicData uri="http://schemas.openxmlformats.org/drawingml/2006/table">
+            <a:tbl>
+              <a:tblPr firstRow="1" bandRow="1">
+                <a:tableStyleId>{5C22544A-7EE6-4342-B048-85BDC9FD1C3A}</a:tableStyleId>
+              </a:tblPr>
+              <a:tblGrid>
+                <a:gridCol w="2271369"/>
+                <a:gridCol w="6141110"/>
+              </a:tblGrid>
+              <a:tr h="755904">
+                <a:tc>
+                  <a:txBody>
+                    <a:bodyPr wrap="none"/>
+                    <a:lstStyle/>
+                    <a:p>
+                      <a:pPr>
+                        <a:lnSpc>
+                          <a:spcPts val="1600"/>
+                        </a:lnSpc>
+                        <a:spcAft>
+                          <a:spcPts val="0"/>
+                        </a:spcAft>
+                        <a:defRPr sz="1200" b="0">
+                          <a:solidFill>
+                            <a:srgbClr val="21243A"/>
+                          </a:solidFill>
+                          <a:latin typeface="Arial"/>
+                        </a:defRPr>
+                      </a:pPr>
+                      <a:r>
+                        <a:t>Ingestion note 3</a:t>
+                      </a:r>
+                    </a:p>
+                  </a:txBody>
+                  <a:tcPr marL="82296" marR="82296" marT="64008" marB="64008">
+                    <a:solidFill>
+                      <a:srgbClr val="F1F7F7"/>
+                    </a:solidFill>
+                  </a:tcPr>
+                </a:tc>
+                <a:tc>
+                  <a:txBody>
+                    <a:bodyPr wrap="none"/>
+                    <a:lstStyle/>
+                    <a:p>
+                      <a:pPr>
+                        <a:lnSpc>
+                          <a:spcPts val="1600"/>
+                        </a:lnSpc>
+                        <a:spcAft>
+                          <a:spcPts val="0"/>
+                        </a:spcAft>
+                        <a:defRPr sz="1200" b="0">
+                          <a:solidFill>
+                            <a:srgbClr val="21243A"/>
+                          </a:solidFill>
+                          <a:latin typeface="Arial"/>
+                        </a:defRPr>
+                      </a:pPr>
+                      <a:r>
                         <a:t>Standalone-audio content assessment covers the transcript. AI-origin detection</a:t>
                       </a:r>
                     </a:p>
@@ -15833,13 +15875,32 @@
                         </a:defRPr>
                       </a:pPr>
                       <a:r>
-                        <a:t>from sound is outside this assessment. Original-file C2PA was checked locally</a:t>
-                      </a:r>
-                    </a:p>
-                  </a:txBody>
-                  <a:tcPr marL="82296" marR="82296" marT="64008" marB="64008">
-                    <a:solidFill>
-                      <a:srgbClr val="FFFFFF"/>
+                        <a:t>from sound is outside this assessment. Original-file C2PA was checked before</a:t>
+                      </a:r>
+                    </a:p>
+                    <a:p>
+                      <a:pPr>
+                        <a:lnSpc>
+                          <a:spcPts val="1600"/>
+                        </a:lnSpc>
+                        <a:spcAft>
+                          <a:spcPts val="0"/>
+                        </a:spcAft>
+                        <a:defRPr sz="1200" b="0">
+                          <a:solidFill>
+                            <a:srgbClr val="21243A"/>
+                          </a:solidFill>
+                          <a:latin typeface="Arial"/>
+                        </a:defRPr>
+                      </a:pPr>
+                      <a:r>
+                        <a:t>transcription and is reported separately.</a:t>
+                      </a:r>
+                    </a:p>
+                  </a:txBody>
+                  <a:tcPr marL="82296" marR="82296" marT="64008" marB="64008">
+                    <a:solidFill>
+                      <a:srgbClr val="F1F7F7"/>
                     </a:solidFill>
                   </a:tcPr>
                 </a:tc>
@@ -16132,7 +16193,7 @@
         </p:nvGraphicFramePr>
         <p:xfrm>
           <a:off x="365760" y="1700784"/>
-          <a:ext cx="8412479" cy="349504"/>
+          <a:ext cx="8412479" cy="552704"/>
         </p:xfrm>
         <a:graphic>
           <a:graphicData uri="http://schemas.openxmlformats.org/drawingml/2006/table">
@@ -16144,28 +16205,28 @@
                 <a:gridCol w="2271369"/>
                 <a:gridCol w="6141110"/>
               </a:tblGrid>
-              <a:tr h="349504">
-                <a:tc>
-                  <a:txBody>
-                    <a:bodyPr wrap="none"/>
-                    <a:lstStyle/>
-                    <a:p>
-                      <a:pPr>
-                        <a:lnSpc>
-                          <a:spcPts val="1600"/>
-                        </a:lnSpc>
-                        <a:spcAft>
-                          <a:spcPts val="0"/>
-                        </a:spcAft>
-                        <a:defRPr sz="1200" b="0">
-                          <a:solidFill>
-                            <a:srgbClr val="21243A"/>
-                          </a:solidFill>
-                          <a:latin typeface="Arial"/>
-                        </a:defRPr>
-                      </a:pPr>
-                      <a:r>
-                        <a:t>Continued</a:t>
+              <a:tr h="552704">
+                <a:tc>
+                  <a:txBody>
+                    <a:bodyPr wrap="none"/>
+                    <a:lstStyle/>
+                    <a:p>
+                      <a:pPr>
+                        <a:lnSpc>
+                          <a:spcPts val="1600"/>
+                        </a:lnSpc>
+                        <a:spcAft>
+                          <a:spcPts val="0"/>
+                        </a:spcAft>
+                        <a:defRPr sz="1200" b="0">
+                          <a:solidFill>
+                            <a:srgbClr val="21243A"/>
+                          </a:solidFill>
+                          <a:latin typeface="Arial"/>
+                        </a:defRPr>
+                      </a:pPr>
+                      <a:r>
+                        <a:t>Ingestion note 4</a:t>
                       </a:r>
                     </a:p>
                   </a:txBody>
@@ -16195,7 +16256,26 @@
                         </a:defRPr>
                       </a:pPr>
                       <a:r>
-                        <a:t>while assembling this saved-results copy and is reported separately.</a:t>
+                        <a:t>Audio tracks inspected locally. Soundtrack uploads require a separate optional</a:t>
+                      </a:r>
+                    </a:p>
+                    <a:p>
+                      <a:pPr>
+                        <a:lnSpc>
+                          <a:spcPts val="1600"/>
+                        </a:lnSpc>
+                        <a:spcAft>
+                          <a:spcPts val="0"/>
+                        </a:spcAft>
+                        <a:defRPr sz="1200" b="0">
+                          <a:solidFill>
+                            <a:srgbClr val="21243A"/>
+                          </a:solidFill>
+                          <a:latin typeface="Arial"/>
+                        </a:defRPr>
+                      </a:pPr>
+                      <a:r>
+                        <a:t>check; AI-origin detection from sound is outside this workflow.</a:t>
                       </a:r>
                     </a:p>
                   </a:txBody>
@@ -16219,7 +16299,7 @@
           <p:nvPr/>
         </p:nvGraphicFramePr>
         <p:xfrm>
-          <a:off x="365760" y="2050288"/>
+          <a:off x="365760" y="2253488"/>
           <a:ext cx="8412479" cy="552704"/>
         </p:xfrm>
         <a:graphic>
@@ -16253,7 +16333,7 @@
                         </a:defRPr>
                       </a:pPr>
                       <a:r>
-                        <a:t>Ingestion note 3</a:t>
+                        <a:t>Ingestion note 5</a:t>
                       </a:r>
                     </a:p>
                   </a:txBody>
@@ -16283,26 +16363,26 @@
                         </a:defRPr>
                       </a:pPr>
                       <a:r>
-                        <a:t>Audio tracks inspected locally. Soundtrack uploads require a separate optional</a:t>
-                      </a:r>
-                    </a:p>
-                    <a:p>
-                      <a:pPr>
-                        <a:lnSpc>
-                          <a:spcPts val="1600"/>
-                        </a:lnSpc>
-                        <a:spcAft>
-                          <a:spcPts val="0"/>
-                        </a:spcAft>
-                        <a:defRPr sz="1200" b="0">
-                          <a:solidFill>
-                            <a:srgbClr val="21243A"/>
-                          </a:solidFill>
-                          <a:latin typeface="Arial"/>
-                        </a:defRPr>
-                      </a:pPr>
-                      <a:r>
-                        <a:t>check; AI-origin detection from sound is outside this workflow.</a:t>
+                        <a:t>Fresh provider replies acquired for eleven-examples-refresh-20260926-r1; report</a:t>
+                      </a:r>
+                    </a:p>
+                    <a:p>
+                      <a:pPr>
+                        <a:lnSpc>
+                          <a:spcPts val="1600"/>
+                        </a:lnSpc>
+                        <a:spcAft>
+                          <a:spcPts val="0"/>
+                        </a:spcAft>
+                        <a:defRPr sz="1200" b="0">
+                          <a:solidFill>
+                            <a:srgbClr val="21243A"/>
+                          </a:solidFill>
+                          <a:latin typeface="Arial"/>
+                        </a:defRPr>
+                      </a:pPr>
+                      <a:r>
+                        <a:t>assembled locally from the saved responses without further API calls.</a:t>
                       </a:r>
                     </a:p>
                   </a:txBody>
@@ -16326,8 +16406,8 @@
           <p:nvPr/>
         </p:nvGraphicFramePr>
         <p:xfrm>
-          <a:off x="365760" y="2602992"/>
-          <a:ext cx="8412479" cy="1365503"/>
+          <a:off x="365760" y="2806192"/>
+          <a:ext cx="8412479" cy="755904"/>
         </p:xfrm>
         <a:graphic>
           <a:graphicData uri="http://schemas.openxmlformats.org/drawingml/2006/table">
@@ -16339,28 +16419,28 @@
                 <a:gridCol w="2271369"/>
                 <a:gridCol w="6141110"/>
               </a:tblGrid>
-              <a:tr h="1365503">
-                <a:tc>
-                  <a:txBody>
-                    <a:bodyPr wrap="none"/>
-                    <a:lstStyle/>
-                    <a:p>
-                      <a:pPr>
-                        <a:lnSpc>
-                          <a:spcPts val="1600"/>
-                        </a:lnSpc>
-                        <a:spcAft>
-                          <a:spcPts val="0"/>
-                        </a:spcAft>
-                        <a:defRPr sz="1200" b="0">
-                          <a:solidFill>
-                            <a:srgbClr val="21243A"/>
-                          </a:solidFill>
-                          <a:latin typeface="Arial"/>
-                        </a:defRPr>
-                      </a:pPr>
-                      <a:r>
-                        <a:t>Ingestion note 4</a:t>
+              <a:tr h="755904">
+                <a:tc>
+                  <a:txBody>
+                    <a:bodyPr wrap="none"/>
+                    <a:lstStyle/>
+                    <a:p>
+                      <a:pPr>
+                        <a:lnSpc>
+                          <a:spcPts val="1600"/>
+                        </a:lnSpc>
+                        <a:spcAft>
+                          <a:spcPts val="0"/>
+                        </a:spcAft>
+                        <a:defRPr sz="1200" b="0">
+                          <a:solidFill>
+                            <a:srgbClr val="21243A"/>
+                          </a:solidFill>
+                          <a:latin typeface="Arial"/>
+                        </a:defRPr>
+                      </a:pPr>
+                      <a:r>
+                        <a:t>Ingestion note 6</a:t>
                       </a:r>
                     </a:p>
                   </a:txBody>
@@ -16390,108 +16470,177 @@
                         </a:defRPr>
                       </a:pPr>
                       <a:r>
-                        <a:t>Reassembled locally from saved transcript-model replies acquired at</a:t>
-                      </a:r>
-                    </a:p>
-                    <a:p>
-                      <a:pPr>
-                        <a:lnSpc>
-                          <a:spcPts val="1600"/>
-                        </a:lnSpc>
-                        <a:spcAft>
-                          <a:spcPts val="0"/>
-                        </a:spcAft>
-                        <a:defRPr sz="1200" b="0">
-                          <a:solidFill>
-                            <a:srgbClr val="21243A"/>
-                          </a:solidFill>
-                          <a:latin typeface="Arial"/>
-                        </a:defRPr>
-                      </a:pPr>
-                      <a:r>
-                        <a:t>2026-09-24T15:10:51+00:00 under method publication-repair-2026-09-24.1.</a:t>
-                      </a:r>
-                    </a:p>
-                    <a:p>
-                      <a:pPr>
-                        <a:lnSpc>
-                          <a:spcPts val="1600"/>
-                        </a:lnSpc>
-                        <a:spcAft>
-                          <a:spcPts val="0"/>
-                        </a:spcAft>
-                        <a:defRPr sz="1200" b="0">
-                          <a:solidFill>
-                            <a:srgbClr val="21243A"/>
-                          </a:solidFill>
-                          <a:latin typeface="Arial"/>
-                        </a:defRPr>
-                      </a:pPr>
-                      <a:r>
-                        <a:t>Original report d5e5a924-6232-4fb4-a4ef-d991655062cc is preserved. The original</a:t>
-                      </a:r>
-                    </a:p>
-                    <a:p>
-                      <a:pPr>
-                        <a:lnSpc>
-                          <a:spcPts val="1600"/>
-                        </a:lnSpc>
-                        <a:spcAft>
-                          <a:spcPts val="0"/>
-                        </a:spcAft>
-                        <a:defRPr sz="1200" b="0">
-                          <a:solidFill>
-                            <a:srgbClr val="21243A"/>
-                          </a:solidFill>
-                          <a:latin typeface="Arial"/>
-                        </a:defRPr>
-                      </a:pPr>
-                      <a:r>
-                        <a:t>run used a source-labelled filename. Local audio-track and original-file credential</a:t>
-                      </a:r>
-                    </a:p>
-                    <a:p>
-                      <a:pPr>
-                        <a:lnSpc>
-                          <a:spcPts val="1600"/>
-                        </a:lnSpc>
-                        <a:spcAft>
-                          <a:spcPts val="0"/>
-                        </a:spcAft>
-                        <a:defRPr sz="1200" b="0">
-                          <a:solidFill>
-                            <a:srgbClr val="21243A"/>
-                          </a:solidFill>
-                          <a:latin typeface="Arial"/>
-                        </a:defRPr>
-                      </a:pPr>
-                      <a:r>
-                        <a:t>checks were repeated; model replies were not rerun. Original run notes:</a:t>
-                      </a:r>
-                    </a:p>
-                    <a:p>
-                      <a:pPr>
-                        <a:lnSpc>
-                          <a:spcPts val="1600"/>
-                        </a:lnSpc>
-                        <a:spcAft>
-                          <a:spcPts val="0"/>
-                        </a:spcAft>
-                        <a:defRPr sz="1200" b="0">
-                          <a:solidFill>
-                            <a:srgbClr val="21243A"/>
-                          </a:solidFill>
-                          <a:latin typeface="Arial"/>
-                        </a:defRPr>
-                      </a:pPr>
-                      <a:r>
-                        <a:t>Transcoded to 5737 KB mono 16 kHz (≤1800s).; Transcribed with Gemini.</a:t>
+                        <a:t>Transcript analysis used the first 12000 characters of a fresh 25985-character</a:t>
+                      </a:r>
+                    </a:p>
+                    <a:p>
+                      <a:pPr>
+                        <a:lnSpc>
+                          <a:spcPts val="1600"/>
+                        </a:lnSpc>
+                        <a:spcAft>
+                          <a:spcPts val="0"/>
+                        </a:spcAft>
+                        <a:defRPr sz="1200" b="0">
+                          <a:solidFill>
+                            <a:srgbClr val="21243A"/>
+                          </a:solidFill>
+                          <a:latin typeface="Arial"/>
+                        </a:defRPr>
+                      </a:pPr>
+                      <a:r>
+                        <a:t>transcription; this report retains its first 4000 characters. Sound-origin detection is</a:t>
+                      </a:r>
+                    </a:p>
+                    <a:p>
+                      <a:pPr>
+                        <a:lnSpc>
+                          <a:spcPts val="1600"/>
+                        </a:lnSpc>
+                        <a:spcAft>
+                          <a:spcPts val="0"/>
+                        </a:spcAft>
+                        <a:defRPr sz="1200" b="0">
+                          <a:solidFill>
+                            <a:srgbClr val="21243A"/>
+                          </a:solidFill>
+                          <a:latin typeface="Arial"/>
+                        </a:defRPr>
+                      </a:pPr>
+                      <a:r>
+                        <a:t>outside this check.</a:t>
                       </a:r>
                     </a:p>
                   </a:txBody>
                   <a:tcPr marL="82296" marR="82296" marT="64008" marB="64008">
                     <a:solidFill>
                       <a:srgbClr val="FFFFFF"/>
+                    </a:solidFill>
+                  </a:tcPr>
+                </a:tc>
+              </a:tr>
+            </a:tbl>
+          </a:graphicData>
+        </a:graphic>
+      </p:graphicFrame>
+      <p:graphicFrame>
+        <p:nvGraphicFramePr>
+          <p:cNvPr id="10" name="Table 9"/>
+          <p:cNvGraphicFramePr>
+            <a:graphicFrameLocks noGrp="1"/>
+          </p:cNvGraphicFramePr>
+          <p:nvPr/>
+        </p:nvGraphicFramePr>
+        <p:xfrm>
+          <a:off x="365760" y="3562096"/>
+          <a:ext cx="8412479" cy="755904"/>
+        </p:xfrm>
+        <a:graphic>
+          <a:graphicData uri="http://schemas.openxmlformats.org/drawingml/2006/table">
+            <a:tbl>
+              <a:tblPr firstRow="1" bandRow="1">
+                <a:tableStyleId>{5C22544A-7EE6-4342-B048-85BDC9FD1C3A}</a:tableStyleId>
+              </a:tblPr>
+              <a:tblGrid>
+                <a:gridCol w="2271369"/>
+                <a:gridCol w="6141110"/>
+              </a:tblGrid>
+              <a:tr h="755904">
+                <a:tc>
+                  <a:txBody>
+                    <a:bodyPr wrap="none"/>
+                    <a:lstStyle/>
+                    <a:p>
+                      <a:pPr>
+                        <a:lnSpc>
+                          <a:spcPts val="1600"/>
+                        </a:lnSpc>
+                        <a:spcAft>
+                          <a:spcPts val="0"/>
+                        </a:spcAft>
+                        <a:defRPr sz="1200" b="0">
+                          <a:solidFill>
+                            <a:srgbClr val="21243A"/>
+                          </a:solidFill>
+                          <a:latin typeface="Arial"/>
+                        </a:defRPr>
+                      </a:pPr>
+                      <a:r>
+                        <a:t>Ingestion note 7</a:t>
+                      </a:r>
+                    </a:p>
+                  </a:txBody>
+                  <a:tcPr marL="82296" marR="82296" marT="64008" marB="64008">
+                    <a:solidFill>
+                      <a:srgbClr val="F1F7F7"/>
+                    </a:solidFill>
+                  </a:tcPr>
+                </a:tc>
+                <a:tc>
+                  <a:txBody>
+                    <a:bodyPr wrap="none"/>
+                    <a:lstStyle/>
+                    <a:p>
+                      <a:pPr>
+                        <a:lnSpc>
+                          <a:spcPts val="1600"/>
+                        </a:lnSpc>
+                        <a:spcAft>
+                          <a:spcPts val="0"/>
+                        </a:spcAft>
+                        <a:defRPr sz="1200" b="0">
+                          <a:solidFill>
+                            <a:srgbClr val="21243A"/>
+                          </a:solidFill>
+                          <a:latin typeface="Arial"/>
+                        </a:defRPr>
+                      </a:pPr>
+                      <a:r>
+                        <a:t>Provider latency values are restored from the acquisition receipts (maximum</a:t>
+                      </a:r>
+                    </a:p>
+                    <a:p>
+                      <a:pPr>
+                        <a:lnSpc>
+                          <a:spcPts val="1600"/>
+                        </a:lnSpc>
+                        <a:spcAft>
+                          <a:spcPts val="0"/>
+                        </a:spcAft>
+                        <a:defRPr sz="1200" b="0">
+                          <a:solidFill>
+                            <a:srgbClr val="21243A"/>
+                          </a:solidFill>
+                          <a:latin typeface="Arial"/>
+                        </a:defRPr>
+                      </a:pPr>
+                      <a:r>
+                        <a:t>sampled-frame latency per provider); raw replies and assessment results are</a:t>
+                      </a:r>
+                    </a:p>
+                    <a:p>
+                      <a:pPr>
+                        <a:lnSpc>
+                          <a:spcPts val="1600"/>
+                        </a:lnSpc>
+                        <a:spcAft>
+                          <a:spcPts val="0"/>
+                        </a:spcAft>
+                        <a:defRPr sz="1200" b="0">
+                          <a:solidFill>
+                            <a:srgbClr val="21243A"/>
+                          </a:solidFill>
+                          <a:latin typeface="Arial"/>
+                        </a:defRPr>
+                      </a:pPr>
+                      <a:r>
+                        <a:t>unchanged by this bookkeeping step.</a:t>
+                      </a:r>
+                    </a:p>
+                  </a:txBody>
+                  <a:tcPr marL="82296" marR="82296" marT="64008" marB="64008">
+                    <a:solidFill>
+                      <a:srgbClr val="F1F7F7"/>
                     </a:solidFill>
                   </a:tcPr>
                 </a:tc>
@@ -16971,7 +17120,7 @@
                         </a:defRPr>
                       </a:pPr>
                       <a:r>
-                        <a:t>80/100</a:t>
+                        <a:t>78/100</a:t>
                       </a:r>
                     </a:p>
                   </a:txBody>
@@ -17121,7 +17270,7 @@
                         </a:defRPr>
                       </a:pPr>
                       <a:r>
-                        <a:t>88/100</a:t>
+                        <a:t>90/100</a:t>
                       </a:r>
                     </a:p>
                   </a:txBody>
@@ -17271,7 +17420,7 @@
                         </a:defRPr>
                       </a:pPr>
                       <a:r>
-                        <a:t>85/100</a:t>
+                        <a:t>95/100</a:t>
                       </a:r>
                     </a:p>
                   </a:txBody>
@@ -18398,7 +18547,7 @@
         </p:nvGraphicFramePr>
         <p:xfrm>
           <a:off x="365760" y="3797808"/>
-          <a:ext cx="8412479" cy="1365503"/>
+          <a:ext cx="8412479" cy="1162304"/>
         </p:xfrm>
         <a:graphic>
           <a:graphicData uri="http://schemas.openxmlformats.org/drawingml/2006/table">
@@ -18410,7 +18559,7 @@
                 <a:gridCol w="2271369"/>
                 <a:gridCol w="6141110"/>
               </a:tblGrid>
-              <a:tr h="1365503">
+              <a:tr h="1162304">
                 <a:tc>
                   <a:txBody>
                     <a:bodyPr wrap="none"/>
@@ -18461,102 +18610,83 @@
                         </a:defRPr>
                       </a:pPr>
                       <a:r>
-                        <a:t>Style strongly resembles AI-generated two-host podcast audio (e.g. NotebookLM</a:t>
-                      </a:r>
-                    </a:p>
-                    <a:p>
-                      <a:pPr>
-                        <a:lnSpc>
-                          <a:spcPts val="1600"/>
-                        </a:lnSpc>
-                        <a:spcAft>
-                          <a:spcPts val="0"/>
-                        </a:spcAft>
-                        <a:defRPr sz="1200" b="0">
-                          <a:solidFill>
-                            <a:srgbClr val="21243A"/>
-                          </a:solidFill>
-                          <a:latin typeface="Arial"/>
-                        </a:defRPr>
-                      </a:pPr>
-                      <a:r>
-                        <a:t>'deep dive' format): stock phrases like 'Okay, let's unpack this', 'If we connect this</a:t>
-                      </a:r>
-                    </a:p>
-                    <a:p>
-                      <a:pPr>
-                        <a:lnSpc>
-                          <a:spcPts val="1600"/>
-                        </a:lnSpc>
-                        <a:spcAft>
-                          <a:spcPts val="0"/>
-                        </a:spcAft>
-                        <a:defRPr sz="1200" b="0">
-                          <a:solidFill>
-                            <a:srgbClr val="21243A"/>
-                          </a:solidFill>
-                          <a:latin typeface="Arial"/>
-                        </a:defRPr>
-                      </a:pPr>
-                      <a:r>
-                        <a:t>to the bigger picture', 'the mission for our deep dive today', 'a quick heads-up to</a:t>
-                      </a:r>
-                    </a:p>
-                    <a:p>
-                      <a:pPr>
-                        <a:lnSpc>
-                          <a:spcPts val="1600"/>
-                        </a:lnSpc>
-                        <a:spcAft>
-                          <a:spcPts val="0"/>
-                        </a:spcAft>
-                        <a:defRPr sz="1200" b="0">
-                          <a:solidFill>
-                            <a:srgbClr val="21243A"/>
-                          </a:solidFill>
-                          <a:latin typeface="Arial"/>
-                        </a:defRPr>
-                      </a:pPr>
-                      <a:r>
-                        <a:t>you, the listener', a formulaic impartiality disclaimer, constant affirmations</a:t>
-                      </a:r>
-                    </a:p>
-                    <a:p>
-                      <a:pPr>
-                        <a:lnSpc>
-                          <a:spcPts val="1600"/>
-                        </a:lnSpc>
-                        <a:spcAft>
-                          <a:spcPts val="0"/>
-                        </a:spcAft>
-                        <a:defRPr sz="1200" b="0">
-                          <a:solidFill>
-                            <a:srgbClr val="21243A"/>
-                          </a:solidFill>
-                          <a:latin typeface="Arial"/>
-                        </a:defRPr>
-                      </a:pPr>
-                      <a:r>
-                        <a:t>('Exactly', 'Perfectly said'), vivid metaphors ('real-time MRI of society'), and inserted</a:t>
-                      </a:r>
-                    </a:p>
-                    <a:p>
-                      <a:pPr>
-                        <a:lnSpc>
-                          <a:spcPts val="1600"/>
-                        </a:lnSpc>
-                        <a:spcAft>
-                          <a:spcPts val="0"/>
-                        </a:spcAft>
-                        <a:defRPr sz="1200" b="0">
-                          <a:solidFill>
-                            <a:srgbClr val="21243A"/>
-                          </a:solidFill>
-                          <a:latin typeface="Arial"/>
-                        </a:defRPr>
-                      </a:pPr>
-                      <a:r>
-                        <a:t>fillers, all suggesting a likely synthetic origin.</a:t>
+                        <a:t>Style closely matches AI-generated two-host 'deep dive' audio overviews (e.g.</a:t>
+                      </a:r>
+                    </a:p>
+                    <a:p>
+                      <a:pPr>
+                        <a:lnSpc>
+                          <a:spcPts val="1600"/>
+                        </a:lnSpc>
+                        <a:spcAft>
+                          <a:spcPts val="0"/>
+                        </a:spcAft>
+                        <a:defRPr sz="1200" b="0">
+                          <a:solidFill>
+                            <a:srgbClr val="21243A"/>
+                          </a:solidFill>
+                          <a:latin typeface="Arial"/>
+                        </a:defRPr>
+                      </a:pPr>
+                      <a:r>
+                        <a:t>NotebookLM): stock openers ('Imagine holding...', 'Okay, let's unpack this', 'If we</a:t>
+                      </a:r>
+                    </a:p>
+                    <a:p>
+                      <a:pPr>
+                        <a:lnSpc>
+                          <a:spcPts val="1600"/>
+                        </a:lnSpc>
+                        <a:spcAft>
+                          <a:spcPts val="0"/>
+                        </a:spcAft>
+                        <a:defRPr sz="1200" b="0">
+                          <a:solidFill>
+                            <a:srgbClr val="21243A"/>
+                          </a:solidFill>
+                          <a:latin typeface="Arial"/>
+                        </a:defRPr>
+                      </a:pPr>
+                      <a:r>
+                        <a:t>connect this to the bigger picture'), constant affirmations ('Exactly', 'Perfectly</a:t>
+                      </a:r>
+                    </a:p>
+                    <a:p>
+                      <a:pPr>
+                        <a:lnSpc>
+                          <a:spcPts val="1600"/>
+                        </a:lnSpc>
+                        <a:spcAft>
+                          <a:spcPts val="0"/>
+                        </a:spcAft>
+                        <a:defRPr sz="1200" b="0">
+                          <a:solidFill>
+                            <a:srgbClr val="21243A"/>
+                          </a:solidFill>
+                          <a:latin typeface="Arial"/>
+                        </a:defRPr>
+                      </a:pPr>
+                      <a:r>
+                        <a:t>said'), scripted neutrality disclaimer and a staged host challenge, suggesting likely</a:t>
+                      </a:r>
+                    </a:p>
+                    <a:p>
+                      <a:pPr>
+                        <a:lnSpc>
+                          <a:spcPts val="1600"/>
+                        </a:lnSpc>
+                        <a:spcAft>
+                          <a:spcPts val="0"/>
+                        </a:spcAft>
+                        <a:defRPr sz="1200" b="0">
+                          <a:solidFill>
+                            <a:srgbClr val="21243A"/>
+                          </a:solidFill>
+                          <a:latin typeface="Arial"/>
+                        </a:defRPr>
+                      </a:pPr>
+                      <a:r>
+                        <a:t>synthetic origin.</a:t>
                       </a:r>
                     </a:p>
                   </a:txBody>
@@ -18580,7 +18710,7 @@
           <p:nvPr/>
         </p:nvGraphicFramePr>
         <p:xfrm>
-          <a:off x="365760" y="5163312"/>
+          <a:off x="365760" y="4960112"/>
           <a:ext cx="8412479" cy="755904"/>
         </p:xfrm>
         <a:graphic>
@@ -18644,45 +18774,45 @@
                         </a:defRPr>
                       </a:pPr>
                       <a:r>
-                        <a:t>Synthetic origin framing: Two-host explainer-podcast dialogue summarizing a</a:t>
-                      </a:r>
-                    </a:p>
-                    <a:p>
-                      <a:pPr>
-                        <a:lnSpc>
-                          <a:spcPts val="1600"/>
-                        </a:lnSpc>
-                        <a:spcAft>
-                          <a:spcPts val="0"/>
-                        </a:spcAft>
-                        <a:defRPr sz="1200" b="0">
-                          <a:solidFill>
-                            <a:srgbClr val="21243A"/>
-                          </a:solidFill>
-                          <a:latin typeface="Arial"/>
-                        </a:defRPr>
-                      </a:pPr>
-                      <a:r>
-                        <a:t>peer-reviewed study, with explicit neutrality disclaimer, historical context, and</a:t>
-                      </a:r>
-                    </a:p>
-                    <a:p>
-                      <a:pPr>
-                        <a:lnSpc>
-                          <a:spcPts val="1600"/>
-                        </a:lnSpc>
-                        <a:spcAft>
-                          <a:spcPts val="0"/>
-                        </a:spcAft>
-                        <a:defRPr sz="1200" b="0">
-                          <a:solidFill>
-                            <a:srgbClr val="21243A"/>
-                          </a:solidFill>
-                          <a:latin typeface="Arial"/>
-                        </a:defRPr>
-                      </a:pPr>
-                      <a:r>
-                        <a:t>sociological interpretation of pro-mask discourse.</a:t>
+                        <a:t>Synthetic origin framing: Two-host explainer podcast summarising a</a:t>
+                      </a:r>
+                    </a:p>
+                    <a:p>
+                      <a:pPr>
+                        <a:lnSpc>
+                          <a:spcPts val="1600"/>
+                        </a:lnSpc>
+                        <a:spcAft>
+                          <a:spcPts val="0"/>
+                        </a:spcAft>
+                        <a:defRPr sz="1200" b="0">
+                          <a:solidFill>
+                            <a:srgbClr val="21243A"/>
+                          </a:solidFill>
+                          <a:latin typeface="Arial"/>
+                        </a:defRPr>
+                      </a:pPr>
+                      <a:r>
+                        <a:t>peer-reviewed study, with historical context, a stated neutrality disclaimer and</a:t>
+                      </a:r>
+                    </a:p>
+                    <a:p>
+                      <a:pPr>
+                        <a:lnSpc>
+                          <a:spcPts val="1600"/>
+                        </a:lnSpc>
+                        <a:spcAft>
+                          <a:spcPts val="0"/>
+                        </a:spcAft>
+                        <a:defRPr sz="1200" b="0">
+                          <a:solidFill>
+                            <a:srgbClr val="21243A"/>
+                          </a:solidFill>
+                          <a:latin typeface="Arial"/>
+                        </a:defRPr>
+                      </a:pPr>
+                      <a:r>
+                        <a:t>interpretive commentary on polarisation</a:t>
                       </a:r>
                     </a:p>
                   </a:txBody>
@@ -19132,7 +19262,7 @@
                         </a:defRPr>
                       </a:pPr>
                       <a:r>
-                        <a:t>Study by Sam Martin and Samantha Vanderslott, Oxford Vaccine Group, published</a:t>
+                        <a:t>Study by Sam Martin and Samantha Vanderslott (Oxford Vaccine Group) published</a:t>
                       </a:r>
                     </a:p>
                     <a:p>
@@ -19239,7 +19369,7 @@
                         </a:defRPr>
                       </a:pPr>
                       <a:r>
-                        <a:t>Analyzed 7.89 million English-language US/UK tweets, June 2020 to June 2021</a:t>
+                        <a:t>Analysed 7.89 million English-language US/UK tweets, June 2020 to June 2021</a:t>
                       </a:r>
                     </a:p>
                   </a:txBody>
@@ -19264,7 +19394,7 @@
         </p:nvGraphicFramePr>
         <p:xfrm>
           <a:off x="365760" y="2952496"/>
-          <a:ext cx="8412479" cy="552704"/>
+          <a:ext cx="8412479" cy="349504"/>
         </p:xfrm>
         <a:graphic>
           <a:graphicData uri="http://schemas.openxmlformats.org/drawingml/2006/table">
@@ -19276,7 +19406,7 @@
                 <a:gridCol w="2271369"/>
                 <a:gridCol w="6141110"/>
               </a:tblGrid>
-              <a:tr h="552704">
+              <a:tr h="349504">
                 <a:tc>
                   <a:txBody>
                     <a:bodyPr wrap="none"/>
@@ -19327,26 +19457,7 @@
                         </a:defRPr>
                       </a:pPr>
                       <a:r>
-                        <a:t>Used Meltwater and InfraNodus software for data collection and text network</a:t>
-                      </a:r>
-                    </a:p>
-                    <a:p>
-                      <a:pPr>
-                        <a:lnSpc>
-                          <a:spcPts val="1600"/>
-                        </a:lnSpc>
-                        <a:spcAft>
-                          <a:spcPts val="0"/>
-                        </a:spcAft>
-                        <a:defRPr sz="1200" b="0">
-                          <a:solidFill>
-                            <a:srgbClr val="21243A"/>
-                          </a:solidFill>
-                          <a:latin typeface="Arial"/>
-                        </a:defRPr>
-                      </a:pPr>
-                      <a:r>
-                        <a:t>analysis</a:t>
+                        <a:t>Used Meltwater for collection and InfraNodus for text network analysis</a:t>
                       </a:r>
                     </a:p>
                   </a:txBody>
@@ -19370,7 +19481,7 @@
           <p:nvPr/>
         </p:nvGraphicFramePr>
         <p:xfrm>
-          <a:off x="365760" y="3505200"/>
+          <a:off x="365760" y="3302000"/>
           <a:ext cx="8412479" cy="349504"/>
         </p:xfrm>
         <a:graphic>
@@ -19434,7 +19545,7 @@
                         </a:defRPr>
                       </a:pPr>
                       <a:r>
-                        <a:t>5.91 million tweets on masks versus 1.98 million on vaccines</a:t>
+                        <a:t>5.91 million tweets on masks, 1.98 million on vaccines</a:t>
                       </a:r>
                     </a:p>
                   </a:txBody>
@@ -19458,7 +19569,7 @@
           <p:nvPr/>
         </p:nvGraphicFramePr>
         <p:xfrm>
-          <a:off x="365760" y="3854704"/>
+          <a:off x="365760" y="3651504"/>
           <a:ext cx="8412479" cy="755904"/>
         </p:xfrm>
         <a:graphic>
@@ -19522,45 +19633,45 @@
                         </a:defRPr>
                       </a:pPr>
                       <a:r>
-                        <a:t>Caveat: Human podcasters can use similar conversational tics and scripted</a:t>
-                      </a:r>
-                    </a:p>
-                    <a:p>
-                      <a:pPr>
-                        <a:lnSpc>
-                          <a:spcPts val="1600"/>
-                        </a:lnSpc>
-                        <a:spcAft>
-                          <a:spcPts val="0"/>
-                        </a:spcAft>
-                        <a:defRPr sz="1200" b="0">
-                          <a:solidFill>
-                            <a:srgbClr val="21243A"/>
-                          </a:solidFill>
-                          <a:latin typeface="Arial"/>
-                        </a:defRPr>
-                      </a:pPr>
-                      <a:r>
-                        <a:t>structure, and the transcription may have added or smoothed fillers. Audio or</a:t>
-                      </a:r>
-                    </a:p>
-                    <a:p>
-                      <a:pPr>
-                        <a:lnSpc>
-                          <a:spcPts val="1600"/>
-                        </a:lnSpc>
-                        <a:spcAft>
-                          <a:spcPts val="0"/>
-                        </a:spcAft>
-                        <a:defRPr sz="1200" b="0">
-                          <a:solidFill>
-                            <a:srgbClr val="21243A"/>
-                          </a:solidFill>
-                          <a:latin typeface="Arial"/>
-                        </a:defRPr>
-                      </a:pPr>
-                      <a:r>
-                        <a:t>provenance data would be needed to confirm origin.</a:t>
+                        <a:t>Caveat: Human podcasters can use similar conventions, and transcription</a:t>
+                      </a:r>
+                    </a:p>
+                    <a:p>
+                      <a:pPr>
+                        <a:lnSpc>
+                          <a:spcPts val="1600"/>
+                        </a:lnSpc>
+                        <a:spcAft>
+                          <a:spcPts val="0"/>
+                        </a:spcAft>
+                        <a:defRPr sz="1200" b="0">
+                          <a:solidFill>
+                            <a:srgbClr val="21243A"/>
+                          </a:solidFill>
+                          <a:latin typeface="Arial"/>
+                        </a:defRPr>
+                      </a:pPr>
+                      <a:r>
+                        <a:t>artefacts may mask or mimic synthetic patterns; source audio and provenance</a:t>
+                      </a:r>
+                    </a:p>
+                    <a:p>
+                      <a:pPr>
+                        <a:lnSpc>
+                          <a:spcPts val="1600"/>
+                        </a:lnSpc>
+                        <a:spcAft>
+                          <a:spcPts val="0"/>
+                        </a:spcAft>
+                        <a:defRPr sz="1200" b="0">
+                          <a:solidFill>
+                            <a:srgbClr val="21243A"/>
+                          </a:solidFill>
+                          <a:latin typeface="Arial"/>
+                        </a:defRPr>
+                      </a:pPr>
+                      <a:r>
+                        <a:t>should be checked.</a:t>
                       </a:r>
                     </a:p>
                   </a:txBody>
@@ -20450,45 +20561,45 @@
                         </a:defRPr>
                       </a:pPr>
                       <a:r>
-                        <a:t>The highly regular question-answer scaffolding, repetitive affirmations, staged</a:t>
-                      </a:r>
-                    </a:p>
-                    <a:p>
-                      <a:pPr>
-                        <a:lnSpc>
-                          <a:spcPts val="1600"/>
-                        </a:lnSpc>
-                        <a:spcAft>
-                          <a:spcPts val="0"/>
-                        </a:spcAft>
-                        <a:defRPr sz="1200" b="0">
-                          <a:solidFill>
-                            <a:srgbClr val="21243A"/>
-                          </a:solidFill>
-                          <a:latin typeface="Arial"/>
-                        </a:defRPr>
-                      </a:pPr>
-                      <a:r>
-                        <a:t>discoveries, and polished explanatory transitions strongly suggest AI-generated</a:t>
-                      </a:r>
-                    </a:p>
-                    <a:p>
-                      <a:pPr>
-                        <a:lnSpc>
-                          <a:spcPts val="1600"/>
-                        </a:lnSpc>
-                        <a:spcAft>
-                          <a:spcPts val="0"/>
-                        </a:spcAft>
-                        <a:defRPr sz="1200" b="0">
-                          <a:solidFill>
-                            <a:srgbClr val="21243A"/>
-                          </a:solidFill>
-                          <a:latin typeface="Arial"/>
-                        </a:defRPr>
-                      </a:pPr>
-                      <a:r>
-                        <a:t>or AI-edited dialogue.</a:t>
+                        <a:t>The highly regular two-host exchanges, repetitive affirmations, scripted</a:t>
+                      </a:r>
+                    </a:p>
+                    <a:p>
+                      <a:pPr>
+                        <a:lnSpc>
+                          <a:spcPts val="1600"/>
+                        </a:lnSpc>
+                        <a:spcAft>
+                          <a:spcPts val="0"/>
+                        </a:spcAft>
+                        <a:defRPr sz="1200" b="0">
+                          <a:solidFill>
+                            <a:srgbClr val="21243A"/>
+                          </a:solidFill>
+                          <a:latin typeface="Arial"/>
+                        </a:defRPr>
+                      </a:pPr>
+                      <a:r>
+                        <a:t>explanatory prompts, and formulaic transitions strongly suggest synthetic</a:t>
+                      </a:r>
+                    </a:p>
+                    <a:p>
+                      <a:pPr>
+                        <a:lnSpc>
+                          <a:spcPts val="1600"/>
+                        </a:lnSpc>
+                        <a:spcAft>
+                          <a:spcPts val="0"/>
+                        </a:spcAft>
+                        <a:defRPr sz="1200" b="0">
+                          <a:solidFill>
+                            <a:srgbClr val="21243A"/>
+                          </a:solidFill>
+                          <a:latin typeface="Arial"/>
+                        </a:defRPr>
+                      </a:pPr>
+                      <a:r>
+                        <a:t>generation or editing.</a:t>
                       </a:r>
                     </a:p>
                   </a:txBody>
@@ -20513,7 +20624,7 @@
         </p:nvGraphicFramePr>
         <p:xfrm>
           <a:off x="365760" y="4553712"/>
-          <a:ext cx="8412479" cy="552704"/>
+          <a:ext cx="8412479" cy="755904"/>
         </p:xfrm>
         <a:graphic>
           <a:graphicData uri="http://schemas.openxmlformats.org/drawingml/2006/table">
@@ -20525,7 +20636,7 @@
                 <a:gridCol w="2271369"/>
                 <a:gridCol w="6141110"/>
               </a:tblGrid>
-              <a:tr h="552704">
+              <a:tr h="755904">
                 <a:tc>
                   <a:txBody>
                     <a:bodyPr wrap="none"/>
@@ -20576,26 +20687,45 @@
                         </a:defRPr>
                       </a:pPr>
                       <a:r>
-                        <a:t>Synthetic origin framing: Conversational research explainer using two-host</a:t>
-                      </a:r>
-                    </a:p>
-                    <a:p>
-                      <a:pPr>
-                        <a:lnSpc>
-                          <a:spcPts val="1600"/>
-                        </a:lnSpc>
-                        <a:spcAft>
-                          <a:spcPts val="0"/>
-                        </a:spcAft>
-                        <a:defRPr sz="1200" b="0">
-                          <a:solidFill>
-                            <a:srgbClr val="21243A"/>
-                          </a:solidFill>
-                          <a:latin typeface="Arial"/>
-                        </a:defRPr>
-                      </a:pPr>
-                      <a:r>
-                        <a:t>banter, historical parallels, vivid analogies, and stated political neutrality.</a:t>
+                        <a:t>Synthetic origin framing: Conversational research explainer using staged</a:t>
+                      </a:r>
+                    </a:p>
+                    <a:p>
+                      <a:pPr>
+                        <a:lnSpc>
+                          <a:spcPts val="1600"/>
+                        </a:lnSpc>
+                        <a:spcAft>
+                          <a:spcPts val="0"/>
+                        </a:spcAft>
+                        <a:defRPr sz="1200" b="0">
+                          <a:solidFill>
+                            <a:srgbClr val="21243A"/>
+                          </a:solidFill>
+                          <a:latin typeface="Arial"/>
+                        </a:defRPr>
+                      </a:pPr>
+                      <a:r>
+                        <a:t>questions, emphatic agreement, historical parallels, and sociological</a:t>
+                      </a:r>
+                    </a:p>
+                    <a:p>
+                      <a:pPr>
+                        <a:lnSpc>
+                          <a:spcPts val="1600"/>
+                        </a:lnSpc>
+                        <a:spcAft>
+                          <a:spcPts val="0"/>
+                        </a:spcAft>
+                        <a:defRPr sz="1200" b="0">
+                          <a:solidFill>
+                            <a:srgbClr val="21243A"/>
+                          </a:solidFill>
+                          <a:latin typeface="Arial"/>
+                        </a:defRPr>
+                      </a:pPr>
+                      <a:r>
+                        <a:t>interpretations.</a:t>
                       </a:r>
                     </a:p>
                   </a:txBody>
@@ -20619,7 +20749,7 @@
           <p:nvPr/>
         </p:nvGraphicFramePr>
         <p:xfrm>
-          <a:off x="365760" y="5106416"/>
+          <a:off x="365760" y="5309616"/>
           <a:ext cx="8412479" cy="349504"/>
         </p:xfrm>
         <a:graphic>
@@ -20690,113 +20820,6 @@
                   <a:tcPr marL="82296" marR="82296" marT="64008" marB="64008">
                     <a:solidFill>
                       <a:srgbClr val="F1F7F7"/>
-                    </a:solidFill>
-                  </a:tcPr>
-                </a:tc>
-              </a:tr>
-            </a:tbl>
-          </a:graphicData>
-        </a:graphic>
-      </p:graphicFrame>
-      <p:graphicFrame>
-        <p:nvGraphicFramePr>
-          <p:cNvPr id="16" name="Table 15"/>
-          <p:cNvGraphicFramePr>
-            <a:graphicFrameLocks noGrp="1"/>
-          </p:cNvGraphicFramePr>
-          <p:nvPr/>
-        </p:nvGraphicFramePr>
-        <p:xfrm>
-          <a:off x="365760" y="5455920"/>
-          <a:ext cx="8412479" cy="552704"/>
-        </p:xfrm>
-        <a:graphic>
-          <a:graphicData uri="http://schemas.openxmlformats.org/drawingml/2006/table">
-            <a:tbl>
-              <a:tblPr firstRow="1" bandRow="1">
-                <a:tableStyleId>{5C22544A-7EE6-4342-B048-85BDC9FD1C3A}</a:tableStyleId>
-              </a:tblPr>
-              <a:tblGrid>
-                <a:gridCol w="2271369"/>
-                <a:gridCol w="6141110"/>
-              </a:tblGrid>
-              <a:tr h="552704">
-                <a:tc>
-                  <a:txBody>
-                    <a:bodyPr wrap="none"/>
-                    <a:lstStyle/>
-                    <a:p>
-                      <a:pPr>
-                        <a:lnSpc>
-                          <a:spcPts val="1600"/>
-                        </a:lnSpc>
-                        <a:spcAft>
-                          <a:spcPts val="0"/>
-                        </a:spcAft>
-                        <a:defRPr sz="1200" b="0">
-                          <a:solidFill>
-                            <a:srgbClr val="21243A"/>
-                          </a:solidFill>
-                          <a:latin typeface="Arial"/>
-                        </a:defRPr>
-                      </a:pPr>
-                      <a:r>
-                        <a:t>Evidence 3</a:t>
-                      </a:r>
-                    </a:p>
-                  </a:txBody>
-                  <a:tcPr marL="82296" marR="82296" marT="64008" marB="64008">
-                    <a:solidFill>
-                      <a:srgbClr val="FFFFFF"/>
-                    </a:solidFill>
-                  </a:tcPr>
-                </a:tc>
-                <a:tc>
-                  <a:txBody>
-                    <a:bodyPr wrap="none"/>
-                    <a:lstStyle/>
-                    <a:p>
-                      <a:pPr>
-                        <a:lnSpc>
-                          <a:spcPts val="1600"/>
-                        </a:lnSpc>
-                        <a:spcAft>
-                          <a:spcPts val="0"/>
-                        </a:spcAft>
-                        <a:defRPr sz="1200" b="0">
-                          <a:solidFill>
-                            <a:srgbClr val="21243A"/>
-                          </a:solidFill>
-                          <a:latin typeface="Arial"/>
-                        </a:defRPr>
-                      </a:pPr>
-                      <a:r>
-                        <a:t>The cited study analyzed 7.89 million US and UK tweets from June 2020 to June</a:t>
-                      </a:r>
-                    </a:p>
-                    <a:p>
-                      <a:pPr>
-                        <a:lnSpc>
-                          <a:spcPts val="1600"/>
-                        </a:lnSpc>
-                        <a:spcAft>
-                          <a:spcPts val="0"/>
-                        </a:spcAft>
-                        <a:defRPr sz="1200" b="0">
-                          <a:solidFill>
-                            <a:srgbClr val="21243A"/>
-                          </a:solidFill>
-                          <a:latin typeface="Arial"/>
-                        </a:defRPr>
-                      </a:pPr>
-                      <a:r>
-                        <a:t>2021.</a:t>
-                      </a:r>
-                    </a:p>
-                  </a:txBody>
-                  <a:tcPr marL="82296" marR="82296" marT="64008" marB="64008">
-                    <a:solidFill>
-                      <a:srgbClr val="FFFFFF"/>
                     </a:solidFill>
                   </a:tcPr>
                 </a:tc>
@@ -21122,62 +21145,62 @@
                         </a:defRPr>
                       </a:pPr>
                       <a:r>
-                        <a:t>Evidence 4</a:t>
-                      </a:r>
-                    </a:p>
-                  </a:txBody>
-                  <a:tcPr marL="82296" marR="82296" marT="64008" marB="64008">
-                    <a:solidFill>
-                      <a:srgbClr val="F1F7F7"/>
-                    </a:solidFill>
-                  </a:tcPr>
-                </a:tc>
-                <a:tc>
-                  <a:txBody>
-                    <a:bodyPr wrap="none"/>
-                    <a:lstStyle/>
-                    <a:p>
-                      <a:pPr>
-                        <a:lnSpc>
-                          <a:spcPts val="1600"/>
-                        </a:lnSpc>
-                        <a:spcAft>
-                          <a:spcPts val="0"/>
-                        </a:spcAft>
-                        <a:defRPr sz="1200" b="0">
-                          <a:solidFill>
-                            <a:srgbClr val="21243A"/>
-                          </a:solidFill>
-                          <a:latin typeface="Arial"/>
-                        </a:defRPr>
-                      </a:pPr>
-                      <a:r>
-                        <a:t>Researchers reportedly used Meltwater and InfraNodus to collect tweets and map</a:t>
-                      </a:r>
-                    </a:p>
-                    <a:p>
-                      <a:pPr>
-                        <a:lnSpc>
-                          <a:spcPts val="1600"/>
-                        </a:lnSpc>
-                        <a:spcAft>
-                          <a:spcPts val="0"/>
-                        </a:spcAft>
-                        <a:defRPr sz="1200" b="0">
-                          <a:solidFill>
-                            <a:srgbClr val="21243A"/>
-                          </a:solidFill>
-                          <a:latin typeface="Arial"/>
-                        </a:defRPr>
-                      </a:pPr>
-                      <a:r>
-                        <a:t>word relationships.</a:t>
-                      </a:r>
-                    </a:p>
-                  </a:txBody>
-                  <a:tcPr marL="82296" marR="82296" marT="64008" marB="64008">
-                    <a:solidFill>
-                      <a:srgbClr val="F1F7F7"/>
+                        <a:t>Evidence 3</a:t>
+                      </a:r>
+                    </a:p>
+                  </a:txBody>
+                  <a:tcPr marL="82296" marR="82296" marT="64008" marB="64008">
+                    <a:solidFill>
+                      <a:srgbClr val="FFFFFF"/>
+                    </a:solidFill>
+                  </a:tcPr>
+                </a:tc>
+                <a:tc>
+                  <a:txBody>
+                    <a:bodyPr wrap="none"/>
+                    <a:lstStyle/>
+                    <a:p>
+                      <a:pPr>
+                        <a:lnSpc>
+                          <a:spcPts val="1600"/>
+                        </a:lnSpc>
+                        <a:spcAft>
+                          <a:spcPts val="0"/>
+                        </a:spcAft>
+                        <a:defRPr sz="1200" b="0">
+                          <a:solidFill>
+                            <a:srgbClr val="21243A"/>
+                          </a:solidFill>
+                          <a:latin typeface="Arial"/>
+                        </a:defRPr>
+                      </a:pPr>
+                      <a:r>
+                        <a:t>The cited study reportedly analyzed 7.89 million English-language tweets from</a:t>
+                      </a:r>
+                    </a:p>
+                    <a:p>
+                      <a:pPr>
+                        <a:lnSpc>
+                          <a:spcPts val="1600"/>
+                        </a:lnSpc>
+                        <a:spcAft>
+                          <a:spcPts val="0"/>
+                        </a:spcAft>
+                        <a:defRPr sz="1200" b="0">
+                          <a:solidFill>
+                            <a:srgbClr val="21243A"/>
+                          </a:solidFill>
+                          <a:latin typeface="Arial"/>
+                        </a:defRPr>
+                      </a:pPr>
+                      <a:r>
+                        <a:t>June 2020 to June 2021.</a:t>
+                      </a:r>
+                    </a:p>
+                  </a:txBody>
+                  <a:tcPr marL="82296" marR="82296" marT="64008" marB="64008">
+                    <a:solidFill>
+                      <a:srgbClr val="FFFFFF"/>
                     </a:solidFill>
                   </a:tcPr>
                 </a:tc>
@@ -21229,62 +21252,62 @@
                         </a:defRPr>
                       </a:pPr>
                       <a:r>
-                        <a:t>Evidence 5</a:t>
-                      </a:r>
-                    </a:p>
-                  </a:txBody>
-                  <a:tcPr marL="82296" marR="82296" marT="64008" marB="64008">
-                    <a:solidFill>
-                      <a:srgbClr val="FFFFFF"/>
-                    </a:solidFill>
-                  </a:tcPr>
-                </a:tc>
-                <a:tc>
-                  <a:txBody>
-                    <a:bodyPr wrap="none"/>
-                    <a:lstStyle/>
-                    <a:p>
-                      <a:pPr>
-                        <a:lnSpc>
-                          <a:spcPts val="1600"/>
-                        </a:lnSpc>
-                        <a:spcAft>
-                          <a:spcPts val="0"/>
-                        </a:spcAft>
-                        <a:defRPr sz="1200" b="0">
-                          <a:solidFill>
-                            <a:srgbClr val="21243A"/>
-                          </a:solidFill>
-                          <a:latin typeface="Arial"/>
-                        </a:defRPr>
-                      </a:pPr>
-                      <a:r>
-                        <a:t>The text describes convergence between anti-vaccine and anti-mask groups</a:t>
-                      </a:r>
-                    </a:p>
-                    <a:p>
-                      <a:pPr>
-                        <a:lnSpc>
-                          <a:spcPts val="1600"/>
-                        </a:lnSpc>
-                        <a:spcAft>
-                          <a:spcPts val="0"/>
-                        </a:spcAft>
-                        <a:defRPr sz="1200" b="0">
-                          <a:solidFill>
-                            <a:srgbClr val="21243A"/>
-                          </a:solidFill>
-                          <a:latin typeface="Arial"/>
-                        </a:defRPr>
-                      </a:pPr>
-                      <a:r>
-                        <a:t>online.</a:t>
-                      </a:r>
-                    </a:p>
-                  </a:txBody>
-                  <a:tcPr marL="82296" marR="82296" marT="64008" marB="64008">
-                    <a:solidFill>
-                      <a:srgbClr val="FFFFFF"/>
+                        <a:t>Evidence 4</a:t>
+                      </a:r>
+                    </a:p>
+                  </a:txBody>
+                  <a:tcPr marL="82296" marR="82296" marT="64008" marB="64008">
+                    <a:solidFill>
+                      <a:srgbClr val="F1F7F7"/>
+                    </a:solidFill>
+                  </a:tcPr>
+                </a:tc>
+                <a:tc>
+                  <a:txBody>
+                    <a:bodyPr wrap="none"/>
+                    <a:lstStyle/>
+                    <a:p>
+                      <a:pPr>
+                        <a:lnSpc>
+                          <a:spcPts val="1600"/>
+                        </a:lnSpc>
+                        <a:spcAft>
+                          <a:spcPts val="0"/>
+                        </a:spcAft>
+                        <a:defRPr sz="1200" b="0">
+                          <a:solidFill>
+                            <a:srgbClr val="21243A"/>
+                          </a:solidFill>
+                          <a:latin typeface="Arial"/>
+                        </a:defRPr>
+                      </a:pPr>
+                      <a:r>
+                        <a:t>Researchers reportedly used Meltwater and InfraNodus to examine mask and</a:t>
+                      </a:r>
+                    </a:p>
+                    <a:p>
+                      <a:pPr>
+                        <a:lnSpc>
+                          <a:spcPts val="1600"/>
+                        </a:lnSpc>
+                        <a:spcAft>
+                          <a:spcPts val="0"/>
+                        </a:spcAft>
+                        <a:defRPr sz="1200" b="0">
+                          <a:solidFill>
+                            <a:srgbClr val="21243A"/>
+                          </a:solidFill>
+                          <a:latin typeface="Arial"/>
+                        </a:defRPr>
+                      </a:pPr>
+                      <a:r>
+                        <a:t>vaccine discourse in the US and UK.</a:t>
+                      </a:r>
+                    </a:p>
+                  </a:txBody>
+                  <a:tcPr marL="82296" marR="82296" marT="64008" marB="64008">
+                    <a:solidFill>
+                      <a:srgbClr val="F1F7F7"/>
                     </a:solidFill>
                   </a:tcPr>
                 </a:tc>
@@ -21336,43 +21359,43 @@
                         </a:defRPr>
                       </a:pPr>
                       <a:r>
-                        <a:t>Evidence 6</a:t>
-                      </a:r>
-                    </a:p>
-                  </a:txBody>
-                  <a:tcPr marL="82296" marR="82296" marT="64008" marB="64008">
-                    <a:solidFill>
-                      <a:srgbClr val="F1F7F7"/>
-                    </a:solidFill>
-                  </a:tcPr>
-                </a:tc>
-                <a:tc>
-                  <a:txBody>
-                    <a:bodyPr wrap="none"/>
-                    <a:lstStyle/>
-                    <a:p>
-                      <a:pPr>
-                        <a:lnSpc>
-                          <a:spcPts val="1600"/>
-                        </a:lnSpc>
-                        <a:spcAft>
-                          <a:spcPts val="0"/>
-                        </a:spcAft>
-                        <a:defRPr sz="1200" b="0">
-                          <a:solidFill>
-                            <a:srgbClr val="21243A"/>
-                          </a:solidFill>
-                          <a:latin typeface="Arial"/>
-                        </a:defRPr>
-                      </a:pPr>
-                      <a:r>
-                        <a:t>Reported mask-related negative sentiment was 28% in the UK and 22% in the US.</a:t>
-                      </a:r>
-                    </a:p>
-                  </a:txBody>
-                  <a:tcPr marL="82296" marR="82296" marT="64008" marB="64008">
-                    <a:solidFill>
-                      <a:srgbClr val="F1F7F7"/>
+                        <a:t>Evidence 5</a:t>
+                      </a:r>
+                    </a:p>
+                  </a:txBody>
+                  <a:tcPr marL="82296" marR="82296" marT="64008" marB="64008">
+                    <a:solidFill>
+                      <a:srgbClr val="FFFFFF"/>
+                    </a:solidFill>
+                  </a:tcPr>
+                </a:tc>
+                <a:tc>
+                  <a:txBody>
+                    <a:bodyPr wrap="none"/>
+                    <a:lstStyle/>
+                    <a:p>
+                      <a:pPr>
+                        <a:lnSpc>
+                          <a:spcPts val="1600"/>
+                        </a:lnSpc>
+                        <a:spcAft>
+                          <a:spcPts val="0"/>
+                        </a:spcAft>
+                        <a:defRPr sz="1200" b="0">
+                          <a:solidFill>
+                            <a:srgbClr val="21243A"/>
+                          </a:solidFill>
+                          <a:latin typeface="Arial"/>
+                        </a:defRPr>
+                      </a:pPr>
+                      <a:r>
+                        <a:t>The text describes convergence between anti-vaccine and anti-mask groups.</a:t>
+                      </a:r>
+                    </a:p>
+                  </a:txBody>
+                  <a:tcPr marL="82296" marR="82296" marT="64008" marB="64008">
+                    <a:solidFill>
+                      <a:srgbClr val="FFFFFF"/>
                     </a:solidFill>
                   </a:tcPr>
                 </a:tc>
@@ -21391,6 +21414,94 @@
         </p:nvGraphicFramePr>
         <p:xfrm>
           <a:off x="365760" y="3155696"/>
+          <a:ext cx="8412479" cy="349504"/>
+        </p:xfrm>
+        <a:graphic>
+          <a:graphicData uri="http://schemas.openxmlformats.org/drawingml/2006/table">
+            <a:tbl>
+              <a:tblPr firstRow="1" bandRow="1">
+                <a:tableStyleId>{5C22544A-7EE6-4342-B048-85BDC9FD1C3A}</a:tableStyleId>
+              </a:tblPr>
+              <a:tblGrid>
+                <a:gridCol w="2271369"/>
+                <a:gridCol w="6141110"/>
+              </a:tblGrid>
+              <a:tr h="349504">
+                <a:tc>
+                  <a:txBody>
+                    <a:bodyPr wrap="none"/>
+                    <a:lstStyle/>
+                    <a:p>
+                      <a:pPr>
+                        <a:lnSpc>
+                          <a:spcPts val="1600"/>
+                        </a:lnSpc>
+                        <a:spcAft>
+                          <a:spcPts val="0"/>
+                        </a:spcAft>
+                        <a:defRPr sz="1200" b="0">
+                          <a:solidFill>
+                            <a:srgbClr val="21243A"/>
+                          </a:solidFill>
+                          <a:latin typeface="Arial"/>
+                        </a:defRPr>
+                      </a:pPr>
+                      <a:r>
+                        <a:t>Evidence 6</a:t>
+                      </a:r>
+                    </a:p>
+                  </a:txBody>
+                  <a:tcPr marL="82296" marR="82296" marT="64008" marB="64008">
+                    <a:solidFill>
+                      <a:srgbClr val="F1F7F7"/>
+                    </a:solidFill>
+                  </a:tcPr>
+                </a:tc>
+                <a:tc>
+                  <a:txBody>
+                    <a:bodyPr wrap="none"/>
+                    <a:lstStyle/>
+                    <a:p>
+                      <a:pPr>
+                        <a:lnSpc>
+                          <a:spcPts val="1600"/>
+                        </a:lnSpc>
+                        <a:spcAft>
+                          <a:spcPts val="0"/>
+                        </a:spcAft>
+                        <a:defRPr sz="1200" b="0">
+                          <a:solidFill>
+                            <a:srgbClr val="21243A"/>
+                          </a:solidFill>
+                          <a:latin typeface="Arial"/>
+                        </a:defRPr>
+                      </a:pPr>
+                      <a:r>
+                        <a:t>It reports greater negative mask sentiment in the UK than the US.</a:t>
+                      </a:r>
+                    </a:p>
+                  </a:txBody>
+                  <a:tcPr marL="82296" marR="82296" marT="64008" marB="64008">
+                    <a:solidFill>
+                      <a:srgbClr val="F1F7F7"/>
+                    </a:solidFill>
+                  </a:tcPr>
+                </a:tc>
+              </a:tr>
+            </a:tbl>
+          </a:graphicData>
+        </a:graphic>
+      </p:graphicFrame>
+      <p:graphicFrame>
+        <p:nvGraphicFramePr>
+          <p:cNvPr id="11" name="Table 10"/>
+          <p:cNvGraphicFramePr>
+            <a:graphicFrameLocks noGrp="1"/>
+          </p:cNvGraphicFramePr>
+          <p:nvPr/>
+        </p:nvGraphicFramePr>
+        <p:xfrm>
+          <a:off x="365760" y="3505200"/>
           <a:ext cx="8412479" cy="552704"/>
         </p:xfrm>
         <a:graphic>
@@ -21454,26 +21565,26 @@
                         </a:defRPr>
                       </a:pPr>
                       <a:r>
-                        <a:t>Caveat: Scripted human podcasts can share these features; transcript style alone</a:t>
-                      </a:r>
-                    </a:p>
-                    <a:p>
-                      <a:pPr>
-                        <a:lnSpc>
-                          <a:spcPts val="1600"/>
-                        </a:lnSpc>
-                        <a:spcAft>
-                          <a:spcPts val="0"/>
-                        </a:spcAft>
-                        <a:defRPr sz="1200" b="0">
-                          <a:solidFill>
-                            <a:srgbClr val="21243A"/>
-                          </a:solidFill>
-                          <a:latin typeface="Arial"/>
-                        </a:defRPr>
-                      </a:pPr>
-                      <a:r>
-                        <a:t>cannot establish authorship.</a:t>
+                        <a:t>Caveat: A human-scripted podcast could share these features; transcript artifacts</a:t>
+                      </a:r>
+                    </a:p>
+                    <a:p>
+                      <a:pPr>
+                        <a:lnSpc>
+                          <a:spcPts val="1600"/>
+                        </a:lnSpc>
+                        <a:spcAft>
+                          <a:spcPts val="0"/>
+                        </a:spcAft>
+                        <a:defRPr sz="1200" b="0">
+                          <a:solidFill>
+                            <a:srgbClr val="21243A"/>
+                          </a:solidFill>
+                          <a:latin typeface="Arial"/>
+                        </a:defRPr>
+                      </a:pPr>
+                      <a:r>
+                        <a:t>and absent provenance limit attribution.</a:t>
                       </a:r>
                     </a:p>
                   </a:txBody>
@@ -22363,45 +22474,45 @@
                         </a:defRPr>
                       </a:pPr>
                       <a:r>
-                        <a:t>Highly synthetic structure exhibiting classic patterns of AI-generated podcast</a:t>
-                      </a:r>
-                    </a:p>
-                    <a:p>
-                      <a:pPr>
-                        <a:lnSpc>
-                          <a:spcPts val="1600"/>
-                        </a:lnSpc>
-                        <a:spcAft>
-                          <a:spcPts val="0"/>
-                        </a:spcAft>
-                        <a:defRPr sz="1200" b="0">
-                          <a:solidFill>
-                            <a:srgbClr val="21243A"/>
-                          </a:solidFill>
-                          <a:latin typeface="Arial"/>
-                        </a:defRPr>
-                      </a:pPr>
-                      <a:r>
-                        <a:t>dialogues (such as NotebookLM Audio Overviews) with formulaic back-and-forth</a:t>
-                      </a:r>
-                    </a:p>
-                    <a:p>
-                      <a:pPr>
-                        <a:lnSpc>
-                          <a:spcPts val="1600"/>
-                        </a:lnSpc>
-                        <a:spcAft>
-                          <a:spcPts val="0"/>
-                        </a:spcAft>
-                        <a:defRPr sz="1200" b="0">
-                          <a:solidFill>
-                            <a:srgbClr val="21243A"/>
-                          </a:solidFill>
-                          <a:latin typeface="Arial"/>
-                        </a:defRPr>
-                      </a:pPr>
-                      <a:r>
-                        <a:t>banter and simulated natural disfluencies.</a:t>
+                        <a:t>The text displays the classic conversational tropes, rapid turn-taking, and</a:t>
+                      </a:r>
+                    </a:p>
+                    <a:p>
+                      <a:pPr>
+                        <a:lnSpc>
+                          <a:spcPts val="1600"/>
+                        </a:lnSpc>
+                        <a:spcAft>
+                          <a:spcPts val="0"/>
+                        </a:spcAft>
+                        <a:defRPr sz="1200" b="0">
+                          <a:solidFill>
+                            <a:srgbClr val="21243A"/>
+                          </a:solidFill>
+                          <a:latin typeface="Arial"/>
+                        </a:defRPr>
+                      </a:pPr>
+                      <a:r>
+                        <a:t>synthetic cadence characteristic of an automated AI podcast generator like</a:t>
+                      </a:r>
+                    </a:p>
+                    <a:p>
+                      <a:pPr>
+                        <a:lnSpc>
+                          <a:spcPts val="1600"/>
+                        </a:lnSpc>
+                        <a:spcAft>
+                          <a:spcPts val="0"/>
+                        </a:spcAft>
+                        <a:defRPr sz="1200" b="0">
+                          <a:solidFill>
+                            <a:srgbClr val="21243A"/>
+                          </a:solidFill>
+                          <a:latin typeface="Arial"/>
+                        </a:defRPr>
+                      </a:pPr>
+                      <a:r>
+                        <a:t>NotebookLM.</a:t>
                       </a:r>
                     </a:p>
                   </a:txBody>
@@ -22489,26 +22600,26 @@
                         </a:defRPr>
                       </a:pPr>
                       <a:r>
-                        <a:t>Synthetic origin framing: Conversational podcast-style dialogue reviewing</a:t>
-                      </a:r>
-                    </a:p>
-                    <a:p>
-                      <a:pPr>
-                        <a:lnSpc>
-                          <a:spcPts val="1600"/>
-                        </a:lnSpc>
-                        <a:spcAft>
-                          <a:spcPts val="0"/>
-                        </a:spcAft>
-                        <a:defRPr sz="1200" b="0">
-                          <a:solidFill>
-                            <a:srgbClr val="21243A"/>
-                          </a:solidFill>
-                          <a:latin typeface="Arial"/>
-                        </a:defRPr>
-                      </a:pPr>
-                      <a:r>
-                        <a:t>academic research on pandemic social dynamics and digital discourse.</a:t>
+                        <a:t>Synthetic origin framing: An informal two-host podcast script discussing academic</a:t>
+                      </a:r>
+                    </a:p>
+                    <a:p>
+                      <a:pPr>
+                        <a:lnSpc>
+                          <a:spcPts val="1600"/>
+                        </a:lnSpc>
+                        <a:spcAft>
+                          <a:spcPts val="0"/>
+                        </a:spcAft>
+                        <a:defRPr sz="1200" b="0">
+                          <a:solidFill>
+                            <a:srgbClr val="21243A"/>
+                          </a:solidFill>
+                          <a:latin typeface="Arial"/>
+                        </a:defRPr>
+                      </a:pPr>
+                      <a:r>
+                        <a:t>research on social media discourse and health mandates.</a:t>
                       </a:r>
                     </a:p>
                   </a:txBody>
@@ -22684,26 +22795,26 @@
                         </a:defRPr>
                       </a:pPr>
                       <a:r>
-                        <a:t>Oxford Vaccine Group study analyzed 7.89 million tweets from June 2020 to June</a:t>
-                      </a:r>
-                    </a:p>
-                    <a:p>
-                      <a:pPr>
-                        <a:lnSpc>
-                          <a:spcPts val="1600"/>
-                        </a:lnSpc>
-                        <a:spcAft>
-                          <a:spcPts val="0"/>
-                        </a:spcAft>
-                        <a:defRPr sz="1200" b="0">
-                          <a:solidFill>
-                            <a:srgbClr val="21243A"/>
-                          </a:solidFill>
-                          <a:latin typeface="Arial"/>
-                        </a:defRPr>
-                      </a:pPr>
-                      <a:r>
-                        <a:t>2021</a:t>
+                        <a:t>Oxford Vaccine Group researchers analyzed 7.89 million English-language tweets</a:t>
+                      </a:r>
+                    </a:p>
+                    <a:p>
+                      <a:pPr>
+                        <a:lnSpc>
+                          <a:spcPts val="1600"/>
+                        </a:lnSpc>
+                        <a:spcAft>
+                          <a:spcPts val="0"/>
+                        </a:spcAft>
+                        <a:defRPr sz="1200" b="0">
+                          <a:solidFill>
+                            <a:srgbClr val="21243A"/>
+                          </a:solidFill>
+                          <a:latin typeface="Arial"/>
+                        </a:defRPr>
+                      </a:pPr>
+                      <a:r>
+                        <a:t>from the US and UK between June 2020 and June 2021</a:t>
                       </a:r>
                     </a:p>
                   </a:txBody>
@@ -23002,7 +23113,7 @@
         </p:nvGraphicFramePr>
         <p:xfrm>
           <a:off x="365760" y="1700784"/>
-          <a:ext cx="8412479" cy="349504"/>
+          <a:ext cx="8412479" cy="552704"/>
         </p:xfrm>
         <a:graphic>
           <a:graphicData uri="http://schemas.openxmlformats.org/drawingml/2006/table">
@@ -23014,7 +23125,7 @@
                 <a:gridCol w="2271369"/>
                 <a:gridCol w="6141110"/>
               </a:tblGrid>
-              <a:tr h="349504">
+              <a:tr h="552704">
                 <a:tc>
                   <a:txBody>
                     <a:bodyPr wrap="none"/>
@@ -23065,7 +23176,26 @@
                         </a:defRPr>
                       </a:pPr>
                       <a:r>
-                        <a:t>5.91 million tweets focused on masks while 1.98 million focused on vaccines</a:t>
+                        <a:t>Study used Meltwater and InfraNodus network analysis software to examine</a:t>
+                      </a:r>
+                    </a:p>
+                    <a:p>
+                      <a:pPr>
+                        <a:lnSpc>
+                          <a:spcPts val="1600"/>
+                        </a:lnSpc>
+                        <a:spcAft>
+                          <a:spcPts val="0"/>
+                        </a:spcAft>
+                        <a:defRPr sz="1200" b="0">
+                          <a:solidFill>
+                            <a:srgbClr val="21243A"/>
+                          </a:solidFill>
+                          <a:latin typeface="Arial"/>
+                        </a:defRPr>
+                      </a:pPr>
+                      <a:r>
+                        <a:t>sentiment around masks and vaccines</a:t>
                       </a:r>
                     </a:p>
                   </a:txBody>
@@ -23089,7 +23219,7 @@
           <p:nvPr/>
         </p:nvGraphicFramePr>
         <p:xfrm>
-          <a:off x="365760" y="2050288"/>
+          <a:off x="365760" y="2253488"/>
           <a:ext cx="8412479" cy="552704"/>
         </p:xfrm>
         <a:graphic>
@@ -23153,26 +23283,26 @@
                         </a:defRPr>
                       </a:pPr>
                       <a:r>
-                        <a:t>UK tweets showed 28 percent negative sentiment on masks compared to 22</a:t>
-                      </a:r>
-                    </a:p>
-                    <a:p>
-                      <a:pPr>
-                        <a:lnSpc>
-                          <a:spcPts val="1600"/>
-                        </a:lnSpc>
-                        <a:spcAft>
-                          <a:spcPts val="0"/>
-                        </a:spcAft>
-                        <a:defRPr sz="1200" b="0">
-                          <a:solidFill>
-                            <a:srgbClr val="21243A"/>
-                          </a:solidFill>
-                          <a:latin typeface="Arial"/>
-                        </a:defRPr>
-                      </a:pPr>
-                      <a:r>
-                        <a:t>percent in US</a:t>
+                        <a:t>5.91 million analyzed tweets focused on masks, while 1.98 million focused on</a:t>
+                      </a:r>
+                    </a:p>
+                    <a:p>
+                      <a:pPr>
+                        <a:lnSpc>
+                          <a:spcPts val="1600"/>
+                        </a:lnSpc>
+                        <a:spcAft>
+                          <a:spcPts val="0"/>
+                        </a:spcAft>
+                        <a:defRPr sz="1200" b="0">
+                          <a:solidFill>
+                            <a:srgbClr val="21243A"/>
+                          </a:solidFill>
+                          <a:latin typeface="Arial"/>
+                        </a:defRPr>
+                      </a:pPr>
+                      <a:r>
+                        <a:t>vaccines</a:t>
                       </a:r>
                     </a:p>
                   </a:txBody>
@@ -23196,8 +23326,8 @@
           <p:nvPr/>
         </p:nvGraphicFramePr>
         <p:xfrm>
-          <a:off x="365760" y="2602992"/>
-          <a:ext cx="8412479" cy="552704"/>
+          <a:off x="365760" y="2806192"/>
+          <a:ext cx="8412479" cy="349504"/>
         </p:xfrm>
         <a:graphic>
           <a:graphicData uri="http://schemas.openxmlformats.org/drawingml/2006/table">
@@ -23209,7 +23339,7 @@
                 <a:gridCol w="2271369"/>
                 <a:gridCol w="6141110"/>
               </a:tblGrid>
-              <a:tr h="552704">
+              <a:tr h="349504">
                 <a:tc>
                   <a:txBody>
                     <a:bodyPr wrap="none"/>
@@ -23260,26 +23390,7 @@
                         </a:defRPr>
                       </a:pPr>
                       <a:r>
-                        <a:t>Negative sentiment toward vaccines was 17 percent in the US and 15 percent in</a:t>
-                      </a:r>
-                    </a:p>
-                    <a:p>
-                      <a:pPr>
-                        <a:lnSpc>
-                          <a:spcPts val="1600"/>
-                        </a:lnSpc>
-                        <a:spcAft>
-                          <a:spcPts val="0"/>
-                        </a:spcAft>
-                        <a:defRPr sz="1200" b="0">
-                          <a:solidFill>
-                            <a:srgbClr val="21243A"/>
-                          </a:solidFill>
-                          <a:latin typeface="Arial"/>
-                        </a:defRPr>
-                      </a:pPr>
-                      <a:r>
-                        <a:t>the UK</a:t>
+                        <a:t>Negative sentiment toward masks was 28% in the UK compared to 22% in the US</a:t>
                       </a:r>
                     </a:p>
                   </a:txBody>
@@ -23367,26 +23478,26 @@
                         </a:defRPr>
                       </a:pPr>
                       <a:r>
-                        <a:t>Caveat: Real human podcast transcripts can display similar conversational</a:t>
-                      </a:r>
-                    </a:p>
-                    <a:p>
-                      <a:pPr>
-                        <a:lnSpc>
-                          <a:spcPts val="1600"/>
-                        </a:lnSpc>
-                        <a:spcAft>
-                          <a:spcPts val="0"/>
-                        </a:spcAft>
-                        <a:defRPr sz="1200" b="0">
-                          <a:solidFill>
-                            <a:srgbClr val="21243A"/>
-                          </a:solidFill>
-                          <a:latin typeface="Arial"/>
-                        </a:defRPr>
-                      </a:pPr>
-                      <a:r>
-                        <a:t>cadence and informal conversational fillers.</a:t>
+                        <a:t>Caveat: Human podcast hosts discussing academic papers can occasionally use</a:t>
+                      </a:r>
+                    </a:p>
+                    <a:p>
+                      <a:pPr>
+                        <a:lnSpc>
+                          <a:spcPts val="1600"/>
+                        </a:lnSpc>
+                        <a:spcAft>
+                          <a:spcPts val="0"/>
+                        </a:spcAft>
+                        <a:defRPr sz="1200" b="0">
+                          <a:solidFill>
+                            <a:srgbClr val="21243A"/>
+                          </a:solidFill>
+                          <a:latin typeface="Arial"/>
+                        </a:defRPr>
+                      </a:pPr>
+                      <a:r>
+                        <a:t>similar rehearsed, highly structured banter.</a:t>
                       </a:r>
                     </a:p>
                   </a:txBody>

--- a/site/showcase/exports/podcast.pptx
+++ b/site/showcase/exports/podcast.pptx
@@ -27,6 +27,8 @@
     <p:sldId id="275" r:id="rId27"/>
     <p:sldId id="276" r:id="rId28"/>
     <p:sldId id="277" r:id="rId29"/>
+    <p:sldId id="278" r:id="rId30"/>
+    <p:sldId id="279" r:id="rId31"/>
   </p:sldIdLst>
   <p:sldSz cx="9144000" cy="6858000" type="screen4x3"/>
   <p:notesSz cx="6858000" cy="9144000"/>
@@ -1073,17 +1075,67 @@
           </a:p>
           <a:p>
             <a:r>
-              <a:t>Assessment coverage</a:t>
-            </a:r>
-          </a:p>
-          <a:p>
-            <a:r>
-              <a:t>Record 1 | Visual verdicts for videos cover the sampled still frames. Standalone-audio content assessments cover the transcript. Soundtrack-origin detection and continuous-motion analysis are outside these assessments.</a:t>
-            </a:r>
-          </a:p>
-          <a:p>
-            <a:r>
-              <a:t>Record 2 | Original-file credentials, excerpt descriptions and visual interpretation are recorded separately. Credential coverage of an individual audio track remains unresolved by this workflow.</a:t>
+              <a:t>Optional audio excerpt description</a:t>
+            </a:r>
+          </a:p>
+          <a:p>
+            <a:r>
+              <a:t>Record 1 | Google Gemini / gemini-3.8-flash; status: ok; content: speech.</a:t>
+            </a:r>
+          </a:p>
+          <a:p>
+            <a:r>
+              <a:t>Record 2 | Checked: 2026-09-27T19:20:45.393134+00:00; consent to Google recorded: True.</a:t>
+            </a:r>
+          </a:p>
+          <a:p>
+            <a:r>
+              <a:t>Record 3 | Track 0; excerpt 0s + 20.0s; prompt: soundtrack-content-v1.</a:t>
+            </a:r>
+          </a:p>
+          <a:p>
+            <a:r>
+              <a:t>Record 4 | Original SHA-256: 58663a6a9e4b634bdb703ead0aaa7cd6dce7fbf97e70c3c1cc61b3311b94c0b4; excerpt SHA-256: f9713796490ddc9624cfc92412738eaca7192d9cbde08dd259237e29e2aa2128.</a:t>
+            </a:r>
+          </a:p>
+          <a:p>
+            <a:r>
+              <a:t>Record 5 | A female voice speaks in an interview or conversational tone.</a:t>
+            </a:r>
+          </a:p>
+          <a:p>
+            <a:r>
+              <a:t>Record 6 | A male voice responds briefly in agreement.</a:t>
+            </a:r>
+          </a:p>
+          <a:p>
+            <a:r>
+              <a:t>Record 7 | The conversation sounds like a podcast or radio broadcast discussion.</a:t>
+            </a:r>
+          </a:p>
+          <a:p>
+            <a:r>
+              <a:t>Record 8 | Audio is clean with minimal to no background noise.</a:t>
+            </a:r>
+          </a:p>
+          <a:p>
+            <a:r>
+              <a:t>Record 9 | Transcript excerpt: Imagine holding, uh, like a simple piece of cloth in your hand. Let's say it's 2019, and it's just a standard surgical mask. Right, just a boring everyday medical supply, something you'd really only see at the dentist's office. Exactly.</a:t>
+            </a:r>
+          </a:p>
+          <a:p>
+            <a:r>
+              <a:t>Record 10 | This assessment describes the selected audio excerpt. Origin and credentials are considered separately.</a:t>
+            </a:r>
+          </a:p>
+          <a:p>
+            <a:r>
+              <a:t>Record 11 | Analysed excerpt: mono, 16 kHz PCM. Credential checks use the original file.</a:t>
+            </a:r>
+          </a:p>
+          <a:p>
+            <a:r>
+              <a:t>Record 12 | Audio findings are shown alongside the visual assessment and remain separate from its score.</a:t>
             </a:r>
           </a:p>
         </p:txBody>
@@ -1158,22 +1210,67 @@
           </a:p>
           <a:p>
             <a:r>
-              <a:t>Evidence supporting this verdict</a:t>
-            </a:r>
-          </a:p>
-          <a:p>
-            <a:r>
-              <a:t>Claude Analysis | Style closely matches AI-generated two-host 'deep dive' audio overviews (e.g. NotebookLM): stock openers ('Imagine holding...', 'Okay, let's unpack this', 'If we connect this to the bigger picture'), constant affirmations ('Exactly', 'Perfectly said'), scripted neutrality disclaimer and a staged host challenge, suggesting likely synthetic origin.</a:t>
-            </a:r>
-          </a:p>
-          <a:p>
-            <a:r>
-              <a:t>OpenAI Analysis | The highly regular two-host exchanges, repetitive affirmations, scripted explanatory prompts, and formulaic transitions strongly suggest synthetic generation or editing.</a:t>
-            </a:r>
-          </a:p>
-          <a:p>
-            <a:r>
-              <a:t>Gemini Analysis | The text displays the classic conversational tropes, rapid turn-taking, and synthetic cadence characteristic of an automated AI podcast generator like NotebookLM.</a:t>
+              <a:t>Optional audio excerpt description</a:t>
+            </a:r>
+          </a:p>
+          <a:p>
+            <a:r>
+              <a:t>Record 1 | Google Gemini / gemini-3.8-flash; status: ok; content: speech.</a:t>
+            </a:r>
+          </a:p>
+          <a:p>
+            <a:r>
+              <a:t>Record 2 | Checked: 2026-09-27T19:20:45.393134+00:00; consent to Google recorded: True.</a:t>
+            </a:r>
+          </a:p>
+          <a:p>
+            <a:r>
+              <a:t>Record 3 | Track 0; excerpt 0s + 20.0s; prompt: soundtrack-content-v1.</a:t>
+            </a:r>
+          </a:p>
+          <a:p>
+            <a:r>
+              <a:t>Record 4 | Original SHA-256: 58663a6a9e4b634bdb703ead0aaa7cd6dce7fbf97e70c3c1cc61b3311b94c0b4; excerpt SHA-256: f9713796490ddc9624cfc92412738eaca7192d9cbde08dd259237e29e2aa2128.</a:t>
+            </a:r>
+          </a:p>
+          <a:p>
+            <a:r>
+              <a:t>Record 5 | A female voice speaks in an interview or conversational tone.</a:t>
+            </a:r>
+          </a:p>
+          <a:p>
+            <a:r>
+              <a:t>Record 6 | A male voice responds briefly in agreement.</a:t>
+            </a:r>
+          </a:p>
+          <a:p>
+            <a:r>
+              <a:t>Record 7 | The conversation sounds like a podcast or radio broadcast discussion.</a:t>
+            </a:r>
+          </a:p>
+          <a:p>
+            <a:r>
+              <a:t>Record 8 | Audio is clean with minimal to no background noise.</a:t>
+            </a:r>
+          </a:p>
+          <a:p>
+            <a:r>
+              <a:t>Record 9 | Transcript excerpt: Imagine holding, uh, like a simple piece of cloth in your hand. Let's say it's 2019, and it's just a standard surgical mask. Right, just a boring everyday medical supply, something you'd really only see at the dentist's office. Exactly.</a:t>
+            </a:r>
+          </a:p>
+          <a:p>
+            <a:r>
+              <a:t>Record 10 | This assessment describes the selected audio excerpt. Origin and credentials are considered separately.</a:t>
+            </a:r>
+          </a:p>
+          <a:p>
+            <a:r>
+              <a:t>Record 11 | Analysed excerpt: mono, 16 kHz PCM. Credential checks use the original file.</a:t>
+            </a:r>
+          </a:p>
+          <a:p>
+            <a:r>
+              <a:t>Record 12 | Audio findings are shown alongside the visual assessment and remain separate from its score.</a:t>
             </a:r>
           </a:p>
         </p:txBody>
@@ -1248,12 +1345,17 @@
           </a:p>
           <a:p>
             <a:r>
-              <a:t>Additional findings</a:t>
-            </a:r>
-          </a:p>
-          <a:p>
-            <a:r>
-              <a:t>C2PA Content Credentials | Not checked in this text-analysis pass; no original-media provenance conclusion.</a:t>
+              <a:t>Assessment coverage</a:t>
+            </a:r>
+          </a:p>
+          <a:p>
+            <a:r>
+              <a:t>Record 1 | Visual verdicts for videos cover the sampled still frames. Standalone-audio content assessments cover the transcript. Soundtrack-origin detection and continuous-motion analysis are outside these assessments.</a:t>
+            </a:r>
+          </a:p>
+          <a:p>
+            <a:r>
+              <a:t>Record 2 | Original-file credentials, excerpt descriptions and visual interpretation are recorded separately. Credential coverage of an individual audio track remains unresolved by this workflow.</a:t>
             </a:r>
           </a:p>
         </p:txBody>
@@ -1328,12 +1430,22 @@
           </a:p>
           <a:p>
             <a:r>
-              <a:t>Transcribed text</a:t>
-            </a:r>
-          </a:p>
-          <a:p>
-            <a:r>
-              <a:t>Recorded text | Imagine holding a like a simple piece of cloth in your hand. Let's say it's 2019, and it's just a standard surgical mask. Right, just a boring everyday medical supply, something you'd really only see at the dentist office. Exactly. But then fast-forward to the end of 2020, and that exact same piece of cloth had morphed into like a literal measure of your morality. Oh, absolutely. It became a symbol of your political affiliation, your patriotism, even. It's just wild to think about. I mean, today we are looking at the exact digital moment a basic health mandate turned into a full-blown ideological war. It really is one of the most compressed, intense sociological shifts we've ever witnessed. Yeah. We went from a public that largely didn't think about epidemiology at all to a society where every single person was forced to take a public, highly visible stance on a global health crisis. And usually, you know, when we talk about a massive global event like that, we have to rely on historians decades later to piece together the public mood. Right, digging through old newspaper clippings or a diary entries. Exactly. But for the COVID-19 pandemic, we have this complete, real-time behavioral laboratory. So, we are grounding our conversation today in this fascinating peer-reviewed study from the journal Vaccine. Yes, authored by Sam Martin and Samantha Vanderslott from the Oxford Vaccine Group. And the scale of their research here is what makes it so robust, right? Oh, totally. They analyzed this massive data set of 7.89 million English-language tweets. Wow. Yeah, from the US and the UK, spanning a very specific window, basically June 1st, 2020 to June 1st, 2021. And they didn't just like count how many times the word mask or vaccine was used, which is what I would have assumed. No, they went way deeper. They utilized media monitoring software called Meltwater and text network analysis software called InfraNodus. Which uh we should probably explain how those tools work because it's vital for understanding the whole study. Please do. So Meltwater acts like this giant net scraping the internet and pulling in every public conversation based on specific keywords. Right. But InfraNodus acts as the brain. It actually maps relationships between words. So if the word mask is constantly sitting right next to the word tyranny or sheep in millions of tweets, The software draws a thick digital line between them. Exactly. It lets researchers see the exact architecture of public sentiment. It's almost like looking at a real-time MRI of society's collective anxiety. That's a really great way to visualize it. It moves us past just individual anecdotes, Yeah. Yeah. and it shows us the actual structural flow of ideas. Yeah. So, the mission for our deep dive today is to explore a very specific phenomenon uncovered in this flow. We want to see how pre-existing anti-vaccine groups and newly formed anti-mask groups actually merged into this massive digital powerhouse. And to understand the psychological, social, and political drivers behind how the public reacted to these mandates. Exactly. Now uh a very quick heads up to you the listener before we dive into the timeline, the data we are analyzing today is heavily political. Very heavily. Yeah, it involves major figures from the left and the right. We're talking President Joe Biden, former President Donald Trump, Vice President Kamala Harris along with a bunch of conservative and liberal viewpoints. Right. So, I have to be clear here. We aren't taking sides today. We aren't endorsing any of the politics discussed. We're just impartially reading the digital footprint left behind to help you understand the mechanics of this social media evolution. Our focus is strictly on the mechanics of the discourse. You know, what the data reflects, what was said, and how it spread. Okay, let's unpack this. To really understand the explosion of outrage and compliance in 2020, we have to recognize that human pushback again</a:t>
+              <a:t>Evidence supporting this verdict</a:t>
+            </a:r>
+          </a:p>
+          <a:p>
+            <a:r>
+              <a:t>Claude Analysis | Style closely matches AI-generated two-host 'deep dive' audio overviews (e.g. NotebookLM): stock openers ('Imagine holding...', 'Okay, let's unpack this', 'If we connect this to the bigger picture'), constant affirmations ('Exactly', 'Perfectly said'), scripted neutrality disclaimer and a staged host challenge, suggesting likely synthetic origin.</a:t>
+            </a:r>
+          </a:p>
+          <a:p>
+            <a:r>
+              <a:t>OpenAI Analysis | The highly regular two-host exchanges, repetitive affirmations, scripted explanatory prompts, and formulaic transitions strongly suggest synthetic generation or editing.</a:t>
+            </a:r>
+          </a:p>
+          <a:p>
+            <a:r>
+              <a:t>Gemini Analysis | The text displays the classic conversational tropes, rapid turn-taking, and synthetic cadence characteristic of an automated AI podcast generator like NotebookLM.</a:t>
             </a:r>
           </a:p>
         </p:txBody>
@@ -1408,12 +1520,12 @@
           </a:p>
           <a:p>
             <a:r>
-              <a:t>Transcribed text</a:t>
-            </a:r>
-          </a:p>
-          <a:p>
-            <a:r>
-              <a:t>Recorded text | Imagine holding a like a simple piece of cloth in your hand. Let's say it's 2019, and it's just a standard surgical mask. Right, just a boring everyday medical supply, something you'd really only see at the dentist office. Exactly. But then fast-forward to the end of 2020, and that exact same piece of cloth had morphed into like a literal measure of your morality. Oh, absolutely. It became a symbol of your political affiliation, your patriotism, even. It's just wild to think about. I mean, today we are looking at the exact digital moment a basic health mandate turned into a full-blown ideological war. It really is one of the most compressed, intense sociological shifts we've ever witnessed. Yeah. We went from a public that largely didn't think about epidemiology at all to a society where every single person was forced to take a public, highly visible stance on a global health crisis. And usually, you know, when we talk about a massive global event like that, we have to rely on historians decades later to piece together the public mood. Right, digging through old newspaper clippings or a diary entries. Exactly. But for the COVID-19 pandemic, we have this complete, real-time behavioral laboratory. So, we are grounding our conversation today in this fascinating peer-reviewed study from the journal Vaccine. Yes, authored by Sam Martin and Samantha Vanderslott from the Oxford Vaccine Group. And the scale of their research here is what makes it so robust, right? Oh, totally. They analyzed this massive data set of 7.89 million English-language tweets. Wow. Yeah, from the US and the UK, spanning a very specific window, basically June 1st, 2020 to June 1st, 2021. And they didn't just like count how many times the word mask or vaccine was used, which is what I would have assumed. No, they went way deeper. They utilized media monitoring software called Meltwater and text network analysis software called InfraNodus. Which uh we should probably explain how those tools work because it's vital for understanding the whole study. Please do. So Meltwater acts like this giant net scraping the internet and pulling in every public conversation based on specific keywords. Right. But InfraNodus acts as the brain. It actually maps relationships between words. So if the word mask is constantly sitting right next to the word tyranny or sheep in millions of tweets, The software draws a thick digital line between them. Exactly. It lets researchers see the exact architecture of public sentiment. It's almost like looking at a real-time MRI of society's collective anxiety. That's a really great way to visualize it. It moves us past just individual anecdotes, Yeah. Yeah. and it shows us the actual structural flow of ideas. Yeah. So, the mission for our deep dive today is to explore a very specific phenomenon uncovered in this flow. We want to see how pre-existing anti-vaccine groups and newly formed anti-mask groups actually merged into this massive digital powerhouse. And to understand the psychological, social, and political drivers behind how the public reacted to these mandates. Exactly. Now uh a very quick heads up to you the listener before we dive into the timeline, the data we are analyzing today is heavily political. Very heavily. Yeah, it involves major figures from the left and the right. We're talking President Joe Biden, former President Donald Trump, Vice President Kamala Harris along with a bunch of conservative and liberal viewpoints. Right. So, I have to be clear here. We aren't taking sides today. We aren't endorsing any of the politics discussed. We're just impartially reading the digital footprint left behind to help you understand the mechanics of this social media evolution. Our focus is strictly on the mechanics of the discourse. You know, what the data reflects, what was said, and how it spread. Okay, let's unpack this. To really understand the explosion of outrage and compliance in 2020, we have to recognize that human pushback again</a:t>
+              <a:t>Additional findings</a:t>
+            </a:r>
+          </a:p>
+          <a:p>
+            <a:r>
+              <a:t>C2PA Content Credentials | Not checked in this text-analysis pass; no original-media provenance conclusion.</a:t>
             </a:r>
           </a:p>
         </p:txBody>
@@ -1683,22 +1795,12 @@
           </a:p>
           <a:p>
             <a:r>
-              <a:t>How this assessment was reached</a:t>
-            </a:r>
-          </a:p>
-          <a:p>
-            <a:r>
-              <a:t>1. override | outcome=none; detail=No confirmed C2PA AI assertion or SynthID watermark. Origin remains unresolved by these checks.</a:t>
-            </a:r>
-          </a:p>
-          <a:p>
-            <a:r>
-              <a:t>2. model_agreement | synthetic=['Claude Analysis', 'OpenAI Analysis', 'Gemini Analysis']; authentic=[]; uncertain=[]; forensic_supports_synthetic=False</a:t>
-            </a:r>
-          </a:p>
-          <a:p>
-            <a:r>
-              <a:t>3. verdict | value=synthetic_likely; confidence=high; reason=3 models agree this is likely synthetic.</a:t>
+              <a:t>Transcribed text</a:t>
+            </a:r>
+          </a:p>
+          <a:p>
+            <a:r>
+              <a:t>Recorded text | Imagine holding a like a simple piece of cloth in your hand. Let's say it's 2019, and it's just a standard surgical mask. Right, just a boring everyday medical supply, something you'd really only see at the dentist office. Exactly. But then fast-forward to the end of 2020, and that exact same piece of cloth had morphed into like a literal measure of your morality. Oh, absolutely. It became a symbol of your political affiliation, your patriotism, even. It's just wild to think about. I mean, today we are looking at the exact digital moment a basic health mandate turned into a full-blown ideological war. It really is one of the most compressed, intense sociological shifts we've ever witnessed. Yeah. We went from a public that largely didn't think about epidemiology at all to a society where every single person was forced to take a public, highly visible stance on a global health crisis. And usually, you know, when we talk about a massive global event like that, we have to rely on historians decades later to piece together the public mood. Right, digging through old newspaper clippings or a diary entries. Exactly. But for the COVID-19 pandemic, we have this complete, real-time behavioral laboratory. So, we are grounding our conversation today in this fascinating peer-reviewed study from the journal Vaccine. Yes, authored by Sam Martin and Samantha Vanderslott from the Oxford Vaccine Group. And the scale of their research here is what makes it so robust, right? Oh, totally. They analyzed this massive data set of 7.89 million English-language tweets. Wow. Yeah, from the US and the UK, spanning a very specific window, basically June 1st, 2020 to June 1st, 2021. And they didn't just like count how many times the word mask or vaccine was used, which is what I would have assumed. No, they went way deeper. They utilized media monitoring software called Meltwater and text network analysis software called InfraNodus. Which uh we should probably explain how those tools work because it's vital for understanding the whole study. Please do. So Meltwater acts like this giant net scraping the internet and pulling in every public conversation based on specific keywords. Right. But InfraNodus acts as the brain. It actually maps relationships between words. So if the word mask is constantly sitting right next to the word tyranny or sheep in millions of tweets, The software draws a thick digital line between them. Exactly. It lets researchers see the exact architecture of public sentiment. It's almost like looking at a real-time MRI of society's collective anxiety. That's a really great way to visualize it. It moves us past just individual anecdotes, Yeah. Yeah. and it shows us the actual structural flow of ideas. Yeah. So, the mission for our deep dive today is to explore a very specific phenomenon uncovered in this flow. We want to see how pre-existing anti-vaccine groups and newly formed anti-mask groups actually merged into this massive digital powerhouse. And to understand the psychological, social, and political drivers behind how the public reacted to these mandates. Exactly. Now uh a very quick heads up to you the listener before we dive into the timeline, the data we are analyzing today is heavily political. Very heavily. Yeah, it involves major figures from the left and the right. We're talking President Joe Biden, former President Donald Trump, Vice President Kamala Harris along with a bunch of conservative and liberal viewpoints. Right. So, I have to be clear here. We aren't taking sides today. We aren't endorsing any of the politics discussed. We're just impartially reading the digital footprint left behind to help you understand the mechanics of this social media evolution. Our focus is strictly on the mechanics of the discourse. You know, what the data reflects, what was said, and how it spread. Okay, let's unpack this. To really understand the explosion of outrage and compliance in 2020, we have to recognize that human pushback again</a:t>
             </a:r>
           </a:p>
         </p:txBody>
@@ -1773,82 +1875,12 @@
           </a:p>
           <a:p>
             <a:r>
-              <a:t>File and analysis record</a:t>
-            </a:r>
-          </a:p>
-          <a:p>
-            <a:r>
-              <a:t>File | podcast.m4a</a:t>
-            </a:r>
-          </a:p>
-          <a:p>
-            <a:r>
-              <a:t>Analysis ID | 7e1a6917-52a1-453d-8dda-9c4842232f31</a:t>
-            </a:r>
-          </a:p>
-          <a:p>
-            <a:r>
-              <a:t>Generated | 2026-09-26T22:31:07+00:00</a:t>
-            </a:r>
-          </a:p>
-          <a:p>
-            <a:r>
-              <a:t>Tool | SDA Vision 0.1.0</a:t>
-            </a:r>
-          </a:p>
-          <a:p>
-            <a:r>
-              <a:t>Models | claude-opus-5-5, gemini-3.8-flash, gpt-6-astra</a:t>
-            </a:r>
-          </a:p>
-          <a:p>
-            <a:r>
-              <a:t>Method version | pdf-preparation-2026-09-26.1</a:t>
-            </a:r>
-          </a:p>
-          <a:p>
-            <a:r>
-              <a:t>Analysis lens | general</a:t>
-            </a:r>
-          </a:p>
-          <a:p>
-            <a:r>
-              <a:t>Original SHA-256 | 58663a6a9e4b634bdb703ead0aaa7cd6dce7fbf97e70c3c1cc61b3311b94c0b4</a:t>
-            </a:r>
-          </a:p>
-          <a:p>
-            <a:r>
-              <a:t>Ingestion note 1 | Transcoded to 5737 KB mono 16 kHz (≤1800s).</a:t>
-            </a:r>
-          </a:p>
-          <a:p>
-            <a:r>
-              <a:t>Ingestion note 2 | Transcribed with Gemini.</a:t>
-            </a:r>
-          </a:p>
-          <a:p>
-            <a:r>
-              <a:t>Ingestion note 3 | Standalone-audio content assessment covers the transcript. AI-origin detection from sound is outside this assessment. Original-file C2PA was checked before transcription and is reported separately.</a:t>
-            </a:r>
-          </a:p>
-          <a:p>
-            <a:r>
-              <a:t>Ingestion note 4 | Audio tracks inspected locally. Soundtrack uploads require a separate optional check; AI-origin detection from sound is outside this workflow.</a:t>
-            </a:r>
-          </a:p>
-          <a:p>
-            <a:r>
-              <a:t>Ingestion note 5 | Fresh provider replies acquired for eleven-examples-refresh-20260926-r1; report assembled locally from the saved responses without further API calls.</a:t>
-            </a:r>
-          </a:p>
-          <a:p>
-            <a:r>
-              <a:t>Ingestion note 6 | Transcript analysis used the first 12000 characters of a fresh 25985-character transcription; this report retains its first 4000 characters. Sound-origin detection is outside this check.</a:t>
-            </a:r>
-          </a:p>
-          <a:p>
-            <a:r>
-              <a:t>Ingestion note 7 | Provider latency values are restored from the acquisition receipts (maximum sampled-frame latency per provider); raw replies and assessment results are unchanged by this bookkeeping step.</a:t>
+              <a:t>Transcribed text</a:t>
+            </a:r>
+          </a:p>
+          <a:p>
+            <a:r>
+              <a:t>Recorded text | Imagine holding a like a simple piece of cloth in your hand. Let's say it's 2019, and it's just a standard surgical mask. Right, just a boring everyday medical supply, something you'd really only see at the dentist office. Exactly. But then fast-forward to the end of 2020, and that exact same piece of cloth had morphed into like a literal measure of your morality. Oh, absolutely. It became a symbol of your political affiliation, your patriotism, even. It's just wild to think about. I mean, today we are looking at the exact digital moment a basic health mandate turned into a full-blown ideological war. It really is one of the most compressed, intense sociological shifts we've ever witnessed. Yeah. We went from a public that largely didn't think about epidemiology at all to a society where every single person was forced to take a public, highly visible stance on a global health crisis. And usually, you know, when we talk about a massive global event like that, we have to rely on historians decades later to piece together the public mood. Right, digging through old newspaper clippings or a diary entries. Exactly. But for the COVID-19 pandemic, we have this complete, real-time behavioral laboratory. So, we are grounding our conversation today in this fascinating peer-reviewed study from the journal Vaccine. Yes, authored by Sam Martin and Samantha Vanderslott from the Oxford Vaccine Group. And the scale of their research here is what makes it so robust, right? Oh, totally. They analyzed this massive data set of 7.89 million English-language tweets. Wow. Yeah, from the US and the UK, spanning a very specific window, basically June 1st, 2020 to June 1st, 2021. And they didn't just like count how many times the word mask or vaccine was used, which is what I would have assumed. No, they went way deeper. They utilized media monitoring software called Meltwater and text network analysis software called InfraNodus. Which uh we should probably explain how those tools work because it's vital for understanding the whole study. Please do. So Meltwater acts like this giant net scraping the internet and pulling in every public conversation based on specific keywords. Right. But InfraNodus acts as the brain. It actually maps relationships between words. So if the word mask is constantly sitting right next to the word tyranny or sheep in millions of tweets, The software draws a thick digital line between them. Exactly. It lets researchers see the exact architecture of public sentiment. It's almost like looking at a real-time MRI of society's collective anxiety. That's a really great way to visualize it. It moves us past just individual anecdotes, Yeah. Yeah. and it shows us the actual structural flow of ideas. Yeah. So, the mission for our deep dive today is to explore a very specific phenomenon uncovered in this flow. We want to see how pre-existing anti-vaccine groups and newly formed anti-mask groups actually merged into this massive digital powerhouse. And to understand the psychological, social, and political drivers behind how the public reacted to these mandates. Exactly. Now uh a very quick heads up to you the listener before we dive into the timeline, the data we are analyzing today is heavily political. Very heavily. Yeah, it involves major figures from the left and the right. We're talking President Joe Biden, former President Donald Trump, Vice President Kamala Harris along with a bunch of conservative and liberal viewpoints. Right. So, I have to be clear here. We aren't taking sides today. We aren't endorsing any of the politics discussed. We're just impartially reading the digital footprint left behind to help you understand the mechanics of this social media evolution. Our focus is strictly on the mechanics of the discourse. You know, what the data reflects, what was said, and how it spread. Okay, let's unpack this. To really understand the explosion of outrage and compliance in 2020, we have to recognize that human pushback again</a:t>
             </a:r>
           </a:p>
         </p:txBody>
@@ -1874,6 +1906,246 @@
 </file>
 
 <file path=ppt/notesSlides/notesSlide22.xml><?xml version="1.0" encoding="utf-8"?>
+<p:notes xmlns:a="http://schemas.openxmlformats.org/drawingml/2006/main" xmlns:p="http://schemas.openxmlformats.org/presentationml/2006/main" xmlns:r="http://schemas.openxmlformats.org/officeDocument/2006/relationships">
+  <p:cSld>
+    <p:spTree>
+      <p:nvGrpSpPr>
+        <p:cNvPr id="1" name=""/>
+        <p:cNvGrpSpPr/>
+        <p:nvPr/>
+      </p:nvGrpSpPr>
+      <p:grpSpPr>
+        <a:xfrm>
+          <a:off x="0" y="0"/>
+          <a:ext cx="0" cy="0"/>
+          <a:chOff x="0" y="0"/>
+          <a:chExt cx="0" cy="0"/>
+        </a:xfrm>
+      </p:grpSpPr>
+      <p:sp>
+        <p:nvSpPr>
+          <p:cNvPr id="2" name="Slide Image Placeholder 1"/>
+          <p:cNvSpPr>
+            <a:spLocks noGrp="1"/>
+          </p:cNvSpPr>
+          <p:nvPr>
+            <p:ph type="sldImg" idx="2"/>
+          </p:nvPr>
+        </p:nvSpPr>
+        <p:spPr/>
+      </p:sp>
+      <p:sp>
+        <p:nvSpPr>
+          <p:cNvPr id="3" name="Notes Placeholder 2"/>
+          <p:cNvSpPr>
+            <a:spLocks noGrp="1"/>
+          </p:cNvSpPr>
+          <p:nvPr>
+            <p:ph type="body" idx="3" sz="quarter"/>
+          </p:nvPr>
+        </p:nvSpPr>
+        <p:spPr/>
+        <p:txBody>
+          <a:bodyPr/>
+          <a:lstStyle/>
+          <a:p>
+            <a:r>
+              <a:t>podcast.m4a</a:t>
+            </a:r>
+          </a:p>
+          <a:p>
+            <a:r>
+              <a:t>How this assessment was reached</a:t>
+            </a:r>
+          </a:p>
+          <a:p>
+            <a:r>
+              <a:t>1. override | outcome=none; detail=No confirmed C2PA AI assertion or SynthID watermark. Origin remains unresolved by these checks.</a:t>
+            </a:r>
+          </a:p>
+          <a:p>
+            <a:r>
+              <a:t>2. model_agreement | synthetic=['Claude Analysis', 'OpenAI Analysis', 'Gemini Analysis']; authentic=[]; uncertain=[]; forensic_supports_synthetic=False</a:t>
+            </a:r>
+          </a:p>
+          <a:p>
+            <a:r>
+              <a:t>3. verdict | value=synthetic_likely; confidence=high; reason=3 models agree this is likely synthetic.</a:t>
+            </a:r>
+          </a:p>
+        </p:txBody>
+      </p:sp>
+      <p:sp>
+        <p:nvSpPr>
+          <p:cNvPr id="4" name="Slide Number Placeholder 3"/>
+          <p:cNvSpPr>
+            <a:spLocks noGrp="1"/>
+          </p:cNvSpPr>
+          <p:nvPr>
+            <p:ph type="sldNum" idx="5" sz="quarter"/>
+          </p:nvPr>
+        </p:nvSpPr>
+        <p:spPr/>
+      </p:sp>
+    </p:spTree>
+  </p:cSld>
+  <p:clrMapOvr>
+    <a:masterClrMapping/>
+  </p:clrMapOvr>
+</p:notes>
+</file>
+
+<file path=ppt/notesSlides/notesSlide23.xml><?xml version="1.0" encoding="utf-8"?>
+<p:notes xmlns:a="http://schemas.openxmlformats.org/drawingml/2006/main" xmlns:p="http://schemas.openxmlformats.org/presentationml/2006/main" xmlns:r="http://schemas.openxmlformats.org/officeDocument/2006/relationships">
+  <p:cSld>
+    <p:spTree>
+      <p:nvGrpSpPr>
+        <p:cNvPr id="1" name=""/>
+        <p:cNvGrpSpPr/>
+        <p:nvPr/>
+      </p:nvGrpSpPr>
+      <p:grpSpPr>
+        <a:xfrm>
+          <a:off x="0" y="0"/>
+          <a:ext cx="0" cy="0"/>
+          <a:chOff x="0" y="0"/>
+          <a:chExt cx="0" cy="0"/>
+        </a:xfrm>
+      </p:grpSpPr>
+      <p:sp>
+        <p:nvSpPr>
+          <p:cNvPr id="2" name="Slide Image Placeholder 1"/>
+          <p:cNvSpPr>
+            <a:spLocks noGrp="1"/>
+          </p:cNvSpPr>
+          <p:nvPr>
+            <p:ph type="sldImg" idx="2"/>
+          </p:nvPr>
+        </p:nvSpPr>
+        <p:spPr/>
+      </p:sp>
+      <p:sp>
+        <p:nvSpPr>
+          <p:cNvPr id="3" name="Notes Placeholder 2"/>
+          <p:cNvSpPr>
+            <a:spLocks noGrp="1"/>
+          </p:cNvSpPr>
+          <p:nvPr>
+            <p:ph type="body" idx="3" sz="quarter"/>
+          </p:nvPr>
+        </p:nvSpPr>
+        <p:spPr/>
+        <p:txBody>
+          <a:bodyPr/>
+          <a:lstStyle/>
+          <a:p>
+            <a:r>
+              <a:t>podcast.m4a</a:t>
+            </a:r>
+          </a:p>
+          <a:p>
+            <a:r>
+              <a:t>File and analysis record</a:t>
+            </a:r>
+          </a:p>
+          <a:p>
+            <a:r>
+              <a:t>File | podcast.m4a</a:t>
+            </a:r>
+          </a:p>
+          <a:p>
+            <a:r>
+              <a:t>Analysis ID | 7e1a6917-52a1-453d-8dda-9c4842232f31</a:t>
+            </a:r>
+          </a:p>
+          <a:p>
+            <a:r>
+              <a:t>Generated | 2026-09-26T22:31:07+00:00</a:t>
+            </a:r>
+          </a:p>
+          <a:p>
+            <a:r>
+              <a:t>Tool | SDA Vision 0.1.0</a:t>
+            </a:r>
+          </a:p>
+          <a:p>
+            <a:r>
+              <a:t>Models | claude-opus-5-5, gemini-3.8-flash, gpt-6-astra</a:t>
+            </a:r>
+          </a:p>
+          <a:p>
+            <a:r>
+              <a:t>Method version | pdf-preparation-2026-09-26.1</a:t>
+            </a:r>
+          </a:p>
+          <a:p>
+            <a:r>
+              <a:t>Analysis lens | general</a:t>
+            </a:r>
+          </a:p>
+          <a:p>
+            <a:r>
+              <a:t>Original SHA-256 | 58663a6a9e4b634bdb703ead0aaa7cd6dce7fbf97e70c3c1cc61b3311b94c0b4</a:t>
+            </a:r>
+          </a:p>
+          <a:p>
+            <a:r>
+              <a:t>Ingestion note 1 | Transcoded to 5737 KB mono 16 kHz (≤1800s).</a:t>
+            </a:r>
+          </a:p>
+          <a:p>
+            <a:r>
+              <a:t>Ingestion note 2 | Transcribed with Gemini.</a:t>
+            </a:r>
+          </a:p>
+          <a:p>
+            <a:r>
+              <a:t>Ingestion note 3 | Standalone-audio content assessment covers the transcript. AI-origin detection from sound is outside this assessment. Original-file C2PA was checked before transcription and is reported separately.</a:t>
+            </a:r>
+          </a:p>
+          <a:p>
+            <a:r>
+              <a:t>Ingestion note 4 | Audio tracks inspected locally. Soundtrack uploads require a separate optional check; AI-origin detection from sound is outside this workflow.</a:t>
+            </a:r>
+          </a:p>
+          <a:p>
+            <a:r>
+              <a:t>Ingestion note 5 | Fresh provider replies acquired for eleven-examples-refresh-20260926-r1; report assembled locally from the saved responses without further API calls.</a:t>
+            </a:r>
+          </a:p>
+          <a:p>
+            <a:r>
+              <a:t>Ingestion note 6 | Transcript analysis used the first 12000 characters of a fresh 25985-character transcription; this report retains its first 4000 characters. Sound-origin detection is outside this check.</a:t>
+            </a:r>
+          </a:p>
+          <a:p>
+            <a:r>
+              <a:t>Ingestion note 7 | Provider latency values are restored from the acquisition receipts (maximum sampled-frame latency per provider); raw replies and assessment results are unchanged by this bookkeeping step.</a:t>
+            </a:r>
+          </a:p>
+        </p:txBody>
+      </p:sp>
+      <p:sp>
+        <p:nvSpPr>
+          <p:cNvPr id="4" name="Slide Number Placeholder 3"/>
+          <p:cNvSpPr>
+            <a:spLocks noGrp="1"/>
+          </p:cNvSpPr>
+          <p:nvPr>
+            <p:ph type="sldNum" idx="5" sz="quarter"/>
+          </p:nvPr>
+        </p:nvSpPr>
+        <p:spPr/>
+      </p:sp>
+    </p:spTree>
+  </p:cSld>
+  <p:clrMapOvr>
+    <a:masterClrMapping/>
+  </p:clrMapOvr>
+</p:notes>
+</file>
+
+<file path=ppt/notesSlides/notesSlide24.xml><?xml version="1.0" encoding="utf-8"?>
 <p:notes xmlns:a="http://schemas.openxmlformats.org/drawingml/2006/main" xmlns:p="http://schemas.openxmlformats.org/presentationml/2006/main" xmlns:r="http://schemas.openxmlformats.org/officeDocument/2006/relationships">
   <p:cSld>
     <p:spTree>
@@ -9558,7 +9830,7 @@
               </a:defRPr>
             </a:pPr>
             <a:r>
-              <a:t>Assessment coverage</a:t>
+              <a:t>Optional audio excerpt description</a:t>
             </a:r>
           </a:p>
         </p:txBody>
@@ -9745,7 +10017,7 @@
         </p:nvGraphicFramePr>
         <p:xfrm>
           <a:off x="365760" y="1700784"/>
-          <a:ext cx="8412479" cy="755904"/>
+          <a:ext cx="8412479" cy="349504"/>
         </p:xfrm>
         <a:graphic>
           <a:graphicData uri="http://schemas.openxmlformats.org/drawingml/2006/table">
@@ -9757,7 +10029,7 @@
                 <a:gridCol w="2271369"/>
                 <a:gridCol w="6141110"/>
               </a:tblGrid>
-              <a:tr h="755904">
+              <a:tr h="349504">
                 <a:tc>
                   <a:txBody>
                     <a:bodyPr wrap="none"/>
@@ -9808,45 +10080,7 @@
                         </a:defRPr>
                       </a:pPr>
                       <a:r>
-                        <a:t>Visual verdicts for videos cover the sampled still frames. Standalone-audio content</a:t>
-                      </a:r>
-                    </a:p>
-                    <a:p>
-                      <a:pPr>
-                        <a:lnSpc>
-                          <a:spcPts val="1600"/>
-                        </a:lnSpc>
-                        <a:spcAft>
-                          <a:spcPts val="0"/>
-                        </a:spcAft>
-                        <a:defRPr sz="1200" b="0">
-                          <a:solidFill>
-                            <a:srgbClr val="21243A"/>
-                          </a:solidFill>
-                          <a:latin typeface="Arial"/>
-                        </a:defRPr>
-                      </a:pPr>
-                      <a:r>
-                        <a:t>assessments cover the transcript. Soundtrack-origin detection and</a:t>
-                      </a:r>
-                    </a:p>
-                    <a:p>
-                      <a:pPr>
-                        <a:lnSpc>
-                          <a:spcPts val="1600"/>
-                        </a:lnSpc>
-                        <a:spcAft>
-                          <a:spcPts val="0"/>
-                        </a:spcAft>
-                        <a:defRPr sz="1200" b="0">
-                          <a:solidFill>
-                            <a:srgbClr val="21243A"/>
-                          </a:solidFill>
-                          <a:latin typeface="Arial"/>
-                        </a:defRPr>
-                      </a:pPr>
-                      <a:r>
-                        <a:t>continuous-motion analysis are outside these assessments.</a:t>
+                        <a:t>Google Gemini / gemini-3.8-flash; status: ok; content: speech.</a:t>
                       </a:r>
                     </a:p>
                   </a:txBody>
@@ -9870,8 +10104,8 @@
           <p:nvPr/>
         </p:nvGraphicFramePr>
         <p:xfrm>
-          <a:off x="365760" y="2456688"/>
-          <a:ext cx="8412479" cy="755904"/>
+          <a:off x="365760" y="2050288"/>
+          <a:ext cx="8412479" cy="349504"/>
         </p:xfrm>
         <a:graphic>
           <a:graphicData uri="http://schemas.openxmlformats.org/drawingml/2006/table">
@@ -9883,7 +10117,7 @@
                 <a:gridCol w="2271369"/>
                 <a:gridCol w="6141110"/>
               </a:tblGrid>
-              <a:tr h="755904">
+              <a:tr h="349504">
                 <a:tc>
                   <a:txBody>
                     <a:bodyPr wrap="none"/>
@@ -9934,51 +10168,743 @@
                         </a:defRPr>
                       </a:pPr>
                       <a:r>
-                        <a:t>Original-file credentials, excerpt descriptions and visual interpretation are</a:t>
-                      </a:r>
-                    </a:p>
-                    <a:p>
-                      <a:pPr>
-                        <a:lnSpc>
-                          <a:spcPts val="1600"/>
-                        </a:lnSpc>
-                        <a:spcAft>
-                          <a:spcPts val="0"/>
-                        </a:spcAft>
-                        <a:defRPr sz="1200" b="0">
-                          <a:solidFill>
-                            <a:srgbClr val="21243A"/>
-                          </a:solidFill>
-                          <a:latin typeface="Arial"/>
-                        </a:defRPr>
-                      </a:pPr>
-                      <a:r>
-                        <a:t>recorded separately. Credential coverage of an individual audio track remains</a:t>
-                      </a:r>
-                    </a:p>
-                    <a:p>
-                      <a:pPr>
-                        <a:lnSpc>
-                          <a:spcPts val="1600"/>
-                        </a:lnSpc>
-                        <a:spcAft>
-                          <a:spcPts val="0"/>
-                        </a:spcAft>
-                        <a:defRPr sz="1200" b="0">
-                          <a:solidFill>
-                            <a:srgbClr val="21243A"/>
-                          </a:solidFill>
-                          <a:latin typeface="Arial"/>
-                        </a:defRPr>
-                      </a:pPr>
-                      <a:r>
-                        <a:t>unresolved by this workflow.</a:t>
+                        <a:t>Checked: 2026-09-27T19:20:45.393134+00:00; consent to Google recorded: True.</a:t>
                       </a:r>
                     </a:p>
                   </a:txBody>
                   <a:tcPr marL="82296" marR="82296" marT="64008" marB="64008">
                     <a:solidFill>
                       <a:srgbClr val="FFFFFF"/>
+                    </a:solidFill>
+                  </a:tcPr>
+                </a:tc>
+              </a:tr>
+            </a:tbl>
+          </a:graphicData>
+        </a:graphic>
+      </p:graphicFrame>
+      <p:graphicFrame>
+        <p:nvGraphicFramePr>
+          <p:cNvPr id="9" name="Table 8"/>
+          <p:cNvGraphicFramePr>
+            <a:graphicFrameLocks noGrp="1"/>
+          </p:cNvGraphicFramePr>
+          <p:nvPr/>
+        </p:nvGraphicFramePr>
+        <p:xfrm>
+          <a:off x="365760" y="2399792"/>
+          <a:ext cx="8412479" cy="349504"/>
+        </p:xfrm>
+        <a:graphic>
+          <a:graphicData uri="http://schemas.openxmlformats.org/drawingml/2006/table">
+            <a:tbl>
+              <a:tblPr firstRow="1" bandRow="1">
+                <a:tableStyleId>{5C22544A-7EE6-4342-B048-85BDC9FD1C3A}</a:tableStyleId>
+              </a:tblPr>
+              <a:tblGrid>
+                <a:gridCol w="2271369"/>
+                <a:gridCol w="6141110"/>
+              </a:tblGrid>
+              <a:tr h="349504">
+                <a:tc>
+                  <a:txBody>
+                    <a:bodyPr wrap="none"/>
+                    <a:lstStyle/>
+                    <a:p>
+                      <a:pPr>
+                        <a:lnSpc>
+                          <a:spcPts val="1600"/>
+                        </a:lnSpc>
+                        <a:spcAft>
+                          <a:spcPts val="0"/>
+                        </a:spcAft>
+                        <a:defRPr sz="1200" b="0">
+                          <a:solidFill>
+                            <a:srgbClr val="21243A"/>
+                          </a:solidFill>
+                          <a:latin typeface="Arial"/>
+                        </a:defRPr>
+                      </a:pPr>
+                      <a:r>
+                        <a:t>Record 3</a:t>
+                      </a:r>
+                    </a:p>
+                  </a:txBody>
+                  <a:tcPr marL="82296" marR="82296" marT="64008" marB="64008">
+                    <a:solidFill>
+                      <a:srgbClr val="F1F7F7"/>
+                    </a:solidFill>
+                  </a:tcPr>
+                </a:tc>
+                <a:tc>
+                  <a:txBody>
+                    <a:bodyPr wrap="none"/>
+                    <a:lstStyle/>
+                    <a:p>
+                      <a:pPr>
+                        <a:lnSpc>
+                          <a:spcPts val="1600"/>
+                        </a:lnSpc>
+                        <a:spcAft>
+                          <a:spcPts val="0"/>
+                        </a:spcAft>
+                        <a:defRPr sz="1200" b="0">
+                          <a:solidFill>
+                            <a:srgbClr val="21243A"/>
+                          </a:solidFill>
+                          <a:latin typeface="Arial"/>
+                        </a:defRPr>
+                      </a:pPr>
+                      <a:r>
+                        <a:t>Track 0; excerpt 0s + 20.0s; prompt: soundtrack-content-v1.</a:t>
+                      </a:r>
+                    </a:p>
+                  </a:txBody>
+                  <a:tcPr marL="82296" marR="82296" marT="64008" marB="64008">
+                    <a:solidFill>
+                      <a:srgbClr val="F1F7F7"/>
+                    </a:solidFill>
+                  </a:tcPr>
+                </a:tc>
+              </a:tr>
+            </a:tbl>
+          </a:graphicData>
+        </a:graphic>
+      </p:graphicFrame>
+      <p:graphicFrame>
+        <p:nvGraphicFramePr>
+          <p:cNvPr id="10" name="Table 9"/>
+          <p:cNvGraphicFramePr>
+            <a:graphicFrameLocks noGrp="1"/>
+          </p:cNvGraphicFramePr>
+          <p:nvPr/>
+        </p:nvGraphicFramePr>
+        <p:xfrm>
+          <a:off x="365760" y="2749296"/>
+          <a:ext cx="8412479" cy="959103"/>
+        </p:xfrm>
+        <a:graphic>
+          <a:graphicData uri="http://schemas.openxmlformats.org/drawingml/2006/table">
+            <a:tbl>
+              <a:tblPr firstRow="1" bandRow="1">
+                <a:tableStyleId>{5C22544A-7EE6-4342-B048-85BDC9FD1C3A}</a:tableStyleId>
+              </a:tblPr>
+              <a:tblGrid>
+                <a:gridCol w="2271369"/>
+                <a:gridCol w="6141110"/>
+              </a:tblGrid>
+              <a:tr h="959103">
+                <a:tc>
+                  <a:txBody>
+                    <a:bodyPr wrap="none"/>
+                    <a:lstStyle/>
+                    <a:p>
+                      <a:pPr>
+                        <a:lnSpc>
+                          <a:spcPts val="1600"/>
+                        </a:lnSpc>
+                        <a:spcAft>
+                          <a:spcPts val="0"/>
+                        </a:spcAft>
+                        <a:defRPr sz="1200" b="0">
+                          <a:solidFill>
+                            <a:srgbClr val="21243A"/>
+                          </a:solidFill>
+                          <a:latin typeface="Arial"/>
+                        </a:defRPr>
+                      </a:pPr>
+                      <a:r>
+                        <a:t>Record 4</a:t>
+                      </a:r>
+                    </a:p>
+                  </a:txBody>
+                  <a:tcPr marL="82296" marR="82296" marT="64008" marB="64008">
+                    <a:solidFill>
+                      <a:srgbClr val="FFFFFF"/>
+                    </a:solidFill>
+                  </a:tcPr>
+                </a:tc>
+                <a:tc>
+                  <a:txBody>
+                    <a:bodyPr wrap="none"/>
+                    <a:lstStyle/>
+                    <a:p>
+                      <a:pPr>
+                        <a:lnSpc>
+                          <a:spcPts val="1600"/>
+                        </a:lnSpc>
+                        <a:spcAft>
+                          <a:spcPts val="0"/>
+                        </a:spcAft>
+                        <a:defRPr sz="1200" b="0">
+                          <a:solidFill>
+                            <a:srgbClr val="21243A"/>
+                          </a:solidFill>
+                          <a:latin typeface="Arial"/>
+                        </a:defRPr>
+                      </a:pPr>
+                      <a:r>
+                        <a:t>Original SHA-256:</a:t>
+                      </a:r>
+                    </a:p>
+                    <a:p>
+                      <a:pPr>
+                        <a:lnSpc>
+                          <a:spcPts val="1600"/>
+                        </a:lnSpc>
+                        <a:spcAft>
+                          <a:spcPts val="0"/>
+                        </a:spcAft>
+                        <a:defRPr sz="1200" b="0">
+                          <a:solidFill>
+                            <a:srgbClr val="21243A"/>
+                          </a:solidFill>
+                          <a:latin typeface="Arial"/>
+                        </a:defRPr>
+                      </a:pPr>
+                      <a:r>
+                        <a:t>58663a6a9e4b634bdb703ead0aaa7cd6dce7fbf97e70c3c1cc61b3311b94c0b4;</a:t>
+                      </a:r>
+                    </a:p>
+                    <a:p>
+                      <a:pPr>
+                        <a:lnSpc>
+                          <a:spcPts val="1600"/>
+                        </a:lnSpc>
+                        <a:spcAft>
+                          <a:spcPts val="0"/>
+                        </a:spcAft>
+                        <a:defRPr sz="1200" b="0">
+                          <a:solidFill>
+                            <a:srgbClr val="21243A"/>
+                          </a:solidFill>
+                          <a:latin typeface="Arial"/>
+                        </a:defRPr>
+                      </a:pPr>
+                      <a:r>
+                        <a:t>excerpt SHA-256:</a:t>
+                      </a:r>
+                    </a:p>
+                    <a:p>
+                      <a:pPr>
+                        <a:lnSpc>
+                          <a:spcPts val="1600"/>
+                        </a:lnSpc>
+                        <a:spcAft>
+                          <a:spcPts val="0"/>
+                        </a:spcAft>
+                        <a:defRPr sz="1200" b="0">
+                          <a:solidFill>
+                            <a:srgbClr val="21243A"/>
+                          </a:solidFill>
+                          <a:latin typeface="Arial"/>
+                        </a:defRPr>
+                      </a:pPr>
+                      <a:r>
+                        <a:t>f9713796490ddc9624cfc92412738eaca7192d9cbde08dd259237e29e2aa2128.</a:t>
+                      </a:r>
+                    </a:p>
+                  </a:txBody>
+                  <a:tcPr marL="82296" marR="82296" marT="64008" marB="64008">
+                    <a:solidFill>
+                      <a:srgbClr val="FFFFFF"/>
+                    </a:solidFill>
+                  </a:tcPr>
+                </a:tc>
+              </a:tr>
+            </a:tbl>
+          </a:graphicData>
+        </a:graphic>
+      </p:graphicFrame>
+      <p:graphicFrame>
+        <p:nvGraphicFramePr>
+          <p:cNvPr id="11" name="Table 10"/>
+          <p:cNvGraphicFramePr>
+            <a:graphicFrameLocks noGrp="1"/>
+          </p:cNvGraphicFramePr>
+          <p:nvPr/>
+        </p:nvGraphicFramePr>
+        <p:xfrm>
+          <a:off x="365760" y="3708400"/>
+          <a:ext cx="8412479" cy="349504"/>
+        </p:xfrm>
+        <a:graphic>
+          <a:graphicData uri="http://schemas.openxmlformats.org/drawingml/2006/table">
+            <a:tbl>
+              <a:tblPr firstRow="1" bandRow="1">
+                <a:tableStyleId>{5C22544A-7EE6-4342-B048-85BDC9FD1C3A}</a:tableStyleId>
+              </a:tblPr>
+              <a:tblGrid>
+                <a:gridCol w="2271369"/>
+                <a:gridCol w="6141110"/>
+              </a:tblGrid>
+              <a:tr h="349504">
+                <a:tc>
+                  <a:txBody>
+                    <a:bodyPr wrap="none"/>
+                    <a:lstStyle/>
+                    <a:p>
+                      <a:pPr>
+                        <a:lnSpc>
+                          <a:spcPts val="1600"/>
+                        </a:lnSpc>
+                        <a:spcAft>
+                          <a:spcPts val="0"/>
+                        </a:spcAft>
+                        <a:defRPr sz="1200" b="0">
+                          <a:solidFill>
+                            <a:srgbClr val="21243A"/>
+                          </a:solidFill>
+                          <a:latin typeface="Arial"/>
+                        </a:defRPr>
+                      </a:pPr>
+                      <a:r>
+                        <a:t>Record 5</a:t>
+                      </a:r>
+                    </a:p>
+                  </a:txBody>
+                  <a:tcPr marL="82296" marR="82296" marT="64008" marB="64008">
+                    <a:solidFill>
+                      <a:srgbClr val="F1F7F7"/>
+                    </a:solidFill>
+                  </a:tcPr>
+                </a:tc>
+                <a:tc>
+                  <a:txBody>
+                    <a:bodyPr wrap="none"/>
+                    <a:lstStyle/>
+                    <a:p>
+                      <a:pPr>
+                        <a:lnSpc>
+                          <a:spcPts val="1600"/>
+                        </a:lnSpc>
+                        <a:spcAft>
+                          <a:spcPts val="0"/>
+                        </a:spcAft>
+                        <a:defRPr sz="1200" b="0">
+                          <a:solidFill>
+                            <a:srgbClr val="21243A"/>
+                          </a:solidFill>
+                          <a:latin typeface="Arial"/>
+                        </a:defRPr>
+                      </a:pPr>
+                      <a:r>
+                        <a:t>A female voice speaks in an interview or conversational tone.</a:t>
+                      </a:r>
+                    </a:p>
+                  </a:txBody>
+                  <a:tcPr marL="82296" marR="82296" marT="64008" marB="64008">
+                    <a:solidFill>
+                      <a:srgbClr val="F1F7F7"/>
+                    </a:solidFill>
+                  </a:tcPr>
+                </a:tc>
+              </a:tr>
+            </a:tbl>
+          </a:graphicData>
+        </a:graphic>
+      </p:graphicFrame>
+      <p:graphicFrame>
+        <p:nvGraphicFramePr>
+          <p:cNvPr id="12" name="Table 11"/>
+          <p:cNvGraphicFramePr>
+            <a:graphicFrameLocks noGrp="1"/>
+          </p:cNvGraphicFramePr>
+          <p:nvPr/>
+        </p:nvGraphicFramePr>
+        <p:xfrm>
+          <a:off x="365760" y="4057904"/>
+          <a:ext cx="8412479" cy="349504"/>
+        </p:xfrm>
+        <a:graphic>
+          <a:graphicData uri="http://schemas.openxmlformats.org/drawingml/2006/table">
+            <a:tbl>
+              <a:tblPr firstRow="1" bandRow="1">
+                <a:tableStyleId>{5C22544A-7EE6-4342-B048-85BDC9FD1C3A}</a:tableStyleId>
+              </a:tblPr>
+              <a:tblGrid>
+                <a:gridCol w="2271369"/>
+                <a:gridCol w="6141110"/>
+              </a:tblGrid>
+              <a:tr h="349504">
+                <a:tc>
+                  <a:txBody>
+                    <a:bodyPr wrap="none"/>
+                    <a:lstStyle/>
+                    <a:p>
+                      <a:pPr>
+                        <a:lnSpc>
+                          <a:spcPts val="1600"/>
+                        </a:lnSpc>
+                        <a:spcAft>
+                          <a:spcPts val="0"/>
+                        </a:spcAft>
+                        <a:defRPr sz="1200" b="0">
+                          <a:solidFill>
+                            <a:srgbClr val="21243A"/>
+                          </a:solidFill>
+                          <a:latin typeface="Arial"/>
+                        </a:defRPr>
+                      </a:pPr>
+                      <a:r>
+                        <a:t>Record 6</a:t>
+                      </a:r>
+                    </a:p>
+                  </a:txBody>
+                  <a:tcPr marL="82296" marR="82296" marT="64008" marB="64008">
+                    <a:solidFill>
+                      <a:srgbClr val="FFFFFF"/>
+                    </a:solidFill>
+                  </a:tcPr>
+                </a:tc>
+                <a:tc>
+                  <a:txBody>
+                    <a:bodyPr wrap="none"/>
+                    <a:lstStyle/>
+                    <a:p>
+                      <a:pPr>
+                        <a:lnSpc>
+                          <a:spcPts val="1600"/>
+                        </a:lnSpc>
+                        <a:spcAft>
+                          <a:spcPts val="0"/>
+                        </a:spcAft>
+                        <a:defRPr sz="1200" b="0">
+                          <a:solidFill>
+                            <a:srgbClr val="21243A"/>
+                          </a:solidFill>
+                          <a:latin typeface="Arial"/>
+                        </a:defRPr>
+                      </a:pPr>
+                      <a:r>
+                        <a:t>A male voice responds briefly in agreement.</a:t>
+                      </a:r>
+                    </a:p>
+                  </a:txBody>
+                  <a:tcPr marL="82296" marR="82296" marT="64008" marB="64008">
+                    <a:solidFill>
+                      <a:srgbClr val="FFFFFF"/>
+                    </a:solidFill>
+                  </a:tcPr>
+                </a:tc>
+              </a:tr>
+            </a:tbl>
+          </a:graphicData>
+        </a:graphic>
+      </p:graphicFrame>
+      <p:graphicFrame>
+        <p:nvGraphicFramePr>
+          <p:cNvPr id="13" name="Table 12"/>
+          <p:cNvGraphicFramePr>
+            <a:graphicFrameLocks noGrp="1"/>
+          </p:cNvGraphicFramePr>
+          <p:nvPr/>
+        </p:nvGraphicFramePr>
+        <p:xfrm>
+          <a:off x="365760" y="4407408"/>
+          <a:ext cx="8412479" cy="349504"/>
+        </p:xfrm>
+        <a:graphic>
+          <a:graphicData uri="http://schemas.openxmlformats.org/drawingml/2006/table">
+            <a:tbl>
+              <a:tblPr firstRow="1" bandRow="1">
+                <a:tableStyleId>{5C22544A-7EE6-4342-B048-85BDC9FD1C3A}</a:tableStyleId>
+              </a:tblPr>
+              <a:tblGrid>
+                <a:gridCol w="2271369"/>
+                <a:gridCol w="6141110"/>
+              </a:tblGrid>
+              <a:tr h="349504">
+                <a:tc>
+                  <a:txBody>
+                    <a:bodyPr wrap="none"/>
+                    <a:lstStyle/>
+                    <a:p>
+                      <a:pPr>
+                        <a:lnSpc>
+                          <a:spcPts val="1600"/>
+                        </a:lnSpc>
+                        <a:spcAft>
+                          <a:spcPts val="0"/>
+                        </a:spcAft>
+                        <a:defRPr sz="1200" b="0">
+                          <a:solidFill>
+                            <a:srgbClr val="21243A"/>
+                          </a:solidFill>
+                          <a:latin typeface="Arial"/>
+                        </a:defRPr>
+                      </a:pPr>
+                      <a:r>
+                        <a:t>Record 7</a:t>
+                      </a:r>
+                    </a:p>
+                  </a:txBody>
+                  <a:tcPr marL="82296" marR="82296" marT="64008" marB="64008">
+                    <a:solidFill>
+                      <a:srgbClr val="F1F7F7"/>
+                    </a:solidFill>
+                  </a:tcPr>
+                </a:tc>
+                <a:tc>
+                  <a:txBody>
+                    <a:bodyPr wrap="none"/>
+                    <a:lstStyle/>
+                    <a:p>
+                      <a:pPr>
+                        <a:lnSpc>
+                          <a:spcPts val="1600"/>
+                        </a:lnSpc>
+                        <a:spcAft>
+                          <a:spcPts val="0"/>
+                        </a:spcAft>
+                        <a:defRPr sz="1200" b="0">
+                          <a:solidFill>
+                            <a:srgbClr val="21243A"/>
+                          </a:solidFill>
+                          <a:latin typeface="Arial"/>
+                        </a:defRPr>
+                      </a:pPr>
+                      <a:r>
+                        <a:t>The conversation sounds like a podcast or radio broadcast discussion.</a:t>
+                      </a:r>
+                    </a:p>
+                  </a:txBody>
+                  <a:tcPr marL="82296" marR="82296" marT="64008" marB="64008">
+                    <a:solidFill>
+                      <a:srgbClr val="F1F7F7"/>
+                    </a:solidFill>
+                  </a:tcPr>
+                </a:tc>
+              </a:tr>
+            </a:tbl>
+          </a:graphicData>
+        </a:graphic>
+      </p:graphicFrame>
+      <p:graphicFrame>
+        <p:nvGraphicFramePr>
+          <p:cNvPr id="14" name="Table 13"/>
+          <p:cNvGraphicFramePr>
+            <a:graphicFrameLocks noGrp="1"/>
+          </p:cNvGraphicFramePr>
+          <p:nvPr/>
+        </p:nvGraphicFramePr>
+        <p:xfrm>
+          <a:off x="365760" y="4756912"/>
+          <a:ext cx="8412479" cy="349504"/>
+        </p:xfrm>
+        <a:graphic>
+          <a:graphicData uri="http://schemas.openxmlformats.org/drawingml/2006/table">
+            <a:tbl>
+              <a:tblPr firstRow="1" bandRow="1">
+                <a:tableStyleId>{5C22544A-7EE6-4342-B048-85BDC9FD1C3A}</a:tableStyleId>
+              </a:tblPr>
+              <a:tblGrid>
+                <a:gridCol w="2271369"/>
+                <a:gridCol w="6141110"/>
+              </a:tblGrid>
+              <a:tr h="349504">
+                <a:tc>
+                  <a:txBody>
+                    <a:bodyPr wrap="none"/>
+                    <a:lstStyle/>
+                    <a:p>
+                      <a:pPr>
+                        <a:lnSpc>
+                          <a:spcPts val="1600"/>
+                        </a:lnSpc>
+                        <a:spcAft>
+                          <a:spcPts val="0"/>
+                        </a:spcAft>
+                        <a:defRPr sz="1200" b="0">
+                          <a:solidFill>
+                            <a:srgbClr val="21243A"/>
+                          </a:solidFill>
+                          <a:latin typeface="Arial"/>
+                        </a:defRPr>
+                      </a:pPr>
+                      <a:r>
+                        <a:t>Record 8</a:t>
+                      </a:r>
+                    </a:p>
+                  </a:txBody>
+                  <a:tcPr marL="82296" marR="82296" marT="64008" marB="64008">
+                    <a:solidFill>
+                      <a:srgbClr val="FFFFFF"/>
+                    </a:solidFill>
+                  </a:tcPr>
+                </a:tc>
+                <a:tc>
+                  <a:txBody>
+                    <a:bodyPr wrap="none"/>
+                    <a:lstStyle/>
+                    <a:p>
+                      <a:pPr>
+                        <a:lnSpc>
+                          <a:spcPts val="1600"/>
+                        </a:lnSpc>
+                        <a:spcAft>
+                          <a:spcPts val="0"/>
+                        </a:spcAft>
+                        <a:defRPr sz="1200" b="0">
+                          <a:solidFill>
+                            <a:srgbClr val="21243A"/>
+                          </a:solidFill>
+                          <a:latin typeface="Arial"/>
+                        </a:defRPr>
+                      </a:pPr>
+                      <a:r>
+                        <a:t>Audio is clean with minimal to no background noise.</a:t>
+                      </a:r>
+                    </a:p>
+                  </a:txBody>
+                  <a:tcPr marL="82296" marR="82296" marT="64008" marB="64008">
+                    <a:solidFill>
+                      <a:srgbClr val="FFFFFF"/>
+                    </a:solidFill>
+                  </a:tcPr>
+                </a:tc>
+              </a:tr>
+            </a:tbl>
+          </a:graphicData>
+        </a:graphic>
+      </p:graphicFrame>
+      <p:graphicFrame>
+        <p:nvGraphicFramePr>
+          <p:cNvPr id="15" name="Table 14"/>
+          <p:cNvGraphicFramePr>
+            <a:graphicFrameLocks noGrp="1"/>
+          </p:cNvGraphicFramePr>
+          <p:nvPr/>
+        </p:nvGraphicFramePr>
+        <p:xfrm>
+          <a:off x="365760" y="5106416"/>
+          <a:ext cx="8412479" cy="959103"/>
+        </p:xfrm>
+        <a:graphic>
+          <a:graphicData uri="http://schemas.openxmlformats.org/drawingml/2006/table">
+            <a:tbl>
+              <a:tblPr firstRow="1" bandRow="1">
+                <a:tableStyleId>{5C22544A-7EE6-4342-B048-85BDC9FD1C3A}</a:tableStyleId>
+              </a:tblPr>
+              <a:tblGrid>
+                <a:gridCol w="2271369"/>
+                <a:gridCol w="6141110"/>
+              </a:tblGrid>
+              <a:tr h="959103">
+                <a:tc>
+                  <a:txBody>
+                    <a:bodyPr wrap="none"/>
+                    <a:lstStyle/>
+                    <a:p>
+                      <a:pPr>
+                        <a:lnSpc>
+                          <a:spcPts val="1600"/>
+                        </a:lnSpc>
+                        <a:spcAft>
+                          <a:spcPts val="0"/>
+                        </a:spcAft>
+                        <a:defRPr sz="1200" b="0">
+                          <a:solidFill>
+                            <a:srgbClr val="21243A"/>
+                          </a:solidFill>
+                          <a:latin typeface="Arial"/>
+                        </a:defRPr>
+                      </a:pPr>
+                      <a:r>
+                        <a:t>Record 9</a:t>
+                      </a:r>
+                    </a:p>
+                  </a:txBody>
+                  <a:tcPr marL="82296" marR="82296" marT="64008" marB="64008">
+                    <a:solidFill>
+                      <a:srgbClr val="F1F7F7"/>
+                    </a:solidFill>
+                  </a:tcPr>
+                </a:tc>
+                <a:tc>
+                  <a:txBody>
+                    <a:bodyPr wrap="none"/>
+                    <a:lstStyle/>
+                    <a:p>
+                      <a:pPr>
+                        <a:lnSpc>
+                          <a:spcPts val="1600"/>
+                        </a:lnSpc>
+                        <a:spcAft>
+                          <a:spcPts val="0"/>
+                        </a:spcAft>
+                        <a:defRPr sz="1200" b="0">
+                          <a:solidFill>
+                            <a:srgbClr val="21243A"/>
+                          </a:solidFill>
+                          <a:latin typeface="Arial"/>
+                        </a:defRPr>
+                      </a:pPr>
+                      <a:r>
+                        <a:t>Transcript excerpt: Imagine holding, uh, like a simple piece of cloth in your hand.</a:t>
+                      </a:r>
+                    </a:p>
+                    <a:p>
+                      <a:pPr>
+                        <a:lnSpc>
+                          <a:spcPts val="1600"/>
+                        </a:lnSpc>
+                        <a:spcAft>
+                          <a:spcPts val="0"/>
+                        </a:spcAft>
+                        <a:defRPr sz="1200" b="0">
+                          <a:solidFill>
+                            <a:srgbClr val="21243A"/>
+                          </a:solidFill>
+                          <a:latin typeface="Arial"/>
+                        </a:defRPr>
+                      </a:pPr>
+                      <a:r>
+                        <a:t>Let's say it's 2019, and it's just a standard surgical mask. Right, just a boring</a:t>
+                      </a:r>
+                    </a:p>
+                    <a:p>
+                      <a:pPr>
+                        <a:lnSpc>
+                          <a:spcPts val="1600"/>
+                        </a:lnSpc>
+                        <a:spcAft>
+                          <a:spcPts val="0"/>
+                        </a:spcAft>
+                        <a:defRPr sz="1200" b="0">
+                          <a:solidFill>
+                            <a:srgbClr val="21243A"/>
+                          </a:solidFill>
+                          <a:latin typeface="Arial"/>
+                        </a:defRPr>
+                      </a:pPr>
+                      <a:r>
+                        <a:t>everyday medical supply, something you'd really only see at the dentist's office.</a:t>
+                      </a:r>
+                    </a:p>
+                    <a:p>
+                      <a:pPr>
+                        <a:lnSpc>
+                          <a:spcPts val="1600"/>
+                        </a:lnSpc>
+                        <a:spcAft>
+                          <a:spcPts val="0"/>
+                        </a:spcAft>
+                        <a:defRPr sz="1200" b="0">
+                          <a:solidFill>
+                            <a:srgbClr val="21243A"/>
+                          </a:solidFill>
+                          <a:latin typeface="Arial"/>
+                        </a:defRPr>
+                      </a:pPr>
+                      <a:r>
+                        <a:t>Exactly.</a:t>
+                      </a:r>
+                    </a:p>
+                  </a:txBody>
+                  <a:tcPr marL="82296" marR="82296" marT="64008" marB="64008">
+                    <a:solidFill>
+                      <a:srgbClr val="F1F7F7"/>
                     </a:solidFill>
                   </a:tcPr>
                 </a:tc>
@@ -10084,7 +11010,7 @@
               </a:defRPr>
             </a:pPr>
             <a:r>
-              <a:t>Evidence supporting this verdict</a:t>
+              <a:t>Optional audio excerpt description (continued)</a:t>
             </a:r>
           </a:p>
         </p:txBody>
@@ -10271,7 +11197,7 @@
         </p:nvGraphicFramePr>
         <p:xfrm>
           <a:off x="365760" y="1700784"/>
-          <a:ext cx="8412479" cy="1162304"/>
+          <a:ext cx="8412479" cy="552704"/>
         </p:xfrm>
         <a:graphic>
           <a:graphicData uri="http://schemas.openxmlformats.org/drawingml/2006/table">
@@ -10283,140 +11209,83 @@
                 <a:gridCol w="2271369"/>
                 <a:gridCol w="6141110"/>
               </a:tblGrid>
-              <a:tr h="1162304">
-                <a:tc>
-                  <a:txBody>
-                    <a:bodyPr wrap="none"/>
-                    <a:lstStyle/>
-                    <a:p>
-                      <a:pPr>
-                        <a:lnSpc>
-                          <a:spcPts val="1600"/>
-                        </a:lnSpc>
-                        <a:spcAft>
-                          <a:spcPts val="0"/>
-                        </a:spcAft>
-                        <a:defRPr sz="1200" b="0">
-                          <a:solidFill>
-                            <a:srgbClr val="21243A"/>
-                          </a:solidFill>
-                          <a:latin typeface="Arial"/>
-                        </a:defRPr>
-                      </a:pPr>
-                      <a:r>
-                        <a:t>Claude Analysis</a:t>
-                      </a:r>
-                    </a:p>
-                  </a:txBody>
-                  <a:tcPr marL="82296" marR="82296" marT="64008" marB="64008">
-                    <a:solidFill>
-                      <a:srgbClr val="F1F7F7"/>
-                    </a:solidFill>
-                  </a:tcPr>
-                </a:tc>
-                <a:tc>
-                  <a:txBody>
-                    <a:bodyPr wrap="none"/>
-                    <a:lstStyle/>
-                    <a:p>
-                      <a:pPr>
-                        <a:lnSpc>
-                          <a:spcPts val="1600"/>
-                        </a:lnSpc>
-                        <a:spcAft>
-                          <a:spcPts val="0"/>
-                        </a:spcAft>
-                        <a:defRPr sz="1200" b="0">
-                          <a:solidFill>
-                            <a:srgbClr val="21243A"/>
-                          </a:solidFill>
-                          <a:latin typeface="Arial"/>
-                        </a:defRPr>
-                      </a:pPr>
-                      <a:r>
-                        <a:t>Style closely matches AI-generated two-host 'deep dive' audio overviews (e.g.</a:t>
-                      </a:r>
-                    </a:p>
-                    <a:p>
-                      <a:pPr>
-                        <a:lnSpc>
-                          <a:spcPts val="1600"/>
-                        </a:lnSpc>
-                        <a:spcAft>
-                          <a:spcPts val="0"/>
-                        </a:spcAft>
-                        <a:defRPr sz="1200" b="0">
-                          <a:solidFill>
-                            <a:srgbClr val="21243A"/>
-                          </a:solidFill>
-                          <a:latin typeface="Arial"/>
-                        </a:defRPr>
-                      </a:pPr>
-                      <a:r>
-                        <a:t>NotebookLM): stock openers ('Imagine holding...', 'Okay, let's unpack this', 'If we</a:t>
-                      </a:r>
-                    </a:p>
-                    <a:p>
-                      <a:pPr>
-                        <a:lnSpc>
-                          <a:spcPts val="1600"/>
-                        </a:lnSpc>
-                        <a:spcAft>
-                          <a:spcPts val="0"/>
-                        </a:spcAft>
-                        <a:defRPr sz="1200" b="0">
-                          <a:solidFill>
-                            <a:srgbClr val="21243A"/>
-                          </a:solidFill>
-                          <a:latin typeface="Arial"/>
-                        </a:defRPr>
-                      </a:pPr>
-                      <a:r>
-                        <a:t>connect this to the bigger picture'), constant affirmations ('Exactly', 'Perfectly</a:t>
-                      </a:r>
-                    </a:p>
-                    <a:p>
-                      <a:pPr>
-                        <a:lnSpc>
-                          <a:spcPts val="1600"/>
-                        </a:lnSpc>
-                        <a:spcAft>
-                          <a:spcPts val="0"/>
-                        </a:spcAft>
-                        <a:defRPr sz="1200" b="0">
-                          <a:solidFill>
-                            <a:srgbClr val="21243A"/>
-                          </a:solidFill>
-                          <a:latin typeface="Arial"/>
-                        </a:defRPr>
-                      </a:pPr>
-                      <a:r>
-                        <a:t>said'), scripted neutrality disclaimer and a staged host challenge, suggesting likely</a:t>
-                      </a:r>
-                    </a:p>
-                    <a:p>
-                      <a:pPr>
-                        <a:lnSpc>
-                          <a:spcPts val="1600"/>
-                        </a:lnSpc>
-                        <a:spcAft>
-                          <a:spcPts val="0"/>
-                        </a:spcAft>
-                        <a:defRPr sz="1200" b="0">
-                          <a:solidFill>
-                            <a:srgbClr val="21243A"/>
-                          </a:solidFill>
-                          <a:latin typeface="Arial"/>
-                        </a:defRPr>
-                      </a:pPr>
-                      <a:r>
-                        <a:t>synthetic origin.</a:t>
-                      </a:r>
-                    </a:p>
-                  </a:txBody>
-                  <a:tcPr marL="82296" marR="82296" marT="64008" marB="64008">
-                    <a:solidFill>
-                      <a:srgbClr val="F1F7F7"/>
+              <a:tr h="552704">
+                <a:tc>
+                  <a:txBody>
+                    <a:bodyPr wrap="none"/>
+                    <a:lstStyle/>
+                    <a:p>
+                      <a:pPr>
+                        <a:lnSpc>
+                          <a:spcPts val="1600"/>
+                        </a:lnSpc>
+                        <a:spcAft>
+                          <a:spcPts val="0"/>
+                        </a:spcAft>
+                        <a:defRPr sz="1200" b="0">
+                          <a:solidFill>
+                            <a:srgbClr val="21243A"/>
+                          </a:solidFill>
+                          <a:latin typeface="Arial"/>
+                        </a:defRPr>
+                      </a:pPr>
+                      <a:r>
+                        <a:t>Record 10</a:t>
+                      </a:r>
+                    </a:p>
+                  </a:txBody>
+                  <a:tcPr marL="82296" marR="82296" marT="64008" marB="64008">
+                    <a:solidFill>
+                      <a:srgbClr val="FFFFFF"/>
+                    </a:solidFill>
+                  </a:tcPr>
+                </a:tc>
+                <a:tc>
+                  <a:txBody>
+                    <a:bodyPr wrap="none"/>
+                    <a:lstStyle/>
+                    <a:p>
+                      <a:pPr>
+                        <a:lnSpc>
+                          <a:spcPts val="1600"/>
+                        </a:lnSpc>
+                        <a:spcAft>
+                          <a:spcPts val="0"/>
+                        </a:spcAft>
+                        <a:defRPr sz="1200" b="0">
+                          <a:solidFill>
+                            <a:srgbClr val="21243A"/>
+                          </a:solidFill>
+                          <a:latin typeface="Arial"/>
+                        </a:defRPr>
+                      </a:pPr>
+                      <a:r>
+                        <a:t>This assessment describes the selected audio excerpt. Origin and credentials are</a:t>
+                      </a:r>
+                    </a:p>
+                    <a:p>
+                      <a:pPr>
+                        <a:lnSpc>
+                          <a:spcPts val="1600"/>
+                        </a:lnSpc>
+                        <a:spcAft>
+                          <a:spcPts val="0"/>
+                        </a:spcAft>
+                        <a:defRPr sz="1200" b="0">
+                          <a:solidFill>
+                            <a:srgbClr val="21243A"/>
+                          </a:solidFill>
+                          <a:latin typeface="Arial"/>
+                        </a:defRPr>
+                      </a:pPr>
+                      <a:r>
+                        <a:t>considered separately.</a:t>
+                      </a:r>
+                    </a:p>
+                  </a:txBody>
+                  <a:tcPr marL="82296" marR="82296" marT="64008" marB="64008">
+                    <a:solidFill>
+                      <a:srgbClr val="FFFFFF"/>
                     </a:solidFill>
                   </a:tcPr>
                 </a:tc>
@@ -10434,8 +11303,8 @@
           <p:nvPr/>
         </p:nvGraphicFramePr>
         <p:xfrm>
-          <a:off x="365760" y="2863088"/>
-          <a:ext cx="8412479" cy="755904"/>
+          <a:off x="365760" y="2253488"/>
+          <a:ext cx="8412479" cy="349504"/>
         </p:xfrm>
         <a:graphic>
           <a:graphicData uri="http://schemas.openxmlformats.org/drawingml/2006/table">
@@ -10447,102 +11316,64 @@
                 <a:gridCol w="2271369"/>
                 <a:gridCol w="6141110"/>
               </a:tblGrid>
-              <a:tr h="755904">
-                <a:tc>
-                  <a:txBody>
-                    <a:bodyPr wrap="none"/>
-                    <a:lstStyle/>
-                    <a:p>
-                      <a:pPr>
-                        <a:lnSpc>
-                          <a:spcPts val="1600"/>
-                        </a:lnSpc>
-                        <a:spcAft>
-                          <a:spcPts val="0"/>
-                        </a:spcAft>
-                        <a:defRPr sz="1200" b="0">
-                          <a:solidFill>
-                            <a:srgbClr val="21243A"/>
-                          </a:solidFill>
-                          <a:latin typeface="Arial"/>
-                        </a:defRPr>
-                      </a:pPr>
-                      <a:r>
-                        <a:t>OpenAI Analysis</a:t>
-                      </a:r>
-                    </a:p>
-                  </a:txBody>
-                  <a:tcPr marL="82296" marR="82296" marT="64008" marB="64008">
-                    <a:solidFill>
-                      <a:srgbClr val="FFFFFF"/>
-                    </a:solidFill>
-                  </a:tcPr>
-                </a:tc>
-                <a:tc>
-                  <a:txBody>
-                    <a:bodyPr wrap="none"/>
-                    <a:lstStyle/>
-                    <a:p>
-                      <a:pPr>
-                        <a:lnSpc>
-                          <a:spcPts val="1600"/>
-                        </a:lnSpc>
-                        <a:spcAft>
-                          <a:spcPts val="0"/>
-                        </a:spcAft>
-                        <a:defRPr sz="1200" b="0">
-                          <a:solidFill>
-                            <a:srgbClr val="21243A"/>
-                          </a:solidFill>
-                          <a:latin typeface="Arial"/>
-                        </a:defRPr>
-                      </a:pPr>
-                      <a:r>
-                        <a:t>The highly regular two-host exchanges, repetitive affirmations, scripted</a:t>
-                      </a:r>
-                    </a:p>
-                    <a:p>
-                      <a:pPr>
-                        <a:lnSpc>
-                          <a:spcPts val="1600"/>
-                        </a:lnSpc>
-                        <a:spcAft>
-                          <a:spcPts val="0"/>
-                        </a:spcAft>
-                        <a:defRPr sz="1200" b="0">
-                          <a:solidFill>
-                            <a:srgbClr val="21243A"/>
-                          </a:solidFill>
-                          <a:latin typeface="Arial"/>
-                        </a:defRPr>
-                      </a:pPr>
-                      <a:r>
-                        <a:t>explanatory prompts, and formulaic transitions strongly suggest synthetic</a:t>
-                      </a:r>
-                    </a:p>
-                    <a:p>
-                      <a:pPr>
-                        <a:lnSpc>
-                          <a:spcPts val="1600"/>
-                        </a:lnSpc>
-                        <a:spcAft>
-                          <a:spcPts val="0"/>
-                        </a:spcAft>
-                        <a:defRPr sz="1200" b="0">
-                          <a:solidFill>
-                            <a:srgbClr val="21243A"/>
-                          </a:solidFill>
-                          <a:latin typeface="Arial"/>
-                        </a:defRPr>
-                      </a:pPr>
-                      <a:r>
-                        <a:t>generation or editing.</a:t>
-                      </a:r>
-                    </a:p>
-                  </a:txBody>
-                  <a:tcPr marL="82296" marR="82296" marT="64008" marB="64008">
-                    <a:solidFill>
-                      <a:srgbClr val="FFFFFF"/>
+              <a:tr h="349504">
+                <a:tc>
+                  <a:txBody>
+                    <a:bodyPr wrap="none"/>
+                    <a:lstStyle/>
+                    <a:p>
+                      <a:pPr>
+                        <a:lnSpc>
+                          <a:spcPts val="1600"/>
+                        </a:lnSpc>
+                        <a:spcAft>
+                          <a:spcPts val="0"/>
+                        </a:spcAft>
+                        <a:defRPr sz="1200" b="0">
+                          <a:solidFill>
+                            <a:srgbClr val="21243A"/>
+                          </a:solidFill>
+                          <a:latin typeface="Arial"/>
+                        </a:defRPr>
+                      </a:pPr>
+                      <a:r>
+                        <a:t>Record 11</a:t>
+                      </a:r>
+                    </a:p>
+                  </a:txBody>
+                  <a:tcPr marL="82296" marR="82296" marT="64008" marB="64008">
+                    <a:solidFill>
+                      <a:srgbClr val="F1F7F7"/>
+                    </a:solidFill>
+                  </a:tcPr>
+                </a:tc>
+                <a:tc>
+                  <a:txBody>
+                    <a:bodyPr wrap="none"/>
+                    <a:lstStyle/>
+                    <a:p>
+                      <a:pPr>
+                        <a:lnSpc>
+                          <a:spcPts val="1600"/>
+                        </a:lnSpc>
+                        <a:spcAft>
+                          <a:spcPts val="0"/>
+                        </a:spcAft>
+                        <a:defRPr sz="1200" b="0">
+                          <a:solidFill>
+                            <a:srgbClr val="21243A"/>
+                          </a:solidFill>
+                          <a:latin typeface="Arial"/>
+                        </a:defRPr>
+                      </a:pPr>
+                      <a:r>
+                        <a:t>Analysed excerpt: mono, 16 kHz PCM. Credential checks use the original file.</a:t>
+                      </a:r>
+                    </a:p>
+                  </a:txBody>
+                  <a:tcPr marL="82296" marR="82296" marT="64008" marB="64008">
+                    <a:solidFill>
+                      <a:srgbClr val="F1F7F7"/>
                     </a:solidFill>
                   </a:tcPr>
                 </a:tc>
@@ -10560,8 +11391,8 @@
           <p:nvPr/>
         </p:nvGraphicFramePr>
         <p:xfrm>
-          <a:off x="365760" y="3618992"/>
-          <a:ext cx="8412479" cy="755904"/>
+          <a:off x="365760" y="2602992"/>
+          <a:ext cx="8412479" cy="552704"/>
         </p:xfrm>
         <a:graphic>
           <a:graphicData uri="http://schemas.openxmlformats.org/drawingml/2006/table">
@@ -10573,102 +11404,83 @@
                 <a:gridCol w="2271369"/>
                 <a:gridCol w="6141110"/>
               </a:tblGrid>
-              <a:tr h="755904">
-                <a:tc>
-                  <a:txBody>
-                    <a:bodyPr wrap="none"/>
-                    <a:lstStyle/>
-                    <a:p>
-                      <a:pPr>
-                        <a:lnSpc>
-                          <a:spcPts val="1600"/>
-                        </a:lnSpc>
-                        <a:spcAft>
-                          <a:spcPts val="0"/>
-                        </a:spcAft>
-                        <a:defRPr sz="1200" b="0">
-                          <a:solidFill>
-                            <a:srgbClr val="21243A"/>
-                          </a:solidFill>
-                          <a:latin typeface="Arial"/>
-                        </a:defRPr>
-                      </a:pPr>
-                      <a:r>
-                        <a:t>Gemini Analysis</a:t>
-                      </a:r>
-                    </a:p>
-                  </a:txBody>
-                  <a:tcPr marL="82296" marR="82296" marT="64008" marB="64008">
-                    <a:solidFill>
-                      <a:srgbClr val="F1F7F7"/>
-                    </a:solidFill>
-                  </a:tcPr>
-                </a:tc>
-                <a:tc>
-                  <a:txBody>
-                    <a:bodyPr wrap="none"/>
-                    <a:lstStyle/>
-                    <a:p>
-                      <a:pPr>
-                        <a:lnSpc>
-                          <a:spcPts val="1600"/>
-                        </a:lnSpc>
-                        <a:spcAft>
-                          <a:spcPts val="0"/>
-                        </a:spcAft>
-                        <a:defRPr sz="1200" b="0">
-                          <a:solidFill>
-                            <a:srgbClr val="21243A"/>
-                          </a:solidFill>
-                          <a:latin typeface="Arial"/>
-                        </a:defRPr>
-                      </a:pPr>
-                      <a:r>
-                        <a:t>The text displays the classic conversational tropes, rapid turn-taking, and</a:t>
-                      </a:r>
-                    </a:p>
-                    <a:p>
-                      <a:pPr>
-                        <a:lnSpc>
-                          <a:spcPts val="1600"/>
-                        </a:lnSpc>
-                        <a:spcAft>
-                          <a:spcPts val="0"/>
-                        </a:spcAft>
-                        <a:defRPr sz="1200" b="0">
-                          <a:solidFill>
-                            <a:srgbClr val="21243A"/>
-                          </a:solidFill>
-                          <a:latin typeface="Arial"/>
-                        </a:defRPr>
-                      </a:pPr>
-                      <a:r>
-                        <a:t>synthetic cadence characteristic of an automated AI podcast generator like</a:t>
-                      </a:r>
-                    </a:p>
-                    <a:p>
-                      <a:pPr>
-                        <a:lnSpc>
-                          <a:spcPts val="1600"/>
-                        </a:lnSpc>
-                        <a:spcAft>
-                          <a:spcPts val="0"/>
-                        </a:spcAft>
-                        <a:defRPr sz="1200" b="0">
-                          <a:solidFill>
-                            <a:srgbClr val="21243A"/>
-                          </a:solidFill>
-                          <a:latin typeface="Arial"/>
-                        </a:defRPr>
-                      </a:pPr>
-                      <a:r>
-                        <a:t>NotebookLM.</a:t>
-                      </a:r>
-                    </a:p>
-                  </a:txBody>
-                  <a:tcPr marL="82296" marR="82296" marT="64008" marB="64008">
-                    <a:solidFill>
-                      <a:srgbClr val="F1F7F7"/>
+              <a:tr h="552704">
+                <a:tc>
+                  <a:txBody>
+                    <a:bodyPr wrap="none"/>
+                    <a:lstStyle/>
+                    <a:p>
+                      <a:pPr>
+                        <a:lnSpc>
+                          <a:spcPts val="1600"/>
+                        </a:lnSpc>
+                        <a:spcAft>
+                          <a:spcPts val="0"/>
+                        </a:spcAft>
+                        <a:defRPr sz="1200" b="0">
+                          <a:solidFill>
+                            <a:srgbClr val="21243A"/>
+                          </a:solidFill>
+                          <a:latin typeface="Arial"/>
+                        </a:defRPr>
+                      </a:pPr>
+                      <a:r>
+                        <a:t>Record 12</a:t>
+                      </a:r>
+                    </a:p>
+                  </a:txBody>
+                  <a:tcPr marL="82296" marR="82296" marT="64008" marB="64008">
+                    <a:solidFill>
+                      <a:srgbClr val="FFFFFF"/>
+                    </a:solidFill>
+                  </a:tcPr>
+                </a:tc>
+                <a:tc>
+                  <a:txBody>
+                    <a:bodyPr wrap="none"/>
+                    <a:lstStyle/>
+                    <a:p>
+                      <a:pPr>
+                        <a:lnSpc>
+                          <a:spcPts val="1600"/>
+                        </a:lnSpc>
+                        <a:spcAft>
+                          <a:spcPts val="0"/>
+                        </a:spcAft>
+                        <a:defRPr sz="1200" b="0">
+                          <a:solidFill>
+                            <a:srgbClr val="21243A"/>
+                          </a:solidFill>
+                          <a:latin typeface="Arial"/>
+                        </a:defRPr>
+                      </a:pPr>
+                      <a:r>
+                        <a:t>Audio findings are shown alongside the visual assessment and remain separate</a:t>
+                      </a:r>
+                    </a:p>
+                    <a:p>
+                      <a:pPr>
+                        <a:lnSpc>
+                          <a:spcPts val="1600"/>
+                        </a:lnSpc>
+                        <a:spcAft>
+                          <a:spcPts val="0"/>
+                        </a:spcAft>
+                        <a:defRPr sz="1200" b="0">
+                          <a:solidFill>
+                            <a:srgbClr val="21243A"/>
+                          </a:solidFill>
+                          <a:latin typeface="Arial"/>
+                        </a:defRPr>
+                      </a:pPr>
+                      <a:r>
+                        <a:t>from its score.</a:t>
+                      </a:r>
+                    </a:p>
+                  </a:txBody>
+                  <a:tcPr marL="82296" marR="82296" marT="64008" marB="64008">
+                    <a:solidFill>
+                      <a:srgbClr val="FFFFFF"/>
                     </a:solidFill>
                   </a:tcPr>
                 </a:tc>
@@ -10774,7 +11586,7 @@
               </a:defRPr>
             </a:pPr>
             <a:r>
-              <a:t>Additional findings</a:t>
+              <a:t>Assessment coverage</a:t>
             </a:r>
           </a:p>
         </p:txBody>
@@ -10961,7 +11773,7 @@
         </p:nvGraphicFramePr>
         <p:xfrm>
           <a:off x="365760" y="1700784"/>
-          <a:ext cx="8412479" cy="349504"/>
+          <a:ext cx="8412479" cy="755904"/>
         </p:xfrm>
         <a:graphic>
           <a:graphicData uri="http://schemas.openxmlformats.org/drawingml/2006/table">
@@ -10973,28 +11785,28 @@
                 <a:gridCol w="2271369"/>
                 <a:gridCol w="6141110"/>
               </a:tblGrid>
-              <a:tr h="349504">
-                <a:tc>
-                  <a:txBody>
-                    <a:bodyPr wrap="none"/>
-                    <a:lstStyle/>
-                    <a:p>
-                      <a:pPr>
-                        <a:lnSpc>
-                          <a:spcPts val="1600"/>
-                        </a:lnSpc>
-                        <a:spcAft>
-                          <a:spcPts val="0"/>
-                        </a:spcAft>
-                        <a:defRPr sz="1200" b="0">
-                          <a:solidFill>
-                            <a:srgbClr val="21243A"/>
-                          </a:solidFill>
-                          <a:latin typeface="Arial"/>
-                        </a:defRPr>
-                      </a:pPr>
-                      <a:r>
-                        <a:t>C2PA Content Credentials</a:t>
+              <a:tr h="755904">
+                <a:tc>
+                  <a:txBody>
+                    <a:bodyPr wrap="none"/>
+                    <a:lstStyle/>
+                    <a:p>
+                      <a:pPr>
+                        <a:lnSpc>
+                          <a:spcPts val="1600"/>
+                        </a:lnSpc>
+                        <a:spcAft>
+                          <a:spcPts val="0"/>
+                        </a:spcAft>
+                        <a:defRPr sz="1200" b="0">
+                          <a:solidFill>
+                            <a:srgbClr val="21243A"/>
+                          </a:solidFill>
+                          <a:latin typeface="Arial"/>
+                        </a:defRPr>
+                      </a:pPr>
+                      <a:r>
+                        <a:t>Record 1</a:t>
                       </a:r>
                     </a:p>
                   </a:txBody>
@@ -11024,13 +11836,177 @@
                         </a:defRPr>
                       </a:pPr>
                       <a:r>
-                        <a:t>Not checked in this text-analysis pass; no original-media provenance conclusion.</a:t>
+                        <a:t>Visual verdicts for videos cover the sampled still frames. Standalone-audio content</a:t>
+                      </a:r>
+                    </a:p>
+                    <a:p>
+                      <a:pPr>
+                        <a:lnSpc>
+                          <a:spcPts val="1600"/>
+                        </a:lnSpc>
+                        <a:spcAft>
+                          <a:spcPts val="0"/>
+                        </a:spcAft>
+                        <a:defRPr sz="1200" b="0">
+                          <a:solidFill>
+                            <a:srgbClr val="21243A"/>
+                          </a:solidFill>
+                          <a:latin typeface="Arial"/>
+                        </a:defRPr>
+                      </a:pPr>
+                      <a:r>
+                        <a:t>assessments cover the transcript. Soundtrack-origin detection and</a:t>
+                      </a:r>
+                    </a:p>
+                    <a:p>
+                      <a:pPr>
+                        <a:lnSpc>
+                          <a:spcPts val="1600"/>
+                        </a:lnSpc>
+                        <a:spcAft>
+                          <a:spcPts val="0"/>
+                        </a:spcAft>
+                        <a:defRPr sz="1200" b="0">
+                          <a:solidFill>
+                            <a:srgbClr val="21243A"/>
+                          </a:solidFill>
+                          <a:latin typeface="Arial"/>
+                        </a:defRPr>
+                      </a:pPr>
+                      <a:r>
+                        <a:t>continuous-motion analysis are outside these assessments.</a:t>
                       </a:r>
                     </a:p>
                   </a:txBody>
                   <a:tcPr marL="82296" marR="82296" marT="64008" marB="64008">
                     <a:solidFill>
                       <a:srgbClr val="F1F7F7"/>
+                    </a:solidFill>
+                  </a:tcPr>
+                </a:tc>
+              </a:tr>
+            </a:tbl>
+          </a:graphicData>
+        </a:graphic>
+      </p:graphicFrame>
+      <p:graphicFrame>
+        <p:nvGraphicFramePr>
+          <p:cNvPr id="8" name="Table 7"/>
+          <p:cNvGraphicFramePr>
+            <a:graphicFrameLocks noGrp="1"/>
+          </p:cNvGraphicFramePr>
+          <p:nvPr/>
+        </p:nvGraphicFramePr>
+        <p:xfrm>
+          <a:off x="365760" y="2456688"/>
+          <a:ext cx="8412479" cy="755904"/>
+        </p:xfrm>
+        <a:graphic>
+          <a:graphicData uri="http://schemas.openxmlformats.org/drawingml/2006/table">
+            <a:tbl>
+              <a:tblPr firstRow="1" bandRow="1">
+                <a:tableStyleId>{5C22544A-7EE6-4342-B048-85BDC9FD1C3A}</a:tableStyleId>
+              </a:tblPr>
+              <a:tblGrid>
+                <a:gridCol w="2271369"/>
+                <a:gridCol w="6141110"/>
+              </a:tblGrid>
+              <a:tr h="755904">
+                <a:tc>
+                  <a:txBody>
+                    <a:bodyPr wrap="none"/>
+                    <a:lstStyle/>
+                    <a:p>
+                      <a:pPr>
+                        <a:lnSpc>
+                          <a:spcPts val="1600"/>
+                        </a:lnSpc>
+                        <a:spcAft>
+                          <a:spcPts val="0"/>
+                        </a:spcAft>
+                        <a:defRPr sz="1200" b="0">
+                          <a:solidFill>
+                            <a:srgbClr val="21243A"/>
+                          </a:solidFill>
+                          <a:latin typeface="Arial"/>
+                        </a:defRPr>
+                      </a:pPr>
+                      <a:r>
+                        <a:t>Record 2</a:t>
+                      </a:r>
+                    </a:p>
+                  </a:txBody>
+                  <a:tcPr marL="82296" marR="82296" marT="64008" marB="64008">
+                    <a:solidFill>
+                      <a:srgbClr val="FFFFFF"/>
+                    </a:solidFill>
+                  </a:tcPr>
+                </a:tc>
+                <a:tc>
+                  <a:txBody>
+                    <a:bodyPr wrap="none"/>
+                    <a:lstStyle/>
+                    <a:p>
+                      <a:pPr>
+                        <a:lnSpc>
+                          <a:spcPts val="1600"/>
+                        </a:lnSpc>
+                        <a:spcAft>
+                          <a:spcPts val="0"/>
+                        </a:spcAft>
+                        <a:defRPr sz="1200" b="0">
+                          <a:solidFill>
+                            <a:srgbClr val="21243A"/>
+                          </a:solidFill>
+                          <a:latin typeface="Arial"/>
+                        </a:defRPr>
+                      </a:pPr>
+                      <a:r>
+                        <a:t>Original-file credentials, excerpt descriptions and visual interpretation are</a:t>
+                      </a:r>
+                    </a:p>
+                    <a:p>
+                      <a:pPr>
+                        <a:lnSpc>
+                          <a:spcPts val="1600"/>
+                        </a:lnSpc>
+                        <a:spcAft>
+                          <a:spcPts val="0"/>
+                        </a:spcAft>
+                        <a:defRPr sz="1200" b="0">
+                          <a:solidFill>
+                            <a:srgbClr val="21243A"/>
+                          </a:solidFill>
+                          <a:latin typeface="Arial"/>
+                        </a:defRPr>
+                      </a:pPr>
+                      <a:r>
+                        <a:t>recorded separately. Credential coverage of an individual audio track remains</a:t>
+                      </a:r>
+                    </a:p>
+                    <a:p>
+                      <a:pPr>
+                        <a:lnSpc>
+                          <a:spcPts val="1600"/>
+                        </a:lnSpc>
+                        <a:spcAft>
+                          <a:spcPts val="0"/>
+                        </a:spcAft>
+                        <a:defRPr sz="1200" b="0">
+                          <a:solidFill>
+                            <a:srgbClr val="21243A"/>
+                          </a:solidFill>
+                          <a:latin typeface="Arial"/>
+                        </a:defRPr>
+                      </a:pPr>
+                      <a:r>
+                        <a:t>unresolved by this workflow.</a:t>
+                      </a:r>
+                    </a:p>
+                  </a:txBody>
+                  <a:tcPr marL="82296" marR="82296" marT="64008" marB="64008">
+                    <a:solidFill>
+                      <a:srgbClr val="FFFFFF"/>
                     </a:solidFill>
                   </a:tcPr>
                 </a:tc>
@@ -11136,7 +12112,7 @@
               </a:defRPr>
             </a:pPr>
             <a:r>
-              <a:t>Transcribed text</a:t>
+              <a:t>Evidence supporting this verdict</a:t>
             </a:r>
           </a:p>
         </p:txBody>
@@ -11323,7 +12299,7 @@
         </p:nvGraphicFramePr>
         <p:xfrm>
           <a:off x="365760" y="1700784"/>
-          <a:ext cx="8412479" cy="4210304"/>
+          <a:ext cx="8412479" cy="1162304"/>
         </p:xfrm>
         <a:graphic>
           <a:graphicData uri="http://schemas.openxmlformats.org/drawingml/2006/table">
@@ -11335,28 +12311,28 @@
                 <a:gridCol w="2271369"/>
                 <a:gridCol w="6141110"/>
               </a:tblGrid>
-              <a:tr h="4210304">
-                <a:tc>
-                  <a:txBody>
-                    <a:bodyPr wrap="none"/>
-                    <a:lstStyle/>
-                    <a:p>
-                      <a:pPr>
-                        <a:lnSpc>
-                          <a:spcPts val="1600"/>
-                        </a:lnSpc>
-                        <a:spcAft>
-                          <a:spcPts val="0"/>
-                        </a:spcAft>
-                        <a:defRPr sz="1200" b="0">
-                          <a:solidFill>
-                            <a:srgbClr val="21243A"/>
-                          </a:solidFill>
-                          <a:latin typeface="Arial"/>
-                        </a:defRPr>
-                      </a:pPr>
-                      <a:r>
-                        <a:t>Recorded text</a:t>
+              <a:tr h="1162304">
+                <a:tc>
+                  <a:txBody>
+                    <a:bodyPr wrap="none"/>
+                    <a:lstStyle/>
+                    <a:p>
+                      <a:pPr>
+                        <a:lnSpc>
+                          <a:spcPts val="1600"/>
+                        </a:lnSpc>
+                        <a:spcAft>
+                          <a:spcPts val="0"/>
+                        </a:spcAft>
+                        <a:defRPr sz="1200" b="0">
+                          <a:solidFill>
+                            <a:srgbClr val="21243A"/>
+                          </a:solidFill>
+                          <a:latin typeface="Arial"/>
+                        </a:defRPr>
+                      </a:pPr>
+                      <a:r>
+                        <a:t>Claude Analysis</a:t>
                       </a:r>
                     </a:p>
                   </a:txBody>
@@ -11386,368 +12362,335 @@
                         </a:defRPr>
                       </a:pPr>
                       <a:r>
-                        <a:t>Imagine holding a like a simple piece of cloth in your hand. Let's say it's 2019, and</a:t>
-                      </a:r>
-                    </a:p>
-                    <a:p>
-                      <a:pPr>
-                        <a:lnSpc>
-                          <a:spcPts val="1600"/>
-                        </a:lnSpc>
-                        <a:spcAft>
-                          <a:spcPts val="0"/>
-                        </a:spcAft>
-                        <a:defRPr sz="1200" b="0">
-                          <a:solidFill>
-                            <a:srgbClr val="21243A"/>
-                          </a:solidFill>
-                          <a:latin typeface="Arial"/>
-                        </a:defRPr>
-                      </a:pPr>
-                      <a:r>
-                        <a:t>it's just a standard surgical mask. Right, just a boring everyday medical supply,</a:t>
-                      </a:r>
-                    </a:p>
-                    <a:p>
-                      <a:pPr>
-                        <a:lnSpc>
-                          <a:spcPts val="1600"/>
-                        </a:lnSpc>
-                        <a:spcAft>
-                          <a:spcPts val="0"/>
-                        </a:spcAft>
-                        <a:defRPr sz="1200" b="0">
-                          <a:solidFill>
-                            <a:srgbClr val="21243A"/>
-                          </a:solidFill>
-                          <a:latin typeface="Arial"/>
-                        </a:defRPr>
-                      </a:pPr>
-                      <a:r>
-                        <a:t>something you'd really only see at the dentist office. Exactly. But then fast-forward</a:t>
-                      </a:r>
-                    </a:p>
-                    <a:p>
-                      <a:pPr>
-                        <a:lnSpc>
-                          <a:spcPts val="1600"/>
-                        </a:lnSpc>
-                        <a:spcAft>
-                          <a:spcPts val="0"/>
-                        </a:spcAft>
-                        <a:defRPr sz="1200" b="0">
-                          <a:solidFill>
-                            <a:srgbClr val="21243A"/>
-                          </a:solidFill>
-                          <a:latin typeface="Arial"/>
-                        </a:defRPr>
-                      </a:pPr>
-                      <a:r>
-                        <a:t>to the end of 2020, and that exact same piece of cloth had morphed into like a</a:t>
-                      </a:r>
-                    </a:p>
-                    <a:p>
-                      <a:pPr>
-                        <a:lnSpc>
-                          <a:spcPts val="1600"/>
-                        </a:lnSpc>
-                        <a:spcAft>
-                          <a:spcPts val="0"/>
-                        </a:spcAft>
-                        <a:defRPr sz="1200" b="0">
-                          <a:solidFill>
-                            <a:srgbClr val="21243A"/>
-                          </a:solidFill>
-                          <a:latin typeface="Arial"/>
-                        </a:defRPr>
-                      </a:pPr>
-                      <a:r>
-                        <a:t>literal measure of your morality. Oh, absolutely. It became a symbol of your</a:t>
-                      </a:r>
-                    </a:p>
-                    <a:p>
-                      <a:pPr>
-                        <a:lnSpc>
-                          <a:spcPts val="1600"/>
-                        </a:lnSpc>
-                        <a:spcAft>
-                          <a:spcPts val="0"/>
-                        </a:spcAft>
-                        <a:defRPr sz="1200" b="0">
-                          <a:solidFill>
-                            <a:srgbClr val="21243A"/>
-                          </a:solidFill>
-                          <a:latin typeface="Arial"/>
-                        </a:defRPr>
-                      </a:pPr>
-                      <a:r>
-                        <a:t>political affiliation, your patriotism, even. It's just wild to think about. I mean,</a:t>
-                      </a:r>
-                    </a:p>
-                    <a:p>
-                      <a:pPr>
-                        <a:lnSpc>
-                          <a:spcPts val="1600"/>
-                        </a:lnSpc>
-                        <a:spcAft>
-                          <a:spcPts val="0"/>
-                        </a:spcAft>
-                        <a:defRPr sz="1200" b="0">
-                          <a:solidFill>
-                            <a:srgbClr val="21243A"/>
-                          </a:solidFill>
-                          <a:latin typeface="Arial"/>
-                        </a:defRPr>
-                      </a:pPr>
-                      <a:r>
-                        <a:t>today we are looking at the exact digital moment a basic health mandate turned</a:t>
-                      </a:r>
-                    </a:p>
-                    <a:p>
-                      <a:pPr>
-                        <a:lnSpc>
-                          <a:spcPts val="1600"/>
-                        </a:lnSpc>
-                        <a:spcAft>
-                          <a:spcPts val="0"/>
-                        </a:spcAft>
-                        <a:defRPr sz="1200" b="0">
-                          <a:solidFill>
-                            <a:srgbClr val="21243A"/>
-                          </a:solidFill>
-                          <a:latin typeface="Arial"/>
-                        </a:defRPr>
-                      </a:pPr>
-                      <a:r>
-                        <a:t>into a full-blown ideological war. It really is one of the most compressed, intense</a:t>
-                      </a:r>
-                    </a:p>
-                    <a:p>
-                      <a:pPr>
-                        <a:lnSpc>
-                          <a:spcPts val="1600"/>
-                        </a:lnSpc>
-                        <a:spcAft>
-                          <a:spcPts val="0"/>
-                        </a:spcAft>
-                        <a:defRPr sz="1200" b="0">
-                          <a:solidFill>
-                            <a:srgbClr val="21243A"/>
-                          </a:solidFill>
-                          <a:latin typeface="Arial"/>
-                        </a:defRPr>
-                      </a:pPr>
-                      <a:r>
-                        <a:t>sociological shifts we've ever witnessed. Yeah. We went from a public that largely</a:t>
-                      </a:r>
-                    </a:p>
-                    <a:p>
-                      <a:pPr>
-                        <a:lnSpc>
-                          <a:spcPts val="1600"/>
-                        </a:lnSpc>
-                        <a:spcAft>
-                          <a:spcPts val="0"/>
-                        </a:spcAft>
-                        <a:defRPr sz="1200" b="0">
-                          <a:solidFill>
-                            <a:srgbClr val="21243A"/>
-                          </a:solidFill>
-                          <a:latin typeface="Arial"/>
-                        </a:defRPr>
-                      </a:pPr>
-                      <a:r>
-                        <a:t>didn't think about epidemiology at all to a society where every single person was</a:t>
-                      </a:r>
-                    </a:p>
-                    <a:p>
-                      <a:pPr>
-                        <a:lnSpc>
-                          <a:spcPts val="1600"/>
-                        </a:lnSpc>
-                        <a:spcAft>
-                          <a:spcPts val="0"/>
-                        </a:spcAft>
-                        <a:defRPr sz="1200" b="0">
-                          <a:solidFill>
-                            <a:srgbClr val="21243A"/>
-                          </a:solidFill>
-                          <a:latin typeface="Arial"/>
-                        </a:defRPr>
-                      </a:pPr>
-                      <a:r>
-                        <a:t>forced to take a public, highly visible stance on a global health crisis. And usually,</a:t>
-                      </a:r>
-                    </a:p>
-                    <a:p>
-                      <a:pPr>
-                        <a:lnSpc>
-                          <a:spcPts val="1600"/>
-                        </a:lnSpc>
-                        <a:spcAft>
-                          <a:spcPts val="0"/>
-                        </a:spcAft>
-                        <a:defRPr sz="1200" b="0">
-                          <a:solidFill>
-                            <a:srgbClr val="21243A"/>
-                          </a:solidFill>
-                          <a:latin typeface="Arial"/>
-                        </a:defRPr>
-                      </a:pPr>
-                      <a:r>
-                        <a:t>you know, when we talk about a massive global event like that, we have to rely on</a:t>
-                      </a:r>
-                    </a:p>
-                    <a:p>
-                      <a:pPr>
-                        <a:lnSpc>
-                          <a:spcPts val="1600"/>
-                        </a:lnSpc>
-                        <a:spcAft>
-                          <a:spcPts val="0"/>
-                        </a:spcAft>
-                        <a:defRPr sz="1200" b="0">
-                          <a:solidFill>
-                            <a:srgbClr val="21243A"/>
-                          </a:solidFill>
-                          <a:latin typeface="Arial"/>
-                        </a:defRPr>
-                      </a:pPr>
-                      <a:r>
-                        <a:t>historians decades later to piece together the public mood. Right, digging through</a:t>
-                      </a:r>
-                    </a:p>
-                    <a:p>
-                      <a:pPr>
-                        <a:lnSpc>
-                          <a:spcPts val="1600"/>
-                        </a:lnSpc>
-                        <a:spcAft>
-                          <a:spcPts val="0"/>
-                        </a:spcAft>
-                        <a:defRPr sz="1200" b="0">
-                          <a:solidFill>
-                            <a:srgbClr val="21243A"/>
-                          </a:solidFill>
-                          <a:latin typeface="Arial"/>
-                        </a:defRPr>
-                      </a:pPr>
-                      <a:r>
-                        <a:t>old newspaper clippings or a diary entries. Exactly. But for the COVID-19</a:t>
-                      </a:r>
-                    </a:p>
-                    <a:p>
-                      <a:pPr>
-                        <a:lnSpc>
-                          <a:spcPts val="1600"/>
-                        </a:lnSpc>
-                        <a:spcAft>
-                          <a:spcPts val="0"/>
-                        </a:spcAft>
-                        <a:defRPr sz="1200" b="0">
-                          <a:solidFill>
-                            <a:srgbClr val="21243A"/>
-                          </a:solidFill>
-                          <a:latin typeface="Arial"/>
-                        </a:defRPr>
-                      </a:pPr>
-                      <a:r>
-                        <a:t>pandemic, we have this complete, real-time behavioral laboratory. So, we are</a:t>
-                      </a:r>
-                    </a:p>
-                    <a:p>
-                      <a:pPr>
-                        <a:lnSpc>
-                          <a:spcPts val="1600"/>
-                        </a:lnSpc>
-                        <a:spcAft>
-                          <a:spcPts val="0"/>
-                        </a:spcAft>
-                        <a:defRPr sz="1200" b="0">
-                          <a:solidFill>
-                            <a:srgbClr val="21243A"/>
-                          </a:solidFill>
-                          <a:latin typeface="Arial"/>
-                        </a:defRPr>
-                      </a:pPr>
-                      <a:r>
-                        <a:t>grounding our conversation today in this fascinating peer-reviewed study from</a:t>
-                      </a:r>
-                    </a:p>
-                    <a:p>
-                      <a:pPr>
-                        <a:lnSpc>
-                          <a:spcPts val="1600"/>
-                        </a:lnSpc>
-                        <a:spcAft>
-                          <a:spcPts val="0"/>
-                        </a:spcAft>
-                        <a:defRPr sz="1200" b="0">
-                          <a:solidFill>
-                            <a:srgbClr val="21243A"/>
-                          </a:solidFill>
-                          <a:latin typeface="Arial"/>
-                        </a:defRPr>
-                      </a:pPr>
-                      <a:r>
-                        <a:t>the journal Vaccine. Yes, authored by Sam Martin and Samantha Vanderslott from</a:t>
-                      </a:r>
-                    </a:p>
-                    <a:p>
-                      <a:pPr>
-                        <a:lnSpc>
-                          <a:spcPts val="1600"/>
-                        </a:lnSpc>
-                        <a:spcAft>
-                          <a:spcPts val="0"/>
-                        </a:spcAft>
-                        <a:defRPr sz="1200" b="0">
-                          <a:solidFill>
-                            <a:srgbClr val="21243A"/>
-                          </a:solidFill>
-                          <a:latin typeface="Arial"/>
-                        </a:defRPr>
-                      </a:pPr>
-                      <a:r>
-                        <a:t>the Oxford Vaccine Group. And the scale of their research here is what makes it so</a:t>
-                      </a:r>
-                    </a:p>
-                    <a:p>
-                      <a:pPr>
-                        <a:lnSpc>
-                          <a:spcPts val="1600"/>
-                        </a:lnSpc>
-                        <a:spcAft>
-                          <a:spcPts val="0"/>
-                        </a:spcAft>
-                        <a:defRPr sz="1200" b="0">
-                          <a:solidFill>
-                            <a:srgbClr val="21243A"/>
-                          </a:solidFill>
-                          <a:latin typeface="Arial"/>
-                        </a:defRPr>
-                      </a:pPr>
-                      <a:r>
-                        <a:t>robust, right? Oh, totally. They analyzed this massive data set of 7.89 million</a:t>
-                      </a:r>
-                    </a:p>
-                    <a:p>
-                      <a:pPr>
-                        <a:lnSpc>
-                          <a:spcPts val="1600"/>
-                        </a:lnSpc>
-                        <a:spcAft>
-                          <a:spcPts val="0"/>
-                        </a:spcAft>
-                        <a:defRPr sz="1200" b="0">
-                          <a:solidFill>
-                            <a:srgbClr val="21243A"/>
-                          </a:solidFill>
-                          <a:latin typeface="Arial"/>
-                        </a:defRPr>
-                      </a:pPr>
-                      <a:r>
-                        <a:t>English-language tweets. Wow. Yeah, from the US and the UK, spanning a very</a:t>
+                        <a:t>Style closely matches AI-generated two-host 'deep dive' audio overviews (e.g.</a:t>
+                      </a:r>
+                    </a:p>
+                    <a:p>
+                      <a:pPr>
+                        <a:lnSpc>
+                          <a:spcPts val="1600"/>
+                        </a:lnSpc>
+                        <a:spcAft>
+                          <a:spcPts val="0"/>
+                        </a:spcAft>
+                        <a:defRPr sz="1200" b="0">
+                          <a:solidFill>
+                            <a:srgbClr val="21243A"/>
+                          </a:solidFill>
+                          <a:latin typeface="Arial"/>
+                        </a:defRPr>
+                      </a:pPr>
+                      <a:r>
+                        <a:t>NotebookLM): stock openers ('Imagine holding...', 'Okay, let's unpack this', 'If we</a:t>
+                      </a:r>
+                    </a:p>
+                    <a:p>
+                      <a:pPr>
+                        <a:lnSpc>
+                          <a:spcPts val="1600"/>
+                        </a:lnSpc>
+                        <a:spcAft>
+                          <a:spcPts val="0"/>
+                        </a:spcAft>
+                        <a:defRPr sz="1200" b="0">
+                          <a:solidFill>
+                            <a:srgbClr val="21243A"/>
+                          </a:solidFill>
+                          <a:latin typeface="Arial"/>
+                        </a:defRPr>
+                      </a:pPr>
+                      <a:r>
+                        <a:t>connect this to the bigger picture'), constant affirmations ('Exactly', 'Perfectly</a:t>
+                      </a:r>
+                    </a:p>
+                    <a:p>
+                      <a:pPr>
+                        <a:lnSpc>
+                          <a:spcPts val="1600"/>
+                        </a:lnSpc>
+                        <a:spcAft>
+                          <a:spcPts val="0"/>
+                        </a:spcAft>
+                        <a:defRPr sz="1200" b="0">
+                          <a:solidFill>
+                            <a:srgbClr val="21243A"/>
+                          </a:solidFill>
+                          <a:latin typeface="Arial"/>
+                        </a:defRPr>
+                      </a:pPr>
+                      <a:r>
+                        <a:t>said'), scripted neutrality disclaimer and a staged host challenge, suggesting likely</a:t>
+                      </a:r>
+                    </a:p>
+                    <a:p>
+                      <a:pPr>
+                        <a:lnSpc>
+                          <a:spcPts val="1600"/>
+                        </a:lnSpc>
+                        <a:spcAft>
+                          <a:spcPts val="0"/>
+                        </a:spcAft>
+                        <a:defRPr sz="1200" b="0">
+                          <a:solidFill>
+                            <a:srgbClr val="21243A"/>
+                          </a:solidFill>
+                          <a:latin typeface="Arial"/>
+                        </a:defRPr>
+                      </a:pPr>
+                      <a:r>
+                        <a:t>synthetic origin.</a:t>
+                      </a:r>
+                    </a:p>
+                  </a:txBody>
+                  <a:tcPr marL="82296" marR="82296" marT="64008" marB="64008">
+                    <a:solidFill>
+                      <a:srgbClr val="F1F7F7"/>
+                    </a:solidFill>
+                  </a:tcPr>
+                </a:tc>
+              </a:tr>
+            </a:tbl>
+          </a:graphicData>
+        </a:graphic>
+      </p:graphicFrame>
+      <p:graphicFrame>
+        <p:nvGraphicFramePr>
+          <p:cNvPr id="8" name="Table 7"/>
+          <p:cNvGraphicFramePr>
+            <a:graphicFrameLocks noGrp="1"/>
+          </p:cNvGraphicFramePr>
+          <p:nvPr/>
+        </p:nvGraphicFramePr>
+        <p:xfrm>
+          <a:off x="365760" y="2863088"/>
+          <a:ext cx="8412479" cy="755904"/>
+        </p:xfrm>
+        <a:graphic>
+          <a:graphicData uri="http://schemas.openxmlformats.org/drawingml/2006/table">
+            <a:tbl>
+              <a:tblPr firstRow="1" bandRow="1">
+                <a:tableStyleId>{5C22544A-7EE6-4342-B048-85BDC9FD1C3A}</a:tableStyleId>
+              </a:tblPr>
+              <a:tblGrid>
+                <a:gridCol w="2271369"/>
+                <a:gridCol w="6141110"/>
+              </a:tblGrid>
+              <a:tr h="755904">
+                <a:tc>
+                  <a:txBody>
+                    <a:bodyPr wrap="none"/>
+                    <a:lstStyle/>
+                    <a:p>
+                      <a:pPr>
+                        <a:lnSpc>
+                          <a:spcPts val="1600"/>
+                        </a:lnSpc>
+                        <a:spcAft>
+                          <a:spcPts val="0"/>
+                        </a:spcAft>
+                        <a:defRPr sz="1200" b="0">
+                          <a:solidFill>
+                            <a:srgbClr val="21243A"/>
+                          </a:solidFill>
+                          <a:latin typeface="Arial"/>
+                        </a:defRPr>
+                      </a:pPr>
+                      <a:r>
+                        <a:t>OpenAI Analysis</a:t>
+                      </a:r>
+                    </a:p>
+                  </a:txBody>
+                  <a:tcPr marL="82296" marR="82296" marT="64008" marB="64008">
+                    <a:solidFill>
+                      <a:srgbClr val="FFFFFF"/>
+                    </a:solidFill>
+                  </a:tcPr>
+                </a:tc>
+                <a:tc>
+                  <a:txBody>
+                    <a:bodyPr wrap="none"/>
+                    <a:lstStyle/>
+                    <a:p>
+                      <a:pPr>
+                        <a:lnSpc>
+                          <a:spcPts val="1600"/>
+                        </a:lnSpc>
+                        <a:spcAft>
+                          <a:spcPts val="0"/>
+                        </a:spcAft>
+                        <a:defRPr sz="1200" b="0">
+                          <a:solidFill>
+                            <a:srgbClr val="21243A"/>
+                          </a:solidFill>
+                          <a:latin typeface="Arial"/>
+                        </a:defRPr>
+                      </a:pPr>
+                      <a:r>
+                        <a:t>The highly regular two-host exchanges, repetitive affirmations, scripted</a:t>
+                      </a:r>
+                    </a:p>
+                    <a:p>
+                      <a:pPr>
+                        <a:lnSpc>
+                          <a:spcPts val="1600"/>
+                        </a:lnSpc>
+                        <a:spcAft>
+                          <a:spcPts val="0"/>
+                        </a:spcAft>
+                        <a:defRPr sz="1200" b="0">
+                          <a:solidFill>
+                            <a:srgbClr val="21243A"/>
+                          </a:solidFill>
+                          <a:latin typeface="Arial"/>
+                        </a:defRPr>
+                      </a:pPr>
+                      <a:r>
+                        <a:t>explanatory prompts, and formulaic transitions strongly suggest synthetic</a:t>
+                      </a:r>
+                    </a:p>
+                    <a:p>
+                      <a:pPr>
+                        <a:lnSpc>
+                          <a:spcPts val="1600"/>
+                        </a:lnSpc>
+                        <a:spcAft>
+                          <a:spcPts val="0"/>
+                        </a:spcAft>
+                        <a:defRPr sz="1200" b="0">
+                          <a:solidFill>
+                            <a:srgbClr val="21243A"/>
+                          </a:solidFill>
+                          <a:latin typeface="Arial"/>
+                        </a:defRPr>
+                      </a:pPr>
+                      <a:r>
+                        <a:t>generation or editing.</a:t>
+                      </a:r>
+                    </a:p>
+                  </a:txBody>
+                  <a:tcPr marL="82296" marR="82296" marT="64008" marB="64008">
+                    <a:solidFill>
+                      <a:srgbClr val="FFFFFF"/>
+                    </a:solidFill>
+                  </a:tcPr>
+                </a:tc>
+              </a:tr>
+            </a:tbl>
+          </a:graphicData>
+        </a:graphic>
+      </p:graphicFrame>
+      <p:graphicFrame>
+        <p:nvGraphicFramePr>
+          <p:cNvPr id="9" name="Table 8"/>
+          <p:cNvGraphicFramePr>
+            <a:graphicFrameLocks noGrp="1"/>
+          </p:cNvGraphicFramePr>
+          <p:nvPr/>
+        </p:nvGraphicFramePr>
+        <p:xfrm>
+          <a:off x="365760" y="3618992"/>
+          <a:ext cx="8412479" cy="755904"/>
+        </p:xfrm>
+        <a:graphic>
+          <a:graphicData uri="http://schemas.openxmlformats.org/drawingml/2006/table">
+            <a:tbl>
+              <a:tblPr firstRow="1" bandRow="1">
+                <a:tableStyleId>{5C22544A-7EE6-4342-B048-85BDC9FD1C3A}</a:tableStyleId>
+              </a:tblPr>
+              <a:tblGrid>
+                <a:gridCol w="2271369"/>
+                <a:gridCol w="6141110"/>
+              </a:tblGrid>
+              <a:tr h="755904">
+                <a:tc>
+                  <a:txBody>
+                    <a:bodyPr wrap="none"/>
+                    <a:lstStyle/>
+                    <a:p>
+                      <a:pPr>
+                        <a:lnSpc>
+                          <a:spcPts val="1600"/>
+                        </a:lnSpc>
+                        <a:spcAft>
+                          <a:spcPts val="0"/>
+                        </a:spcAft>
+                        <a:defRPr sz="1200" b="0">
+                          <a:solidFill>
+                            <a:srgbClr val="21243A"/>
+                          </a:solidFill>
+                          <a:latin typeface="Arial"/>
+                        </a:defRPr>
+                      </a:pPr>
+                      <a:r>
+                        <a:t>Gemini Analysis</a:t>
+                      </a:r>
+                    </a:p>
+                  </a:txBody>
+                  <a:tcPr marL="82296" marR="82296" marT="64008" marB="64008">
+                    <a:solidFill>
+                      <a:srgbClr val="F1F7F7"/>
+                    </a:solidFill>
+                  </a:tcPr>
+                </a:tc>
+                <a:tc>
+                  <a:txBody>
+                    <a:bodyPr wrap="none"/>
+                    <a:lstStyle/>
+                    <a:p>
+                      <a:pPr>
+                        <a:lnSpc>
+                          <a:spcPts val="1600"/>
+                        </a:lnSpc>
+                        <a:spcAft>
+                          <a:spcPts val="0"/>
+                        </a:spcAft>
+                        <a:defRPr sz="1200" b="0">
+                          <a:solidFill>
+                            <a:srgbClr val="21243A"/>
+                          </a:solidFill>
+                          <a:latin typeface="Arial"/>
+                        </a:defRPr>
+                      </a:pPr>
+                      <a:r>
+                        <a:t>The text displays the classic conversational tropes, rapid turn-taking, and</a:t>
+                      </a:r>
+                    </a:p>
+                    <a:p>
+                      <a:pPr>
+                        <a:lnSpc>
+                          <a:spcPts val="1600"/>
+                        </a:lnSpc>
+                        <a:spcAft>
+                          <a:spcPts val="0"/>
+                        </a:spcAft>
+                        <a:defRPr sz="1200" b="0">
+                          <a:solidFill>
+                            <a:srgbClr val="21243A"/>
+                          </a:solidFill>
+                          <a:latin typeface="Arial"/>
+                        </a:defRPr>
+                      </a:pPr>
+                      <a:r>
+                        <a:t>synthetic cadence characteristic of an automated AI podcast generator like</a:t>
+                      </a:r>
+                    </a:p>
+                    <a:p>
+                      <a:pPr>
+                        <a:lnSpc>
+                          <a:spcPts val="1600"/>
+                        </a:lnSpc>
+                        <a:spcAft>
+                          <a:spcPts val="0"/>
+                        </a:spcAft>
+                        <a:defRPr sz="1200" b="0">
+                          <a:solidFill>
+                            <a:srgbClr val="21243A"/>
+                          </a:solidFill>
+                          <a:latin typeface="Arial"/>
+                        </a:defRPr>
+                      </a:pPr>
+                      <a:r>
+                        <a:t>NotebookLM.</a:t>
                       </a:r>
                     </a:p>
                   </a:txBody>
@@ -11859,7 +12802,7 @@
               </a:defRPr>
             </a:pPr>
             <a:r>
-              <a:t>Transcribed text (continued)</a:t>
+              <a:t>Additional findings</a:t>
             </a:r>
           </a:p>
         </p:txBody>
@@ -12046,7 +12989,7 @@
         </p:nvGraphicFramePr>
         <p:xfrm>
           <a:off x="365760" y="1700784"/>
-          <a:ext cx="8412479" cy="4210304"/>
+          <a:ext cx="8412479" cy="349504"/>
         </p:xfrm>
         <a:graphic>
           <a:graphicData uri="http://schemas.openxmlformats.org/drawingml/2006/table">
@@ -12058,28 +13001,28 @@
                 <a:gridCol w="2271369"/>
                 <a:gridCol w="6141110"/>
               </a:tblGrid>
-              <a:tr h="4210304">
-                <a:tc>
-                  <a:txBody>
-                    <a:bodyPr wrap="none"/>
-                    <a:lstStyle/>
-                    <a:p>
-                      <a:pPr>
-                        <a:lnSpc>
-                          <a:spcPts val="1600"/>
-                        </a:lnSpc>
-                        <a:spcAft>
-                          <a:spcPts val="0"/>
-                        </a:spcAft>
-                        <a:defRPr sz="1200" b="0">
-                          <a:solidFill>
-                            <a:srgbClr val="21243A"/>
-                          </a:solidFill>
-                          <a:latin typeface="Arial"/>
-                        </a:defRPr>
-                      </a:pPr>
-                      <a:r>
-                        <a:t>Continued</a:t>
+              <a:tr h="349504">
+                <a:tc>
+                  <a:txBody>
+                    <a:bodyPr wrap="none"/>
+                    <a:lstStyle/>
+                    <a:p>
+                      <a:pPr>
+                        <a:lnSpc>
+                          <a:spcPts val="1600"/>
+                        </a:lnSpc>
+                        <a:spcAft>
+                          <a:spcPts val="0"/>
+                        </a:spcAft>
+                        <a:defRPr sz="1200" b="0">
+                          <a:solidFill>
+                            <a:srgbClr val="21243A"/>
+                          </a:solidFill>
+                          <a:latin typeface="Arial"/>
+                        </a:defRPr>
+                      </a:pPr>
+                      <a:r>
+                        <a:t>C2PA Content Credentials</a:t>
                       </a:r>
                     </a:p>
                   </a:txBody>
@@ -12109,368 +13052,7 @@
                         </a:defRPr>
                       </a:pPr>
                       <a:r>
-                        <a:t>specific window, basically June 1st, 2020 to June 1st, 2021. And they didn't just like</a:t>
-                      </a:r>
-                    </a:p>
-                    <a:p>
-                      <a:pPr>
-                        <a:lnSpc>
-                          <a:spcPts val="1600"/>
-                        </a:lnSpc>
-                        <a:spcAft>
-                          <a:spcPts val="0"/>
-                        </a:spcAft>
-                        <a:defRPr sz="1200" b="0">
-                          <a:solidFill>
-                            <a:srgbClr val="21243A"/>
-                          </a:solidFill>
-                          <a:latin typeface="Arial"/>
-                        </a:defRPr>
-                      </a:pPr>
-                      <a:r>
-                        <a:t>count how many times the word mask or vaccine was used, which is what I would</a:t>
-                      </a:r>
-                    </a:p>
-                    <a:p>
-                      <a:pPr>
-                        <a:lnSpc>
-                          <a:spcPts val="1600"/>
-                        </a:lnSpc>
-                        <a:spcAft>
-                          <a:spcPts val="0"/>
-                        </a:spcAft>
-                        <a:defRPr sz="1200" b="0">
-                          <a:solidFill>
-                            <a:srgbClr val="21243A"/>
-                          </a:solidFill>
-                          <a:latin typeface="Arial"/>
-                        </a:defRPr>
-                      </a:pPr>
-                      <a:r>
-                        <a:t>have assumed. No, they went way deeper. They utilized media monitoring</a:t>
-                      </a:r>
-                    </a:p>
-                    <a:p>
-                      <a:pPr>
-                        <a:lnSpc>
-                          <a:spcPts val="1600"/>
-                        </a:lnSpc>
-                        <a:spcAft>
-                          <a:spcPts val="0"/>
-                        </a:spcAft>
-                        <a:defRPr sz="1200" b="0">
-                          <a:solidFill>
-                            <a:srgbClr val="21243A"/>
-                          </a:solidFill>
-                          <a:latin typeface="Arial"/>
-                        </a:defRPr>
-                      </a:pPr>
-                      <a:r>
-                        <a:t>software called Meltwater and text network analysis software called InfraNodus.</a:t>
-                      </a:r>
-                    </a:p>
-                    <a:p>
-                      <a:pPr>
-                        <a:lnSpc>
-                          <a:spcPts val="1600"/>
-                        </a:lnSpc>
-                        <a:spcAft>
-                          <a:spcPts val="0"/>
-                        </a:spcAft>
-                        <a:defRPr sz="1200" b="0">
-                          <a:solidFill>
-                            <a:srgbClr val="21243A"/>
-                          </a:solidFill>
-                          <a:latin typeface="Arial"/>
-                        </a:defRPr>
-                      </a:pPr>
-                      <a:r>
-                        <a:t>Which uh we should probably explain how those tools work because it's vital for</a:t>
-                      </a:r>
-                    </a:p>
-                    <a:p>
-                      <a:pPr>
-                        <a:lnSpc>
-                          <a:spcPts val="1600"/>
-                        </a:lnSpc>
-                        <a:spcAft>
-                          <a:spcPts val="0"/>
-                        </a:spcAft>
-                        <a:defRPr sz="1200" b="0">
-                          <a:solidFill>
-                            <a:srgbClr val="21243A"/>
-                          </a:solidFill>
-                          <a:latin typeface="Arial"/>
-                        </a:defRPr>
-                      </a:pPr>
-                      <a:r>
-                        <a:t>understanding the whole study. Please do. So Meltwater acts like this giant net</a:t>
-                      </a:r>
-                    </a:p>
-                    <a:p>
-                      <a:pPr>
-                        <a:lnSpc>
-                          <a:spcPts val="1600"/>
-                        </a:lnSpc>
-                        <a:spcAft>
-                          <a:spcPts val="0"/>
-                        </a:spcAft>
-                        <a:defRPr sz="1200" b="0">
-                          <a:solidFill>
-                            <a:srgbClr val="21243A"/>
-                          </a:solidFill>
-                          <a:latin typeface="Arial"/>
-                        </a:defRPr>
-                      </a:pPr>
-                      <a:r>
-                        <a:t>scraping the internet and pulling in every public conversation based on specific</a:t>
-                      </a:r>
-                    </a:p>
-                    <a:p>
-                      <a:pPr>
-                        <a:lnSpc>
-                          <a:spcPts val="1600"/>
-                        </a:lnSpc>
-                        <a:spcAft>
-                          <a:spcPts val="0"/>
-                        </a:spcAft>
-                        <a:defRPr sz="1200" b="0">
-                          <a:solidFill>
-                            <a:srgbClr val="21243A"/>
-                          </a:solidFill>
-                          <a:latin typeface="Arial"/>
-                        </a:defRPr>
-                      </a:pPr>
-                      <a:r>
-                        <a:t>keywords. Right. But InfraNodus acts as the brain. It actually maps relationships</a:t>
-                      </a:r>
-                    </a:p>
-                    <a:p>
-                      <a:pPr>
-                        <a:lnSpc>
-                          <a:spcPts val="1600"/>
-                        </a:lnSpc>
-                        <a:spcAft>
-                          <a:spcPts val="0"/>
-                        </a:spcAft>
-                        <a:defRPr sz="1200" b="0">
-                          <a:solidFill>
-                            <a:srgbClr val="21243A"/>
-                          </a:solidFill>
-                          <a:latin typeface="Arial"/>
-                        </a:defRPr>
-                      </a:pPr>
-                      <a:r>
-                        <a:t>between words. So if the word mask is constantly sitting right next to the word</a:t>
-                      </a:r>
-                    </a:p>
-                    <a:p>
-                      <a:pPr>
-                        <a:lnSpc>
-                          <a:spcPts val="1600"/>
-                        </a:lnSpc>
-                        <a:spcAft>
-                          <a:spcPts val="0"/>
-                        </a:spcAft>
-                        <a:defRPr sz="1200" b="0">
-                          <a:solidFill>
-                            <a:srgbClr val="21243A"/>
-                          </a:solidFill>
-                          <a:latin typeface="Arial"/>
-                        </a:defRPr>
-                      </a:pPr>
-                      <a:r>
-                        <a:t>tyranny or sheep in millions of tweets, The software draws a thick digital line</a:t>
-                      </a:r>
-                    </a:p>
-                    <a:p>
-                      <a:pPr>
-                        <a:lnSpc>
-                          <a:spcPts val="1600"/>
-                        </a:lnSpc>
-                        <a:spcAft>
-                          <a:spcPts val="0"/>
-                        </a:spcAft>
-                        <a:defRPr sz="1200" b="0">
-                          <a:solidFill>
-                            <a:srgbClr val="21243A"/>
-                          </a:solidFill>
-                          <a:latin typeface="Arial"/>
-                        </a:defRPr>
-                      </a:pPr>
-                      <a:r>
-                        <a:t>between them. Exactly. It lets researchers see the exact architecture of public</a:t>
-                      </a:r>
-                    </a:p>
-                    <a:p>
-                      <a:pPr>
-                        <a:lnSpc>
-                          <a:spcPts val="1600"/>
-                        </a:lnSpc>
-                        <a:spcAft>
-                          <a:spcPts val="0"/>
-                        </a:spcAft>
-                        <a:defRPr sz="1200" b="0">
-                          <a:solidFill>
-                            <a:srgbClr val="21243A"/>
-                          </a:solidFill>
-                          <a:latin typeface="Arial"/>
-                        </a:defRPr>
-                      </a:pPr>
-                      <a:r>
-                        <a:t>sentiment. It's almost like looking at a real-time MRI of society's collective anxiety.</a:t>
-                      </a:r>
-                    </a:p>
-                    <a:p>
-                      <a:pPr>
-                        <a:lnSpc>
-                          <a:spcPts val="1600"/>
-                        </a:lnSpc>
-                        <a:spcAft>
-                          <a:spcPts val="0"/>
-                        </a:spcAft>
-                        <a:defRPr sz="1200" b="0">
-                          <a:solidFill>
-                            <a:srgbClr val="21243A"/>
-                          </a:solidFill>
-                          <a:latin typeface="Arial"/>
-                        </a:defRPr>
-                      </a:pPr>
-                      <a:r>
-                        <a:t>That's a really great way to visualize it. It moves us past just individual anecdotes,</a:t>
-                      </a:r>
-                    </a:p>
-                    <a:p>
-                      <a:pPr>
-                        <a:lnSpc>
-                          <a:spcPts val="1600"/>
-                        </a:lnSpc>
-                        <a:spcAft>
-                          <a:spcPts val="0"/>
-                        </a:spcAft>
-                        <a:defRPr sz="1200" b="0">
-                          <a:solidFill>
-                            <a:srgbClr val="21243A"/>
-                          </a:solidFill>
-                          <a:latin typeface="Arial"/>
-                        </a:defRPr>
-                      </a:pPr>
-                      <a:r>
-                        <a:t>Yeah. Yeah. and it shows us the actual structural flow of ideas. Yeah. So, the</a:t>
-                      </a:r>
-                    </a:p>
-                    <a:p>
-                      <a:pPr>
-                        <a:lnSpc>
-                          <a:spcPts val="1600"/>
-                        </a:lnSpc>
-                        <a:spcAft>
-                          <a:spcPts val="0"/>
-                        </a:spcAft>
-                        <a:defRPr sz="1200" b="0">
-                          <a:solidFill>
-                            <a:srgbClr val="21243A"/>
-                          </a:solidFill>
-                          <a:latin typeface="Arial"/>
-                        </a:defRPr>
-                      </a:pPr>
-                      <a:r>
-                        <a:t>mission for our deep dive today is to explore a very specific phenomenon</a:t>
-                      </a:r>
-                    </a:p>
-                    <a:p>
-                      <a:pPr>
-                        <a:lnSpc>
-                          <a:spcPts val="1600"/>
-                        </a:lnSpc>
-                        <a:spcAft>
-                          <a:spcPts val="0"/>
-                        </a:spcAft>
-                        <a:defRPr sz="1200" b="0">
-                          <a:solidFill>
-                            <a:srgbClr val="21243A"/>
-                          </a:solidFill>
-                          <a:latin typeface="Arial"/>
-                        </a:defRPr>
-                      </a:pPr>
-                      <a:r>
-                        <a:t>uncovered in this flow. We want to see how pre-existing anti-vaccine groups and</a:t>
-                      </a:r>
-                    </a:p>
-                    <a:p>
-                      <a:pPr>
-                        <a:lnSpc>
-                          <a:spcPts val="1600"/>
-                        </a:lnSpc>
-                        <a:spcAft>
-                          <a:spcPts val="0"/>
-                        </a:spcAft>
-                        <a:defRPr sz="1200" b="0">
-                          <a:solidFill>
-                            <a:srgbClr val="21243A"/>
-                          </a:solidFill>
-                          <a:latin typeface="Arial"/>
-                        </a:defRPr>
-                      </a:pPr>
-                      <a:r>
-                        <a:t>newly formed anti-mask groups actually merged into this massive digital</a:t>
-                      </a:r>
-                    </a:p>
-                    <a:p>
-                      <a:pPr>
-                        <a:lnSpc>
-                          <a:spcPts val="1600"/>
-                        </a:lnSpc>
-                        <a:spcAft>
-                          <a:spcPts val="0"/>
-                        </a:spcAft>
-                        <a:defRPr sz="1200" b="0">
-                          <a:solidFill>
-                            <a:srgbClr val="21243A"/>
-                          </a:solidFill>
-                          <a:latin typeface="Arial"/>
-                        </a:defRPr>
-                      </a:pPr>
-                      <a:r>
-                        <a:t>powerhouse. And to understand the psychological, social, and political drivers</a:t>
-                      </a:r>
-                    </a:p>
-                    <a:p>
-                      <a:pPr>
-                        <a:lnSpc>
-                          <a:spcPts val="1600"/>
-                        </a:lnSpc>
-                        <a:spcAft>
-                          <a:spcPts val="0"/>
-                        </a:spcAft>
-                        <a:defRPr sz="1200" b="0">
-                          <a:solidFill>
-                            <a:srgbClr val="21243A"/>
-                          </a:solidFill>
-                          <a:latin typeface="Arial"/>
-                        </a:defRPr>
-                      </a:pPr>
-                      <a:r>
-                        <a:t>behind how the public reacted to these mandates. Exactly. Now uh a very quick</a:t>
-                      </a:r>
-                    </a:p>
-                    <a:p>
-                      <a:pPr>
-                        <a:lnSpc>
-                          <a:spcPts val="1600"/>
-                        </a:lnSpc>
-                        <a:spcAft>
-                          <a:spcPts val="0"/>
-                        </a:spcAft>
-                        <a:defRPr sz="1200" b="0">
-                          <a:solidFill>
-                            <a:srgbClr val="21243A"/>
-                          </a:solidFill>
-                          <a:latin typeface="Arial"/>
-                        </a:defRPr>
-                      </a:pPr>
-                      <a:r>
-                        <a:t>heads up to you the listener before we dive into the timeline, the data we are</a:t>
+                        <a:t>Not checked in this text-analysis pass; no original-media provenance conclusion.</a:t>
                       </a:r>
                     </a:p>
                   </a:txBody>
@@ -12582,7 +13164,7 @@
               </a:defRPr>
             </a:pPr>
             <a:r>
-              <a:t>Transcribed text (continued)</a:t>
+              <a:t>Transcribed text</a:t>
             </a:r>
           </a:p>
         </p:txBody>
@@ -12769,7 +13351,7 @@
         </p:nvGraphicFramePr>
         <p:xfrm>
           <a:off x="365760" y="1700784"/>
-          <a:ext cx="8412479" cy="2178304"/>
+          <a:ext cx="8412479" cy="4210304"/>
         </p:xfrm>
         <a:graphic>
           <a:graphicData uri="http://schemas.openxmlformats.org/drawingml/2006/table">
@@ -12781,28 +13363,28 @@
                 <a:gridCol w="2271369"/>
                 <a:gridCol w="6141110"/>
               </a:tblGrid>
-              <a:tr h="2178304">
-                <a:tc>
-                  <a:txBody>
-                    <a:bodyPr wrap="none"/>
-                    <a:lstStyle/>
-                    <a:p>
-                      <a:pPr>
-                        <a:lnSpc>
-                          <a:spcPts val="1600"/>
-                        </a:lnSpc>
-                        <a:spcAft>
-                          <a:spcPts val="0"/>
-                        </a:spcAft>
-                        <a:defRPr sz="1200" b="0">
-                          <a:solidFill>
-                            <a:srgbClr val="21243A"/>
-                          </a:solidFill>
-                          <a:latin typeface="Arial"/>
-                        </a:defRPr>
-                      </a:pPr>
-                      <a:r>
-                        <a:t>Continued</a:t>
+              <a:tr h="4210304">
+                <a:tc>
+                  <a:txBody>
+                    <a:bodyPr wrap="none"/>
+                    <a:lstStyle/>
+                    <a:p>
+                      <a:pPr>
+                        <a:lnSpc>
+                          <a:spcPts val="1600"/>
+                        </a:lnSpc>
+                        <a:spcAft>
+                          <a:spcPts val="0"/>
+                        </a:spcAft>
+                        <a:defRPr sz="1200" b="0">
+                          <a:solidFill>
+                            <a:srgbClr val="21243A"/>
+                          </a:solidFill>
+                          <a:latin typeface="Arial"/>
+                        </a:defRPr>
+                      </a:pPr>
+                      <a:r>
+                        <a:t>Recorded text</a:t>
                       </a:r>
                     </a:p>
                   </a:txBody>
@@ -12832,178 +13414,368 @@
                         </a:defRPr>
                       </a:pPr>
                       <a:r>
-                        <a:t>analyzing today is heavily political. Very heavily. Yeah, it involves major figures</a:t>
-                      </a:r>
-                    </a:p>
-                    <a:p>
-                      <a:pPr>
-                        <a:lnSpc>
-                          <a:spcPts val="1600"/>
-                        </a:lnSpc>
-                        <a:spcAft>
-                          <a:spcPts val="0"/>
-                        </a:spcAft>
-                        <a:defRPr sz="1200" b="0">
-                          <a:solidFill>
-                            <a:srgbClr val="21243A"/>
-                          </a:solidFill>
-                          <a:latin typeface="Arial"/>
-                        </a:defRPr>
-                      </a:pPr>
-                      <a:r>
-                        <a:t>from the left and the right. We're talking President Joe Biden, former President</a:t>
-                      </a:r>
-                    </a:p>
-                    <a:p>
-                      <a:pPr>
-                        <a:lnSpc>
-                          <a:spcPts val="1600"/>
-                        </a:lnSpc>
-                        <a:spcAft>
-                          <a:spcPts val="0"/>
-                        </a:spcAft>
-                        <a:defRPr sz="1200" b="0">
-                          <a:solidFill>
-                            <a:srgbClr val="21243A"/>
-                          </a:solidFill>
-                          <a:latin typeface="Arial"/>
-                        </a:defRPr>
-                      </a:pPr>
-                      <a:r>
-                        <a:t>Donald Trump, Vice President Kamala Harris along with a bunch of conservative</a:t>
-                      </a:r>
-                    </a:p>
-                    <a:p>
-                      <a:pPr>
-                        <a:lnSpc>
-                          <a:spcPts val="1600"/>
-                        </a:lnSpc>
-                        <a:spcAft>
-                          <a:spcPts val="0"/>
-                        </a:spcAft>
-                        <a:defRPr sz="1200" b="0">
-                          <a:solidFill>
-                            <a:srgbClr val="21243A"/>
-                          </a:solidFill>
-                          <a:latin typeface="Arial"/>
-                        </a:defRPr>
-                      </a:pPr>
-                      <a:r>
-                        <a:t>and liberal viewpoints. Right. So, I have to be clear here. We aren't taking sides</a:t>
-                      </a:r>
-                    </a:p>
-                    <a:p>
-                      <a:pPr>
-                        <a:lnSpc>
-                          <a:spcPts val="1600"/>
-                        </a:lnSpc>
-                        <a:spcAft>
-                          <a:spcPts val="0"/>
-                        </a:spcAft>
-                        <a:defRPr sz="1200" b="0">
-                          <a:solidFill>
-                            <a:srgbClr val="21243A"/>
-                          </a:solidFill>
-                          <a:latin typeface="Arial"/>
-                        </a:defRPr>
-                      </a:pPr>
-                      <a:r>
-                        <a:t>today. We aren't endorsing any of the politics discussed. We're just impartially</a:t>
-                      </a:r>
-                    </a:p>
-                    <a:p>
-                      <a:pPr>
-                        <a:lnSpc>
-                          <a:spcPts val="1600"/>
-                        </a:lnSpc>
-                        <a:spcAft>
-                          <a:spcPts val="0"/>
-                        </a:spcAft>
-                        <a:defRPr sz="1200" b="0">
-                          <a:solidFill>
-                            <a:srgbClr val="21243A"/>
-                          </a:solidFill>
-                          <a:latin typeface="Arial"/>
-                        </a:defRPr>
-                      </a:pPr>
-                      <a:r>
-                        <a:t>reading the digital footprint left behind to help you understand the mechanics of</a:t>
-                      </a:r>
-                    </a:p>
-                    <a:p>
-                      <a:pPr>
-                        <a:lnSpc>
-                          <a:spcPts val="1600"/>
-                        </a:lnSpc>
-                        <a:spcAft>
-                          <a:spcPts val="0"/>
-                        </a:spcAft>
-                        <a:defRPr sz="1200" b="0">
-                          <a:solidFill>
-                            <a:srgbClr val="21243A"/>
-                          </a:solidFill>
-                          <a:latin typeface="Arial"/>
-                        </a:defRPr>
-                      </a:pPr>
-                      <a:r>
-                        <a:t>this social media evolution. Our focus is strictly on the mechanics of the discourse.</a:t>
-                      </a:r>
-                    </a:p>
-                    <a:p>
-                      <a:pPr>
-                        <a:lnSpc>
-                          <a:spcPts val="1600"/>
-                        </a:lnSpc>
-                        <a:spcAft>
-                          <a:spcPts val="0"/>
-                        </a:spcAft>
-                        <a:defRPr sz="1200" b="0">
-                          <a:solidFill>
-                            <a:srgbClr val="21243A"/>
-                          </a:solidFill>
-                          <a:latin typeface="Arial"/>
-                        </a:defRPr>
-                      </a:pPr>
-                      <a:r>
-                        <a:t>You know, what the data reflects, what was said, and how it spread. Okay, let's</a:t>
-                      </a:r>
-                    </a:p>
-                    <a:p>
-                      <a:pPr>
-                        <a:lnSpc>
-                          <a:spcPts val="1600"/>
-                        </a:lnSpc>
-                        <a:spcAft>
-                          <a:spcPts val="0"/>
-                        </a:spcAft>
-                        <a:defRPr sz="1200" b="0">
-                          <a:solidFill>
-                            <a:srgbClr val="21243A"/>
-                          </a:solidFill>
-                          <a:latin typeface="Arial"/>
-                        </a:defRPr>
-                      </a:pPr>
-                      <a:r>
-                        <a:t>unpack this. To really understand the explosion of outrage and compliance in</a:t>
-                      </a:r>
-                    </a:p>
-                    <a:p>
-                      <a:pPr>
-                        <a:lnSpc>
-                          <a:spcPts val="1600"/>
-                        </a:lnSpc>
-                        <a:spcAft>
-                          <a:spcPts val="0"/>
-                        </a:spcAft>
-                        <a:defRPr sz="1200" b="0">
-                          <a:solidFill>
-                            <a:srgbClr val="21243A"/>
-                          </a:solidFill>
-                          <a:latin typeface="Arial"/>
-                        </a:defRPr>
-                      </a:pPr>
-                      <a:r>
-                        <a:t>2020, we have to recognize that human pushback again</a:t>
+                        <a:t>Imagine holding a like a simple piece of cloth in your hand. Let's say it's 2019, and</a:t>
+                      </a:r>
+                    </a:p>
+                    <a:p>
+                      <a:pPr>
+                        <a:lnSpc>
+                          <a:spcPts val="1600"/>
+                        </a:lnSpc>
+                        <a:spcAft>
+                          <a:spcPts val="0"/>
+                        </a:spcAft>
+                        <a:defRPr sz="1200" b="0">
+                          <a:solidFill>
+                            <a:srgbClr val="21243A"/>
+                          </a:solidFill>
+                          <a:latin typeface="Arial"/>
+                        </a:defRPr>
+                      </a:pPr>
+                      <a:r>
+                        <a:t>it's just a standard surgical mask. Right, just a boring everyday medical supply,</a:t>
+                      </a:r>
+                    </a:p>
+                    <a:p>
+                      <a:pPr>
+                        <a:lnSpc>
+                          <a:spcPts val="1600"/>
+                        </a:lnSpc>
+                        <a:spcAft>
+                          <a:spcPts val="0"/>
+                        </a:spcAft>
+                        <a:defRPr sz="1200" b="0">
+                          <a:solidFill>
+                            <a:srgbClr val="21243A"/>
+                          </a:solidFill>
+                          <a:latin typeface="Arial"/>
+                        </a:defRPr>
+                      </a:pPr>
+                      <a:r>
+                        <a:t>something you'd really only see at the dentist office. Exactly. But then fast-forward</a:t>
+                      </a:r>
+                    </a:p>
+                    <a:p>
+                      <a:pPr>
+                        <a:lnSpc>
+                          <a:spcPts val="1600"/>
+                        </a:lnSpc>
+                        <a:spcAft>
+                          <a:spcPts val="0"/>
+                        </a:spcAft>
+                        <a:defRPr sz="1200" b="0">
+                          <a:solidFill>
+                            <a:srgbClr val="21243A"/>
+                          </a:solidFill>
+                          <a:latin typeface="Arial"/>
+                        </a:defRPr>
+                      </a:pPr>
+                      <a:r>
+                        <a:t>to the end of 2020, and that exact same piece of cloth had morphed into like a</a:t>
+                      </a:r>
+                    </a:p>
+                    <a:p>
+                      <a:pPr>
+                        <a:lnSpc>
+                          <a:spcPts val="1600"/>
+                        </a:lnSpc>
+                        <a:spcAft>
+                          <a:spcPts val="0"/>
+                        </a:spcAft>
+                        <a:defRPr sz="1200" b="0">
+                          <a:solidFill>
+                            <a:srgbClr val="21243A"/>
+                          </a:solidFill>
+                          <a:latin typeface="Arial"/>
+                        </a:defRPr>
+                      </a:pPr>
+                      <a:r>
+                        <a:t>literal measure of your morality. Oh, absolutely. It became a symbol of your</a:t>
+                      </a:r>
+                    </a:p>
+                    <a:p>
+                      <a:pPr>
+                        <a:lnSpc>
+                          <a:spcPts val="1600"/>
+                        </a:lnSpc>
+                        <a:spcAft>
+                          <a:spcPts val="0"/>
+                        </a:spcAft>
+                        <a:defRPr sz="1200" b="0">
+                          <a:solidFill>
+                            <a:srgbClr val="21243A"/>
+                          </a:solidFill>
+                          <a:latin typeface="Arial"/>
+                        </a:defRPr>
+                      </a:pPr>
+                      <a:r>
+                        <a:t>political affiliation, your patriotism, even. It's just wild to think about. I mean,</a:t>
+                      </a:r>
+                    </a:p>
+                    <a:p>
+                      <a:pPr>
+                        <a:lnSpc>
+                          <a:spcPts val="1600"/>
+                        </a:lnSpc>
+                        <a:spcAft>
+                          <a:spcPts val="0"/>
+                        </a:spcAft>
+                        <a:defRPr sz="1200" b="0">
+                          <a:solidFill>
+                            <a:srgbClr val="21243A"/>
+                          </a:solidFill>
+                          <a:latin typeface="Arial"/>
+                        </a:defRPr>
+                      </a:pPr>
+                      <a:r>
+                        <a:t>today we are looking at the exact digital moment a basic health mandate turned</a:t>
+                      </a:r>
+                    </a:p>
+                    <a:p>
+                      <a:pPr>
+                        <a:lnSpc>
+                          <a:spcPts val="1600"/>
+                        </a:lnSpc>
+                        <a:spcAft>
+                          <a:spcPts val="0"/>
+                        </a:spcAft>
+                        <a:defRPr sz="1200" b="0">
+                          <a:solidFill>
+                            <a:srgbClr val="21243A"/>
+                          </a:solidFill>
+                          <a:latin typeface="Arial"/>
+                        </a:defRPr>
+                      </a:pPr>
+                      <a:r>
+                        <a:t>into a full-blown ideological war. It really is one of the most compressed, intense</a:t>
+                      </a:r>
+                    </a:p>
+                    <a:p>
+                      <a:pPr>
+                        <a:lnSpc>
+                          <a:spcPts val="1600"/>
+                        </a:lnSpc>
+                        <a:spcAft>
+                          <a:spcPts val="0"/>
+                        </a:spcAft>
+                        <a:defRPr sz="1200" b="0">
+                          <a:solidFill>
+                            <a:srgbClr val="21243A"/>
+                          </a:solidFill>
+                          <a:latin typeface="Arial"/>
+                        </a:defRPr>
+                      </a:pPr>
+                      <a:r>
+                        <a:t>sociological shifts we've ever witnessed. Yeah. We went from a public that largely</a:t>
+                      </a:r>
+                    </a:p>
+                    <a:p>
+                      <a:pPr>
+                        <a:lnSpc>
+                          <a:spcPts val="1600"/>
+                        </a:lnSpc>
+                        <a:spcAft>
+                          <a:spcPts val="0"/>
+                        </a:spcAft>
+                        <a:defRPr sz="1200" b="0">
+                          <a:solidFill>
+                            <a:srgbClr val="21243A"/>
+                          </a:solidFill>
+                          <a:latin typeface="Arial"/>
+                        </a:defRPr>
+                      </a:pPr>
+                      <a:r>
+                        <a:t>didn't think about epidemiology at all to a society where every single person was</a:t>
+                      </a:r>
+                    </a:p>
+                    <a:p>
+                      <a:pPr>
+                        <a:lnSpc>
+                          <a:spcPts val="1600"/>
+                        </a:lnSpc>
+                        <a:spcAft>
+                          <a:spcPts val="0"/>
+                        </a:spcAft>
+                        <a:defRPr sz="1200" b="0">
+                          <a:solidFill>
+                            <a:srgbClr val="21243A"/>
+                          </a:solidFill>
+                          <a:latin typeface="Arial"/>
+                        </a:defRPr>
+                      </a:pPr>
+                      <a:r>
+                        <a:t>forced to take a public, highly visible stance on a global health crisis. And usually,</a:t>
+                      </a:r>
+                    </a:p>
+                    <a:p>
+                      <a:pPr>
+                        <a:lnSpc>
+                          <a:spcPts val="1600"/>
+                        </a:lnSpc>
+                        <a:spcAft>
+                          <a:spcPts val="0"/>
+                        </a:spcAft>
+                        <a:defRPr sz="1200" b="0">
+                          <a:solidFill>
+                            <a:srgbClr val="21243A"/>
+                          </a:solidFill>
+                          <a:latin typeface="Arial"/>
+                        </a:defRPr>
+                      </a:pPr>
+                      <a:r>
+                        <a:t>you know, when we talk about a massive global event like that, we have to rely on</a:t>
+                      </a:r>
+                    </a:p>
+                    <a:p>
+                      <a:pPr>
+                        <a:lnSpc>
+                          <a:spcPts val="1600"/>
+                        </a:lnSpc>
+                        <a:spcAft>
+                          <a:spcPts val="0"/>
+                        </a:spcAft>
+                        <a:defRPr sz="1200" b="0">
+                          <a:solidFill>
+                            <a:srgbClr val="21243A"/>
+                          </a:solidFill>
+                          <a:latin typeface="Arial"/>
+                        </a:defRPr>
+                      </a:pPr>
+                      <a:r>
+                        <a:t>historians decades later to piece together the public mood. Right, digging through</a:t>
+                      </a:r>
+                    </a:p>
+                    <a:p>
+                      <a:pPr>
+                        <a:lnSpc>
+                          <a:spcPts val="1600"/>
+                        </a:lnSpc>
+                        <a:spcAft>
+                          <a:spcPts val="0"/>
+                        </a:spcAft>
+                        <a:defRPr sz="1200" b="0">
+                          <a:solidFill>
+                            <a:srgbClr val="21243A"/>
+                          </a:solidFill>
+                          <a:latin typeface="Arial"/>
+                        </a:defRPr>
+                      </a:pPr>
+                      <a:r>
+                        <a:t>old newspaper clippings or a diary entries. Exactly. But for the COVID-19</a:t>
+                      </a:r>
+                    </a:p>
+                    <a:p>
+                      <a:pPr>
+                        <a:lnSpc>
+                          <a:spcPts val="1600"/>
+                        </a:lnSpc>
+                        <a:spcAft>
+                          <a:spcPts val="0"/>
+                        </a:spcAft>
+                        <a:defRPr sz="1200" b="0">
+                          <a:solidFill>
+                            <a:srgbClr val="21243A"/>
+                          </a:solidFill>
+                          <a:latin typeface="Arial"/>
+                        </a:defRPr>
+                      </a:pPr>
+                      <a:r>
+                        <a:t>pandemic, we have this complete, real-time behavioral laboratory. So, we are</a:t>
+                      </a:r>
+                    </a:p>
+                    <a:p>
+                      <a:pPr>
+                        <a:lnSpc>
+                          <a:spcPts val="1600"/>
+                        </a:lnSpc>
+                        <a:spcAft>
+                          <a:spcPts val="0"/>
+                        </a:spcAft>
+                        <a:defRPr sz="1200" b="0">
+                          <a:solidFill>
+                            <a:srgbClr val="21243A"/>
+                          </a:solidFill>
+                          <a:latin typeface="Arial"/>
+                        </a:defRPr>
+                      </a:pPr>
+                      <a:r>
+                        <a:t>grounding our conversation today in this fascinating peer-reviewed study from</a:t>
+                      </a:r>
+                    </a:p>
+                    <a:p>
+                      <a:pPr>
+                        <a:lnSpc>
+                          <a:spcPts val="1600"/>
+                        </a:lnSpc>
+                        <a:spcAft>
+                          <a:spcPts val="0"/>
+                        </a:spcAft>
+                        <a:defRPr sz="1200" b="0">
+                          <a:solidFill>
+                            <a:srgbClr val="21243A"/>
+                          </a:solidFill>
+                          <a:latin typeface="Arial"/>
+                        </a:defRPr>
+                      </a:pPr>
+                      <a:r>
+                        <a:t>the journal Vaccine. Yes, authored by Sam Martin and Samantha Vanderslott from</a:t>
+                      </a:r>
+                    </a:p>
+                    <a:p>
+                      <a:pPr>
+                        <a:lnSpc>
+                          <a:spcPts val="1600"/>
+                        </a:lnSpc>
+                        <a:spcAft>
+                          <a:spcPts val="0"/>
+                        </a:spcAft>
+                        <a:defRPr sz="1200" b="0">
+                          <a:solidFill>
+                            <a:srgbClr val="21243A"/>
+                          </a:solidFill>
+                          <a:latin typeface="Arial"/>
+                        </a:defRPr>
+                      </a:pPr>
+                      <a:r>
+                        <a:t>the Oxford Vaccine Group. And the scale of their research here is what makes it so</a:t>
+                      </a:r>
+                    </a:p>
+                    <a:p>
+                      <a:pPr>
+                        <a:lnSpc>
+                          <a:spcPts val="1600"/>
+                        </a:lnSpc>
+                        <a:spcAft>
+                          <a:spcPts val="0"/>
+                        </a:spcAft>
+                        <a:defRPr sz="1200" b="0">
+                          <a:solidFill>
+                            <a:srgbClr val="21243A"/>
+                          </a:solidFill>
+                          <a:latin typeface="Arial"/>
+                        </a:defRPr>
+                      </a:pPr>
+                      <a:r>
+                        <a:t>robust, right? Oh, totally. They analyzed this massive data set of 7.89 million</a:t>
+                      </a:r>
+                    </a:p>
+                    <a:p>
+                      <a:pPr>
+                        <a:lnSpc>
+                          <a:spcPts val="1600"/>
+                        </a:lnSpc>
+                        <a:spcAft>
+                          <a:spcPts val="0"/>
+                        </a:spcAft>
+                        <a:defRPr sz="1200" b="0">
+                          <a:solidFill>
+                            <a:srgbClr val="21243A"/>
+                          </a:solidFill>
+                          <a:latin typeface="Arial"/>
+                        </a:defRPr>
+                      </a:pPr>
+                      <a:r>
+                        <a:t>English-language tweets. Wow. Yeah, from the US and the UK, spanning a very</a:t>
                       </a:r>
                     </a:p>
                   </a:txBody>
@@ -14131,7 +14903,7 @@
               </a:defRPr>
             </a:pPr>
             <a:r>
-              <a:t>How this assessment was reached</a:t>
+              <a:t>Transcribed text (continued)</a:t>
             </a:r>
           </a:p>
         </p:txBody>
@@ -14318,7 +15090,7 @@
         </p:nvGraphicFramePr>
         <p:xfrm>
           <a:off x="365760" y="1700784"/>
-          <a:ext cx="8412479" cy="552704"/>
+          <a:ext cx="8412479" cy="4210304"/>
         </p:xfrm>
         <a:graphic>
           <a:graphicData uri="http://schemas.openxmlformats.org/drawingml/2006/table">
@@ -14330,28 +15102,28 @@
                 <a:gridCol w="2271369"/>
                 <a:gridCol w="6141110"/>
               </a:tblGrid>
-              <a:tr h="552704">
-                <a:tc>
-                  <a:txBody>
-                    <a:bodyPr wrap="none"/>
-                    <a:lstStyle/>
-                    <a:p>
-                      <a:pPr>
-                        <a:lnSpc>
-                          <a:spcPts val="1600"/>
-                        </a:lnSpc>
-                        <a:spcAft>
-                          <a:spcPts val="0"/>
-                        </a:spcAft>
-                        <a:defRPr sz="1200" b="0">
-                          <a:solidFill>
-                            <a:srgbClr val="21243A"/>
-                          </a:solidFill>
-                          <a:latin typeface="Arial"/>
-                        </a:defRPr>
-                      </a:pPr>
-                      <a:r>
-                        <a:t>1. override</a:t>
+              <a:tr h="4210304">
+                <a:tc>
+                  <a:txBody>
+                    <a:bodyPr wrap="none"/>
+                    <a:lstStyle/>
+                    <a:p>
+                      <a:pPr>
+                        <a:lnSpc>
+                          <a:spcPts val="1600"/>
+                        </a:lnSpc>
+                        <a:spcAft>
+                          <a:spcPts val="0"/>
+                        </a:spcAft>
+                        <a:defRPr sz="1200" b="0">
+                          <a:solidFill>
+                            <a:srgbClr val="21243A"/>
+                          </a:solidFill>
+                          <a:latin typeface="Arial"/>
+                        </a:defRPr>
+                      </a:pPr>
+                      <a:r>
+                        <a:t>Continued</a:t>
                       </a:r>
                     </a:p>
                   </a:txBody>
@@ -14381,240 +15153,368 @@
                         </a:defRPr>
                       </a:pPr>
                       <a:r>
-                        <a:t>outcome=none; detail=No confirmed C2PA AI assertion or SynthID watermark.</a:t>
-                      </a:r>
-                    </a:p>
-                    <a:p>
-                      <a:pPr>
-                        <a:lnSpc>
-                          <a:spcPts val="1600"/>
-                        </a:lnSpc>
-                        <a:spcAft>
-                          <a:spcPts val="0"/>
-                        </a:spcAft>
-                        <a:defRPr sz="1200" b="0">
-                          <a:solidFill>
-                            <a:srgbClr val="21243A"/>
-                          </a:solidFill>
-                          <a:latin typeface="Arial"/>
-                        </a:defRPr>
-                      </a:pPr>
-                      <a:r>
-                        <a:t>Origin remains unresolved by these checks.</a:t>
-                      </a:r>
-                    </a:p>
-                  </a:txBody>
-                  <a:tcPr marL="82296" marR="82296" marT="64008" marB="64008">
-                    <a:solidFill>
-                      <a:srgbClr val="F1F7F7"/>
-                    </a:solidFill>
-                  </a:tcPr>
-                </a:tc>
-              </a:tr>
-            </a:tbl>
-          </a:graphicData>
-        </a:graphic>
-      </p:graphicFrame>
-      <p:graphicFrame>
-        <p:nvGraphicFramePr>
-          <p:cNvPr id="8" name="Table 7"/>
-          <p:cNvGraphicFramePr>
-            <a:graphicFrameLocks noGrp="1"/>
-          </p:cNvGraphicFramePr>
-          <p:nvPr/>
-        </p:nvGraphicFramePr>
-        <p:xfrm>
-          <a:off x="365760" y="2253488"/>
-          <a:ext cx="8412479" cy="552704"/>
-        </p:xfrm>
-        <a:graphic>
-          <a:graphicData uri="http://schemas.openxmlformats.org/drawingml/2006/table">
-            <a:tbl>
-              <a:tblPr firstRow="1" bandRow="1">
-                <a:tableStyleId>{5C22544A-7EE6-4342-B048-85BDC9FD1C3A}</a:tableStyleId>
-              </a:tblPr>
-              <a:tblGrid>
-                <a:gridCol w="2271369"/>
-                <a:gridCol w="6141110"/>
-              </a:tblGrid>
-              <a:tr h="552704">
-                <a:tc>
-                  <a:txBody>
-                    <a:bodyPr wrap="none"/>
-                    <a:lstStyle/>
-                    <a:p>
-                      <a:pPr>
-                        <a:lnSpc>
-                          <a:spcPts val="1600"/>
-                        </a:lnSpc>
-                        <a:spcAft>
-                          <a:spcPts val="0"/>
-                        </a:spcAft>
-                        <a:defRPr sz="1200" b="0">
-                          <a:solidFill>
-                            <a:srgbClr val="21243A"/>
-                          </a:solidFill>
-                          <a:latin typeface="Arial"/>
-                        </a:defRPr>
-                      </a:pPr>
-                      <a:r>
-                        <a:t>2. model_agreement</a:t>
-                      </a:r>
-                    </a:p>
-                  </a:txBody>
-                  <a:tcPr marL="82296" marR="82296" marT="64008" marB="64008">
-                    <a:solidFill>
-                      <a:srgbClr val="FFFFFF"/>
-                    </a:solidFill>
-                  </a:tcPr>
-                </a:tc>
-                <a:tc>
-                  <a:txBody>
-                    <a:bodyPr wrap="none"/>
-                    <a:lstStyle/>
-                    <a:p>
-                      <a:pPr>
-                        <a:lnSpc>
-                          <a:spcPts val="1600"/>
-                        </a:lnSpc>
-                        <a:spcAft>
-                          <a:spcPts val="0"/>
-                        </a:spcAft>
-                        <a:defRPr sz="1200" b="0">
-                          <a:solidFill>
-                            <a:srgbClr val="21243A"/>
-                          </a:solidFill>
-                          <a:latin typeface="Arial"/>
-                        </a:defRPr>
-                      </a:pPr>
-                      <a:r>
-                        <a:t>synthetic=['Claude Analysis', 'OpenAI Analysis', 'Gemini Analysis']; authentic=[];</a:t>
-                      </a:r>
-                    </a:p>
-                    <a:p>
-                      <a:pPr>
-                        <a:lnSpc>
-                          <a:spcPts val="1600"/>
-                        </a:lnSpc>
-                        <a:spcAft>
-                          <a:spcPts val="0"/>
-                        </a:spcAft>
-                        <a:defRPr sz="1200" b="0">
-                          <a:solidFill>
-                            <a:srgbClr val="21243A"/>
-                          </a:solidFill>
-                          <a:latin typeface="Arial"/>
-                        </a:defRPr>
-                      </a:pPr>
-                      <a:r>
-                        <a:t>uncertain=[]; forensic_supports_synthetic=False</a:t>
-                      </a:r>
-                    </a:p>
-                  </a:txBody>
-                  <a:tcPr marL="82296" marR="82296" marT="64008" marB="64008">
-                    <a:solidFill>
-                      <a:srgbClr val="FFFFFF"/>
-                    </a:solidFill>
-                  </a:tcPr>
-                </a:tc>
-              </a:tr>
-            </a:tbl>
-          </a:graphicData>
-        </a:graphic>
-      </p:graphicFrame>
-      <p:graphicFrame>
-        <p:nvGraphicFramePr>
-          <p:cNvPr id="9" name="Table 8"/>
-          <p:cNvGraphicFramePr>
-            <a:graphicFrameLocks noGrp="1"/>
-          </p:cNvGraphicFramePr>
-          <p:nvPr/>
-        </p:nvGraphicFramePr>
-        <p:xfrm>
-          <a:off x="365760" y="2806192"/>
-          <a:ext cx="8412479" cy="552704"/>
-        </p:xfrm>
-        <a:graphic>
-          <a:graphicData uri="http://schemas.openxmlformats.org/drawingml/2006/table">
-            <a:tbl>
-              <a:tblPr firstRow="1" bandRow="1">
-                <a:tableStyleId>{5C22544A-7EE6-4342-B048-85BDC9FD1C3A}</a:tableStyleId>
-              </a:tblPr>
-              <a:tblGrid>
-                <a:gridCol w="2271369"/>
-                <a:gridCol w="6141110"/>
-              </a:tblGrid>
-              <a:tr h="552704">
-                <a:tc>
-                  <a:txBody>
-                    <a:bodyPr wrap="none"/>
-                    <a:lstStyle/>
-                    <a:p>
-                      <a:pPr>
-                        <a:lnSpc>
-                          <a:spcPts val="1600"/>
-                        </a:lnSpc>
-                        <a:spcAft>
-                          <a:spcPts val="0"/>
-                        </a:spcAft>
-                        <a:defRPr sz="1200" b="0">
-                          <a:solidFill>
-                            <a:srgbClr val="21243A"/>
-                          </a:solidFill>
-                          <a:latin typeface="Arial"/>
-                        </a:defRPr>
-                      </a:pPr>
-                      <a:r>
-                        <a:t>3. verdict</a:t>
-                      </a:r>
-                    </a:p>
-                  </a:txBody>
-                  <a:tcPr marL="82296" marR="82296" marT="64008" marB="64008">
-                    <a:solidFill>
-                      <a:srgbClr val="F1F7F7"/>
-                    </a:solidFill>
-                  </a:tcPr>
-                </a:tc>
-                <a:tc>
-                  <a:txBody>
-                    <a:bodyPr wrap="none"/>
-                    <a:lstStyle/>
-                    <a:p>
-                      <a:pPr>
-                        <a:lnSpc>
-                          <a:spcPts val="1600"/>
-                        </a:lnSpc>
-                        <a:spcAft>
-                          <a:spcPts val="0"/>
-                        </a:spcAft>
-                        <a:defRPr sz="1200" b="0">
-                          <a:solidFill>
-                            <a:srgbClr val="21243A"/>
-                          </a:solidFill>
-                          <a:latin typeface="Arial"/>
-                        </a:defRPr>
-                      </a:pPr>
-                      <a:r>
-                        <a:t>value=synthetic_likely; confidence=high; reason=3 models agree this is likely</a:t>
-                      </a:r>
-                    </a:p>
-                    <a:p>
-                      <a:pPr>
-                        <a:lnSpc>
-                          <a:spcPts val="1600"/>
-                        </a:lnSpc>
-                        <a:spcAft>
-                          <a:spcPts val="0"/>
-                        </a:spcAft>
-                        <a:defRPr sz="1200" b="0">
-                          <a:solidFill>
-                            <a:srgbClr val="21243A"/>
-                          </a:solidFill>
-                          <a:latin typeface="Arial"/>
-                        </a:defRPr>
-                      </a:pPr>
-                      <a:r>
-                        <a:t>synthetic.</a:t>
+                        <a:t>specific window, basically June 1st, 2020 to June 1st, 2021. And they didn't just like</a:t>
+                      </a:r>
+                    </a:p>
+                    <a:p>
+                      <a:pPr>
+                        <a:lnSpc>
+                          <a:spcPts val="1600"/>
+                        </a:lnSpc>
+                        <a:spcAft>
+                          <a:spcPts val="0"/>
+                        </a:spcAft>
+                        <a:defRPr sz="1200" b="0">
+                          <a:solidFill>
+                            <a:srgbClr val="21243A"/>
+                          </a:solidFill>
+                          <a:latin typeface="Arial"/>
+                        </a:defRPr>
+                      </a:pPr>
+                      <a:r>
+                        <a:t>count how many times the word mask or vaccine was used, which is what I would</a:t>
+                      </a:r>
+                    </a:p>
+                    <a:p>
+                      <a:pPr>
+                        <a:lnSpc>
+                          <a:spcPts val="1600"/>
+                        </a:lnSpc>
+                        <a:spcAft>
+                          <a:spcPts val="0"/>
+                        </a:spcAft>
+                        <a:defRPr sz="1200" b="0">
+                          <a:solidFill>
+                            <a:srgbClr val="21243A"/>
+                          </a:solidFill>
+                          <a:latin typeface="Arial"/>
+                        </a:defRPr>
+                      </a:pPr>
+                      <a:r>
+                        <a:t>have assumed. No, they went way deeper. They utilized media monitoring</a:t>
+                      </a:r>
+                    </a:p>
+                    <a:p>
+                      <a:pPr>
+                        <a:lnSpc>
+                          <a:spcPts val="1600"/>
+                        </a:lnSpc>
+                        <a:spcAft>
+                          <a:spcPts val="0"/>
+                        </a:spcAft>
+                        <a:defRPr sz="1200" b="0">
+                          <a:solidFill>
+                            <a:srgbClr val="21243A"/>
+                          </a:solidFill>
+                          <a:latin typeface="Arial"/>
+                        </a:defRPr>
+                      </a:pPr>
+                      <a:r>
+                        <a:t>software called Meltwater and text network analysis software called InfraNodus.</a:t>
+                      </a:r>
+                    </a:p>
+                    <a:p>
+                      <a:pPr>
+                        <a:lnSpc>
+                          <a:spcPts val="1600"/>
+                        </a:lnSpc>
+                        <a:spcAft>
+                          <a:spcPts val="0"/>
+                        </a:spcAft>
+                        <a:defRPr sz="1200" b="0">
+                          <a:solidFill>
+                            <a:srgbClr val="21243A"/>
+                          </a:solidFill>
+                          <a:latin typeface="Arial"/>
+                        </a:defRPr>
+                      </a:pPr>
+                      <a:r>
+                        <a:t>Which uh we should probably explain how those tools work because it's vital for</a:t>
+                      </a:r>
+                    </a:p>
+                    <a:p>
+                      <a:pPr>
+                        <a:lnSpc>
+                          <a:spcPts val="1600"/>
+                        </a:lnSpc>
+                        <a:spcAft>
+                          <a:spcPts val="0"/>
+                        </a:spcAft>
+                        <a:defRPr sz="1200" b="0">
+                          <a:solidFill>
+                            <a:srgbClr val="21243A"/>
+                          </a:solidFill>
+                          <a:latin typeface="Arial"/>
+                        </a:defRPr>
+                      </a:pPr>
+                      <a:r>
+                        <a:t>understanding the whole study. Please do. So Meltwater acts like this giant net</a:t>
+                      </a:r>
+                    </a:p>
+                    <a:p>
+                      <a:pPr>
+                        <a:lnSpc>
+                          <a:spcPts val="1600"/>
+                        </a:lnSpc>
+                        <a:spcAft>
+                          <a:spcPts val="0"/>
+                        </a:spcAft>
+                        <a:defRPr sz="1200" b="0">
+                          <a:solidFill>
+                            <a:srgbClr val="21243A"/>
+                          </a:solidFill>
+                          <a:latin typeface="Arial"/>
+                        </a:defRPr>
+                      </a:pPr>
+                      <a:r>
+                        <a:t>scraping the internet and pulling in every public conversation based on specific</a:t>
+                      </a:r>
+                    </a:p>
+                    <a:p>
+                      <a:pPr>
+                        <a:lnSpc>
+                          <a:spcPts val="1600"/>
+                        </a:lnSpc>
+                        <a:spcAft>
+                          <a:spcPts val="0"/>
+                        </a:spcAft>
+                        <a:defRPr sz="1200" b="0">
+                          <a:solidFill>
+                            <a:srgbClr val="21243A"/>
+                          </a:solidFill>
+                          <a:latin typeface="Arial"/>
+                        </a:defRPr>
+                      </a:pPr>
+                      <a:r>
+                        <a:t>keywords. Right. But InfraNodus acts as the brain. It actually maps relationships</a:t>
+                      </a:r>
+                    </a:p>
+                    <a:p>
+                      <a:pPr>
+                        <a:lnSpc>
+                          <a:spcPts val="1600"/>
+                        </a:lnSpc>
+                        <a:spcAft>
+                          <a:spcPts val="0"/>
+                        </a:spcAft>
+                        <a:defRPr sz="1200" b="0">
+                          <a:solidFill>
+                            <a:srgbClr val="21243A"/>
+                          </a:solidFill>
+                          <a:latin typeface="Arial"/>
+                        </a:defRPr>
+                      </a:pPr>
+                      <a:r>
+                        <a:t>between words. So if the word mask is constantly sitting right next to the word</a:t>
+                      </a:r>
+                    </a:p>
+                    <a:p>
+                      <a:pPr>
+                        <a:lnSpc>
+                          <a:spcPts val="1600"/>
+                        </a:lnSpc>
+                        <a:spcAft>
+                          <a:spcPts val="0"/>
+                        </a:spcAft>
+                        <a:defRPr sz="1200" b="0">
+                          <a:solidFill>
+                            <a:srgbClr val="21243A"/>
+                          </a:solidFill>
+                          <a:latin typeface="Arial"/>
+                        </a:defRPr>
+                      </a:pPr>
+                      <a:r>
+                        <a:t>tyranny or sheep in millions of tweets, The software draws a thick digital line</a:t>
+                      </a:r>
+                    </a:p>
+                    <a:p>
+                      <a:pPr>
+                        <a:lnSpc>
+                          <a:spcPts val="1600"/>
+                        </a:lnSpc>
+                        <a:spcAft>
+                          <a:spcPts val="0"/>
+                        </a:spcAft>
+                        <a:defRPr sz="1200" b="0">
+                          <a:solidFill>
+                            <a:srgbClr val="21243A"/>
+                          </a:solidFill>
+                          <a:latin typeface="Arial"/>
+                        </a:defRPr>
+                      </a:pPr>
+                      <a:r>
+                        <a:t>between them. Exactly. It lets researchers see the exact architecture of public</a:t>
+                      </a:r>
+                    </a:p>
+                    <a:p>
+                      <a:pPr>
+                        <a:lnSpc>
+                          <a:spcPts val="1600"/>
+                        </a:lnSpc>
+                        <a:spcAft>
+                          <a:spcPts val="0"/>
+                        </a:spcAft>
+                        <a:defRPr sz="1200" b="0">
+                          <a:solidFill>
+                            <a:srgbClr val="21243A"/>
+                          </a:solidFill>
+                          <a:latin typeface="Arial"/>
+                        </a:defRPr>
+                      </a:pPr>
+                      <a:r>
+                        <a:t>sentiment. It's almost like looking at a real-time MRI of society's collective anxiety.</a:t>
+                      </a:r>
+                    </a:p>
+                    <a:p>
+                      <a:pPr>
+                        <a:lnSpc>
+                          <a:spcPts val="1600"/>
+                        </a:lnSpc>
+                        <a:spcAft>
+                          <a:spcPts val="0"/>
+                        </a:spcAft>
+                        <a:defRPr sz="1200" b="0">
+                          <a:solidFill>
+                            <a:srgbClr val="21243A"/>
+                          </a:solidFill>
+                          <a:latin typeface="Arial"/>
+                        </a:defRPr>
+                      </a:pPr>
+                      <a:r>
+                        <a:t>That's a really great way to visualize it. It moves us past just individual anecdotes,</a:t>
+                      </a:r>
+                    </a:p>
+                    <a:p>
+                      <a:pPr>
+                        <a:lnSpc>
+                          <a:spcPts val="1600"/>
+                        </a:lnSpc>
+                        <a:spcAft>
+                          <a:spcPts val="0"/>
+                        </a:spcAft>
+                        <a:defRPr sz="1200" b="0">
+                          <a:solidFill>
+                            <a:srgbClr val="21243A"/>
+                          </a:solidFill>
+                          <a:latin typeface="Arial"/>
+                        </a:defRPr>
+                      </a:pPr>
+                      <a:r>
+                        <a:t>Yeah. Yeah. and it shows us the actual structural flow of ideas. Yeah. So, the</a:t>
+                      </a:r>
+                    </a:p>
+                    <a:p>
+                      <a:pPr>
+                        <a:lnSpc>
+                          <a:spcPts val="1600"/>
+                        </a:lnSpc>
+                        <a:spcAft>
+                          <a:spcPts val="0"/>
+                        </a:spcAft>
+                        <a:defRPr sz="1200" b="0">
+                          <a:solidFill>
+                            <a:srgbClr val="21243A"/>
+                          </a:solidFill>
+                          <a:latin typeface="Arial"/>
+                        </a:defRPr>
+                      </a:pPr>
+                      <a:r>
+                        <a:t>mission for our deep dive today is to explore a very specific phenomenon</a:t>
+                      </a:r>
+                    </a:p>
+                    <a:p>
+                      <a:pPr>
+                        <a:lnSpc>
+                          <a:spcPts val="1600"/>
+                        </a:lnSpc>
+                        <a:spcAft>
+                          <a:spcPts val="0"/>
+                        </a:spcAft>
+                        <a:defRPr sz="1200" b="0">
+                          <a:solidFill>
+                            <a:srgbClr val="21243A"/>
+                          </a:solidFill>
+                          <a:latin typeface="Arial"/>
+                        </a:defRPr>
+                      </a:pPr>
+                      <a:r>
+                        <a:t>uncovered in this flow. We want to see how pre-existing anti-vaccine groups and</a:t>
+                      </a:r>
+                    </a:p>
+                    <a:p>
+                      <a:pPr>
+                        <a:lnSpc>
+                          <a:spcPts val="1600"/>
+                        </a:lnSpc>
+                        <a:spcAft>
+                          <a:spcPts val="0"/>
+                        </a:spcAft>
+                        <a:defRPr sz="1200" b="0">
+                          <a:solidFill>
+                            <a:srgbClr val="21243A"/>
+                          </a:solidFill>
+                          <a:latin typeface="Arial"/>
+                        </a:defRPr>
+                      </a:pPr>
+                      <a:r>
+                        <a:t>newly formed anti-mask groups actually merged into this massive digital</a:t>
+                      </a:r>
+                    </a:p>
+                    <a:p>
+                      <a:pPr>
+                        <a:lnSpc>
+                          <a:spcPts val="1600"/>
+                        </a:lnSpc>
+                        <a:spcAft>
+                          <a:spcPts val="0"/>
+                        </a:spcAft>
+                        <a:defRPr sz="1200" b="0">
+                          <a:solidFill>
+                            <a:srgbClr val="21243A"/>
+                          </a:solidFill>
+                          <a:latin typeface="Arial"/>
+                        </a:defRPr>
+                      </a:pPr>
+                      <a:r>
+                        <a:t>powerhouse. And to understand the psychological, social, and political drivers</a:t>
+                      </a:r>
+                    </a:p>
+                    <a:p>
+                      <a:pPr>
+                        <a:lnSpc>
+                          <a:spcPts val="1600"/>
+                        </a:lnSpc>
+                        <a:spcAft>
+                          <a:spcPts val="0"/>
+                        </a:spcAft>
+                        <a:defRPr sz="1200" b="0">
+                          <a:solidFill>
+                            <a:srgbClr val="21243A"/>
+                          </a:solidFill>
+                          <a:latin typeface="Arial"/>
+                        </a:defRPr>
+                      </a:pPr>
+                      <a:r>
+                        <a:t>behind how the public reacted to these mandates. Exactly. Now uh a very quick</a:t>
+                      </a:r>
+                    </a:p>
+                    <a:p>
+                      <a:pPr>
+                        <a:lnSpc>
+                          <a:spcPts val="1600"/>
+                        </a:lnSpc>
+                        <a:spcAft>
+                          <a:spcPts val="0"/>
+                        </a:spcAft>
+                        <a:defRPr sz="1200" b="0">
+                          <a:solidFill>
+                            <a:srgbClr val="21243A"/>
+                          </a:solidFill>
+                          <a:latin typeface="Arial"/>
+                        </a:defRPr>
+                      </a:pPr>
+                      <a:r>
+                        <a:t>heads up to you the listener before we dive into the timeline, the data we are</a:t>
                       </a:r>
                     </a:p>
                   </a:txBody>
@@ -14726,7 +15626,7 @@
               </a:defRPr>
             </a:pPr>
             <a:r>
-              <a:t>File and analysis record</a:t>
+              <a:t>Transcribed text (continued)</a:t>
             </a:r>
           </a:p>
         </p:txBody>
@@ -14913,7 +15813,7 @@
         </p:nvGraphicFramePr>
         <p:xfrm>
           <a:off x="365760" y="1700784"/>
-          <a:ext cx="8412479" cy="349504"/>
+          <a:ext cx="8412479" cy="2178304"/>
         </p:xfrm>
         <a:graphic>
           <a:graphicData uri="http://schemas.openxmlformats.org/drawingml/2006/table">
@@ -14925,28 +15825,28 @@
                 <a:gridCol w="2271369"/>
                 <a:gridCol w="6141110"/>
               </a:tblGrid>
-              <a:tr h="349504">
-                <a:tc>
-                  <a:txBody>
-                    <a:bodyPr wrap="none"/>
-                    <a:lstStyle/>
-                    <a:p>
-                      <a:pPr>
-                        <a:lnSpc>
-                          <a:spcPts val="1600"/>
-                        </a:lnSpc>
-                        <a:spcAft>
-                          <a:spcPts val="0"/>
-                        </a:spcAft>
-                        <a:defRPr sz="1200" b="0">
-                          <a:solidFill>
-                            <a:srgbClr val="21243A"/>
-                          </a:solidFill>
-                          <a:latin typeface="Arial"/>
-                        </a:defRPr>
-                      </a:pPr>
-                      <a:r>
-                        <a:t>File</a:t>
+              <a:tr h="2178304">
+                <a:tc>
+                  <a:txBody>
+                    <a:bodyPr wrap="none"/>
+                    <a:lstStyle/>
+                    <a:p>
+                      <a:pPr>
+                        <a:lnSpc>
+                          <a:spcPts val="1600"/>
+                        </a:lnSpc>
+                        <a:spcAft>
+                          <a:spcPts val="0"/>
+                        </a:spcAft>
+                        <a:defRPr sz="1200" b="0">
+                          <a:solidFill>
+                            <a:srgbClr val="21243A"/>
+                          </a:solidFill>
+                          <a:latin typeface="Arial"/>
+                        </a:defRPr>
+                      </a:pPr>
+                      <a:r>
+                        <a:t>Continued</a:t>
                       </a:r>
                     </a:p>
                   </a:txBody>
@@ -14976,925 +15876,178 @@
                         </a:defRPr>
                       </a:pPr>
                       <a:r>
-                        <a:t>podcast.m4a</a:t>
-                      </a:r>
-                    </a:p>
-                  </a:txBody>
-                  <a:tcPr marL="82296" marR="82296" marT="64008" marB="64008">
-                    <a:solidFill>
-                      <a:srgbClr val="F1F7F7"/>
-                    </a:solidFill>
-                  </a:tcPr>
-                </a:tc>
-              </a:tr>
-            </a:tbl>
-          </a:graphicData>
-        </a:graphic>
-      </p:graphicFrame>
-      <p:graphicFrame>
-        <p:nvGraphicFramePr>
-          <p:cNvPr id="8" name="Table 7"/>
-          <p:cNvGraphicFramePr>
-            <a:graphicFrameLocks noGrp="1"/>
-          </p:cNvGraphicFramePr>
-          <p:nvPr/>
-        </p:nvGraphicFramePr>
-        <p:xfrm>
-          <a:off x="365760" y="2050288"/>
-          <a:ext cx="8412479" cy="349504"/>
-        </p:xfrm>
-        <a:graphic>
-          <a:graphicData uri="http://schemas.openxmlformats.org/drawingml/2006/table">
-            <a:tbl>
-              <a:tblPr firstRow="1" bandRow="1">
-                <a:tableStyleId>{5C22544A-7EE6-4342-B048-85BDC9FD1C3A}</a:tableStyleId>
-              </a:tblPr>
-              <a:tblGrid>
-                <a:gridCol w="2271369"/>
-                <a:gridCol w="6141110"/>
-              </a:tblGrid>
-              <a:tr h="349504">
-                <a:tc>
-                  <a:txBody>
-                    <a:bodyPr wrap="none"/>
-                    <a:lstStyle/>
-                    <a:p>
-                      <a:pPr>
-                        <a:lnSpc>
-                          <a:spcPts val="1600"/>
-                        </a:lnSpc>
-                        <a:spcAft>
-                          <a:spcPts val="0"/>
-                        </a:spcAft>
-                        <a:defRPr sz="1200" b="0">
-                          <a:solidFill>
-                            <a:srgbClr val="21243A"/>
-                          </a:solidFill>
-                          <a:latin typeface="Arial"/>
-                        </a:defRPr>
-                      </a:pPr>
-                      <a:r>
-                        <a:t>Analysis ID</a:t>
-                      </a:r>
-                    </a:p>
-                  </a:txBody>
-                  <a:tcPr marL="82296" marR="82296" marT="64008" marB="64008">
-                    <a:solidFill>
-                      <a:srgbClr val="FFFFFF"/>
-                    </a:solidFill>
-                  </a:tcPr>
-                </a:tc>
-                <a:tc>
-                  <a:txBody>
-                    <a:bodyPr wrap="none"/>
-                    <a:lstStyle/>
-                    <a:p>
-                      <a:pPr>
-                        <a:lnSpc>
-                          <a:spcPts val="1600"/>
-                        </a:lnSpc>
-                        <a:spcAft>
-                          <a:spcPts val="0"/>
-                        </a:spcAft>
-                        <a:defRPr sz="1200" b="0">
-                          <a:solidFill>
-                            <a:srgbClr val="21243A"/>
-                          </a:solidFill>
-                          <a:latin typeface="Arial"/>
-                        </a:defRPr>
-                      </a:pPr>
-                      <a:r>
-                        <a:t>7e1a6917-52a1-453d-8dda-9c4842232f31</a:t>
-                      </a:r>
-                    </a:p>
-                  </a:txBody>
-                  <a:tcPr marL="82296" marR="82296" marT="64008" marB="64008">
-                    <a:solidFill>
-                      <a:srgbClr val="FFFFFF"/>
-                    </a:solidFill>
-                  </a:tcPr>
-                </a:tc>
-              </a:tr>
-            </a:tbl>
-          </a:graphicData>
-        </a:graphic>
-      </p:graphicFrame>
-      <p:graphicFrame>
-        <p:nvGraphicFramePr>
-          <p:cNvPr id="9" name="Table 8"/>
-          <p:cNvGraphicFramePr>
-            <a:graphicFrameLocks noGrp="1"/>
-          </p:cNvGraphicFramePr>
-          <p:nvPr/>
-        </p:nvGraphicFramePr>
-        <p:xfrm>
-          <a:off x="365760" y="2399792"/>
-          <a:ext cx="8412479" cy="349504"/>
-        </p:xfrm>
-        <a:graphic>
-          <a:graphicData uri="http://schemas.openxmlformats.org/drawingml/2006/table">
-            <a:tbl>
-              <a:tblPr firstRow="1" bandRow="1">
-                <a:tableStyleId>{5C22544A-7EE6-4342-B048-85BDC9FD1C3A}</a:tableStyleId>
-              </a:tblPr>
-              <a:tblGrid>
-                <a:gridCol w="2271369"/>
-                <a:gridCol w="6141110"/>
-              </a:tblGrid>
-              <a:tr h="349504">
-                <a:tc>
-                  <a:txBody>
-                    <a:bodyPr wrap="none"/>
-                    <a:lstStyle/>
-                    <a:p>
-                      <a:pPr>
-                        <a:lnSpc>
-                          <a:spcPts val="1600"/>
-                        </a:lnSpc>
-                        <a:spcAft>
-                          <a:spcPts val="0"/>
-                        </a:spcAft>
-                        <a:defRPr sz="1200" b="0">
-                          <a:solidFill>
-                            <a:srgbClr val="21243A"/>
-                          </a:solidFill>
-                          <a:latin typeface="Arial"/>
-                        </a:defRPr>
-                      </a:pPr>
-                      <a:r>
-                        <a:t>Generated</a:t>
-                      </a:r>
-                    </a:p>
-                  </a:txBody>
-                  <a:tcPr marL="82296" marR="82296" marT="64008" marB="64008">
-                    <a:solidFill>
-                      <a:srgbClr val="F1F7F7"/>
-                    </a:solidFill>
-                  </a:tcPr>
-                </a:tc>
-                <a:tc>
-                  <a:txBody>
-                    <a:bodyPr wrap="none"/>
-                    <a:lstStyle/>
-                    <a:p>
-                      <a:pPr>
-                        <a:lnSpc>
-                          <a:spcPts val="1600"/>
-                        </a:lnSpc>
-                        <a:spcAft>
-                          <a:spcPts val="0"/>
-                        </a:spcAft>
-                        <a:defRPr sz="1200" b="0">
-                          <a:solidFill>
-                            <a:srgbClr val="21243A"/>
-                          </a:solidFill>
-                          <a:latin typeface="Arial"/>
-                        </a:defRPr>
-                      </a:pPr>
-                      <a:r>
-                        <a:t>2026-09-26T22:31:07+00:00</a:t>
-                      </a:r>
-                    </a:p>
-                  </a:txBody>
-                  <a:tcPr marL="82296" marR="82296" marT="64008" marB="64008">
-                    <a:solidFill>
-                      <a:srgbClr val="F1F7F7"/>
-                    </a:solidFill>
-                  </a:tcPr>
-                </a:tc>
-              </a:tr>
-            </a:tbl>
-          </a:graphicData>
-        </a:graphic>
-      </p:graphicFrame>
-      <p:graphicFrame>
-        <p:nvGraphicFramePr>
-          <p:cNvPr id="10" name="Table 9"/>
-          <p:cNvGraphicFramePr>
-            <a:graphicFrameLocks noGrp="1"/>
-          </p:cNvGraphicFramePr>
-          <p:nvPr/>
-        </p:nvGraphicFramePr>
-        <p:xfrm>
-          <a:off x="365760" y="2749296"/>
-          <a:ext cx="8412479" cy="349504"/>
-        </p:xfrm>
-        <a:graphic>
-          <a:graphicData uri="http://schemas.openxmlformats.org/drawingml/2006/table">
-            <a:tbl>
-              <a:tblPr firstRow="1" bandRow="1">
-                <a:tableStyleId>{5C22544A-7EE6-4342-B048-85BDC9FD1C3A}</a:tableStyleId>
-              </a:tblPr>
-              <a:tblGrid>
-                <a:gridCol w="2271369"/>
-                <a:gridCol w="6141110"/>
-              </a:tblGrid>
-              <a:tr h="349504">
-                <a:tc>
-                  <a:txBody>
-                    <a:bodyPr wrap="none"/>
-                    <a:lstStyle/>
-                    <a:p>
-                      <a:pPr>
-                        <a:lnSpc>
-                          <a:spcPts val="1600"/>
-                        </a:lnSpc>
-                        <a:spcAft>
-                          <a:spcPts val="0"/>
-                        </a:spcAft>
-                        <a:defRPr sz="1200" b="0">
-                          <a:solidFill>
-                            <a:srgbClr val="21243A"/>
-                          </a:solidFill>
-                          <a:latin typeface="Arial"/>
-                        </a:defRPr>
-                      </a:pPr>
-                      <a:r>
-                        <a:t>Tool</a:t>
-                      </a:r>
-                    </a:p>
-                  </a:txBody>
-                  <a:tcPr marL="82296" marR="82296" marT="64008" marB="64008">
-                    <a:solidFill>
-                      <a:srgbClr val="FFFFFF"/>
-                    </a:solidFill>
-                  </a:tcPr>
-                </a:tc>
-                <a:tc>
-                  <a:txBody>
-                    <a:bodyPr wrap="none"/>
-                    <a:lstStyle/>
-                    <a:p>
-                      <a:pPr>
-                        <a:lnSpc>
-                          <a:spcPts val="1600"/>
-                        </a:lnSpc>
-                        <a:spcAft>
-                          <a:spcPts val="0"/>
-                        </a:spcAft>
-                        <a:defRPr sz="1200" b="0">
-                          <a:solidFill>
-                            <a:srgbClr val="21243A"/>
-                          </a:solidFill>
-                          <a:latin typeface="Arial"/>
-                        </a:defRPr>
-                      </a:pPr>
-                      <a:r>
-                        <a:t>SDA Vision 0.1.0</a:t>
-                      </a:r>
-                    </a:p>
-                  </a:txBody>
-                  <a:tcPr marL="82296" marR="82296" marT="64008" marB="64008">
-                    <a:solidFill>
-                      <a:srgbClr val="FFFFFF"/>
-                    </a:solidFill>
-                  </a:tcPr>
-                </a:tc>
-              </a:tr>
-            </a:tbl>
-          </a:graphicData>
-        </a:graphic>
-      </p:graphicFrame>
-      <p:graphicFrame>
-        <p:nvGraphicFramePr>
-          <p:cNvPr id="11" name="Table 10"/>
-          <p:cNvGraphicFramePr>
-            <a:graphicFrameLocks noGrp="1"/>
-          </p:cNvGraphicFramePr>
-          <p:nvPr/>
-        </p:nvGraphicFramePr>
-        <p:xfrm>
-          <a:off x="365760" y="3098800"/>
-          <a:ext cx="8412479" cy="349504"/>
-        </p:xfrm>
-        <a:graphic>
-          <a:graphicData uri="http://schemas.openxmlformats.org/drawingml/2006/table">
-            <a:tbl>
-              <a:tblPr firstRow="1" bandRow="1">
-                <a:tableStyleId>{5C22544A-7EE6-4342-B048-85BDC9FD1C3A}</a:tableStyleId>
-              </a:tblPr>
-              <a:tblGrid>
-                <a:gridCol w="2271369"/>
-                <a:gridCol w="6141110"/>
-              </a:tblGrid>
-              <a:tr h="349504">
-                <a:tc>
-                  <a:txBody>
-                    <a:bodyPr wrap="none"/>
-                    <a:lstStyle/>
-                    <a:p>
-                      <a:pPr>
-                        <a:lnSpc>
-                          <a:spcPts val="1600"/>
-                        </a:lnSpc>
-                        <a:spcAft>
-                          <a:spcPts val="0"/>
-                        </a:spcAft>
-                        <a:defRPr sz="1200" b="0">
-                          <a:solidFill>
-                            <a:srgbClr val="21243A"/>
-                          </a:solidFill>
-                          <a:latin typeface="Arial"/>
-                        </a:defRPr>
-                      </a:pPr>
-                      <a:r>
-                        <a:t>Models</a:t>
-                      </a:r>
-                    </a:p>
-                  </a:txBody>
-                  <a:tcPr marL="82296" marR="82296" marT="64008" marB="64008">
-                    <a:solidFill>
-                      <a:srgbClr val="F1F7F7"/>
-                    </a:solidFill>
-                  </a:tcPr>
-                </a:tc>
-                <a:tc>
-                  <a:txBody>
-                    <a:bodyPr wrap="none"/>
-                    <a:lstStyle/>
-                    <a:p>
-                      <a:pPr>
-                        <a:lnSpc>
-                          <a:spcPts val="1600"/>
-                        </a:lnSpc>
-                        <a:spcAft>
-                          <a:spcPts val="0"/>
-                        </a:spcAft>
-                        <a:defRPr sz="1200" b="0">
-                          <a:solidFill>
-                            <a:srgbClr val="21243A"/>
-                          </a:solidFill>
-                          <a:latin typeface="Arial"/>
-                        </a:defRPr>
-                      </a:pPr>
-                      <a:r>
-                        <a:t>claude-opus-5-5, gemini-3.8-flash, gpt-6-astra</a:t>
-                      </a:r>
-                    </a:p>
-                  </a:txBody>
-                  <a:tcPr marL="82296" marR="82296" marT="64008" marB="64008">
-                    <a:solidFill>
-                      <a:srgbClr val="F1F7F7"/>
-                    </a:solidFill>
-                  </a:tcPr>
-                </a:tc>
-              </a:tr>
-            </a:tbl>
-          </a:graphicData>
-        </a:graphic>
-      </p:graphicFrame>
-      <p:graphicFrame>
-        <p:nvGraphicFramePr>
-          <p:cNvPr id="12" name="Table 11"/>
-          <p:cNvGraphicFramePr>
-            <a:graphicFrameLocks noGrp="1"/>
-          </p:cNvGraphicFramePr>
-          <p:nvPr/>
-        </p:nvGraphicFramePr>
-        <p:xfrm>
-          <a:off x="365760" y="3448304"/>
-          <a:ext cx="8412479" cy="349504"/>
-        </p:xfrm>
-        <a:graphic>
-          <a:graphicData uri="http://schemas.openxmlformats.org/drawingml/2006/table">
-            <a:tbl>
-              <a:tblPr firstRow="1" bandRow="1">
-                <a:tableStyleId>{5C22544A-7EE6-4342-B048-85BDC9FD1C3A}</a:tableStyleId>
-              </a:tblPr>
-              <a:tblGrid>
-                <a:gridCol w="2271369"/>
-                <a:gridCol w="6141110"/>
-              </a:tblGrid>
-              <a:tr h="349504">
-                <a:tc>
-                  <a:txBody>
-                    <a:bodyPr wrap="none"/>
-                    <a:lstStyle/>
-                    <a:p>
-                      <a:pPr>
-                        <a:lnSpc>
-                          <a:spcPts val="1600"/>
-                        </a:lnSpc>
-                        <a:spcAft>
-                          <a:spcPts val="0"/>
-                        </a:spcAft>
-                        <a:defRPr sz="1200" b="0">
-                          <a:solidFill>
-                            <a:srgbClr val="21243A"/>
-                          </a:solidFill>
-                          <a:latin typeface="Arial"/>
-                        </a:defRPr>
-                      </a:pPr>
-                      <a:r>
-                        <a:t>Method version</a:t>
-                      </a:r>
-                    </a:p>
-                  </a:txBody>
-                  <a:tcPr marL="82296" marR="82296" marT="64008" marB="64008">
-                    <a:solidFill>
-                      <a:srgbClr val="FFFFFF"/>
-                    </a:solidFill>
-                  </a:tcPr>
-                </a:tc>
-                <a:tc>
-                  <a:txBody>
-                    <a:bodyPr wrap="none"/>
-                    <a:lstStyle/>
-                    <a:p>
-                      <a:pPr>
-                        <a:lnSpc>
-                          <a:spcPts val="1600"/>
-                        </a:lnSpc>
-                        <a:spcAft>
-                          <a:spcPts val="0"/>
-                        </a:spcAft>
-                        <a:defRPr sz="1200" b="0">
-                          <a:solidFill>
-                            <a:srgbClr val="21243A"/>
-                          </a:solidFill>
-                          <a:latin typeface="Arial"/>
-                        </a:defRPr>
-                      </a:pPr>
-                      <a:r>
-                        <a:t>pdf-preparation-2026-09-26.1</a:t>
-                      </a:r>
-                    </a:p>
-                  </a:txBody>
-                  <a:tcPr marL="82296" marR="82296" marT="64008" marB="64008">
-                    <a:solidFill>
-                      <a:srgbClr val="FFFFFF"/>
-                    </a:solidFill>
-                  </a:tcPr>
-                </a:tc>
-              </a:tr>
-            </a:tbl>
-          </a:graphicData>
-        </a:graphic>
-      </p:graphicFrame>
-      <p:graphicFrame>
-        <p:nvGraphicFramePr>
-          <p:cNvPr id="13" name="Table 12"/>
-          <p:cNvGraphicFramePr>
-            <a:graphicFrameLocks noGrp="1"/>
-          </p:cNvGraphicFramePr>
-          <p:nvPr/>
-        </p:nvGraphicFramePr>
-        <p:xfrm>
-          <a:off x="365760" y="3797808"/>
-          <a:ext cx="8412479" cy="349504"/>
-        </p:xfrm>
-        <a:graphic>
-          <a:graphicData uri="http://schemas.openxmlformats.org/drawingml/2006/table">
-            <a:tbl>
-              <a:tblPr firstRow="1" bandRow="1">
-                <a:tableStyleId>{5C22544A-7EE6-4342-B048-85BDC9FD1C3A}</a:tableStyleId>
-              </a:tblPr>
-              <a:tblGrid>
-                <a:gridCol w="2271369"/>
-                <a:gridCol w="6141110"/>
-              </a:tblGrid>
-              <a:tr h="349504">
-                <a:tc>
-                  <a:txBody>
-                    <a:bodyPr wrap="none"/>
-                    <a:lstStyle/>
-                    <a:p>
-                      <a:pPr>
-                        <a:lnSpc>
-                          <a:spcPts val="1600"/>
-                        </a:lnSpc>
-                        <a:spcAft>
-                          <a:spcPts val="0"/>
-                        </a:spcAft>
-                        <a:defRPr sz="1200" b="0">
-                          <a:solidFill>
-                            <a:srgbClr val="21243A"/>
-                          </a:solidFill>
-                          <a:latin typeface="Arial"/>
-                        </a:defRPr>
-                      </a:pPr>
-                      <a:r>
-                        <a:t>Analysis lens</a:t>
-                      </a:r>
-                    </a:p>
-                  </a:txBody>
-                  <a:tcPr marL="82296" marR="82296" marT="64008" marB="64008">
-                    <a:solidFill>
-                      <a:srgbClr val="F1F7F7"/>
-                    </a:solidFill>
-                  </a:tcPr>
-                </a:tc>
-                <a:tc>
-                  <a:txBody>
-                    <a:bodyPr wrap="none"/>
-                    <a:lstStyle/>
-                    <a:p>
-                      <a:pPr>
-                        <a:lnSpc>
-                          <a:spcPts val="1600"/>
-                        </a:lnSpc>
-                        <a:spcAft>
-                          <a:spcPts val="0"/>
-                        </a:spcAft>
-                        <a:defRPr sz="1200" b="0">
-                          <a:solidFill>
-                            <a:srgbClr val="21243A"/>
-                          </a:solidFill>
-                          <a:latin typeface="Arial"/>
-                        </a:defRPr>
-                      </a:pPr>
-                      <a:r>
-                        <a:t>general</a:t>
-                      </a:r>
-                    </a:p>
-                  </a:txBody>
-                  <a:tcPr marL="82296" marR="82296" marT="64008" marB="64008">
-                    <a:solidFill>
-                      <a:srgbClr val="F1F7F7"/>
-                    </a:solidFill>
-                  </a:tcPr>
-                </a:tc>
-              </a:tr>
-            </a:tbl>
-          </a:graphicData>
-        </a:graphic>
-      </p:graphicFrame>
-      <p:graphicFrame>
-        <p:nvGraphicFramePr>
-          <p:cNvPr id="14" name="Table 13"/>
-          <p:cNvGraphicFramePr>
-            <a:graphicFrameLocks noGrp="1"/>
-          </p:cNvGraphicFramePr>
-          <p:nvPr/>
-        </p:nvGraphicFramePr>
-        <p:xfrm>
-          <a:off x="365760" y="4147312"/>
-          <a:ext cx="8412479" cy="349504"/>
-        </p:xfrm>
-        <a:graphic>
-          <a:graphicData uri="http://schemas.openxmlformats.org/drawingml/2006/table">
-            <a:tbl>
-              <a:tblPr firstRow="1" bandRow="1">
-                <a:tableStyleId>{5C22544A-7EE6-4342-B048-85BDC9FD1C3A}</a:tableStyleId>
-              </a:tblPr>
-              <a:tblGrid>
-                <a:gridCol w="2271369"/>
-                <a:gridCol w="6141110"/>
-              </a:tblGrid>
-              <a:tr h="349504">
-                <a:tc>
-                  <a:txBody>
-                    <a:bodyPr wrap="none"/>
-                    <a:lstStyle/>
-                    <a:p>
-                      <a:pPr>
-                        <a:lnSpc>
-                          <a:spcPts val="1600"/>
-                        </a:lnSpc>
-                        <a:spcAft>
-                          <a:spcPts val="0"/>
-                        </a:spcAft>
-                        <a:defRPr sz="1200" b="0">
-                          <a:solidFill>
-                            <a:srgbClr val="21243A"/>
-                          </a:solidFill>
-                          <a:latin typeface="Arial"/>
-                        </a:defRPr>
-                      </a:pPr>
-                      <a:r>
-                        <a:t>Original SHA-256</a:t>
-                      </a:r>
-                    </a:p>
-                  </a:txBody>
-                  <a:tcPr marL="82296" marR="82296" marT="64008" marB="64008">
-                    <a:solidFill>
-                      <a:srgbClr val="FFFFFF"/>
-                    </a:solidFill>
-                  </a:tcPr>
-                </a:tc>
-                <a:tc>
-                  <a:txBody>
-                    <a:bodyPr wrap="none"/>
-                    <a:lstStyle/>
-                    <a:p>
-                      <a:pPr>
-                        <a:lnSpc>
-                          <a:spcPts val="1600"/>
-                        </a:lnSpc>
-                        <a:spcAft>
-                          <a:spcPts val="0"/>
-                        </a:spcAft>
-                        <a:defRPr sz="1200" b="0">
-                          <a:solidFill>
-                            <a:srgbClr val="21243A"/>
-                          </a:solidFill>
-                          <a:latin typeface="Arial"/>
-                        </a:defRPr>
-                      </a:pPr>
-                      <a:r>
-                        <a:t>58663a6a9e4b634bdb703ead0aaa7cd6dce7fbf97e70c3c1cc61b3311b94c0b4</a:t>
-                      </a:r>
-                    </a:p>
-                  </a:txBody>
-                  <a:tcPr marL="82296" marR="82296" marT="64008" marB="64008">
-                    <a:solidFill>
-                      <a:srgbClr val="FFFFFF"/>
-                    </a:solidFill>
-                  </a:tcPr>
-                </a:tc>
-              </a:tr>
-            </a:tbl>
-          </a:graphicData>
-        </a:graphic>
-      </p:graphicFrame>
-      <p:graphicFrame>
-        <p:nvGraphicFramePr>
-          <p:cNvPr id="15" name="Table 14"/>
-          <p:cNvGraphicFramePr>
-            <a:graphicFrameLocks noGrp="1"/>
-          </p:cNvGraphicFramePr>
-          <p:nvPr/>
-        </p:nvGraphicFramePr>
-        <p:xfrm>
-          <a:off x="365760" y="4496816"/>
-          <a:ext cx="8412479" cy="349504"/>
-        </p:xfrm>
-        <a:graphic>
-          <a:graphicData uri="http://schemas.openxmlformats.org/drawingml/2006/table">
-            <a:tbl>
-              <a:tblPr firstRow="1" bandRow="1">
-                <a:tableStyleId>{5C22544A-7EE6-4342-B048-85BDC9FD1C3A}</a:tableStyleId>
-              </a:tblPr>
-              <a:tblGrid>
-                <a:gridCol w="2271369"/>
-                <a:gridCol w="6141110"/>
-              </a:tblGrid>
-              <a:tr h="349504">
-                <a:tc>
-                  <a:txBody>
-                    <a:bodyPr wrap="none"/>
-                    <a:lstStyle/>
-                    <a:p>
-                      <a:pPr>
-                        <a:lnSpc>
-                          <a:spcPts val="1600"/>
-                        </a:lnSpc>
-                        <a:spcAft>
-                          <a:spcPts val="0"/>
-                        </a:spcAft>
-                        <a:defRPr sz="1200" b="0">
-                          <a:solidFill>
-                            <a:srgbClr val="21243A"/>
-                          </a:solidFill>
-                          <a:latin typeface="Arial"/>
-                        </a:defRPr>
-                      </a:pPr>
-                      <a:r>
-                        <a:t>Ingestion note 1</a:t>
-                      </a:r>
-                    </a:p>
-                  </a:txBody>
-                  <a:tcPr marL="82296" marR="82296" marT="64008" marB="64008">
-                    <a:solidFill>
-                      <a:srgbClr val="F1F7F7"/>
-                    </a:solidFill>
-                  </a:tcPr>
-                </a:tc>
-                <a:tc>
-                  <a:txBody>
-                    <a:bodyPr wrap="none"/>
-                    <a:lstStyle/>
-                    <a:p>
-                      <a:pPr>
-                        <a:lnSpc>
-                          <a:spcPts val="1600"/>
-                        </a:lnSpc>
-                        <a:spcAft>
-                          <a:spcPts val="0"/>
-                        </a:spcAft>
-                        <a:defRPr sz="1200" b="0">
-                          <a:solidFill>
-                            <a:srgbClr val="21243A"/>
-                          </a:solidFill>
-                          <a:latin typeface="Arial"/>
-                        </a:defRPr>
-                      </a:pPr>
-                      <a:r>
-                        <a:t>Transcoded to 5737 KB mono 16 kHz (≤1800s).</a:t>
-                      </a:r>
-                    </a:p>
-                  </a:txBody>
-                  <a:tcPr marL="82296" marR="82296" marT="64008" marB="64008">
-                    <a:solidFill>
-                      <a:srgbClr val="F1F7F7"/>
-                    </a:solidFill>
-                  </a:tcPr>
-                </a:tc>
-              </a:tr>
-            </a:tbl>
-          </a:graphicData>
-        </a:graphic>
-      </p:graphicFrame>
-      <p:graphicFrame>
-        <p:nvGraphicFramePr>
-          <p:cNvPr id="16" name="Table 15"/>
-          <p:cNvGraphicFramePr>
-            <a:graphicFrameLocks noGrp="1"/>
-          </p:cNvGraphicFramePr>
-          <p:nvPr/>
-        </p:nvGraphicFramePr>
-        <p:xfrm>
-          <a:off x="365760" y="4846320"/>
-          <a:ext cx="8412479" cy="349504"/>
-        </p:xfrm>
-        <a:graphic>
-          <a:graphicData uri="http://schemas.openxmlformats.org/drawingml/2006/table">
-            <a:tbl>
-              <a:tblPr firstRow="1" bandRow="1">
-                <a:tableStyleId>{5C22544A-7EE6-4342-B048-85BDC9FD1C3A}</a:tableStyleId>
-              </a:tblPr>
-              <a:tblGrid>
-                <a:gridCol w="2271369"/>
-                <a:gridCol w="6141110"/>
-              </a:tblGrid>
-              <a:tr h="349504">
-                <a:tc>
-                  <a:txBody>
-                    <a:bodyPr wrap="none"/>
-                    <a:lstStyle/>
-                    <a:p>
-                      <a:pPr>
-                        <a:lnSpc>
-                          <a:spcPts val="1600"/>
-                        </a:lnSpc>
-                        <a:spcAft>
-                          <a:spcPts val="0"/>
-                        </a:spcAft>
-                        <a:defRPr sz="1200" b="0">
-                          <a:solidFill>
-                            <a:srgbClr val="21243A"/>
-                          </a:solidFill>
-                          <a:latin typeface="Arial"/>
-                        </a:defRPr>
-                      </a:pPr>
-                      <a:r>
-                        <a:t>Ingestion note 2</a:t>
-                      </a:r>
-                    </a:p>
-                  </a:txBody>
-                  <a:tcPr marL="82296" marR="82296" marT="64008" marB="64008">
-                    <a:solidFill>
-                      <a:srgbClr val="FFFFFF"/>
-                    </a:solidFill>
-                  </a:tcPr>
-                </a:tc>
-                <a:tc>
-                  <a:txBody>
-                    <a:bodyPr wrap="none"/>
-                    <a:lstStyle/>
-                    <a:p>
-                      <a:pPr>
-                        <a:lnSpc>
-                          <a:spcPts val="1600"/>
-                        </a:lnSpc>
-                        <a:spcAft>
-                          <a:spcPts val="0"/>
-                        </a:spcAft>
-                        <a:defRPr sz="1200" b="0">
-                          <a:solidFill>
-                            <a:srgbClr val="21243A"/>
-                          </a:solidFill>
-                          <a:latin typeface="Arial"/>
-                        </a:defRPr>
-                      </a:pPr>
-                      <a:r>
-                        <a:t>Transcribed with Gemini.</a:t>
-                      </a:r>
-                    </a:p>
-                  </a:txBody>
-                  <a:tcPr marL="82296" marR="82296" marT="64008" marB="64008">
-                    <a:solidFill>
-                      <a:srgbClr val="FFFFFF"/>
-                    </a:solidFill>
-                  </a:tcPr>
-                </a:tc>
-              </a:tr>
-            </a:tbl>
-          </a:graphicData>
-        </a:graphic>
-      </p:graphicFrame>
-      <p:graphicFrame>
-        <p:nvGraphicFramePr>
-          <p:cNvPr id="17" name="Table 16"/>
-          <p:cNvGraphicFramePr>
-            <a:graphicFrameLocks noGrp="1"/>
-          </p:cNvGraphicFramePr>
-          <p:nvPr/>
-        </p:nvGraphicFramePr>
-        <p:xfrm>
-          <a:off x="365760" y="5195824"/>
-          <a:ext cx="8412479" cy="755904"/>
-        </p:xfrm>
-        <a:graphic>
-          <a:graphicData uri="http://schemas.openxmlformats.org/drawingml/2006/table">
-            <a:tbl>
-              <a:tblPr firstRow="1" bandRow="1">
-                <a:tableStyleId>{5C22544A-7EE6-4342-B048-85BDC9FD1C3A}</a:tableStyleId>
-              </a:tblPr>
-              <a:tblGrid>
-                <a:gridCol w="2271369"/>
-                <a:gridCol w="6141110"/>
-              </a:tblGrid>
-              <a:tr h="755904">
-                <a:tc>
-                  <a:txBody>
-                    <a:bodyPr wrap="none"/>
-                    <a:lstStyle/>
-                    <a:p>
-                      <a:pPr>
-                        <a:lnSpc>
-                          <a:spcPts val="1600"/>
-                        </a:lnSpc>
-                        <a:spcAft>
-                          <a:spcPts val="0"/>
-                        </a:spcAft>
-                        <a:defRPr sz="1200" b="0">
-                          <a:solidFill>
-                            <a:srgbClr val="21243A"/>
-                          </a:solidFill>
-                          <a:latin typeface="Arial"/>
-                        </a:defRPr>
-                      </a:pPr>
-                      <a:r>
-                        <a:t>Ingestion note 3</a:t>
-                      </a:r>
-                    </a:p>
-                  </a:txBody>
-                  <a:tcPr marL="82296" marR="82296" marT="64008" marB="64008">
-                    <a:solidFill>
-                      <a:srgbClr val="F1F7F7"/>
-                    </a:solidFill>
-                  </a:tcPr>
-                </a:tc>
-                <a:tc>
-                  <a:txBody>
-                    <a:bodyPr wrap="none"/>
-                    <a:lstStyle/>
-                    <a:p>
-                      <a:pPr>
-                        <a:lnSpc>
-                          <a:spcPts val="1600"/>
-                        </a:lnSpc>
-                        <a:spcAft>
-                          <a:spcPts val="0"/>
-                        </a:spcAft>
-                        <a:defRPr sz="1200" b="0">
-                          <a:solidFill>
-                            <a:srgbClr val="21243A"/>
-                          </a:solidFill>
-                          <a:latin typeface="Arial"/>
-                        </a:defRPr>
-                      </a:pPr>
-                      <a:r>
-                        <a:t>Standalone-audio content assessment covers the transcript. AI-origin detection</a:t>
-                      </a:r>
-                    </a:p>
-                    <a:p>
-                      <a:pPr>
-                        <a:lnSpc>
-                          <a:spcPts val="1600"/>
-                        </a:lnSpc>
-                        <a:spcAft>
-                          <a:spcPts val="0"/>
-                        </a:spcAft>
-                        <a:defRPr sz="1200" b="0">
-                          <a:solidFill>
-                            <a:srgbClr val="21243A"/>
-                          </a:solidFill>
-                          <a:latin typeface="Arial"/>
-                        </a:defRPr>
-                      </a:pPr>
-                      <a:r>
-                        <a:t>from sound is outside this assessment. Original-file C2PA was checked before</a:t>
-                      </a:r>
-                    </a:p>
-                    <a:p>
-                      <a:pPr>
-                        <a:lnSpc>
-                          <a:spcPts val="1600"/>
-                        </a:lnSpc>
-                        <a:spcAft>
-                          <a:spcPts val="0"/>
-                        </a:spcAft>
-                        <a:defRPr sz="1200" b="0">
-                          <a:solidFill>
-                            <a:srgbClr val="21243A"/>
-                          </a:solidFill>
-                          <a:latin typeface="Arial"/>
-                        </a:defRPr>
-                      </a:pPr>
-                      <a:r>
-                        <a:t>transcription and is reported separately.</a:t>
+                        <a:t>analyzing today is heavily political. Very heavily. Yeah, it involves major figures</a:t>
+                      </a:r>
+                    </a:p>
+                    <a:p>
+                      <a:pPr>
+                        <a:lnSpc>
+                          <a:spcPts val="1600"/>
+                        </a:lnSpc>
+                        <a:spcAft>
+                          <a:spcPts val="0"/>
+                        </a:spcAft>
+                        <a:defRPr sz="1200" b="0">
+                          <a:solidFill>
+                            <a:srgbClr val="21243A"/>
+                          </a:solidFill>
+                          <a:latin typeface="Arial"/>
+                        </a:defRPr>
+                      </a:pPr>
+                      <a:r>
+                        <a:t>from the left and the right. We're talking President Joe Biden, former President</a:t>
+                      </a:r>
+                    </a:p>
+                    <a:p>
+                      <a:pPr>
+                        <a:lnSpc>
+                          <a:spcPts val="1600"/>
+                        </a:lnSpc>
+                        <a:spcAft>
+                          <a:spcPts val="0"/>
+                        </a:spcAft>
+                        <a:defRPr sz="1200" b="0">
+                          <a:solidFill>
+                            <a:srgbClr val="21243A"/>
+                          </a:solidFill>
+                          <a:latin typeface="Arial"/>
+                        </a:defRPr>
+                      </a:pPr>
+                      <a:r>
+                        <a:t>Donald Trump, Vice President Kamala Harris along with a bunch of conservative</a:t>
+                      </a:r>
+                    </a:p>
+                    <a:p>
+                      <a:pPr>
+                        <a:lnSpc>
+                          <a:spcPts val="1600"/>
+                        </a:lnSpc>
+                        <a:spcAft>
+                          <a:spcPts val="0"/>
+                        </a:spcAft>
+                        <a:defRPr sz="1200" b="0">
+                          <a:solidFill>
+                            <a:srgbClr val="21243A"/>
+                          </a:solidFill>
+                          <a:latin typeface="Arial"/>
+                        </a:defRPr>
+                      </a:pPr>
+                      <a:r>
+                        <a:t>and liberal viewpoints. Right. So, I have to be clear here. We aren't taking sides</a:t>
+                      </a:r>
+                    </a:p>
+                    <a:p>
+                      <a:pPr>
+                        <a:lnSpc>
+                          <a:spcPts val="1600"/>
+                        </a:lnSpc>
+                        <a:spcAft>
+                          <a:spcPts val="0"/>
+                        </a:spcAft>
+                        <a:defRPr sz="1200" b="0">
+                          <a:solidFill>
+                            <a:srgbClr val="21243A"/>
+                          </a:solidFill>
+                          <a:latin typeface="Arial"/>
+                        </a:defRPr>
+                      </a:pPr>
+                      <a:r>
+                        <a:t>today. We aren't endorsing any of the politics discussed. We're just impartially</a:t>
+                      </a:r>
+                    </a:p>
+                    <a:p>
+                      <a:pPr>
+                        <a:lnSpc>
+                          <a:spcPts val="1600"/>
+                        </a:lnSpc>
+                        <a:spcAft>
+                          <a:spcPts val="0"/>
+                        </a:spcAft>
+                        <a:defRPr sz="1200" b="0">
+                          <a:solidFill>
+                            <a:srgbClr val="21243A"/>
+                          </a:solidFill>
+                          <a:latin typeface="Arial"/>
+                        </a:defRPr>
+                      </a:pPr>
+                      <a:r>
+                        <a:t>reading the digital footprint left behind to help you understand the mechanics of</a:t>
+                      </a:r>
+                    </a:p>
+                    <a:p>
+                      <a:pPr>
+                        <a:lnSpc>
+                          <a:spcPts val="1600"/>
+                        </a:lnSpc>
+                        <a:spcAft>
+                          <a:spcPts val="0"/>
+                        </a:spcAft>
+                        <a:defRPr sz="1200" b="0">
+                          <a:solidFill>
+                            <a:srgbClr val="21243A"/>
+                          </a:solidFill>
+                          <a:latin typeface="Arial"/>
+                        </a:defRPr>
+                      </a:pPr>
+                      <a:r>
+                        <a:t>this social media evolution. Our focus is strictly on the mechanics of the discourse.</a:t>
+                      </a:r>
+                    </a:p>
+                    <a:p>
+                      <a:pPr>
+                        <a:lnSpc>
+                          <a:spcPts val="1600"/>
+                        </a:lnSpc>
+                        <a:spcAft>
+                          <a:spcPts val="0"/>
+                        </a:spcAft>
+                        <a:defRPr sz="1200" b="0">
+                          <a:solidFill>
+                            <a:srgbClr val="21243A"/>
+                          </a:solidFill>
+                          <a:latin typeface="Arial"/>
+                        </a:defRPr>
+                      </a:pPr>
+                      <a:r>
+                        <a:t>You know, what the data reflects, what was said, and how it spread. Okay, let's</a:t>
+                      </a:r>
+                    </a:p>
+                    <a:p>
+                      <a:pPr>
+                        <a:lnSpc>
+                          <a:spcPts val="1600"/>
+                        </a:lnSpc>
+                        <a:spcAft>
+                          <a:spcPts val="0"/>
+                        </a:spcAft>
+                        <a:defRPr sz="1200" b="0">
+                          <a:solidFill>
+                            <a:srgbClr val="21243A"/>
+                          </a:solidFill>
+                          <a:latin typeface="Arial"/>
+                        </a:defRPr>
+                      </a:pPr>
+                      <a:r>
+                        <a:t>unpack this. To really understand the explosion of outrage and compliance in</a:t>
+                      </a:r>
+                    </a:p>
+                    <a:p>
+                      <a:pPr>
+                        <a:lnSpc>
+                          <a:spcPts val="1600"/>
+                        </a:lnSpc>
+                        <a:spcAft>
+                          <a:spcPts val="0"/>
+                        </a:spcAft>
+                        <a:defRPr sz="1200" b="0">
+                          <a:solidFill>
+                            <a:srgbClr val="21243A"/>
+                          </a:solidFill>
+                          <a:latin typeface="Arial"/>
+                        </a:defRPr>
+                      </a:pPr>
+                      <a:r>
+                        <a:t>2020, we have to recognize that human pushback again</a:t>
                       </a:r>
                     </a:p>
                   </a:txBody>
@@ -16006,7 +16159,7 @@
               </a:defRPr>
             </a:pPr>
             <a:r>
-              <a:t>File and analysis record (continued)</a:t>
+              <a:t>How this assessment was reached</a:t>
             </a:r>
           </a:p>
         </p:txBody>
@@ -16091,6 +16244,1881 @@
             </a:pPr>
             <a:r>
               <a:t>22</a:t>
+            </a:r>
+          </a:p>
+        </p:txBody>
+      </p:sp>
+      <p:graphicFrame>
+        <p:nvGraphicFramePr>
+          <p:cNvPr id="6" name="Table 5"/>
+          <p:cNvGraphicFramePr>
+            <a:graphicFrameLocks noGrp="1"/>
+          </p:cNvGraphicFramePr>
+          <p:nvPr/>
+        </p:nvGraphicFramePr>
+        <p:xfrm>
+          <a:off x="365760" y="1353312"/>
+          <a:ext cx="8412479" cy="347472"/>
+        </p:xfrm>
+        <a:graphic>
+          <a:graphicData uri="http://schemas.openxmlformats.org/drawingml/2006/table">
+            <a:tbl>
+              <a:tblPr firstRow="1" bandRow="1">
+                <a:tableStyleId>{5C22544A-7EE6-4342-B048-85BDC9FD1C3A}</a:tableStyleId>
+              </a:tblPr>
+              <a:tblGrid>
+                <a:gridCol w="2271369"/>
+                <a:gridCol w="6141110"/>
+              </a:tblGrid>
+              <a:tr h="347472">
+                <a:tc>
+                  <a:txBody>
+                    <a:bodyPr wrap="none"/>
+                    <a:lstStyle/>
+                    <a:p>
+                      <a:pPr>
+                        <a:lnSpc>
+                          <a:spcPts val="1600"/>
+                        </a:lnSpc>
+                        <a:spcAft>
+                          <a:spcPts val="0"/>
+                        </a:spcAft>
+                        <a:defRPr sz="1200" b="1">
+                          <a:solidFill>
+                            <a:srgbClr val="FFFFFF"/>
+                          </a:solidFill>
+                          <a:latin typeface="Arial"/>
+                        </a:defRPr>
+                      </a:pPr>
+                      <a:r>
+                        <a:t>Field</a:t>
+                      </a:r>
+                    </a:p>
+                  </a:txBody>
+                  <a:tcPr marL="82296" marR="82296" marT="64008" marB="64008">
+                    <a:solidFill>
+                      <a:srgbClr val="16787C"/>
+                    </a:solidFill>
+                  </a:tcPr>
+                </a:tc>
+                <a:tc>
+                  <a:txBody>
+                    <a:bodyPr wrap="none"/>
+                    <a:lstStyle/>
+                    <a:p>
+                      <a:pPr>
+                        <a:lnSpc>
+                          <a:spcPts val="1600"/>
+                        </a:lnSpc>
+                        <a:spcAft>
+                          <a:spcPts val="0"/>
+                        </a:spcAft>
+                        <a:defRPr sz="1200" b="1">
+                          <a:solidFill>
+                            <a:srgbClr val="FFFFFF"/>
+                          </a:solidFill>
+                          <a:latin typeface="Arial"/>
+                        </a:defRPr>
+                      </a:pPr>
+                      <a:r>
+                        <a:t>Recorded detail</a:t>
+                      </a:r>
+                    </a:p>
+                  </a:txBody>
+                  <a:tcPr marL="82296" marR="82296" marT="64008" marB="64008">
+                    <a:solidFill>
+                      <a:srgbClr val="16787C"/>
+                    </a:solidFill>
+                  </a:tcPr>
+                </a:tc>
+              </a:tr>
+            </a:tbl>
+          </a:graphicData>
+        </a:graphic>
+      </p:graphicFrame>
+      <p:graphicFrame>
+        <p:nvGraphicFramePr>
+          <p:cNvPr id="7" name="Table 6"/>
+          <p:cNvGraphicFramePr>
+            <a:graphicFrameLocks noGrp="1"/>
+          </p:cNvGraphicFramePr>
+          <p:nvPr/>
+        </p:nvGraphicFramePr>
+        <p:xfrm>
+          <a:off x="365760" y="1700784"/>
+          <a:ext cx="8412479" cy="552704"/>
+        </p:xfrm>
+        <a:graphic>
+          <a:graphicData uri="http://schemas.openxmlformats.org/drawingml/2006/table">
+            <a:tbl>
+              <a:tblPr firstRow="1" bandRow="1">
+                <a:tableStyleId>{5C22544A-7EE6-4342-B048-85BDC9FD1C3A}</a:tableStyleId>
+              </a:tblPr>
+              <a:tblGrid>
+                <a:gridCol w="2271369"/>
+                <a:gridCol w="6141110"/>
+              </a:tblGrid>
+              <a:tr h="552704">
+                <a:tc>
+                  <a:txBody>
+                    <a:bodyPr wrap="none"/>
+                    <a:lstStyle/>
+                    <a:p>
+                      <a:pPr>
+                        <a:lnSpc>
+                          <a:spcPts val="1600"/>
+                        </a:lnSpc>
+                        <a:spcAft>
+                          <a:spcPts val="0"/>
+                        </a:spcAft>
+                        <a:defRPr sz="1200" b="0">
+                          <a:solidFill>
+                            <a:srgbClr val="21243A"/>
+                          </a:solidFill>
+                          <a:latin typeface="Arial"/>
+                        </a:defRPr>
+                      </a:pPr>
+                      <a:r>
+                        <a:t>1. override</a:t>
+                      </a:r>
+                    </a:p>
+                  </a:txBody>
+                  <a:tcPr marL="82296" marR="82296" marT="64008" marB="64008">
+                    <a:solidFill>
+                      <a:srgbClr val="F1F7F7"/>
+                    </a:solidFill>
+                  </a:tcPr>
+                </a:tc>
+                <a:tc>
+                  <a:txBody>
+                    <a:bodyPr wrap="none"/>
+                    <a:lstStyle/>
+                    <a:p>
+                      <a:pPr>
+                        <a:lnSpc>
+                          <a:spcPts val="1600"/>
+                        </a:lnSpc>
+                        <a:spcAft>
+                          <a:spcPts val="0"/>
+                        </a:spcAft>
+                        <a:defRPr sz="1200" b="0">
+                          <a:solidFill>
+                            <a:srgbClr val="21243A"/>
+                          </a:solidFill>
+                          <a:latin typeface="Arial"/>
+                        </a:defRPr>
+                      </a:pPr>
+                      <a:r>
+                        <a:t>outcome=none; detail=No confirmed C2PA AI assertion or SynthID watermark.</a:t>
+                      </a:r>
+                    </a:p>
+                    <a:p>
+                      <a:pPr>
+                        <a:lnSpc>
+                          <a:spcPts val="1600"/>
+                        </a:lnSpc>
+                        <a:spcAft>
+                          <a:spcPts val="0"/>
+                        </a:spcAft>
+                        <a:defRPr sz="1200" b="0">
+                          <a:solidFill>
+                            <a:srgbClr val="21243A"/>
+                          </a:solidFill>
+                          <a:latin typeface="Arial"/>
+                        </a:defRPr>
+                      </a:pPr>
+                      <a:r>
+                        <a:t>Origin remains unresolved by these checks.</a:t>
+                      </a:r>
+                    </a:p>
+                  </a:txBody>
+                  <a:tcPr marL="82296" marR="82296" marT="64008" marB="64008">
+                    <a:solidFill>
+                      <a:srgbClr val="F1F7F7"/>
+                    </a:solidFill>
+                  </a:tcPr>
+                </a:tc>
+              </a:tr>
+            </a:tbl>
+          </a:graphicData>
+        </a:graphic>
+      </p:graphicFrame>
+      <p:graphicFrame>
+        <p:nvGraphicFramePr>
+          <p:cNvPr id="8" name="Table 7"/>
+          <p:cNvGraphicFramePr>
+            <a:graphicFrameLocks noGrp="1"/>
+          </p:cNvGraphicFramePr>
+          <p:nvPr/>
+        </p:nvGraphicFramePr>
+        <p:xfrm>
+          <a:off x="365760" y="2253488"/>
+          <a:ext cx="8412479" cy="552704"/>
+        </p:xfrm>
+        <a:graphic>
+          <a:graphicData uri="http://schemas.openxmlformats.org/drawingml/2006/table">
+            <a:tbl>
+              <a:tblPr firstRow="1" bandRow="1">
+                <a:tableStyleId>{5C22544A-7EE6-4342-B048-85BDC9FD1C3A}</a:tableStyleId>
+              </a:tblPr>
+              <a:tblGrid>
+                <a:gridCol w="2271369"/>
+                <a:gridCol w="6141110"/>
+              </a:tblGrid>
+              <a:tr h="552704">
+                <a:tc>
+                  <a:txBody>
+                    <a:bodyPr wrap="none"/>
+                    <a:lstStyle/>
+                    <a:p>
+                      <a:pPr>
+                        <a:lnSpc>
+                          <a:spcPts val="1600"/>
+                        </a:lnSpc>
+                        <a:spcAft>
+                          <a:spcPts val="0"/>
+                        </a:spcAft>
+                        <a:defRPr sz="1200" b="0">
+                          <a:solidFill>
+                            <a:srgbClr val="21243A"/>
+                          </a:solidFill>
+                          <a:latin typeface="Arial"/>
+                        </a:defRPr>
+                      </a:pPr>
+                      <a:r>
+                        <a:t>2. model_agreement</a:t>
+                      </a:r>
+                    </a:p>
+                  </a:txBody>
+                  <a:tcPr marL="82296" marR="82296" marT="64008" marB="64008">
+                    <a:solidFill>
+                      <a:srgbClr val="FFFFFF"/>
+                    </a:solidFill>
+                  </a:tcPr>
+                </a:tc>
+                <a:tc>
+                  <a:txBody>
+                    <a:bodyPr wrap="none"/>
+                    <a:lstStyle/>
+                    <a:p>
+                      <a:pPr>
+                        <a:lnSpc>
+                          <a:spcPts val="1600"/>
+                        </a:lnSpc>
+                        <a:spcAft>
+                          <a:spcPts val="0"/>
+                        </a:spcAft>
+                        <a:defRPr sz="1200" b="0">
+                          <a:solidFill>
+                            <a:srgbClr val="21243A"/>
+                          </a:solidFill>
+                          <a:latin typeface="Arial"/>
+                        </a:defRPr>
+                      </a:pPr>
+                      <a:r>
+                        <a:t>synthetic=['Claude Analysis', 'OpenAI Analysis', 'Gemini Analysis']; authentic=[];</a:t>
+                      </a:r>
+                    </a:p>
+                    <a:p>
+                      <a:pPr>
+                        <a:lnSpc>
+                          <a:spcPts val="1600"/>
+                        </a:lnSpc>
+                        <a:spcAft>
+                          <a:spcPts val="0"/>
+                        </a:spcAft>
+                        <a:defRPr sz="1200" b="0">
+                          <a:solidFill>
+                            <a:srgbClr val="21243A"/>
+                          </a:solidFill>
+                          <a:latin typeface="Arial"/>
+                        </a:defRPr>
+                      </a:pPr>
+                      <a:r>
+                        <a:t>uncertain=[]; forensic_supports_synthetic=False</a:t>
+                      </a:r>
+                    </a:p>
+                  </a:txBody>
+                  <a:tcPr marL="82296" marR="82296" marT="64008" marB="64008">
+                    <a:solidFill>
+                      <a:srgbClr val="FFFFFF"/>
+                    </a:solidFill>
+                  </a:tcPr>
+                </a:tc>
+              </a:tr>
+            </a:tbl>
+          </a:graphicData>
+        </a:graphic>
+      </p:graphicFrame>
+      <p:graphicFrame>
+        <p:nvGraphicFramePr>
+          <p:cNvPr id="9" name="Table 8"/>
+          <p:cNvGraphicFramePr>
+            <a:graphicFrameLocks noGrp="1"/>
+          </p:cNvGraphicFramePr>
+          <p:nvPr/>
+        </p:nvGraphicFramePr>
+        <p:xfrm>
+          <a:off x="365760" y="2806192"/>
+          <a:ext cx="8412479" cy="552704"/>
+        </p:xfrm>
+        <a:graphic>
+          <a:graphicData uri="http://schemas.openxmlformats.org/drawingml/2006/table">
+            <a:tbl>
+              <a:tblPr firstRow="1" bandRow="1">
+                <a:tableStyleId>{5C22544A-7EE6-4342-B048-85BDC9FD1C3A}</a:tableStyleId>
+              </a:tblPr>
+              <a:tblGrid>
+                <a:gridCol w="2271369"/>
+                <a:gridCol w="6141110"/>
+              </a:tblGrid>
+              <a:tr h="552704">
+                <a:tc>
+                  <a:txBody>
+                    <a:bodyPr wrap="none"/>
+                    <a:lstStyle/>
+                    <a:p>
+                      <a:pPr>
+                        <a:lnSpc>
+                          <a:spcPts val="1600"/>
+                        </a:lnSpc>
+                        <a:spcAft>
+                          <a:spcPts val="0"/>
+                        </a:spcAft>
+                        <a:defRPr sz="1200" b="0">
+                          <a:solidFill>
+                            <a:srgbClr val="21243A"/>
+                          </a:solidFill>
+                          <a:latin typeface="Arial"/>
+                        </a:defRPr>
+                      </a:pPr>
+                      <a:r>
+                        <a:t>3. verdict</a:t>
+                      </a:r>
+                    </a:p>
+                  </a:txBody>
+                  <a:tcPr marL="82296" marR="82296" marT="64008" marB="64008">
+                    <a:solidFill>
+                      <a:srgbClr val="F1F7F7"/>
+                    </a:solidFill>
+                  </a:tcPr>
+                </a:tc>
+                <a:tc>
+                  <a:txBody>
+                    <a:bodyPr wrap="none"/>
+                    <a:lstStyle/>
+                    <a:p>
+                      <a:pPr>
+                        <a:lnSpc>
+                          <a:spcPts val="1600"/>
+                        </a:lnSpc>
+                        <a:spcAft>
+                          <a:spcPts val="0"/>
+                        </a:spcAft>
+                        <a:defRPr sz="1200" b="0">
+                          <a:solidFill>
+                            <a:srgbClr val="21243A"/>
+                          </a:solidFill>
+                          <a:latin typeface="Arial"/>
+                        </a:defRPr>
+                      </a:pPr>
+                      <a:r>
+                        <a:t>value=synthetic_likely; confidence=high; reason=3 models agree this is likely</a:t>
+                      </a:r>
+                    </a:p>
+                    <a:p>
+                      <a:pPr>
+                        <a:lnSpc>
+                          <a:spcPts val="1600"/>
+                        </a:lnSpc>
+                        <a:spcAft>
+                          <a:spcPts val="0"/>
+                        </a:spcAft>
+                        <a:defRPr sz="1200" b="0">
+                          <a:solidFill>
+                            <a:srgbClr val="21243A"/>
+                          </a:solidFill>
+                          <a:latin typeface="Arial"/>
+                        </a:defRPr>
+                      </a:pPr>
+                      <a:r>
+                        <a:t>synthetic.</a:t>
+                      </a:r>
+                    </a:p>
+                  </a:txBody>
+                  <a:tcPr marL="82296" marR="82296" marT="64008" marB="64008">
+                    <a:solidFill>
+                      <a:srgbClr val="F1F7F7"/>
+                    </a:solidFill>
+                  </a:tcPr>
+                </a:tc>
+              </a:tr>
+            </a:tbl>
+          </a:graphicData>
+        </a:graphic>
+      </p:graphicFrame>
+    </p:spTree>
+  </p:cSld>
+  <p:clrMapOvr>
+    <a:masterClrMapping/>
+  </p:clrMapOvr>
+</p:sld>
+</file>
+
+<file path=ppt/slides/slide23.xml><?xml version="1.0" encoding="utf-8"?>
+<p:sld xmlns:a="http://schemas.openxmlformats.org/drawingml/2006/main" xmlns:p="http://schemas.openxmlformats.org/presentationml/2006/main" xmlns:r="http://schemas.openxmlformats.org/officeDocument/2006/relationships">
+  <p:cSld>
+    <p:spTree>
+      <p:nvGrpSpPr>
+        <p:cNvPr id="1" name=""/>
+        <p:cNvGrpSpPr/>
+        <p:nvPr/>
+      </p:nvGrpSpPr>
+      <p:grpSpPr/>
+      <p:sp>
+        <p:nvSpPr>
+          <p:cNvPr id="2" name="TextBox 1"/>
+          <p:cNvSpPr txBox="1"/>
+          <p:nvPr/>
+        </p:nvSpPr>
+        <p:spPr>
+          <a:xfrm>
+            <a:off x="365760" y="219456"/>
+            <a:ext cx="8412480" cy="228600"/>
+          </a:xfrm>
+          <a:prstGeom prst="rect">
+            <a:avLst/>
+          </a:prstGeom>
+          <a:noFill/>
+        </p:spPr>
+        <p:txBody>
+          <a:bodyPr wrap="square" lIns="0" rIns="0" tIns="0" bIns="0">
+            <a:spAutoFit/>
+          </a:bodyPr>
+          <a:lstStyle/>
+          <a:p>
+            <a:pPr>
+              <a:lnSpc>
+                <a:spcPct val="115000"/>
+              </a:lnSpc>
+              <a:spcAft>
+                <a:spcPts val="0"/>
+              </a:spcAft>
+              <a:defRPr sz="1100" b="1">
+                <a:solidFill>
+                  <a:srgbClr val="C5006A"/>
+                </a:solidFill>
+                <a:latin typeface="Arial"/>
+              </a:defRPr>
+            </a:pPr>
+            <a:r>
+              <a:t>SDA VISION / RESEARCH REPORT</a:t>
+            </a:r>
+          </a:p>
+        </p:txBody>
+      </p:sp>
+      <p:sp>
+        <p:nvSpPr>
+          <p:cNvPr id="3" name="TextBox 2"/>
+          <p:cNvSpPr txBox="1"/>
+          <p:nvPr/>
+        </p:nvSpPr>
+        <p:spPr>
+          <a:xfrm>
+            <a:off x="365760" y="658368"/>
+            <a:ext cx="8412480" cy="612648"/>
+          </a:xfrm>
+          <a:prstGeom prst="rect">
+            <a:avLst/>
+          </a:prstGeom>
+          <a:noFill/>
+        </p:spPr>
+        <p:txBody>
+          <a:bodyPr wrap="square" lIns="0" rIns="0" tIns="0" bIns="0">
+            <a:spAutoFit/>
+          </a:bodyPr>
+          <a:lstStyle/>
+          <a:p>
+            <a:pPr>
+              <a:lnSpc>
+                <a:spcPct val="115000"/>
+              </a:lnSpc>
+              <a:spcAft>
+                <a:spcPts val="0"/>
+              </a:spcAft>
+              <a:defRPr sz="2200" b="1">
+                <a:solidFill>
+                  <a:srgbClr val="21243A"/>
+                </a:solidFill>
+                <a:latin typeface="Arial"/>
+              </a:defRPr>
+            </a:pPr>
+            <a:r>
+              <a:t>File and analysis record</a:t>
+            </a:r>
+          </a:p>
+        </p:txBody>
+      </p:sp>
+      <p:sp>
+        <p:nvSpPr>
+          <p:cNvPr id="4" name="TextBox 3"/>
+          <p:cNvSpPr txBox="1"/>
+          <p:nvPr/>
+        </p:nvSpPr>
+        <p:spPr>
+          <a:xfrm>
+            <a:off x="365760" y="6291072"/>
+            <a:ext cx="8001000" cy="365760"/>
+          </a:xfrm>
+          <a:prstGeom prst="rect">
+            <a:avLst/>
+          </a:prstGeom>
+          <a:noFill/>
+        </p:spPr>
+        <p:txBody>
+          <a:bodyPr wrap="square" lIns="0" rIns="0" tIns="0" bIns="0">
+            <a:spAutoFit/>
+          </a:bodyPr>
+          <a:lstStyle/>
+          <a:p>
+            <a:pPr>
+              <a:lnSpc>
+                <a:spcPct val="115000"/>
+              </a:lnSpc>
+              <a:spcAft>
+                <a:spcPts val="0"/>
+              </a:spcAft>
+              <a:defRPr sz="800" b="0">
+                <a:solidFill>
+                  <a:srgbClr val="545B6D"/>
+                </a:solidFill>
+                <a:latin typeface="Arial"/>
+              </a:defRPr>
+            </a:pPr>
+            <a:r>
+              <a:t>Research assessment. Ratings are not calibrated probabilities. Acoustic AI-origin detection: outside scope.</a:t>
+            </a:r>
+          </a:p>
+        </p:txBody>
+      </p:sp>
+      <p:sp>
+        <p:nvSpPr>
+          <p:cNvPr id="5" name="TextBox 4"/>
+          <p:cNvSpPr txBox="1"/>
+          <p:nvPr/>
+        </p:nvSpPr>
+        <p:spPr>
+          <a:xfrm>
+            <a:off x="8394192" y="6318504"/>
+            <a:ext cx="365760" cy="228600"/>
+          </a:xfrm>
+          <a:prstGeom prst="rect">
+            <a:avLst/>
+          </a:prstGeom>
+          <a:noFill/>
+        </p:spPr>
+        <p:txBody>
+          <a:bodyPr wrap="square" lIns="0" rIns="0" tIns="0" bIns="0">
+            <a:spAutoFit/>
+          </a:bodyPr>
+          <a:lstStyle/>
+          <a:p>
+            <a:pPr>
+              <a:lnSpc>
+                <a:spcPct val="115000"/>
+              </a:lnSpc>
+              <a:spcAft>
+                <a:spcPts val="0"/>
+              </a:spcAft>
+              <a:defRPr sz="900" b="0">
+                <a:solidFill>
+                  <a:srgbClr val="545B6D"/>
+                </a:solidFill>
+                <a:latin typeface="Arial"/>
+              </a:defRPr>
+            </a:pPr>
+            <a:r>
+              <a:t>23</a:t>
+            </a:r>
+          </a:p>
+        </p:txBody>
+      </p:sp>
+      <p:graphicFrame>
+        <p:nvGraphicFramePr>
+          <p:cNvPr id="6" name="Table 5"/>
+          <p:cNvGraphicFramePr>
+            <a:graphicFrameLocks noGrp="1"/>
+          </p:cNvGraphicFramePr>
+          <p:nvPr/>
+        </p:nvGraphicFramePr>
+        <p:xfrm>
+          <a:off x="365760" y="1353312"/>
+          <a:ext cx="8412479" cy="347472"/>
+        </p:xfrm>
+        <a:graphic>
+          <a:graphicData uri="http://schemas.openxmlformats.org/drawingml/2006/table">
+            <a:tbl>
+              <a:tblPr firstRow="1" bandRow="1">
+                <a:tableStyleId>{5C22544A-7EE6-4342-B048-85BDC9FD1C3A}</a:tableStyleId>
+              </a:tblPr>
+              <a:tblGrid>
+                <a:gridCol w="2271369"/>
+                <a:gridCol w="6141110"/>
+              </a:tblGrid>
+              <a:tr h="347472">
+                <a:tc>
+                  <a:txBody>
+                    <a:bodyPr wrap="none"/>
+                    <a:lstStyle/>
+                    <a:p>
+                      <a:pPr>
+                        <a:lnSpc>
+                          <a:spcPts val="1600"/>
+                        </a:lnSpc>
+                        <a:spcAft>
+                          <a:spcPts val="0"/>
+                        </a:spcAft>
+                        <a:defRPr sz="1200" b="1">
+                          <a:solidFill>
+                            <a:srgbClr val="FFFFFF"/>
+                          </a:solidFill>
+                          <a:latin typeface="Arial"/>
+                        </a:defRPr>
+                      </a:pPr>
+                      <a:r>
+                        <a:t>Field</a:t>
+                      </a:r>
+                    </a:p>
+                  </a:txBody>
+                  <a:tcPr marL="82296" marR="82296" marT="64008" marB="64008">
+                    <a:solidFill>
+                      <a:srgbClr val="16787C"/>
+                    </a:solidFill>
+                  </a:tcPr>
+                </a:tc>
+                <a:tc>
+                  <a:txBody>
+                    <a:bodyPr wrap="none"/>
+                    <a:lstStyle/>
+                    <a:p>
+                      <a:pPr>
+                        <a:lnSpc>
+                          <a:spcPts val="1600"/>
+                        </a:lnSpc>
+                        <a:spcAft>
+                          <a:spcPts val="0"/>
+                        </a:spcAft>
+                        <a:defRPr sz="1200" b="1">
+                          <a:solidFill>
+                            <a:srgbClr val="FFFFFF"/>
+                          </a:solidFill>
+                          <a:latin typeface="Arial"/>
+                        </a:defRPr>
+                      </a:pPr>
+                      <a:r>
+                        <a:t>Recorded detail</a:t>
+                      </a:r>
+                    </a:p>
+                  </a:txBody>
+                  <a:tcPr marL="82296" marR="82296" marT="64008" marB="64008">
+                    <a:solidFill>
+                      <a:srgbClr val="16787C"/>
+                    </a:solidFill>
+                  </a:tcPr>
+                </a:tc>
+              </a:tr>
+            </a:tbl>
+          </a:graphicData>
+        </a:graphic>
+      </p:graphicFrame>
+      <p:graphicFrame>
+        <p:nvGraphicFramePr>
+          <p:cNvPr id="7" name="Table 6"/>
+          <p:cNvGraphicFramePr>
+            <a:graphicFrameLocks noGrp="1"/>
+          </p:cNvGraphicFramePr>
+          <p:nvPr/>
+        </p:nvGraphicFramePr>
+        <p:xfrm>
+          <a:off x="365760" y="1700784"/>
+          <a:ext cx="8412479" cy="349504"/>
+        </p:xfrm>
+        <a:graphic>
+          <a:graphicData uri="http://schemas.openxmlformats.org/drawingml/2006/table">
+            <a:tbl>
+              <a:tblPr firstRow="1" bandRow="1">
+                <a:tableStyleId>{5C22544A-7EE6-4342-B048-85BDC9FD1C3A}</a:tableStyleId>
+              </a:tblPr>
+              <a:tblGrid>
+                <a:gridCol w="2271369"/>
+                <a:gridCol w="6141110"/>
+              </a:tblGrid>
+              <a:tr h="349504">
+                <a:tc>
+                  <a:txBody>
+                    <a:bodyPr wrap="none"/>
+                    <a:lstStyle/>
+                    <a:p>
+                      <a:pPr>
+                        <a:lnSpc>
+                          <a:spcPts val="1600"/>
+                        </a:lnSpc>
+                        <a:spcAft>
+                          <a:spcPts val="0"/>
+                        </a:spcAft>
+                        <a:defRPr sz="1200" b="0">
+                          <a:solidFill>
+                            <a:srgbClr val="21243A"/>
+                          </a:solidFill>
+                          <a:latin typeface="Arial"/>
+                        </a:defRPr>
+                      </a:pPr>
+                      <a:r>
+                        <a:t>File</a:t>
+                      </a:r>
+                    </a:p>
+                  </a:txBody>
+                  <a:tcPr marL="82296" marR="82296" marT="64008" marB="64008">
+                    <a:solidFill>
+                      <a:srgbClr val="F1F7F7"/>
+                    </a:solidFill>
+                  </a:tcPr>
+                </a:tc>
+                <a:tc>
+                  <a:txBody>
+                    <a:bodyPr wrap="none"/>
+                    <a:lstStyle/>
+                    <a:p>
+                      <a:pPr>
+                        <a:lnSpc>
+                          <a:spcPts val="1600"/>
+                        </a:lnSpc>
+                        <a:spcAft>
+                          <a:spcPts val="0"/>
+                        </a:spcAft>
+                        <a:defRPr sz="1200" b="0">
+                          <a:solidFill>
+                            <a:srgbClr val="21243A"/>
+                          </a:solidFill>
+                          <a:latin typeface="Arial"/>
+                        </a:defRPr>
+                      </a:pPr>
+                      <a:r>
+                        <a:t>podcast.m4a</a:t>
+                      </a:r>
+                    </a:p>
+                  </a:txBody>
+                  <a:tcPr marL="82296" marR="82296" marT="64008" marB="64008">
+                    <a:solidFill>
+                      <a:srgbClr val="F1F7F7"/>
+                    </a:solidFill>
+                  </a:tcPr>
+                </a:tc>
+              </a:tr>
+            </a:tbl>
+          </a:graphicData>
+        </a:graphic>
+      </p:graphicFrame>
+      <p:graphicFrame>
+        <p:nvGraphicFramePr>
+          <p:cNvPr id="8" name="Table 7"/>
+          <p:cNvGraphicFramePr>
+            <a:graphicFrameLocks noGrp="1"/>
+          </p:cNvGraphicFramePr>
+          <p:nvPr/>
+        </p:nvGraphicFramePr>
+        <p:xfrm>
+          <a:off x="365760" y="2050288"/>
+          <a:ext cx="8412479" cy="349504"/>
+        </p:xfrm>
+        <a:graphic>
+          <a:graphicData uri="http://schemas.openxmlformats.org/drawingml/2006/table">
+            <a:tbl>
+              <a:tblPr firstRow="1" bandRow="1">
+                <a:tableStyleId>{5C22544A-7EE6-4342-B048-85BDC9FD1C3A}</a:tableStyleId>
+              </a:tblPr>
+              <a:tblGrid>
+                <a:gridCol w="2271369"/>
+                <a:gridCol w="6141110"/>
+              </a:tblGrid>
+              <a:tr h="349504">
+                <a:tc>
+                  <a:txBody>
+                    <a:bodyPr wrap="none"/>
+                    <a:lstStyle/>
+                    <a:p>
+                      <a:pPr>
+                        <a:lnSpc>
+                          <a:spcPts val="1600"/>
+                        </a:lnSpc>
+                        <a:spcAft>
+                          <a:spcPts val="0"/>
+                        </a:spcAft>
+                        <a:defRPr sz="1200" b="0">
+                          <a:solidFill>
+                            <a:srgbClr val="21243A"/>
+                          </a:solidFill>
+                          <a:latin typeface="Arial"/>
+                        </a:defRPr>
+                      </a:pPr>
+                      <a:r>
+                        <a:t>Analysis ID</a:t>
+                      </a:r>
+                    </a:p>
+                  </a:txBody>
+                  <a:tcPr marL="82296" marR="82296" marT="64008" marB="64008">
+                    <a:solidFill>
+                      <a:srgbClr val="FFFFFF"/>
+                    </a:solidFill>
+                  </a:tcPr>
+                </a:tc>
+                <a:tc>
+                  <a:txBody>
+                    <a:bodyPr wrap="none"/>
+                    <a:lstStyle/>
+                    <a:p>
+                      <a:pPr>
+                        <a:lnSpc>
+                          <a:spcPts val="1600"/>
+                        </a:lnSpc>
+                        <a:spcAft>
+                          <a:spcPts val="0"/>
+                        </a:spcAft>
+                        <a:defRPr sz="1200" b="0">
+                          <a:solidFill>
+                            <a:srgbClr val="21243A"/>
+                          </a:solidFill>
+                          <a:latin typeface="Arial"/>
+                        </a:defRPr>
+                      </a:pPr>
+                      <a:r>
+                        <a:t>7e1a6917-52a1-453d-8dda-9c4842232f31</a:t>
+                      </a:r>
+                    </a:p>
+                  </a:txBody>
+                  <a:tcPr marL="82296" marR="82296" marT="64008" marB="64008">
+                    <a:solidFill>
+                      <a:srgbClr val="FFFFFF"/>
+                    </a:solidFill>
+                  </a:tcPr>
+                </a:tc>
+              </a:tr>
+            </a:tbl>
+          </a:graphicData>
+        </a:graphic>
+      </p:graphicFrame>
+      <p:graphicFrame>
+        <p:nvGraphicFramePr>
+          <p:cNvPr id="9" name="Table 8"/>
+          <p:cNvGraphicFramePr>
+            <a:graphicFrameLocks noGrp="1"/>
+          </p:cNvGraphicFramePr>
+          <p:nvPr/>
+        </p:nvGraphicFramePr>
+        <p:xfrm>
+          <a:off x="365760" y="2399792"/>
+          <a:ext cx="8412479" cy="349504"/>
+        </p:xfrm>
+        <a:graphic>
+          <a:graphicData uri="http://schemas.openxmlformats.org/drawingml/2006/table">
+            <a:tbl>
+              <a:tblPr firstRow="1" bandRow="1">
+                <a:tableStyleId>{5C22544A-7EE6-4342-B048-85BDC9FD1C3A}</a:tableStyleId>
+              </a:tblPr>
+              <a:tblGrid>
+                <a:gridCol w="2271369"/>
+                <a:gridCol w="6141110"/>
+              </a:tblGrid>
+              <a:tr h="349504">
+                <a:tc>
+                  <a:txBody>
+                    <a:bodyPr wrap="none"/>
+                    <a:lstStyle/>
+                    <a:p>
+                      <a:pPr>
+                        <a:lnSpc>
+                          <a:spcPts val="1600"/>
+                        </a:lnSpc>
+                        <a:spcAft>
+                          <a:spcPts val="0"/>
+                        </a:spcAft>
+                        <a:defRPr sz="1200" b="0">
+                          <a:solidFill>
+                            <a:srgbClr val="21243A"/>
+                          </a:solidFill>
+                          <a:latin typeface="Arial"/>
+                        </a:defRPr>
+                      </a:pPr>
+                      <a:r>
+                        <a:t>Generated</a:t>
+                      </a:r>
+                    </a:p>
+                  </a:txBody>
+                  <a:tcPr marL="82296" marR="82296" marT="64008" marB="64008">
+                    <a:solidFill>
+                      <a:srgbClr val="F1F7F7"/>
+                    </a:solidFill>
+                  </a:tcPr>
+                </a:tc>
+                <a:tc>
+                  <a:txBody>
+                    <a:bodyPr wrap="none"/>
+                    <a:lstStyle/>
+                    <a:p>
+                      <a:pPr>
+                        <a:lnSpc>
+                          <a:spcPts val="1600"/>
+                        </a:lnSpc>
+                        <a:spcAft>
+                          <a:spcPts val="0"/>
+                        </a:spcAft>
+                        <a:defRPr sz="1200" b="0">
+                          <a:solidFill>
+                            <a:srgbClr val="21243A"/>
+                          </a:solidFill>
+                          <a:latin typeface="Arial"/>
+                        </a:defRPr>
+                      </a:pPr>
+                      <a:r>
+                        <a:t>2026-09-26T22:31:07+00:00</a:t>
+                      </a:r>
+                    </a:p>
+                  </a:txBody>
+                  <a:tcPr marL="82296" marR="82296" marT="64008" marB="64008">
+                    <a:solidFill>
+                      <a:srgbClr val="F1F7F7"/>
+                    </a:solidFill>
+                  </a:tcPr>
+                </a:tc>
+              </a:tr>
+            </a:tbl>
+          </a:graphicData>
+        </a:graphic>
+      </p:graphicFrame>
+      <p:graphicFrame>
+        <p:nvGraphicFramePr>
+          <p:cNvPr id="10" name="Table 9"/>
+          <p:cNvGraphicFramePr>
+            <a:graphicFrameLocks noGrp="1"/>
+          </p:cNvGraphicFramePr>
+          <p:nvPr/>
+        </p:nvGraphicFramePr>
+        <p:xfrm>
+          <a:off x="365760" y="2749296"/>
+          <a:ext cx="8412479" cy="349504"/>
+        </p:xfrm>
+        <a:graphic>
+          <a:graphicData uri="http://schemas.openxmlformats.org/drawingml/2006/table">
+            <a:tbl>
+              <a:tblPr firstRow="1" bandRow="1">
+                <a:tableStyleId>{5C22544A-7EE6-4342-B048-85BDC9FD1C3A}</a:tableStyleId>
+              </a:tblPr>
+              <a:tblGrid>
+                <a:gridCol w="2271369"/>
+                <a:gridCol w="6141110"/>
+              </a:tblGrid>
+              <a:tr h="349504">
+                <a:tc>
+                  <a:txBody>
+                    <a:bodyPr wrap="none"/>
+                    <a:lstStyle/>
+                    <a:p>
+                      <a:pPr>
+                        <a:lnSpc>
+                          <a:spcPts val="1600"/>
+                        </a:lnSpc>
+                        <a:spcAft>
+                          <a:spcPts val="0"/>
+                        </a:spcAft>
+                        <a:defRPr sz="1200" b="0">
+                          <a:solidFill>
+                            <a:srgbClr val="21243A"/>
+                          </a:solidFill>
+                          <a:latin typeface="Arial"/>
+                        </a:defRPr>
+                      </a:pPr>
+                      <a:r>
+                        <a:t>Tool</a:t>
+                      </a:r>
+                    </a:p>
+                  </a:txBody>
+                  <a:tcPr marL="82296" marR="82296" marT="64008" marB="64008">
+                    <a:solidFill>
+                      <a:srgbClr val="FFFFFF"/>
+                    </a:solidFill>
+                  </a:tcPr>
+                </a:tc>
+                <a:tc>
+                  <a:txBody>
+                    <a:bodyPr wrap="none"/>
+                    <a:lstStyle/>
+                    <a:p>
+                      <a:pPr>
+                        <a:lnSpc>
+                          <a:spcPts val="1600"/>
+                        </a:lnSpc>
+                        <a:spcAft>
+                          <a:spcPts val="0"/>
+                        </a:spcAft>
+                        <a:defRPr sz="1200" b="0">
+                          <a:solidFill>
+                            <a:srgbClr val="21243A"/>
+                          </a:solidFill>
+                          <a:latin typeface="Arial"/>
+                        </a:defRPr>
+                      </a:pPr>
+                      <a:r>
+                        <a:t>SDA Vision 0.1.0</a:t>
+                      </a:r>
+                    </a:p>
+                  </a:txBody>
+                  <a:tcPr marL="82296" marR="82296" marT="64008" marB="64008">
+                    <a:solidFill>
+                      <a:srgbClr val="FFFFFF"/>
+                    </a:solidFill>
+                  </a:tcPr>
+                </a:tc>
+              </a:tr>
+            </a:tbl>
+          </a:graphicData>
+        </a:graphic>
+      </p:graphicFrame>
+      <p:graphicFrame>
+        <p:nvGraphicFramePr>
+          <p:cNvPr id="11" name="Table 10"/>
+          <p:cNvGraphicFramePr>
+            <a:graphicFrameLocks noGrp="1"/>
+          </p:cNvGraphicFramePr>
+          <p:nvPr/>
+        </p:nvGraphicFramePr>
+        <p:xfrm>
+          <a:off x="365760" y="3098800"/>
+          <a:ext cx="8412479" cy="349504"/>
+        </p:xfrm>
+        <a:graphic>
+          <a:graphicData uri="http://schemas.openxmlformats.org/drawingml/2006/table">
+            <a:tbl>
+              <a:tblPr firstRow="1" bandRow="1">
+                <a:tableStyleId>{5C22544A-7EE6-4342-B048-85BDC9FD1C3A}</a:tableStyleId>
+              </a:tblPr>
+              <a:tblGrid>
+                <a:gridCol w="2271369"/>
+                <a:gridCol w="6141110"/>
+              </a:tblGrid>
+              <a:tr h="349504">
+                <a:tc>
+                  <a:txBody>
+                    <a:bodyPr wrap="none"/>
+                    <a:lstStyle/>
+                    <a:p>
+                      <a:pPr>
+                        <a:lnSpc>
+                          <a:spcPts val="1600"/>
+                        </a:lnSpc>
+                        <a:spcAft>
+                          <a:spcPts val="0"/>
+                        </a:spcAft>
+                        <a:defRPr sz="1200" b="0">
+                          <a:solidFill>
+                            <a:srgbClr val="21243A"/>
+                          </a:solidFill>
+                          <a:latin typeface="Arial"/>
+                        </a:defRPr>
+                      </a:pPr>
+                      <a:r>
+                        <a:t>Models</a:t>
+                      </a:r>
+                    </a:p>
+                  </a:txBody>
+                  <a:tcPr marL="82296" marR="82296" marT="64008" marB="64008">
+                    <a:solidFill>
+                      <a:srgbClr val="F1F7F7"/>
+                    </a:solidFill>
+                  </a:tcPr>
+                </a:tc>
+                <a:tc>
+                  <a:txBody>
+                    <a:bodyPr wrap="none"/>
+                    <a:lstStyle/>
+                    <a:p>
+                      <a:pPr>
+                        <a:lnSpc>
+                          <a:spcPts val="1600"/>
+                        </a:lnSpc>
+                        <a:spcAft>
+                          <a:spcPts val="0"/>
+                        </a:spcAft>
+                        <a:defRPr sz="1200" b="0">
+                          <a:solidFill>
+                            <a:srgbClr val="21243A"/>
+                          </a:solidFill>
+                          <a:latin typeface="Arial"/>
+                        </a:defRPr>
+                      </a:pPr>
+                      <a:r>
+                        <a:t>claude-opus-5-5, gemini-3.8-flash, gpt-6-astra</a:t>
+                      </a:r>
+                    </a:p>
+                  </a:txBody>
+                  <a:tcPr marL="82296" marR="82296" marT="64008" marB="64008">
+                    <a:solidFill>
+                      <a:srgbClr val="F1F7F7"/>
+                    </a:solidFill>
+                  </a:tcPr>
+                </a:tc>
+              </a:tr>
+            </a:tbl>
+          </a:graphicData>
+        </a:graphic>
+      </p:graphicFrame>
+      <p:graphicFrame>
+        <p:nvGraphicFramePr>
+          <p:cNvPr id="12" name="Table 11"/>
+          <p:cNvGraphicFramePr>
+            <a:graphicFrameLocks noGrp="1"/>
+          </p:cNvGraphicFramePr>
+          <p:nvPr/>
+        </p:nvGraphicFramePr>
+        <p:xfrm>
+          <a:off x="365760" y="3448304"/>
+          <a:ext cx="8412479" cy="349504"/>
+        </p:xfrm>
+        <a:graphic>
+          <a:graphicData uri="http://schemas.openxmlformats.org/drawingml/2006/table">
+            <a:tbl>
+              <a:tblPr firstRow="1" bandRow="1">
+                <a:tableStyleId>{5C22544A-7EE6-4342-B048-85BDC9FD1C3A}</a:tableStyleId>
+              </a:tblPr>
+              <a:tblGrid>
+                <a:gridCol w="2271369"/>
+                <a:gridCol w="6141110"/>
+              </a:tblGrid>
+              <a:tr h="349504">
+                <a:tc>
+                  <a:txBody>
+                    <a:bodyPr wrap="none"/>
+                    <a:lstStyle/>
+                    <a:p>
+                      <a:pPr>
+                        <a:lnSpc>
+                          <a:spcPts val="1600"/>
+                        </a:lnSpc>
+                        <a:spcAft>
+                          <a:spcPts val="0"/>
+                        </a:spcAft>
+                        <a:defRPr sz="1200" b="0">
+                          <a:solidFill>
+                            <a:srgbClr val="21243A"/>
+                          </a:solidFill>
+                          <a:latin typeface="Arial"/>
+                        </a:defRPr>
+                      </a:pPr>
+                      <a:r>
+                        <a:t>Method version</a:t>
+                      </a:r>
+                    </a:p>
+                  </a:txBody>
+                  <a:tcPr marL="82296" marR="82296" marT="64008" marB="64008">
+                    <a:solidFill>
+                      <a:srgbClr val="FFFFFF"/>
+                    </a:solidFill>
+                  </a:tcPr>
+                </a:tc>
+                <a:tc>
+                  <a:txBody>
+                    <a:bodyPr wrap="none"/>
+                    <a:lstStyle/>
+                    <a:p>
+                      <a:pPr>
+                        <a:lnSpc>
+                          <a:spcPts val="1600"/>
+                        </a:lnSpc>
+                        <a:spcAft>
+                          <a:spcPts val="0"/>
+                        </a:spcAft>
+                        <a:defRPr sz="1200" b="0">
+                          <a:solidFill>
+                            <a:srgbClr val="21243A"/>
+                          </a:solidFill>
+                          <a:latin typeface="Arial"/>
+                        </a:defRPr>
+                      </a:pPr>
+                      <a:r>
+                        <a:t>pdf-preparation-2026-09-26.1</a:t>
+                      </a:r>
+                    </a:p>
+                  </a:txBody>
+                  <a:tcPr marL="82296" marR="82296" marT="64008" marB="64008">
+                    <a:solidFill>
+                      <a:srgbClr val="FFFFFF"/>
+                    </a:solidFill>
+                  </a:tcPr>
+                </a:tc>
+              </a:tr>
+            </a:tbl>
+          </a:graphicData>
+        </a:graphic>
+      </p:graphicFrame>
+      <p:graphicFrame>
+        <p:nvGraphicFramePr>
+          <p:cNvPr id="13" name="Table 12"/>
+          <p:cNvGraphicFramePr>
+            <a:graphicFrameLocks noGrp="1"/>
+          </p:cNvGraphicFramePr>
+          <p:nvPr/>
+        </p:nvGraphicFramePr>
+        <p:xfrm>
+          <a:off x="365760" y="3797808"/>
+          <a:ext cx="8412479" cy="349504"/>
+        </p:xfrm>
+        <a:graphic>
+          <a:graphicData uri="http://schemas.openxmlformats.org/drawingml/2006/table">
+            <a:tbl>
+              <a:tblPr firstRow="1" bandRow="1">
+                <a:tableStyleId>{5C22544A-7EE6-4342-B048-85BDC9FD1C3A}</a:tableStyleId>
+              </a:tblPr>
+              <a:tblGrid>
+                <a:gridCol w="2271369"/>
+                <a:gridCol w="6141110"/>
+              </a:tblGrid>
+              <a:tr h="349504">
+                <a:tc>
+                  <a:txBody>
+                    <a:bodyPr wrap="none"/>
+                    <a:lstStyle/>
+                    <a:p>
+                      <a:pPr>
+                        <a:lnSpc>
+                          <a:spcPts val="1600"/>
+                        </a:lnSpc>
+                        <a:spcAft>
+                          <a:spcPts val="0"/>
+                        </a:spcAft>
+                        <a:defRPr sz="1200" b="0">
+                          <a:solidFill>
+                            <a:srgbClr val="21243A"/>
+                          </a:solidFill>
+                          <a:latin typeface="Arial"/>
+                        </a:defRPr>
+                      </a:pPr>
+                      <a:r>
+                        <a:t>Analysis lens</a:t>
+                      </a:r>
+                    </a:p>
+                  </a:txBody>
+                  <a:tcPr marL="82296" marR="82296" marT="64008" marB="64008">
+                    <a:solidFill>
+                      <a:srgbClr val="F1F7F7"/>
+                    </a:solidFill>
+                  </a:tcPr>
+                </a:tc>
+                <a:tc>
+                  <a:txBody>
+                    <a:bodyPr wrap="none"/>
+                    <a:lstStyle/>
+                    <a:p>
+                      <a:pPr>
+                        <a:lnSpc>
+                          <a:spcPts val="1600"/>
+                        </a:lnSpc>
+                        <a:spcAft>
+                          <a:spcPts val="0"/>
+                        </a:spcAft>
+                        <a:defRPr sz="1200" b="0">
+                          <a:solidFill>
+                            <a:srgbClr val="21243A"/>
+                          </a:solidFill>
+                          <a:latin typeface="Arial"/>
+                        </a:defRPr>
+                      </a:pPr>
+                      <a:r>
+                        <a:t>general</a:t>
+                      </a:r>
+                    </a:p>
+                  </a:txBody>
+                  <a:tcPr marL="82296" marR="82296" marT="64008" marB="64008">
+                    <a:solidFill>
+                      <a:srgbClr val="F1F7F7"/>
+                    </a:solidFill>
+                  </a:tcPr>
+                </a:tc>
+              </a:tr>
+            </a:tbl>
+          </a:graphicData>
+        </a:graphic>
+      </p:graphicFrame>
+      <p:graphicFrame>
+        <p:nvGraphicFramePr>
+          <p:cNvPr id="14" name="Table 13"/>
+          <p:cNvGraphicFramePr>
+            <a:graphicFrameLocks noGrp="1"/>
+          </p:cNvGraphicFramePr>
+          <p:nvPr/>
+        </p:nvGraphicFramePr>
+        <p:xfrm>
+          <a:off x="365760" y="4147312"/>
+          <a:ext cx="8412479" cy="349504"/>
+        </p:xfrm>
+        <a:graphic>
+          <a:graphicData uri="http://schemas.openxmlformats.org/drawingml/2006/table">
+            <a:tbl>
+              <a:tblPr firstRow="1" bandRow="1">
+                <a:tableStyleId>{5C22544A-7EE6-4342-B048-85BDC9FD1C3A}</a:tableStyleId>
+              </a:tblPr>
+              <a:tblGrid>
+                <a:gridCol w="2271369"/>
+                <a:gridCol w="6141110"/>
+              </a:tblGrid>
+              <a:tr h="349504">
+                <a:tc>
+                  <a:txBody>
+                    <a:bodyPr wrap="none"/>
+                    <a:lstStyle/>
+                    <a:p>
+                      <a:pPr>
+                        <a:lnSpc>
+                          <a:spcPts val="1600"/>
+                        </a:lnSpc>
+                        <a:spcAft>
+                          <a:spcPts val="0"/>
+                        </a:spcAft>
+                        <a:defRPr sz="1200" b="0">
+                          <a:solidFill>
+                            <a:srgbClr val="21243A"/>
+                          </a:solidFill>
+                          <a:latin typeface="Arial"/>
+                        </a:defRPr>
+                      </a:pPr>
+                      <a:r>
+                        <a:t>Original SHA-256</a:t>
+                      </a:r>
+                    </a:p>
+                  </a:txBody>
+                  <a:tcPr marL="82296" marR="82296" marT="64008" marB="64008">
+                    <a:solidFill>
+                      <a:srgbClr val="FFFFFF"/>
+                    </a:solidFill>
+                  </a:tcPr>
+                </a:tc>
+                <a:tc>
+                  <a:txBody>
+                    <a:bodyPr wrap="none"/>
+                    <a:lstStyle/>
+                    <a:p>
+                      <a:pPr>
+                        <a:lnSpc>
+                          <a:spcPts val="1600"/>
+                        </a:lnSpc>
+                        <a:spcAft>
+                          <a:spcPts val="0"/>
+                        </a:spcAft>
+                        <a:defRPr sz="1200" b="0">
+                          <a:solidFill>
+                            <a:srgbClr val="21243A"/>
+                          </a:solidFill>
+                          <a:latin typeface="Arial"/>
+                        </a:defRPr>
+                      </a:pPr>
+                      <a:r>
+                        <a:t>58663a6a9e4b634bdb703ead0aaa7cd6dce7fbf97e70c3c1cc61b3311b94c0b4</a:t>
+                      </a:r>
+                    </a:p>
+                  </a:txBody>
+                  <a:tcPr marL="82296" marR="82296" marT="64008" marB="64008">
+                    <a:solidFill>
+                      <a:srgbClr val="FFFFFF"/>
+                    </a:solidFill>
+                  </a:tcPr>
+                </a:tc>
+              </a:tr>
+            </a:tbl>
+          </a:graphicData>
+        </a:graphic>
+      </p:graphicFrame>
+      <p:graphicFrame>
+        <p:nvGraphicFramePr>
+          <p:cNvPr id="15" name="Table 14"/>
+          <p:cNvGraphicFramePr>
+            <a:graphicFrameLocks noGrp="1"/>
+          </p:cNvGraphicFramePr>
+          <p:nvPr/>
+        </p:nvGraphicFramePr>
+        <p:xfrm>
+          <a:off x="365760" y="4496816"/>
+          <a:ext cx="8412479" cy="349504"/>
+        </p:xfrm>
+        <a:graphic>
+          <a:graphicData uri="http://schemas.openxmlformats.org/drawingml/2006/table">
+            <a:tbl>
+              <a:tblPr firstRow="1" bandRow="1">
+                <a:tableStyleId>{5C22544A-7EE6-4342-B048-85BDC9FD1C3A}</a:tableStyleId>
+              </a:tblPr>
+              <a:tblGrid>
+                <a:gridCol w="2271369"/>
+                <a:gridCol w="6141110"/>
+              </a:tblGrid>
+              <a:tr h="349504">
+                <a:tc>
+                  <a:txBody>
+                    <a:bodyPr wrap="none"/>
+                    <a:lstStyle/>
+                    <a:p>
+                      <a:pPr>
+                        <a:lnSpc>
+                          <a:spcPts val="1600"/>
+                        </a:lnSpc>
+                        <a:spcAft>
+                          <a:spcPts val="0"/>
+                        </a:spcAft>
+                        <a:defRPr sz="1200" b="0">
+                          <a:solidFill>
+                            <a:srgbClr val="21243A"/>
+                          </a:solidFill>
+                          <a:latin typeface="Arial"/>
+                        </a:defRPr>
+                      </a:pPr>
+                      <a:r>
+                        <a:t>Ingestion note 1</a:t>
+                      </a:r>
+                    </a:p>
+                  </a:txBody>
+                  <a:tcPr marL="82296" marR="82296" marT="64008" marB="64008">
+                    <a:solidFill>
+                      <a:srgbClr val="F1F7F7"/>
+                    </a:solidFill>
+                  </a:tcPr>
+                </a:tc>
+                <a:tc>
+                  <a:txBody>
+                    <a:bodyPr wrap="none"/>
+                    <a:lstStyle/>
+                    <a:p>
+                      <a:pPr>
+                        <a:lnSpc>
+                          <a:spcPts val="1600"/>
+                        </a:lnSpc>
+                        <a:spcAft>
+                          <a:spcPts val="0"/>
+                        </a:spcAft>
+                        <a:defRPr sz="1200" b="0">
+                          <a:solidFill>
+                            <a:srgbClr val="21243A"/>
+                          </a:solidFill>
+                          <a:latin typeface="Arial"/>
+                        </a:defRPr>
+                      </a:pPr>
+                      <a:r>
+                        <a:t>Transcoded to 5737 KB mono 16 kHz (≤1800s).</a:t>
+                      </a:r>
+                    </a:p>
+                  </a:txBody>
+                  <a:tcPr marL="82296" marR="82296" marT="64008" marB="64008">
+                    <a:solidFill>
+                      <a:srgbClr val="F1F7F7"/>
+                    </a:solidFill>
+                  </a:tcPr>
+                </a:tc>
+              </a:tr>
+            </a:tbl>
+          </a:graphicData>
+        </a:graphic>
+      </p:graphicFrame>
+      <p:graphicFrame>
+        <p:nvGraphicFramePr>
+          <p:cNvPr id="16" name="Table 15"/>
+          <p:cNvGraphicFramePr>
+            <a:graphicFrameLocks noGrp="1"/>
+          </p:cNvGraphicFramePr>
+          <p:nvPr/>
+        </p:nvGraphicFramePr>
+        <p:xfrm>
+          <a:off x="365760" y="4846320"/>
+          <a:ext cx="8412479" cy="349504"/>
+        </p:xfrm>
+        <a:graphic>
+          <a:graphicData uri="http://schemas.openxmlformats.org/drawingml/2006/table">
+            <a:tbl>
+              <a:tblPr firstRow="1" bandRow="1">
+                <a:tableStyleId>{5C22544A-7EE6-4342-B048-85BDC9FD1C3A}</a:tableStyleId>
+              </a:tblPr>
+              <a:tblGrid>
+                <a:gridCol w="2271369"/>
+                <a:gridCol w="6141110"/>
+              </a:tblGrid>
+              <a:tr h="349504">
+                <a:tc>
+                  <a:txBody>
+                    <a:bodyPr wrap="none"/>
+                    <a:lstStyle/>
+                    <a:p>
+                      <a:pPr>
+                        <a:lnSpc>
+                          <a:spcPts val="1600"/>
+                        </a:lnSpc>
+                        <a:spcAft>
+                          <a:spcPts val="0"/>
+                        </a:spcAft>
+                        <a:defRPr sz="1200" b="0">
+                          <a:solidFill>
+                            <a:srgbClr val="21243A"/>
+                          </a:solidFill>
+                          <a:latin typeface="Arial"/>
+                        </a:defRPr>
+                      </a:pPr>
+                      <a:r>
+                        <a:t>Ingestion note 2</a:t>
+                      </a:r>
+                    </a:p>
+                  </a:txBody>
+                  <a:tcPr marL="82296" marR="82296" marT="64008" marB="64008">
+                    <a:solidFill>
+                      <a:srgbClr val="FFFFFF"/>
+                    </a:solidFill>
+                  </a:tcPr>
+                </a:tc>
+                <a:tc>
+                  <a:txBody>
+                    <a:bodyPr wrap="none"/>
+                    <a:lstStyle/>
+                    <a:p>
+                      <a:pPr>
+                        <a:lnSpc>
+                          <a:spcPts val="1600"/>
+                        </a:lnSpc>
+                        <a:spcAft>
+                          <a:spcPts val="0"/>
+                        </a:spcAft>
+                        <a:defRPr sz="1200" b="0">
+                          <a:solidFill>
+                            <a:srgbClr val="21243A"/>
+                          </a:solidFill>
+                          <a:latin typeface="Arial"/>
+                        </a:defRPr>
+                      </a:pPr>
+                      <a:r>
+                        <a:t>Transcribed with Gemini.</a:t>
+                      </a:r>
+                    </a:p>
+                  </a:txBody>
+                  <a:tcPr marL="82296" marR="82296" marT="64008" marB="64008">
+                    <a:solidFill>
+                      <a:srgbClr val="FFFFFF"/>
+                    </a:solidFill>
+                  </a:tcPr>
+                </a:tc>
+              </a:tr>
+            </a:tbl>
+          </a:graphicData>
+        </a:graphic>
+      </p:graphicFrame>
+      <p:graphicFrame>
+        <p:nvGraphicFramePr>
+          <p:cNvPr id="17" name="Table 16"/>
+          <p:cNvGraphicFramePr>
+            <a:graphicFrameLocks noGrp="1"/>
+          </p:cNvGraphicFramePr>
+          <p:nvPr/>
+        </p:nvGraphicFramePr>
+        <p:xfrm>
+          <a:off x="365760" y="5195824"/>
+          <a:ext cx="8412479" cy="755904"/>
+        </p:xfrm>
+        <a:graphic>
+          <a:graphicData uri="http://schemas.openxmlformats.org/drawingml/2006/table">
+            <a:tbl>
+              <a:tblPr firstRow="1" bandRow="1">
+                <a:tableStyleId>{5C22544A-7EE6-4342-B048-85BDC9FD1C3A}</a:tableStyleId>
+              </a:tblPr>
+              <a:tblGrid>
+                <a:gridCol w="2271369"/>
+                <a:gridCol w="6141110"/>
+              </a:tblGrid>
+              <a:tr h="755904">
+                <a:tc>
+                  <a:txBody>
+                    <a:bodyPr wrap="none"/>
+                    <a:lstStyle/>
+                    <a:p>
+                      <a:pPr>
+                        <a:lnSpc>
+                          <a:spcPts val="1600"/>
+                        </a:lnSpc>
+                        <a:spcAft>
+                          <a:spcPts val="0"/>
+                        </a:spcAft>
+                        <a:defRPr sz="1200" b="0">
+                          <a:solidFill>
+                            <a:srgbClr val="21243A"/>
+                          </a:solidFill>
+                          <a:latin typeface="Arial"/>
+                        </a:defRPr>
+                      </a:pPr>
+                      <a:r>
+                        <a:t>Ingestion note 3</a:t>
+                      </a:r>
+                    </a:p>
+                  </a:txBody>
+                  <a:tcPr marL="82296" marR="82296" marT="64008" marB="64008">
+                    <a:solidFill>
+                      <a:srgbClr val="F1F7F7"/>
+                    </a:solidFill>
+                  </a:tcPr>
+                </a:tc>
+                <a:tc>
+                  <a:txBody>
+                    <a:bodyPr wrap="none"/>
+                    <a:lstStyle/>
+                    <a:p>
+                      <a:pPr>
+                        <a:lnSpc>
+                          <a:spcPts val="1600"/>
+                        </a:lnSpc>
+                        <a:spcAft>
+                          <a:spcPts val="0"/>
+                        </a:spcAft>
+                        <a:defRPr sz="1200" b="0">
+                          <a:solidFill>
+                            <a:srgbClr val="21243A"/>
+                          </a:solidFill>
+                          <a:latin typeface="Arial"/>
+                        </a:defRPr>
+                      </a:pPr>
+                      <a:r>
+                        <a:t>Standalone-audio content assessment covers the transcript. AI-origin detection</a:t>
+                      </a:r>
+                    </a:p>
+                    <a:p>
+                      <a:pPr>
+                        <a:lnSpc>
+                          <a:spcPts val="1600"/>
+                        </a:lnSpc>
+                        <a:spcAft>
+                          <a:spcPts val="0"/>
+                        </a:spcAft>
+                        <a:defRPr sz="1200" b="0">
+                          <a:solidFill>
+                            <a:srgbClr val="21243A"/>
+                          </a:solidFill>
+                          <a:latin typeface="Arial"/>
+                        </a:defRPr>
+                      </a:pPr>
+                      <a:r>
+                        <a:t>from sound is outside this assessment. Original-file C2PA was checked before</a:t>
+                      </a:r>
+                    </a:p>
+                    <a:p>
+                      <a:pPr>
+                        <a:lnSpc>
+                          <a:spcPts val="1600"/>
+                        </a:lnSpc>
+                        <a:spcAft>
+                          <a:spcPts val="0"/>
+                        </a:spcAft>
+                        <a:defRPr sz="1200" b="0">
+                          <a:solidFill>
+                            <a:srgbClr val="21243A"/>
+                          </a:solidFill>
+                          <a:latin typeface="Arial"/>
+                        </a:defRPr>
+                      </a:pPr>
+                      <a:r>
+                        <a:t>transcription and is reported separately.</a:t>
+                      </a:r>
+                    </a:p>
+                  </a:txBody>
+                  <a:tcPr marL="82296" marR="82296" marT="64008" marB="64008">
+                    <a:solidFill>
+                      <a:srgbClr val="F1F7F7"/>
+                    </a:solidFill>
+                  </a:tcPr>
+                </a:tc>
+              </a:tr>
+            </a:tbl>
+          </a:graphicData>
+        </a:graphic>
+      </p:graphicFrame>
+    </p:spTree>
+  </p:cSld>
+  <p:clrMapOvr>
+    <a:masterClrMapping/>
+  </p:clrMapOvr>
+</p:sld>
+</file>
+
+<file path=ppt/slides/slide24.xml><?xml version="1.0" encoding="utf-8"?>
+<p:sld xmlns:a="http://schemas.openxmlformats.org/drawingml/2006/main" xmlns:p="http://schemas.openxmlformats.org/presentationml/2006/main" xmlns:r="http://schemas.openxmlformats.org/officeDocument/2006/relationships">
+  <p:cSld>
+    <p:spTree>
+      <p:nvGrpSpPr>
+        <p:cNvPr id="1" name=""/>
+        <p:cNvGrpSpPr/>
+        <p:nvPr/>
+      </p:nvGrpSpPr>
+      <p:grpSpPr/>
+      <p:sp>
+        <p:nvSpPr>
+          <p:cNvPr id="2" name="TextBox 1"/>
+          <p:cNvSpPr txBox="1"/>
+          <p:nvPr/>
+        </p:nvSpPr>
+        <p:spPr>
+          <a:xfrm>
+            <a:off x="365760" y="219456"/>
+            <a:ext cx="8412480" cy="228600"/>
+          </a:xfrm>
+          <a:prstGeom prst="rect">
+            <a:avLst/>
+          </a:prstGeom>
+          <a:noFill/>
+        </p:spPr>
+        <p:txBody>
+          <a:bodyPr wrap="square" lIns="0" rIns="0" tIns="0" bIns="0">
+            <a:spAutoFit/>
+          </a:bodyPr>
+          <a:lstStyle/>
+          <a:p>
+            <a:pPr>
+              <a:lnSpc>
+                <a:spcPct val="115000"/>
+              </a:lnSpc>
+              <a:spcAft>
+                <a:spcPts val="0"/>
+              </a:spcAft>
+              <a:defRPr sz="1100" b="1">
+                <a:solidFill>
+                  <a:srgbClr val="C5006A"/>
+                </a:solidFill>
+                <a:latin typeface="Arial"/>
+              </a:defRPr>
+            </a:pPr>
+            <a:r>
+              <a:t>SDA VISION / RESEARCH REPORT</a:t>
+            </a:r>
+          </a:p>
+        </p:txBody>
+      </p:sp>
+      <p:sp>
+        <p:nvSpPr>
+          <p:cNvPr id="3" name="TextBox 2"/>
+          <p:cNvSpPr txBox="1"/>
+          <p:nvPr/>
+        </p:nvSpPr>
+        <p:spPr>
+          <a:xfrm>
+            <a:off x="365760" y="658368"/>
+            <a:ext cx="8412480" cy="612648"/>
+          </a:xfrm>
+          <a:prstGeom prst="rect">
+            <a:avLst/>
+          </a:prstGeom>
+          <a:noFill/>
+        </p:spPr>
+        <p:txBody>
+          <a:bodyPr wrap="square" lIns="0" rIns="0" tIns="0" bIns="0">
+            <a:spAutoFit/>
+          </a:bodyPr>
+          <a:lstStyle/>
+          <a:p>
+            <a:pPr>
+              <a:lnSpc>
+                <a:spcPct val="115000"/>
+              </a:lnSpc>
+              <a:spcAft>
+                <a:spcPts val="0"/>
+              </a:spcAft>
+              <a:defRPr sz="2200" b="1">
+                <a:solidFill>
+                  <a:srgbClr val="21243A"/>
+                </a:solidFill>
+                <a:latin typeface="Arial"/>
+              </a:defRPr>
+            </a:pPr>
+            <a:r>
+              <a:t>File and analysis record (continued)</a:t>
+            </a:r>
+          </a:p>
+        </p:txBody>
+      </p:sp>
+      <p:sp>
+        <p:nvSpPr>
+          <p:cNvPr id="4" name="TextBox 3"/>
+          <p:cNvSpPr txBox="1"/>
+          <p:nvPr/>
+        </p:nvSpPr>
+        <p:spPr>
+          <a:xfrm>
+            <a:off x="365760" y="6291072"/>
+            <a:ext cx="8001000" cy="365760"/>
+          </a:xfrm>
+          <a:prstGeom prst="rect">
+            <a:avLst/>
+          </a:prstGeom>
+          <a:noFill/>
+        </p:spPr>
+        <p:txBody>
+          <a:bodyPr wrap="square" lIns="0" rIns="0" tIns="0" bIns="0">
+            <a:spAutoFit/>
+          </a:bodyPr>
+          <a:lstStyle/>
+          <a:p>
+            <a:pPr>
+              <a:lnSpc>
+                <a:spcPct val="115000"/>
+              </a:lnSpc>
+              <a:spcAft>
+                <a:spcPts val="0"/>
+              </a:spcAft>
+              <a:defRPr sz="800" b="0">
+                <a:solidFill>
+                  <a:srgbClr val="545B6D"/>
+                </a:solidFill>
+                <a:latin typeface="Arial"/>
+              </a:defRPr>
+            </a:pPr>
+            <a:r>
+              <a:t>Research assessment. Ratings are not calibrated probabilities. Acoustic AI-origin detection: outside scope.</a:t>
+            </a:r>
+          </a:p>
+        </p:txBody>
+      </p:sp>
+      <p:sp>
+        <p:nvSpPr>
+          <p:cNvPr id="5" name="TextBox 4"/>
+          <p:cNvSpPr txBox="1"/>
+          <p:nvPr/>
+        </p:nvSpPr>
+        <p:spPr>
+          <a:xfrm>
+            <a:off x="8394192" y="6318504"/>
+            <a:ext cx="365760" cy="228600"/>
+          </a:xfrm>
+          <a:prstGeom prst="rect">
+            <a:avLst/>
+          </a:prstGeom>
+          <a:noFill/>
+        </p:spPr>
+        <p:txBody>
+          <a:bodyPr wrap="square" lIns="0" rIns="0" tIns="0" bIns="0">
+            <a:spAutoFit/>
+          </a:bodyPr>
+          <a:lstStyle/>
+          <a:p>
+            <a:pPr>
+              <a:lnSpc>
+                <a:spcPct val="115000"/>
+              </a:lnSpc>
+              <a:spcAft>
+                <a:spcPts val="0"/>
+              </a:spcAft>
+              <a:defRPr sz="900" b="0">
+                <a:solidFill>
+                  <a:srgbClr val="545B6D"/>
+                </a:solidFill>
+                <a:latin typeface="Arial"/>
+              </a:defRPr>
+            </a:pPr>
+            <a:r>
+              <a:t>24</a:t>
             </a:r>
           </a:p>
         </p:txBody>

--- a/site/showcase/exports/podcast.pptx
+++ b/site/showcase/exports/podcast.pptx
@@ -29,6 +29,7 @@
     <p:sldId id="277" r:id="rId29"/>
     <p:sldId id="278" r:id="rId30"/>
     <p:sldId id="279" r:id="rId31"/>
+    <p:sldId id="280" r:id="rId32"/>
   </p:sldIdLst>
   <p:sldSz cx="9144000" cy="6858000" type="screen4x3"/>
   <p:notesSz cx="6858000" cy="9144000"/>
@@ -2045,82 +2046,27 @@
           </a:p>
           <a:p>
             <a:r>
-              <a:t>File and analysis record</a:t>
-            </a:r>
-          </a:p>
-          <a:p>
-            <a:r>
-              <a:t>File | podcast.m4a</a:t>
-            </a:r>
-          </a:p>
-          <a:p>
-            <a:r>
-              <a:t>Analysis ID | 7e1a6917-52a1-453d-8dda-9c4842232f31</a:t>
-            </a:r>
-          </a:p>
-          <a:p>
-            <a:r>
-              <a:t>Generated | 2026-09-26T22:31:07+00:00</a:t>
-            </a:r>
-          </a:p>
-          <a:p>
-            <a:r>
-              <a:t>Tool | SDA Vision 0.1.0</a:t>
-            </a:r>
-          </a:p>
-          <a:p>
-            <a:r>
-              <a:t>Models | claude-opus-5-5, gemini-3.8-flash, gpt-6-astra</a:t>
-            </a:r>
-          </a:p>
-          <a:p>
-            <a:r>
-              <a:t>Method version | pdf-preparation-2026-09-26.1</a:t>
-            </a:r>
-          </a:p>
-          <a:p>
-            <a:r>
-              <a:t>Analysis lens | general</a:t>
-            </a:r>
-          </a:p>
-          <a:p>
-            <a:r>
-              <a:t>Original SHA-256 | 58663a6a9e4b634bdb703ead0aaa7cd6dce7fbf97e70c3c1cc61b3311b94c0b4</a:t>
-            </a:r>
-          </a:p>
-          <a:p>
-            <a:r>
-              <a:t>Ingestion note 1 | Transcoded to 5737 KB mono 16 kHz (≤1800s).</a:t>
-            </a:r>
-          </a:p>
-          <a:p>
-            <a:r>
-              <a:t>Ingestion note 2 | Transcribed with Gemini.</a:t>
-            </a:r>
-          </a:p>
-          <a:p>
-            <a:r>
-              <a:t>Ingestion note 3 | Standalone-audio content assessment covers the transcript. AI-origin detection from sound is outside this assessment. Original-file C2PA was checked before transcription and is reported separately.</a:t>
-            </a:r>
-          </a:p>
-          <a:p>
-            <a:r>
-              <a:t>Ingestion note 4 | Audio tracks inspected locally. Soundtrack uploads require a separate optional check; AI-origin detection from sound is outside this workflow.</a:t>
-            </a:r>
-          </a:p>
-          <a:p>
-            <a:r>
-              <a:t>Ingestion note 5 | Fresh provider replies acquired for eleven-examples-refresh-20260926-r1; report assembled locally from the saved responses without further API calls.</a:t>
-            </a:r>
-          </a:p>
-          <a:p>
-            <a:r>
-              <a:t>Ingestion note 6 | Transcript analysis used the first 12000 characters of a fresh 25985-character transcription; this report retains its first 4000 characters. Sound-origin detection is outside this check.</a:t>
-            </a:r>
-          </a:p>
-          <a:p>
-            <a:r>
-              <a:t>Ingestion note 7 | Provider latency values are restored from the acquisition receipts (maximum sampled-frame latency per provider); raw replies and assessment results are unchanged by this bookkeeping step.</a:t>
+              <a:t>Cite this analysis</a:t>
+            </a:r>
+          </a:p>
+          <a:p>
+            <a:r>
+              <a:t>Software (Harvard) | Martin, S. (2026) SDA Vision: Synthetic-media Discourse Analysis (version 0.1.0) [Computer software]. Manchester Metropolitan University. Available at: https://sdavision.io/</a:t>
+            </a:r>
+          </a:p>
+          <a:p>
+            <a:r>
+              <a:t>Software creator | Dr Sam Martin, Smart Data Research UK (UKRI) Fellow, Manchester Metropolitan University (MMU). ORCID: https://orcid.org/0000-0002-4466-8374.</a:t>
+            </a:r>
+          </a:p>
+          <a:p>
+            <a:r>
+              <a:t>Funding acknowledgement | This work was supported by Smart Data Research UK, a UKRI investment; Grant number UKRI4010.</a:t>
+            </a:r>
+          </a:p>
+          <a:p>
+            <a:r>
+              <a:t>Analysis record | File: podcast.m4a; media type: audio; recorded at: 2026-09-26T22:31:07+00:00; models: claude-opus-5-5, gemini-3.8-flash, gpt-6-astra.</a:t>
             </a:r>
           </a:p>
         </p:txBody>
@@ -2146,6 +2092,156 @@
 </file>
 
 <file path=ppt/notesSlides/notesSlide24.xml><?xml version="1.0" encoding="utf-8"?>
+<p:notes xmlns:a="http://schemas.openxmlformats.org/drawingml/2006/main" xmlns:p="http://schemas.openxmlformats.org/presentationml/2006/main" xmlns:r="http://schemas.openxmlformats.org/officeDocument/2006/relationships">
+  <p:cSld>
+    <p:spTree>
+      <p:nvGrpSpPr>
+        <p:cNvPr id="1" name=""/>
+        <p:cNvGrpSpPr/>
+        <p:nvPr/>
+      </p:nvGrpSpPr>
+      <p:grpSpPr>
+        <a:xfrm>
+          <a:off x="0" y="0"/>
+          <a:ext cx="0" cy="0"/>
+          <a:chOff x="0" y="0"/>
+          <a:chExt cx="0" cy="0"/>
+        </a:xfrm>
+      </p:grpSpPr>
+      <p:sp>
+        <p:nvSpPr>
+          <p:cNvPr id="2" name="Slide Image Placeholder 1"/>
+          <p:cNvSpPr>
+            <a:spLocks noGrp="1"/>
+          </p:cNvSpPr>
+          <p:nvPr>
+            <p:ph type="sldImg" idx="2"/>
+          </p:nvPr>
+        </p:nvSpPr>
+        <p:spPr/>
+      </p:sp>
+      <p:sp>
+        <p:nvSpPr>
+          <p:cNvPr id="3" name="Notes Placeholder 2"/>
+          <p:cNvSpPr>
+            <a:spLocks noGrp="1"/>
+          </p:cNvSpPr>
+          <p:nvPr>
+            <p:ph type="body" idx="3" sz="quarter"/>
+          </p:nvPr>
+        </p:nvSpPr>
+        <p:spPr/>
+        <p:txBody>
+          <a:bodyPr/>
+          <a:lstStyle/>
+          <a:p>
+            <a:r>
+              <a:t>podcast.m4a</a:t>
+            </a:r>
+          </a:p>
+          <a:p>
+            <a:r>
+              <a:t>File and analysis record</a:t>
+            </a:r>
+          </a:p>
+          <a:p>
+            <a:r>
+              <a:t>File | podcast.m4a</a:t>
+            </a:r>
+          </a:p>
+          <a:p>
+            <a:r>
+              <a:t>Analysis ID | 7e1a6917-52a1-453d-8dda-9c4842232f31</a:t>
+            </a:r>
+          </a:p>
+          <a:p>
+            <a:r>
+              <a:t>Generated | 2026-09-26T22:31:07+00:00</a:t>
+            </a:r>
+          </a:p>
+          <a:p>
+            <a:r>
+              <a:t>Tool | SDA Vision 0.1.0</a:t>
+            </a:r>
+          </a:p>
+          <a:p>
+            <a:r>
+              <a:t>Models | claude-opus-5-5, gemini-3.8-flash, gpt-6-astra</a:t>
+            </a:r>
+          </a:p>
+          <a:p>
+            <a:r>
+              <a:t>Method version | pdf-preparation-2026-09-26.1</a:t>
+            </a:r>
+          </a:p>
+          <a:p>
+            <a:r>
+              <a:t>Analysis lens | general</a:t>
+            </a:r>
+          </a:p>
+          <a:p>
+            <a:r>
+              <a:t>Original SHA-256 | 58663a6a9e4b634bdb703ead0aaa7cd6dce7fbf97e70c3c1cc61b3311b94c0b4</a:t>
+            </a:r>
+          </a:p>
+          <a:p>
+            <a:r>
+              <a:t>Ingestion note 1 | Transcoded to 5737 KB mono 16 kHz (≤1800s).</a:t>
+            </a:r>
+          </a:p>
+          <a:p>
+            <a:r>
+              <a:t>Ingestion note 2 | Transcribed with Gemini.</a:t>
+            </a:r>
+          </a:p>
+          <a:p>
+            <a:r>
+              <a:t>Ingestion note 3 | Standalone-audio content assessment covers the transcript. AI-origin detection from sound is outside this assessment. Original-file C2PA was checked before transcription and is reported separately.</a:t>
+            </a:r>
+          </a:p>
+          <a:p>
+            <a:r>
+              <a:t>Ingestion note 4 | Audio tracks inspected locally. Soundtrack uploads require a separate optional check; AI-origin detection from sound is outside this workflow.</a:t>
+            </a:r>
+          </a:p>
+          <a:p>
+            <a:r>
+              <a:t>Ingestion note 5 | Fresh provider replies acquired for eleven-examples-refresh-20260926-r1; report assembled locally from the saved responses without further API calls.</a:t>
+            </a:r>
+          </a:p>
+          <a:p>
+            <a:r>
+              <a:t>Ingestion note 6 | Transcript analysis used the first 12000 characters of a fresh 25985-character transcription; this report retains its first 4000 characters. Sound-origin detection is outside this check.</a:t>
+            </a:r>
+          </a:p>
+          <a:p>
+            <a:r>
+              <a:t>Ingestion note 7 | Provider latency values are restored from the acquisition receipts (maximum sampled-frame latency per provider); raw replies and assessment results are unchanged by this bookkeeping step.</a:t>
+            </a:r>
+          </a:p>
+        </p:txBody>
+      </p:sp>
+      <p:sp>
+        <p:nvSpPr>
+          <p:cNvPr id="4" name="Slide Number Placeholder 3"/>
+          <p:cNvSpPr>
+            <a:spLocks noGrp="1"/>
+          </p:cNvSpPr>
+          <p:nvPr>
+            <p:ph type="sldNum" idx="5" sz="quarter"/>
+          </p:nvPr>
+        </p:nvSpPr>
+        <p:spPr/>
+      </p:sp>
+    </p:spTree>
+  </p:cSld>
+  <p:clrMapOvr>
+    <a:masterClrMapping/>
+  </p:clrMapOvr>
+</p:notes>
+</file>
+
+<file path=ppt/notesSlides/notesSlide25.xml><?xml version="1.0" encoding="utf-8"?>
 <p:notes xmlns:a="http://schemas.openxmlformats.org/drawingml/2006/main" xmlns:p="http://schemas.openxmlformats.org/presentationml/2006/main" xmlns:r="http://schemas.openxmlformats.org/officeDocument/2006/relationships">
   <p:cSld>
     <p:spTree>
@@ -16754,7 +16850,7 @@
               </a:defRPr>
             </a:pPr>
             <a:r>
-              <a:t>File and analysis record</a:t>
+              <a:t>Cite this analysis</a:t>
             </a:r>
           </a:p>
         </p:txBody>
@@ -16941,7 +17037,7 @@
         </p:nvGraphicFramePr>
         <p:xfrm>
           <a:off x="365760" y="1700784"/>
-          <a:ext cx="8412479" cy="349504"/>
+          <a:ext cx="8412479" cy="755904"/>
         </p:xfrm>
         <a:graphic>
           <a:graphicData uri="http://schemas.openxmlformats.org/drawingml/2006/table">
@@ -16953,28 +17049,28 @@
                 <a:gridCol w="2271369"/>
                 <a:gridCol w="6141110"/>
               </a:tblGrid>
-              <a:tr h="349504">
-                <a:tc>
-                  <a:txBody>
-                    <a:bodyPr wrap="none"/>
-                    <a:lstStyle/>
-                    <a:p>
-                      <a:pPr>
-                        <a:lnSpc>
-                          <a:spcPts val="1600"/>
-                        </a:lnSpc>
-                        <a:spcAft>
-                          <a:spcPts val="0"/>
-                        </a:spcAft>
-                        <a:defRPr sz="1200" b="0">
-                          <a:solidFill>
-                            <a:srgbClr val="21243A"/>
-                          </a:solidFill>
-                          <a:latin typeface="Arial"/>
-                        </a:defRPr>
-                      </a:pPr>
-                      <a:r>
-                        <a:t>File</a:t>
+              <a:tr h="755904">
+                <a:tc>
+                  <a:txBody>
+                    <a:bodyPr wrap="none"/>
+                    <a:lstStyle/>
+                    <a:p>
+                      <a:pPr>
+                        <a:lnSpc>
+                          <a:spcPts val="1600"/>
+                        </a:lnSpc>
+                        <a:spcAft>
+                          <a:spcPts val="0"/>
+                        </a:spcAft>
+                        <a:defRPr sz="1200" b="0">
+                          <a:solidFill>
+                            <a:srgbClr val="21243A"/>
+                          </a:solidFill>
+                          <a:latin typeface="Arial"/>
+                        </a:defRPr>
+                      </a:pPr>
+                      <a:r>
+                        <a:t>Software (Harvard)</a:t>
                       </a:r>
                     </a:p>
                   </a:txBody>
@@ -17004,7 +17100,45 @@
                         </a:defRPr>
                       </a:pPr>
                       <a:r>
-                        <a:t>podcast.m4a</a:t>
+                        <a:t>Martin, S. (2026) SDA Vision: Synthetic-media Discourse Analysis (version 0.1.0)</a:t>
+                      </a:r>
+                    </a:p>
+                    <a:p>
+                      <a:pPr>
+                        <a:lnSpc>
+                          <a:spcPts val="1600"/>
+                        </a:lnSpc>
+                        <a:spcAft>
+                          <a:spcPts val="0"/>
+                        </a:spcAft>
+                        <a:defRPr sz="1200" b="0">
+                          <a:solidFill>
+                            <a:srgbClr val="21243A"/>
+                          </a:solidFill>
+                          <a:latin typeface="Arial"/>
+                        </a:defRPr>
+                      </a:pPr>
+                      <a:r>
+                        <a:t>[Computer software]. Manchester Metropolitan University. Available at:</a:t>
+                      </a:r>
+                    </a:p>
+                    <a:p>
+                      <a:pPr>
+                        <a:lnSpc>
+                          <a:spcPts val="1600"/>
+                        </a:lnSpc>
+                        <a:spcAft>
+                          <a:spcPts val="0"/>
+                        </a:spcAft>
+                        <a:defRPr sz="1200" b="0">
+                          <a:solidFill>
+                            <a:srgbClr val="21243A"/>
+                          </a:solidFill>
+                          <a:latin typeface="Arial"/>
+                        </a:defRPr>
+                      </a:pPr>
+                      <a:r>
+                        <a:t>https://sdavision.io/</a:t>
                       </a:r>
                     </a:p>
                   </a:txBody>
@@ -17028,8 +17162,8 @@
           <p:nvPr/>
         </p:nvGraphicFramePr>
         <p:xfrm>
-          <a:off x="365760" y="2050288"/>
-          <a:ext cx="8412479" cy="349504"/>
+          <a:off x="365760" y="2456688"/>
+          <a:ext cx="8412479" cy="552704"/>
         </p:xfrm>
         <a:graphic>
           <a:graphicData uri="http://schemas.openxmlformats.org/drawingml/2006/table">
@@ -17041,28 +17175,28 @@
                 <a:gridCol w="2271369"/>
                 <a:gridCol w="6141110"/>
               </a:tblGrid>
-              <a:tr h="349504">
-                <a:tc>
-                  <a:txBody>
-                    <a:bodyPr wrap="none"/>
-                    <a:lstStyle/>
-                    <a:p>
-                      <a:pPr>
-                        <a:lnSpc>
-                          <a:spcPts val="1600"/>
-                        </a:lnSpc>
-                        <a:spcAft>
-                          <a:spcPts val="0"/>
-                        </a:spcAft>
-                        <a:defRPr sz="1200" b="0">
-                          <a:solidFill>
-                            <a:srgbClr val="21243A"/>
-                          </a:solidFill>
-                          <a:latin typeface="Arial"/>
-                        </a:defRPr>
-                      </a:pPr>
-                      <a:r>
-                        <a:t>Analysis ID</a:t>
+              <a:tr h="552704">
+                <a:tc>
+                  <a:txBody>
+                    <a:bodyPr wrap="none"/>
+                    <a:lstStyle/>
+                    <a:p>
+                      <a:pPr>
+                        <a:lnSpc>
+                          <a:spcPts val="1600"/>
+                        </a:lnSpc>
+                        <a:spcAft>
+                          <a:spcPts val="0"/>
+                        </a:spcAft>
+                        <a:defRPr sz="1200" b="0">
+                          <a:solidFill>
+                            <a:srgbClr val="21243A"/>
+                          </a:solidFill>
+                          <a:latin typeface="Arial"/>
+                        </a:defRPr>
+                      </a:pPr>
+                      <a:r>
+                        <a:t>Software creator</a:t>
                       </a:r>
                     </a:p>
                   </a:txBody>
@@ -17092,7 +17226,26 @@
                         </a:defRPr>
                       </a:pPr>
                       <a:r>
-                        <a:t>7e1a6917-52a1-453d-8dda-9c4842232f31</a:t>
+                        <a:t>Dr Sam Martin, Smart Data Research UK (UKRI) Fellow, Manchester Metropolitan</a:t>
+                      </a:r>
+                    </a:p>
+                    <a:p>
+                      <a:pPr>
+                        <a:lnSpc>
+                          <a:spcPts val="1600"/>
+                        </a:lnSpc>
+                        <a:spcAft>
+                          <a:spcPts val="0"/>
+                        </a:spcAft>
+                        <a:defRPr sz="1200" b="0">
+                          <a:solidFill>
+                            <a:srgbClr val="21243A"/>
+                          </a:solidFill>
+                          <a:latin typeface="Arial"/>
+                        </a:defRPr>
+                      </a:pPr>
+                      <a:r>
+                        <a:t>University (MMU). ORCID: https://orcid.org/0000-0002-4466-8374.</a:t>
                       </a:r>
                     </a:p>
                   </a:txBody>
@@ -17116,8 +17269,8 @@
           <p:nvPr/>
         </p:nvGraphicFramePr>
         <p:xfrm>
-          <a:off x="365760" y="2399792"/>
-          <a:ext cx="8412479" cy="349504"/>
+          <a:off x="365760" y="3009392"/>
+          <a:ext cx="8412479" cy="552704"/>
         </p:xfrm>
         <a:graphic>
           <a:graphicData uri="http://schemas.openxmlformats.org/drawingml/2006/table">
@@ -17129,28 +17282,28 @@
                 <a:gridCol w="2271369"/>
                 <a:gridCol w="6141110"/>
               </a:tblGrid>
-              <a:tr h="349504">
-                <a:tc>
-                  <a:txBody>
-                    <a:bodyPr wrap="none"/>
-                    <a:lstStyle/>
-                    <a:p>
-                      <a:pPr>
-                        <a:lnSpc>
-                          <a:spcPts val="1600"/>
-                        </a:lnSpc>
-                        <a:spcAft>
-                          <a:spcPts val="0"/>
-                        </a:spcAft>
-                        <a:defRPr sz="1200" b="0">
-                          <a:solidFill>
-                            <a:srgbClr val="21243A"/>
-                          </a:solidFill>
-                          <a:latin typeface="Arial"/>
-                        </a:defRPr>
-                      </a:pPr>
-                      <a:r>
-                        <a:t>Generated</a:t>
+              <a:tr h="552704">
+                <a:tc>
+                  <a:txBody>
+                    <a:bodyPr wrap="none"/>
+                    <a:lstStyle/>
+                    <a:p>
+                      <a:pPr>
+                        <a:lnSpc>
+                          <a:spcPts val="1600"/>
+                        </a:lnSpc>
+                        <a:spcAft>
+                          <a:spcPts val="0"/>
+                        </a:spcAft>
+                        <a:defRPr sz="1200" b="0">
+                          <a:solidFill>
+                            <a:srgbClr val="21243A"/>
+                          </a:solidFill>
+                          <a:latin typeface="Arial"/>
+                        </a:defRPr>
+                      </a:pPr>
+                      <a:r>
+                        <a:t>Funding acknowledgement</a:t>
                       </a:r>
                     </a:p>
                   </a:txBody>
@@ -17180,7 +17333,26 @@
                         </a:defRPr>
                       </a:pPr>
                       <a:r>
-                        <a:t>2026-09-26T22:31:07+00:00</a:t>
+                        <a:t>This work was supported by Smart Data Research UK, a UKRI investment; Grant</a:t>
+                      </a:r>
+                    </a:p>
+                    <a:p>
+                      <a:pPr>
+                        <a:lnSpc>
+                          <a:spcPts val="1600"/>
+                        </a:lnSpc>
+                        <a:spcAft>
+                          <a:spcPts val="0"/>
+                        </a:spcAft>
+                        <a:defRPr sz="1200" b="0">
+                          <a:solidFill>
+                            <a:srgbClr val="21243A"/>
+                          </a:solidFill>
+                          <a:latin typeface="Arial"/>
+                        </a:defRPr>
+                      </a:pPr>
+                      <a:r>
+                        <a:t>number UKRI4010.</a:t>
                       </a:r>
                     </a:p>
                   </a:txBody>
@@ -17204,8 +17376,8 @@
           <p:nvPr/>
         </p:nvGraphicFramePr>
         <p:xfrm>
-          <a:off x="365760" y="2749296"/>
-          <a:ext cx="8412479" cy="349504"/>
+          <a:off x="365760" y="3562095"/>
+          <a:ext cx="8412479" cy="552704"/>
         </p:xfrm>
         <a:graphic>
           <a:graphicData uri="http://schemas.openxmlformats.org/drawingml/2006/table">
@@ -17217,28 +17389,28 @@
                 <a:gridCol w="2271369"/>
                 <a:gridCol w="6141110"/>
               </a:tblGrid>
-              <a:tr h="349504">
-                <a:tc>
-                  <a:txBody>
-                    <a:bodyPr wrap="none"/>
-                    <a:lstStyle/>
-                    <a:p>
-                      <a:pPr>
-                        <a:lnSpc>
-                          <a:spcPts val="1600"/>
-                        </a:lnSpc>
-                        <a:spcAft>
-                          <a:spcPts val="0"/>
-                        </a:spcAft>
-                        <a:defRPr sz="1200" b="0">
-                          <a:solidFill>
-                            <a:srgbClr val="21243A"/>
-                          </a:solidFill>
-                          <a:latin typeface="Arial"/>
-                        </a:defRPr>
-                      </a:pPr>
-                      <a:r>
-                        <a:t>Tool</a:t>
+              <a:tr h="552704">
+                <a:tc>
+                  <a:txBody>
+                    <a:bodyPr wrap="none"/>
+                    <a:lstStyle/>
+                    <a:p>
+                      <a:pPr>
+                        <a:lnSpc>
+                          <a:spcPts val="1600"/>
+                        </a:lnSpc>
+                        <a:spcAft>
+                          <a:spcPts val="0"/>
+                        </a:spcAft>
+                        <a:defRPr sz="1200" b="0">
+                          <a:solidFill>
+                            <a:srgbClr val="21243A"/>
+                          </a:solidFill>
+                          <a:latin typeface="Arial"/>
+                        </a:defRPr>
+                      </a:pPr>
+                      <a:r>
+                        <a:t>Analysis record</a:t>
                       </a:r>
                     </a:p>
                   </a:txBody>
@@ -17268,667 +17440,32 @@
                         </a:defRPr>
                       </a:pPr>
                       <a:r>
-                        <a:t>SDA Vision 0.1.0</a:t>
+                        <a:t>File: podcast.m4a; media type: audio; recorded at: 2026-09-26T22:31:07+00:00;</a:t>
+                      </a:r>
+                    </a:p>
+                    <a:p>
+                      <a:pPr>
+                        <a:lnSpc>
+                          <a:spcPts val="1600"/>
+                        </a:lnSpc>
+                        <a:spcAft>
+                          <a:spcPts val="0"/>
+                        </a:spcAft>
+                        <a:defRPr sz="1200" b="0">
+                          <a:solidFill>
+                            <a:srgbClr val="21243A"/>
+                          </a:solidFill>
+                          <a:latin typeface="Arial"/>
+                        </a:defRPr>
+                      </a:pPr>
+                      <a:r>
+                        <a:t>models: claude-opus-5-5, gemini-3.8-flash, gpt-6-astra.</a:t>
                       </a:r>
                     </a:p>
                   </a:txBody>
                   <a:tcPr marL="82296" marR="82296" marT="64008" marB="64008">
                     <a:solidFill>
                       <a:srgbClr val="FFFFFF"/>
-                    </a:solidFill>
-                  </a:tcPr>
-                </a:tc>
-              </a:tr>
-            </a:tbl>
-          </a:graphicData>
-        </a:graphic>
-      </p:graphicFrame>
-      <p:graphicFrame>
-        <p:nvGraphicFramePr>
-          <p:cNvPr id="11" name="Table 10"/>
-          <p:cNvGraphicFramePr>
-            <a:graphicFrameLocks noGrp="1"/>
-          </p:cNvGraphicFramePr>
-          <p:nvPr/>
-        </p:nvGraphicFramePr>
-        <p:xfrm>
-          <a:off x="365760" y="3098800"/>
-          <a:ext cx="8412479" cy="349504"/>
-        </p:xfrm>
-        <a:graphic>
-          <a:graphicData uri="http://schemas.openxmlformats.org/drawingml/2006/table">
-            <a:tbl>
-              <a:tblPr firstRow="1" bandRow="1">
-                <a:tableStyleId>{5C22544A-7EE6-4342-B048-85BDC9FD1C3A}</a:tableStyleId>
-              </a:tblPr>
-              <a:tblGrid>
-                <a:gridCol w="2271369"/>
-                <a:gridCol w="6141110"/>
-              </a:tblGrid>
-              <a:tr h="349504">
-                <a:tc>
-                  <a:txBody>
-                    <a:bodyPr wrap="none"/>
-                    <a:lstStyle/>
-                    <a:p>
-                      <a:pPr>
-                        <a:lnSpc>
-                          <a:spcPts val="1600"/>
-                        </a:lnSpc>
-                        <a:spcAft>
-                          <a:spcPts val="0"/>
-                        </a:spcAft>
-                        <a:defRPr sz="1200" b="0">
-                          <a:solidFill>
-                            <a:srgbClr val="21243A"/>
-                          </a:solidFill>
-                          <a:latin typeface="Arial"/>
-                        </a:defRPr>
-                      </a:pPr>
-                      <a:r>
-                        <a:t>Models</a:t>
-                      </a:r>
-                    </a:p>
-                  </a:txBody>
-                  <a:tcPr marL="82296" marR="82296" marT="64008" marB="64008">
-                    <a:solidFill>
-                      <a:srgbClr val="F1F7F7"/>
-                    </a:solidFill>
-                  </a:tcPr>
-                </a:tc>
-                <a:tc>
-                  <a:txBody>
-                    <a:bodyPr wrap="none"/>
-                    <a:lstStyle/>
-                    <a:p>
-                      <a:pPr>
-                        <a:lnSpc>
-                          <a:spcPts val="1600"/>
-                        </a:lnSpc>
-                        <a:spcAft>
-                          <a:spcPts val="0"/>
-                        </a:spcAft>
-                        <a:defRPr sz="1200" b="0">
-                          <a:solidFill>
-                            <a:srgbClr val="21243A"/>
-                          </a:solidFill>
-                          <a:latin typeface="Arial"/>
-                        </a:defRPr>
-                      </a:pPr>
-                      <a:r>
-                        <a:t>claude-opus-5-5, gemini-3.8-flash, gpt-6-astra</a:t>
-                      </a:r>
-                    </a:p>
-                  </a:txBody>
-                  <a:tcPr marL="82296" marR="82296" marT="64008" marB="64008">
-                    <a:solidFill>
-                      <a:srgbClr val="F1F7F7"/>
-                    </a:solidFill>
-                  </a:tcPr>
-                </a:tc>
-              </a:tr>
-            </a:tbl>
-          </a:graphicData>
-        </a:graphic>
-      </p:graphicFrame>
-      <p:graphicFrame>
-        <p:nvGraphicFramePr>
-          <p:cNvPr id="12" name="Table 11"/>
-          <p:cNvGraphicFramePr>
-            <a:graphicFrameLocks noGrp="1"/>
-          </p:cNvGraphicFramePr>
-          <p:nvPr/>
-        </p:nvGraphicFramePr>
-        <p:xfrm>
-          <a:off x="365760" y="3448304"/>
-          <a:ext cx="8412479" cy="349504"/>
-        </p:xfrm>
-        <a:graphic>
-          <a:graphicData uri="http://schemas.openxmlformats.org/drawingml/2006/table">
-            <a:tbl>
-              <a:tblPr firstRow="1" bandRow="1">
-                <a:tableStyleId>{5C22544A-7EE6-4342-B048-85BDC9FD1C3A}</a:tableStyleId>
-              </a:tblPr>
-              <a:tblGrid>
-                <a:gridCol w="2271369"/>
-                <a:gridCol w="6141110"/>
-              </a:tblGrid>
-              <a:tr h="349504">
-                <a:tc>
-                  <a:txBody>
-                    <a:bodyPr wrap="none"/>
-                    <a:lstStyle/>
-                    <a:p>
-                      <a:pPr>
-                        <a:lnSpc>
-                          <a:spcPts val="1600"/>
-                        </a:lnSpc>
-                        <a:spcAft>
-                          <a:spcPts val="0"/>
-                        </a:spcAft>
-                        <a:defRPr sz="1200" b="0">
-                          <a:solidFill>
-                            <a:srgbClr val="21243A"/>
-                          </a:solidFill>
-                          <a:latin typeface="Arial"/>
-                        </a:defRPr>
-                      </a:pPr>
-                      <a:r>
-                        <a:t>Method version</a:t>
-                      </a:r>
-                    </a:p>
-                  </a:txBody>
-                  <a:tcPr marL="82296" marR="82296" marT="64008" marB="64008">
-                    <a:solidFill>
-                      <a:srgbClr val="FFFFFF"/>
-                    </a:solidFill>
-                  </a:tcPr>
-                </a:tc>
-                <a:tc>
-                  <a:txBody>
-                    <a:bodyPr wrap="none"/>
-                    <a:lstStyle/>
-                    <a:p>
-                      <a:pPr>
-                        <a:lnSpc>
-                          <a:spcPts val="1600"/>
-                        </a:lnSpc>
-                        <a:spcAft>
-                          <a:spcPts val="0"/>
-                        </a:spcAft>
-                        <a:defRPr sz="1200" b="0">
-                          <a:solidFill>
-                            <a:srgbClr val="21243A"/>
-                          </a:solidFill>
-                          <a:latin typeface="Arial"/>
-                        </a:defRPr>
-                      </a:pPr>
-                      <a:r>
-                        <a:t>pdf-preparation-2026-09-26.1</a:t>
-                      </a:r>
-                    </a:p>
-                  </a:txBody>
-                  <a:tcPr marL="82296" marR="82296" marT="64008" marB="64008">
-                    <a:solidFill>
-                      <a:srgbClr val="FFFFFF"/>
-                    </a:solidFill>
-                  </a:tcPr>
-                </a:tc>
-              </a:tr>
-            </a:tbl>
-          </a:graphicData>
-        </a:graphic>
-      </p:graphicFrame>
-      <p:graphicFrame>
-        <p:nvGraphicFramePr>
-          <p:cNvPr id="13" name="Table 12"/>
-          <p:cNvGraphicFramePr>
-            <a:graphicFrameLocks noGrp="1"/>
-          </p:cNvGraphicFramePr>
-          <p:nvPr/>
-        </p:nvGraphicFramePr>
-        <p:xfrm>
-          <a:off x="365760" y="3797808"/>
-          <a:ext cx="8412479" cy="349504"/>
-        </p:xfrm>
-        <a:graphic>
-          <a:graphicData uri="http://schemas.openxmlformats.org/drawingml/2006/table">
-            <a:tbl>
-              <a:tblPr firstRow="1" bandRow="1">
-                <a:tableStyleId>{5C22544A-7EE6-4342-B048-85BDC9FD1C3A}</a:tableStyleId>
-              </a:tblPr>
-              <a:tblGrid>
-                <a:gridCol w="2271369"/>
-                <a:gridCol w="6141110"/>
-              </a:tblGrid>
-              <a:tr h="349504">
-                <a:tc>
-                  <a:txBody>
-                    <a:bodyPr wrap="none"/>
-                    <a:lstStyle/>
-                    <a:p>
-                      <a:pPr>
-                        <a:lnSpc>
-                          <a:spcPts val="1600"/>
-                        </a:lnSpc>
-                        <a:spcAft>
-                          <a:spcPts val="0"/>
-                        </a:spcAft>
-                        <a:defRPr sz="1200" b="0">
-                          <a:solidFill>
-                            <a:srgbClr val="21243A"/>
-                          </a:solidFill>
-                          <a:latin typeface="Arial"/>
-                        </a:defRPr>
-                      </a:pPr>
-                      <a:r>
-                        <a:t>Analysis lens</a:t>
-                      </a:r>
-                    </a:p>
-                  </a:txBody>
-                  <a:tcPr marL="82296" marR="82296" marT="64008" marB="64008">
-                    <a:solidFill>
-                      <a:srgbClr val="F1F7F7"/>
-                    </a:solidFill>
-                  </a:tcPr>
-                </a:tc>
-                <a:tc>
-                  <a:txBody>
-                    <a:bodyPr wrap="none"/>
-                    <a:lstStyle/>
-                    <a:p>
-                      <a:pPr>
-                        <a:lnSpc>
-                          <a:spcPts val="1600"/>
-                        </a:lnSpc>
-                        <a:spcAft>
-                          <a:spcPts val="0"/>
-                        </a:spcAft>
-                        <a:defRPr sz="1200" b="0">
-                          <a:solidFill>
-                            <a:srgbClr val="21243A"/>
-                          </a:solidFill>
-                          <a:latin typeface="Arial"/>
-                        </a:defRPr>
-                      </a:pPr>
-                      <a:r>
-                        <a:t>general</a:t>
-                      </a:r>
-                    </a:p>
-                  </a:txBody>
-                  <a:tcPr marL="82296" marR="82296" marT="64008" marB="64008">
-                    <a:solidFill>
-                      <a:srgbClr val="F1F7F7"/>
-                    </a:solidFill>
-                  </a:tcPr>
-                </a:tc>
-              </a:tr>
-            </a:tbl>
-          </a:graphicData>
-        </a:graphic>
-      </p:graphicFrame>
-      <p:graphicFrame>
-        <p:nvGraphicFramePr>
-          <p:cNvPr id="14" name="Table 13"/>
-          <p:cNvGraphicFramePr>
-            <a:graphicFrameLocks noGrp="1"/>
-          </p:cNvGraphicFramePr>
-          <p:nvPr/>
-        </p:nvGraphicFramePr>
-        <p:xfrm>
-          <a:off x="365760" y="4147312"/>
-          <a:ext cx="8412479" cy="349504"/>
-        </p:xfrm>
-        <a:graphic>
-          <a:graphicData uri="http://schemas.openxmlformats.org/drawingml/2006/table">
-            <a:tbl>
-              <a:tblPr firstRow="1" bandRow="1">
-                <a:tableStyleId>{5C22544A-7EE6-4342-B048-85BDC9FD1C3A}</a:tableStyleId>
-              </a:tblPr>
-              <a:tblGrid>
-                <a:gridCol w="2271369"/>
-                <a:gridCol w="6141110"/>
-              </a:tblGrid>
-              <a:tr h="349504">
-                <a:tc>
-                  <a:txBody>
-                    <a:bodyPr wrap="none"/>
-                    <a:lstStyle/>
-                    <a:p>
-                      <a:pPr>
-                        <a:lnSpc>
-                          <a:spcPts val="1600"/>
-                        </a:lnSpc>
-                        <a:spcAft>
-                          <a:spcPts val="0"/>
-                        </a:spcAft>
-                        <a:defRPr sz="1200" b="0">
-                          <a:solidFill>
-                            <a:srgbClr val="21243A"/>
-                          </a:solidFill>
-                          <a:latin typeface="Arial"/>
-                        </a:defRPr>
-                      </a:pPr>
-                      <a:r>
-                        <a:t>Original SHA-256</a:t>
-                      </a:r>
-                    </a:p>
-                  </a:txBody>
-                  <a:tcPr marL="82296" marR="82296" marT="64008" marB="64008">
-                    <a:solidFill>
-                      <a:srgbClr val="FFFFFF"/>
-                    </a:solidFill>
-                  </a:tcPr>
-                </a:tc>
-                <a:tc>
-                  <a:txBody>
-                    <a:bodyPr wrap="none"/>
-                    <a:lstStyle/>
-                    <a:p>
-                      <a:pPr>
-                        <a:lnSpc>
-                          <a:spcPts val="1600"/>
-                        </a:lnSpc>
-                        <a:spcAft>
-                          <a:spcPts val="0"/>
-                        </a:spcAft>
-                        <a:defRPr sz="1200" b="0">
-                          <a:solidFill>
-                            <a:srgbClr val="21243A"/>
-                          </a:solidFill>
-                          <a:latin typeface="Arial"/>
-                        </a:defRPr>
-                      </a:pPr>
-                      <a:r>
-                        <a:t>58663a6a9e4b634bdb703ead0aaa7cd6dce7fbf97e70c3c1cc61b3311b94c0b4</a:t>
-                      </a:r>
-                    </a:p>
-                  </a:txBody>
-                  <a:tcPr marL="82296" marR="82296" marT="64008" marB="64008">
-                    <a:solidFill>
-                      <a:srgbClr val="FFFFFF"/>
-                    </a:solidFill>
-                  </a:tcPr>
-                </a:tc>
-              </a:tr>
-            </a:tbl>
-          </a:graphicData>
-        </a:graphic>
-      </p:graphicFrame>
-      <p:graphicFrame>
-        <p:nvGraphicFramePr>
-          <p:cNvPr id="15" name="Table 14"/>
-          <p:cNvGraphicFramePr>
-            <a:graphicFrameLocks noGrp="1"/>
-          </p:cNvGraphicFramePr>
-          <p:nvPr/>
-        </p:nvGraphicFramePr>
-        <p:xfrm>
-          <a:off x="365760" y="4496816"/>
-          <a:ext cx="8412479" cy="349504"/>
-        </p:xfrm>
-        <a:graphic>
-          <a:graphicData uri="http://schemas.openxmlformats.org/drawingml/2006/table">
-            <a:tbl>
-              <a:tblPr firstRow="1" bandRow="1">
-                <a:tableStyleId>{5C22544A-7EE6-4342-B048-85BDC9FD1C3A}</a:tableStyleId>
-              </a:tblPr>
-              <a:tblGrid>
-                <a:gridCol w="2271369"/>
-                <a:gridCol w="6141110"/>
-              </a:tblGrid>
-              <a:tr h="349504">
-                <a:tc>
-                  <a:txBody>
-                    <a:bodyPr wrap="none"/>
-                    <a:lstStyle/>
-                    <a:p>
-                      <a:pPr>
-                        <a:lnSpc>
-                          <a:spcPts val="1600"/>
-                        </a:lnSpc>
-                        <a:spcAft>
-                          <a:spcPts val="0"/>
-                        </a:spcAft>
-                        <a:defRPr sz="1200" b="0">
-                          <a:solidFill>
-                            <a:srgbClr val="21243A"/>
-                          </a:solidFill>
-                          <a:latin typeface="Arial"/>
-                        </a:defRPr>
-                      </a:pPr>
-                      <a:r>
-                        <a:t>Ingestion note 1</a:t>
-                      </a:r>
-                    </a:p>
-                  </a:txBody>
-                  <a:tcPr marL="82296" marR="82296" marT="64008" marB="64008">
-                    <a:solidFill>
-                      <a:srgbClr val="F1F7F7"/>
-                    </a:solidFill>
-                  </a:tcPr>
-                </a:tc>
-                <a:tc>
-                  <a:txBody>
-                    <a:bodyPr wrap="none"/>
-                    <a:lstStyle/>
-                    <a:p>
-                      <a:pPr>
-                        <a:lnSpc>
-                          <a:spcPts val="1600"/>
-                        </a:lnSpc>
-                        <a:spcAft>
-                          <a:spcPts val="0"/>
-                        </a:spcAft>
-                        <a:defRPr sz="1200" b="0">
-                          <a:solidFill>
-                            <a:srgbClr val="21243A"/>
-                          </a:solidFill>
-                          <a:latin typeface="Arial"/>
-                        </a:defRPr>
-                      </a:pPr>
-                      <a:r>
-                        <a:t>Transcoded to 5737 KB mono 16 kHz (≤1800s).</a:t>
-                      </a:r>
-                    </a:p>
-                  </a:txBody>
-                  <a:tcPr marL="82296" marR="82296" marT="64008" marB="64008">
-                    <a:solidFill>
-                      <a:srgbClr val="F1F7F7"/>
-                    </a:solidFill>
-                  </a:tcPr>
-                </a:tc>
-              </a:tr>
-            </a:tbl>
-          </a:graphicData>
-        </a:graphic>
-      </p:graphicFrame>
-      <p:graphicFrame>
-        <p:nvGraphicFramePr>
-          <p:cNvPr id="16" name="Table 15"/>
-          <p:cNvGraphicFramePr>
-            <a:graphicFrameLocks noGrp="1"/>
-          </p:cNvGraphicFramePr>
-          <p:nvPr/>
-        </p:nvGraphicFramePr>
-        <p:xfrm>
-          <a:off x="365760" y="4846320"/>
-          <a:ext cx="8412479" cy="349504"/>
-        </p:xfrm>
-        <a:graphic>
-          <a:graphicData uri="http://schemas.openxmlformats.org/drawingml/2006/table">
-            <a:tbl>
-              <a:tblPr firstRow="1" bandRow="1">
-                <a:tableStyleId>{5C22544A-7EE6-4342-B048-85BDC9FD1C3A}</a:tableStyleId>
-              </a:tblPr>
-              <a:tblGrid>
-                <a:gridCol w="2271369"/>
-                <a:gridCol w="6141110"/>
-              </a:tblGrid>
-              <a:tr h="349504">
-                <a:tc>
-                  <a:txBody>
-                    <a:bodyPr wrap="none"/>
-                    <a:lstStyle/>
-                    <a:p>
-                      <a:pPr>
-                        <a:lnSpc>
-                          <a:spcPts val="1600"/>
-                        </a:lnSpc>
-                        <a:spcAft>
-                          <a:spcPts val="0"/>
-                        </a:spcAft>
-                        <a:defRPr sz="1200" b="0">
-                          <a:solidFill>
-                            <a:srgbClr val="21243A"/>
-                          </a:solidFill>
-                          <a:latin typeface="Arial"/>
-                        </a:defRPr>
-                      </a:pPr>
-                      <a:r>
-                        <a:t>Ingestion note 2</a:t>
-                      </a:r>
-                    </a:p>
-                  </a:txBody>
-                  <a:tcPr marL="82296" marR="82296" marT="64008" marB="64008">
-                    <a:solidFill>
-                      <a:srgbClr val="FFFFFF"/>
-                    </a:solidFill>
-                  </a:tcPr>
-                </a:tc>
-                <a:tc>
-                  <a:txBody>
-                    <a:bodyPr wrap="none"/>
-                    <a:lstStyle/>
-                    <a:p>
-                      <a:pPr>
-                        <a:lnSpc>
-                          <a:spcPts val="1600"/>
-                        </a:lnSpc>
-                        <a:spcAft>
-                          <a:spcPts val="0"/>
-                        </a:spcAft>
-                        <a:defRPr sz="1200" b="0">
-                          <a:solidFill>
-                            <a:srgbClr val="21243A"/>
-                          </a:solidFill>
-                          <a:latin typeface="Arial"/>
-                        </a:defRPr>
-                      </a:pPr>
-                      <a:r>
-                        <a:t>Transcribed with Gemini.</a:t>
-                      </a:r>
-                    </a:p>
-                  </a:txBody>
-                  <a:tcPr marL="82296" marR="82296" marT="64008" marB="64008">
-                    <a:solidFill>
-                      <a:srgbClr val="FFFFFF"/>
-                    </a:solidFill>
-                  </a:tcPr>
-                </a:tc>
-              </a:tr>
-            </a:tbl>
-          </a:graphicData>
-        </a:graphic>
-      </p:graphicFrame>
-      <p:graphicFrame>
-        <p:nvGraphicFramePr>
-          <p:cNvPr id="17" name="Table 16"/>
-          <p:cNvGraphicFramePr>
-            <a:graphicFrameLocks noGrp="1"/>
-          </p:cNvGraphicFramePr>
-          <p:nvPr/>
-        </p:nvGraphicFramePr>
-        <p:xfrm>
-          <a:off x="365760" y="5195824"/>
-          <a:ext cx="8412479" cy="755904"/>
-        </p:xfrm>
-        <a:graphic>
-          <a:graphicData uri="http://schemas.openxmlformats.org/drawingml/2006/table">
-            <a:tbl>
-              <a:tblPr firstRow="1" bandRow="1">
-                <a:tableStyleId>{5C22544A-7EE6-4342-B048-85BDC9FD1C3A}</a:tableStyleId>
-              </a:tblPr>
-              <a:tblGrid>
-                <a:gridCol w="2271369"/>
-                <a:gridCol w="6141110"/>
-              </a:tblGrid>
-              <a:tr h="755904">
-                <a:tc>
-                  <a:txBody>
-                    <a:bodyPr wrap="none"/>
-                    <a:lstStyle/>
-                    <a:p>
-                      <a:pPr>
-                        <a:lnSpc>
-                          <a:spcPts val="1600"/>
-                        </a:lnSpc>
-                        <a:spcAft>
-                          <a:spcPts val="0"/>
-                        </a:spcAft>
-                        <a:defRPr sz="1200" b="0">
-                          <a:solidFill>
-                            <a:srgbClr val="21243A"/>
-                          </a:solidFill>
-                          <a:latin typeface="Arial"/>
-                        </a:defRPr>
-                      </a:pPr>
-                      <a:r>
-                        <a:t>Ingestion note 3</a:t>
-                      </a:r>
-                    </a:p>
-                  </a:txBody>
-                  <a:tcPr marL="82296" marR="82296" marT="64008" marB="64008">
-                    <a:solidFill>
-                      <a:srgbClr val="F1F7F7"/>
-                    </a:solidFill>
-                  </a:tcPr>
-                </a:tc>
-                <a:tc>
-                  <a:txBody>
-                    <a:bodyPr wrap="none"/>
-                    <a:lstStyle/>
-                    <a:p>
-                      <a:pPr>
-                        <a:lnSpc>
-                          <a:spcPts val="1600"/>
-                        </a:lnSpc>
-                        <a:spcAft>
-                          <a:spcPts val="0"/>
-                        </a:spcAft>
-                        <a:defRPr sz="1200" b="0">
-                          <a:solidFill>
-                            <a:srgbClr val="21243A"/>
-                          </a:solidFill>
-                          <a:latin typeface="Arial"/>
-                        </a:defRPr>
-                      </a:pPr>
-                      <a:r>
-                        <a:t>Standalone-audio content assessment covers the transcript. AI-origin detection</a:t>
-                      </a:r>
-                    </a:p>
-                    <a:p>
-                      <a:pPr>
-                        <a:lnSpc>
-                          <a:spcPts val="1600"/>
-                        </a:lnSpc>
-                        <a:spcAft>
-                          <a:spcPts val="0"/>
-                        </a:spcAft>
-                        <a:defRPr sz="1200" b="0">
-                          <a:solidFill>
-                            <a:srgbClr val="21243A"/>
-                          </a:solidFill>
-                          <a:latin typeface="Arial"/>
-                        </a:defRPr>
-                      </a:pPr>
-                      <a:r>
-                        <a:t>from sound is outside this assessment. Original-file C2PA was checked before</a:t>
-                      </a:r>
-                    </a:p>
-                    <a:p>
-                      <a:pPr>
-                        <a:lnSpc>
-                          <a:spcPts val="1600"/>
-                        </a:lnSpc>
-                        <a:spcAft>
-                          <a:spcPts val="0"/>
-                        </a:spcAft>
-                        <a:defRPr sz="1200" b="0">
-                          <a:solidFill>
-                            <a:srgbClr val="21243A"/>
-                          </a:solidFill>
-                          <a:latin typeface="Arial"/>
-                        </a:defRPr>
-                      </a:pPr>
-                      <a:r>
-                        <a:t>transcription and is reported separately.</a:t>
-                      </a:r>
-                    </a:p>
-                  </a:txBody>
-                  <a:tcPr marL="82296" marR="82296" marT="64008" marB="64008">
-                    <a:solidFill>
-                      <a:srgbClr val="F1F7F7"/>
                     </a:solidFill>
                   </a:tcPr>
                 </a:tc>
@@ -18034,7 +17571,7 @@
               </a:defRPr>
             </a:pPr>
             <a:r>
-              <a:t>File and analysis record (continued)</a:t>
+              <a:t>File and analysis record</a:t>
             </a:r>
           </a:p>
         </p:txBody>
@@ -18119,6 +17656,1286 @@
             </a:pPr>
             <a:r>
               <a:t>24</a:t>
+            </a:r>
+          </a:p>
+        </p:txBody>
+      </p:sp>
+      <p:graphicFrame>
+        <p:nvGraphicFramePr>
+          <p:cNvPr id="6" name="Table 5"/>
+          <p:cNvGraphicFramePr>
+            <a:graphicFrameLocks noGrp="1"/>
+          </p:cNvGraphicFramePr>
+          <p:nvPr/>
+        </p:nvGraphicFramePr>
+        <p:xfrm>
+          <a:off x="365760" y="1353312"/>
+          <a:ext cx="8412479" cy="347472"/>
+        </p:xfrm>
+        <a:graphic>
+          <a:graphicData uri="http://schemas.openxmlformats.org/drawingml/2006/table">
+            <a:tbl>
+              <a:tblPr firstRow="1" bandRow="1">
+                <a:tableStyleId>{5C22544A-7EE6-4342-B048-85BDC9FD1C3A}</a:tableStyleId>
+              </a:tblPr>
+              <a:tblGrid>
+                <a:gridCol w="2271369"/>
+                <a:gridCol w="6141110"/>
+              </a:tblGrid>
+              <a:tr h="347472">
+                <a:tc>
+                  <a:txBody>
+                    <a:bodyPr wrap="none"/>
+                    <a:lstStyle/>
+                    <a:p>
+                      <a:pPr>
+                        <a:lnSpc>
+                          <a:spcPts val="1600"/>
+                        </a:lnSpc>
+                        <a:spcAft>
+                          <a:spcPts val="0"/>
+                        </a:spcAft>
+                        <a:defRPr sz="1200" b="1">
+                          <a:solidFill>
+                            <a:srgbClr val="FFFFFF"/>
+                          </a:solidFill>
+                          <a:latin typeface="Arial"/>
+                        </a:defRPr>
+                      </a:pPr>
+                      <a:r>
+                        <a:t>Field</a:t>
+                      </a:r>
+                    </a:p>
+                  </a:txBody>
+                  <a:tcPr marL="82296" marR="82296" marT="64008" marB="64008">
+                    <a:solidFill>
+                      <a:srgbClr val="16787C"/>
+                    </a:solidFill>
+                  </a:tcPr>
+                </a:tc>
+                <a:tc>
+                  <a:txBody>
+                    <a:bodyPr wrap="none"/>
+                    <a:lstStyle/>
+                    <a:p>
+                      <a:pPr>
+                        <a:lnSpc>
+                          <a:spcPts val="1600"/>
+                        </a:lnSpc>
+                        <a:spcAft>
+                          <a:spcPts val="0"/>
+                        </a:spcAft>
+                        <a:defRPr sz="1200" b="1">
+                          <a:solidFill>
+                            <a:srgbClr val="FFFFFF"/>
+                          </a:solidFill>
+                          <a:latin typeface="Arial"/>
+                        </a:defRPr>
+                      </a:pPr>
+                      <a:r>
+                        <a:t>Recorded detail</a:t>
+                      </a:r>
+                    </a:p>
+                  </a:txBody>
+                  <a:tcPr marL="82296" marR="82296" marT="64008" marB="64008">
+                    <a:solidFill>
+                      <a:srgbClr val="16787C"/>
+                    </a:solidFill>
+                  </a:tcPr>
+                </a:tc>
+              </a:tr>
+            </a:tbl>
+          </a:graphicData>
+        </a:graphic>
+      </p:graphicFrame>
+      <p:graphicFrame>
+        <p:nvGraphicFramePr>
+          <p:cNvPr id="7" name="Table 6"/>
+          <p:cNvGraphicFramePr>
+            <a:graphicFrameLocks noGrp="1"/>
+          </p:cNvGraphicFramePr>
+          <p:nvPr/>
+        </p:nvGraphicFramePr>
+        <p:xfrm>
+          <a:off x="365760" y="1700784"/>
+          <a:ext cx="8412479" cy="349504"/>
+        </p:xfrm>
+        <a:graphic>
+          <a:graphicData uri="http://schemas.openxmlformats.org/drawingml/2006/table">
+            <a:tbl>
+              <a:tblPr firstRow="1" bandRow="1">
+                <a:tableStyleId>{5C22544A-7EE6-4342-B048-85BDC9FD1C3A}</a:tableStyleId>
+              </a:tblPr>
+              <a:tblGrid>
+                <a:gridCol w="2271369"/>
+                <a:gridCol w="6141110"/>
+              </a:tblGrid>
+              <a:tr h="349504">
+                <a:tc>
+                  <a:txBody>
+                    <a:bodyPr wrap="none"/>
+                    <a:lstStyle/>
+                    <a:p>
+                      <a:pPr>
+                        <a:lnSpc>
+                          <a:spcPts val="1600"/>
+                        </a:lnSpc>
+                        <a:spcAft>
+                          <a:spcPts val="0"/>
+                        </a:spcAft>
+                        <a:defRPr sz="1200" b="0">
+                          <a:solidFill>
+                            <a:srgbClr val="21243A"/>
+                          </a:solidFill>
+                          <a:latin typeface="Arial"/>
+                        </a:defRPr>
+                      </a:pPr>
+                      <a:r>
+                        <a:t>File</a:t>
+                      </a:r>
+                    </a:p>
+                  </a:txBody>
+                  <a:tcPr marL="82296" marR="82296" marT="64008" marB="64008">
+                    <a:solidFill>
+                      <a:srgbClr val="F1F7F7"/>
+                    </a:solidFill>
+                  </a:tcPr>
+                </a:tc>
+                <a:tc>
+                  <a:txBody>
+                    <a:bodyPr wrap="none"/>
+                    <a:lstStyle/>
+                    <a:p>
+                      <a:pPr>
+                        <a:lnSpc>
+                          <a:spcPts val="1600"/>
+                        </a:lnSpc>
+                        <a:spcAft>
+                          <a:spcPts val="0"/>
+                        </a:spcAft>
+                        <a:defRPr sz="1200" b="0">
+                          <a:solidFill>
+                            <a:srgbClr val="21243A"/>
+                          </a:solidFill>
+                          <a:latin typeface="Arial"/>
+                        </a:defRPr>
+                      </a:pPr>
+                      <a:r>
+                        <a:t>podcast.m4a</a:t>
+                      </a:r>
+                    </a:p>
+                  </a:txBody>
+                  <a:tcPr marL="82296" marR="82296" marT="64008" marB="64008">
+                    <a:solidFill>
+                      <a:srgbClr val="F1F7F7"/>
+                    </a:solidFill>
+                  </a:tcPr>
+                </a:tc>
+              </a:tr>
+            </a:tbl>
+          </a:graphicData>
+        </a:graphic>
+      </p:graphicFrame>
+      <p:graphicFrame>
+        <p:nvGraphicFramePr>
+          <p:cNvPr id="8" name="Table 7"/>
+          <p:cNvGraphicFramePr>
+            <a:graphicFrameLocks noGrp="1"/>
+          </p:cNvGraphicFramePr>
+          <p:nvPr/>
+        </p:nvGraphicFramePr>
+        <p:xfrm>
+          <a:off x="365760" y="2050288"/>
+          <a:ext cx="8412479" cy="349504"/>
+        </p:xfrm>
+        <a:graphic>
+          <a:graphicData uri="http://schemas.openxmlformats.org/drawingml/2006/table">
+            <a:tbl>
+              <a:tblPr firstRow="1" bandRow="1">
+                <a:tableStyleId>{5C22544A-7EE6-4342-B048-85BDC9FD1C3A}</a:tableStyleId>
+              </a:tblPr>
+              <a:tblGrid>
+                <a:gridCol w="2271369"/>
+                <a:gridCol w="6141110"/>
+              </a:tblGrid>
+              <a:tr h="349504">
+                <a:tc>
+                  <a:txBody>
+                    <a:bodyPr wrap="none"/>
+                    <a:lstStyle/>
+                    <a:p>
+                      <a:pPr>
+                        <a:lnSpc>
+                          <a:spcPts val="1600"/>
+                        </a:lnSpc>
+                        <a:spcAft>
+                          <a:spcPts val="0"/>
+                        </a:spcAft>
+                        <a:defRPr sz="1200" b="0">
+                          <a:solidFill>
+                            <a:srgbClr val="21243A"/>
+                          </a:solidFill>
+                          <a:latin typeface="Arial"/>
+                        </a:defRPr>
+                      </a:pPr>
+                      <a:r>
+                        <a:t>Analysis ID</a:t>
+                      </a:r>
+                    </a:p>
+                  </a:txBody>
+                  <a:tcPr marL="82296" marR="82296" marT="64008" marB="64008">
+                    <a:solidFill>
+                      <a:srgbClr val="FFFFFF"/>
+                    </a:solidFill>
+                  </a:tcPr>
+                </a:tc>
+                <a:tc>
+                  <a:txBody>
+                    <a:bodyPr wrap="none"/>
+                    <a:lstStyle/>
+                    <a:p>
+                      <a:pPr>
+                        <a:lnSpc>
+                          <a:spcPts val="1600"/>
+                        </a:lnSpc>
+                        <a:spcAft>
+                          <a:spcPts val="0"/>
+                        </a:spcAft>
+                        <a:defRPr sz="1200" b="0">
+                          <a:solidFill>
+                            <a:srgbClr val="21243A"/>
+                          </a:solidFill>
+                          <a:latin typeface="Arial"/>
+                        </a:defRPr>
+                      </a:pPr>
+                      <a:r>
+                        <a:t>7e1a6917-52a1-453d-8dda-9c4842232f31</a:t>
+                      </a:r>
+                    </a:p>
+                  </a:txBody>
+                  <a:tcPr marL="82296" marR="82296" marT="64008" marB="64008">
+                    <a:solidFill>
+                      <a:srgbClr val="FFFFFF"/>
+                    </a:solidFill>
+                  </a:tcPr>
+                </a:tc>
+              </a:tr>
+            </a:tbl>
+          </a:graphicData>
+        </a:graphic>
+      </p:graphicFrame>
+      <p:graphicFrame>
+        <p:nvGraphicFramePr>
+          <p:cNvPr id="9" name="Table 8"/>
+          <p:cNvGraphicFramePr>
+            <a:graphicFrameLocks noGrp="1"/>
+          </p:cNvGraphicFramePr>
+          <p:nvPr/>
+        </p:nvGraphicFramePr>
+        <p:xfrm>
+          <a:off x="365760" y="2399792"/>
+          <a:ext cx="8412479" cy="349504"/>
+        </p:xfrm>
+        <a:graphic>
+          <a:graphicData uri="http://schemas.openxmlformats.org/drawingml/2006/table">
+            <a:tbl>
+              <a:tblPr firstRow="1" bandRow="1">
+                <a:tableStyleId>{5C22544A-7EE6-4342-B048-85BDC9FD1C3A}</a:tableStyleId>
+              </a:tblPr>
+              <a:tblGrid>
+                <a:gridCol w="2271369"/>
+                <a:gridCol w="6141110"/>
+              </a:tblGrid>
+              <a:tr h="349504">
+                <a:tc>
+                  <a:txBody>
+                    <a:bodyPr wrap="none"/>
+                    <a:lstStyle/>
+                    <a:p>
+                      <a:pPr>
+                        <a:lnSpc>
+                          <a:spcPts val="1600"/>
+                        </a:lnSpc>
+                        <a:spcAft>
+                          <a:spcPts val="0"/>
+                        </a:spcAft>
+                        <a:defRPr sz="1200" b="0">
+                          <a:solidFill>
+                            <a:srgbClr val="21243A"/>
+                          </a:solidFill>
+                          <a:latin typeface="Arial"/>
+                        </a:defRPr>
+                      </a:pPr>
+                      <a:r>
+                        <a:t>Generated</a:t>
+                      </a:r>
+                    </a:p>
+                  </a:txBody>
+                  <a:tcPr marL="82296" marR="82296" marT="64008" marB="64008">
+                    <a:solidFill>
+                      <a:srgbClr val="F1F7F7"/>
+                    </a:solidFill>
+                  </a:tcPr>
+                </a:tc>
+                <a:tc>
+                  <a:txBody>
+                    <a:bodyPr wrap="none"/>
+                    <a:lstStyle/>
+                    <a:p>
+                      <a:pPr>
+                        <a:lnSpc>
+                          <a:spcPts val="1600"/>
+                        </a:lnSpc>
+                        <a:spcAft>
+                          <a:spcPts val="0"/>
+                        </a:spcAft>
+                        <a:defRPr sz="1200" b="0">
+                          <a:solidFill>
+                            <a:srgbClr val="21243A"/>
+                          </a:solidFill>
+                          <a:latin typeface="Arial"/>
+                        </a:defRPr>
+                      </a:pPr>
+                      <a:r>
+                        <a:t>2026-09-26T22:31:07+00:00</a:t>
+                      </a:r>
+                    </a:p>
+                  </a:txBody>
+                  <a:tcPr marL="82296" marR="82296" marT="64008" marB="64008">
+                    <a:solidFill>
+                      <a:srgbClr val="F1F7F7"/>
+                    </a:solidFill>
+                  </a:tcPr>
+                </a:tc>
+              </a:tr>
+            </a:tbl>
+          </a:graphicData>
+        </a:graphic>
+      </p:graphicFrame>
+      <p:graphicFrame>
+        <p:nvGraphicFramePr>
+          <p:cNvPr id="10" name="Table 9"/>
+          <p:cNvGraphicFramePr>
+            <a:graphicFrameLocks noGrp="1"/>
+          </p:cNvGraphicFramePr>
+          <p:nvPr/>
+        </p:nvGraphicFramePr>
+        <p:xfrm>
+          <a:off x="365760" y="2749296"/>
+          <a:ext cx="8412479" cy="349504"/>
+        </p:xfrm>
+        <a:graphic>
+          <a:graphicData uri="http://schemas.openxmlformats.org/drawingml/2006/table">
+            <a:tbl>
+              <a:tblPr firstRow="1" bandRow="1">
+                <a:tableStyleId>{5C22544A-7EE6-4342-B048-85BDC9FD1C3A}</a:tableStyleId>
+              </a:tblPr>
+              <a:tblGrid>
+                <a:gridCol w="2271369"/>
+                <a:gridCol w="6141110"/>
+              </a:tblGrid>
+              <a:tr h="349504">
+                <a:tc>
+                  <a:txBody>
+                    <a:bodyPr wrap="none"/>
+                    <a:lstStyle/>
+                    <a:p>
+                      <a:pPr>
+                        <a:lnSpc>
+                          <a:spcPts val="1600"/>
+                        </a:lnSpc>
+                        <a:spcAft>
+                          <a:spcPts val="0"/>
+                        </a:spcAft>
+                        <a:defRPr sz="1200" b="0">
+                          <a:solidFill>
+                            <a:srgbClr val="21243A"/>
+                          </a:solidFill>
+                          <a:latin typeface="Arial"/>
+                        </a:defRPr>
+                      </a:pPr>
+                      <a:r>
+                        <a:t>Tool</a:t>
+                      </a:r>
+                    </a:p>
+                  </a:txBody>
+                  <a:tcPr marL="82296" marR="82296" marT="64008" marB="64008">
+                    <a:solidFill>
+                      <a:srgbClr val="FFFFFF"/>
+                    </a:solidFill>
+                  </a:tcPr>
+                </a:tc>
+                <a:tc>
+                  <a:txBody>
+                    <a:bodyPr wrap="none"/>
+                    <a:lstStyle/>
+                    <a:p>
+                      <a:pPr>
+                        <a:lnSpc>
+                          <a:spcPts val="1600"/>
+                        </a:lnSpc>
+                        <a:spcAft>
+                          <a:spcPts val="0"/>
+                        </a:spcAft>
+                        <a:defRPr sz="1200" b="0">
+                          <a:solidFill>
+                            <a:srgbClr val="21243A"/>
+                          </a:solidFill>
+                          <a:latin typeface="Arial"/>
+                        </a:defRPr>
+                      </a:pPr>
+                      <a:r>
+                        <a:t>SDA Vision 0.1.0</a:t>
+                      </a:r>
+                    </a:p>
+                  </a:txBody>
+                  <a:tcPr marL="82296" marR="82296" marT="64008" marB="64008">
+                    <a:solidFill>
+                      <a:srgbClr val="FFFFFF"/>
+                    </a:solidFill>
+                  </a:tcPr>
+                </a:tc>
+              </a:tr>
+            </a:tbl>
+          </a:graphicData>
+        </a:graphic>
+      </p:graphicFrame>
+      <p:graphicFrame>
+        <p:nvGraphicFramePr>
+          <p:cNvPr id="11" name="Table 10"/>
+          <p:cNvGraphicFramePr>
+            <a:graphicFrameLocks noGrp="1"/>
+          </p:cNvGraphicFramePr>
+          <p:nvPr/>
+        </p:nvGraphicFramePr>
+        <p:xfrm>
+          <a:off x="365760" y="3098800"/>
+          <a:ext cx="8412479" cy="349504"/>
+        </p:xfrm>
+        <a:graphic>
+          <a:graphicData uri="http://schemas.openxmlformats.org/drawingml/2006/table">
+            <a:tbl>
+              <a:tblPr firstRow="1" bandRow="1">
+                <a:tableStyleId>{5C22544A-7EE6-4342-B048-85BDC9FD1C3A}</a:tableStyleId>
+              </a:tblPr>
+              <a:tblGrid>
+                <a:gridCol w="2271369"/>
+                <a:gridCol w="6141110"/>
+              </a:tblGrid>
+              <a:tr h="349504">
+                <a:tc>
+                  <a:txBody>
+                    <a:bodyPr wrap="none"/>
+                    <a:lstStyle/>
+                    <a:p>
+                      <a:pPr>
+                        <a:lnSpc>
+                          <a:spcPts val="1600"/>
+                        </a:lnSpc>
+                        <a:spcAft>
+                          <a:spcPts val="0"/>
+                        </a:spcAft>
+                        <a:defRPr sz="1200" b="0">
+                          <a:solidFill>
+                            <a:srgbClr val="21243A"/>
+                          </a:solidFill>
+                          <a:latin typeface="Arial"/>
+                        </a:defRPr>
+                      </a:pPr>
+                      <a:r>
+                        <a:t>Models</a:t>
+                      </a:r>
+                    </a:p>
+                  </a:txBody>
+                  <a:tcPr marL="82296" marR="82296" marT="64008" marB="64008">
+                    <a:solidFill>
+                      <a:srgbClr val="F1F7F7"/>
+                    </a:solidFill>
+                  </a:tcPr>
+                </a:tc>
+                <a:tc>
+                  <a:txBody>
+                    <a:bodyPr wrap="none"/>
+                    <a:lstStyle/>
+                    <a:p>
+                      <a:pPr>
+                        <a:lnSpc>
+                          <a:spcPts val="1600"/>
+                        </a:lnSpc>
+                        <a:spcAft>
+                          <a:spcPts val="0"/>
+                        </a:spcAft>
+                        <a:defRPr sz="1200" b="0">
+                          <a:solidFill>
+                            <a:srgbClr val="21243A"/>
+                          </a:solidFill>
+                          <a:latin typeface="Arial"/>
+                        </a:defRPr>
+                      </a:pPr>
+                      <a:r>
+                        <a:t>claude-opus-5-5, gemini-3.8-flash, gpt-6-astra</a:t>
+                      </a:r>
+                    </a:p>
+                  </a:txBody>
+                  <a:tcPr marL="82296" marR="82296" marT="64008" marB="64008">
+                    <a:solidFill>
+                      <a:srgbClr val="F1F7F7"/>
+                    </a:solidFill>
+                  </a:tcPr>
+                </a:tc>
+              </a:tr>
+            </a:tbl>
+          </a:graphicData>
+        </a:graphic>
+      </p:graphicFrame>
+      <p:graphicFrame>
+        <p:nvGraphicFramePr>
+          <p:cNvPr id="12" name="Table 11"/>
+          <p:cNvGraphicFramePr>
+            <a:graphicFrameLocks noGrp="1"/>
+          </p:cNvGraphicFramePr>
+          <p:nvPr/>
+        </p:nvGraphicFramePr>
+        <p:xfrm>
+          <a:off x="365760" y="3448304"/>
+          <a:ext cx="8412479" cy="349504"/>
+        </p:xfrm>
+        <a:graphic>
+          <a:graphicData uri="http://schemas.openxmlformats.org/drawingml/2006/table">
+            <a:tbl>
+              <a:tblPr firstRow="1" bandRow="1">
+                <a:tableStyleId>{5C22544A-7EE6-4342-B048-85BDC9FD1C3A}</a:tableStyleId>
+              </a:tblPr>
+              <a:tblGrid>
+                <a:gridCol w="2271369"/>
+                <a:gridCol w="6141110"/>
+              </a:tblGrid>
+              <a:tr h="349504">
+                <a:tc>
+                  <a:txBody>
+                    <a:bodyPr wrap="none"/>
+                    <a:lstStyle/>
+                    <a:p>
+                      <a:pPr>
+                        <a:lnSpc>
+                          <a:spcPts val="1600"/>
+                        </a:lnSpc>
+                        <a:spcAft>
+                          <a:spcPts val="0"/>
+                        </a:spcAft>
+                        <a:defRPr sz="1200" b="0">
+                          <a:solidFill>
+                            <a:srgbClr val="21243A"/>
+                          </a:solidFill>
+                          <a:latin typeface="Arial"/>
+                        </a:defRPr>
+                      </a:pPr>
+                      <a:r>
+                        <a:t>Method version</a:t>
+                      </a:r>
+                    </a:p>
+                  </a:txBody>
+                  <a:tcPr marL="82296" marR="82296" marT="64008" marB="64008">
+                    <a:solidFill>
+                      <a:srgbClr val="FFFFFF"/>
+                    </a:solidFill>
+                  </a:tcPr>
+                </a:tc>
+                <a:tc>
+                  <a:txBody>
+                    <a:bodyPr wrap="none"/>
+                    <a:lstStyle/>
+                    <a:p>
+                      <a:pPr>
+                        <a:lnSpc>
+                          <a:spcPts val="1600"/>
+                        </a:lnSpc>
+                        <a:spcAft>
+                          <a:spcPts val="0"/>
+                        </a:spcAft>
+                        <a:defRPr sz="1200" b="0">
+                          <a:solidFill>
+                            <a:srgbClr val="21243A"/>
+                          </a:solidFill>
+                          <a:latin typeface="Arial"/>
+                        </a:defRPr>
+                      </a:pPr>
+                      <a:r>
+                        <a:t>pdf-preparation-2026-09-26.1</a:t>
+                      </a:r>
+                    </a:p>
+                  </a:txBody>
+                  <a:tcPr marL="82296" marR="82296" marT="64008" marB="64008">
+                    <a:solidFill>
+                      <a:srgbClr val="FFFFFF"/>
+                    </a:solidFill>
+                  </a:tcPr>
+                </a:tc>
+              </a:tr>
+            </a:tbl>
+          </a:graphicData>
+        </a:graphic>
+      </p:graphicFrame>
+      <p:graphicFrame>
+        <p:nvGraphicFramePr>
+          <p:cNvPr id="13" name="Table 12"/>
+          <p:cNvGraphicFramePr>
+            <a:graphicFrameLocks noGrp="1"/>
+          </p:cNvGraphicFramePr>
+          <p:nvPr/>
+        </p:nvGraphicFramePr>
+        <p:xfrm>
+          <a:off x="365760" y="3797808"/>
+          <a:ext cx="8412479" cy="349504"/>
+        </p:xfrm>
+        <a:graphic>
+          <a:graphicData uri="http://schemas.openxmlformats.org/drawingml/2006/table">
+            <a:tbl>
+              <a:tblPr firstRow="1" bandRow="1">
+                <a:tableStyleId>{5C22544A-7EE6-4342-B048-85BDC9FD1C3A}</a:tableStyleId>
+              </a:tblPr>
+              <a:tblGrid>
+                <a:gridCol w="2271369"/>
+                <a:gridCol w="6141110"/>
+              </a:tblGrid>
+              <a:tr h="349504">
+                <a:tc>
+                  <a:txBody>
+                    <a:bodyPr wrap="none"/>
+                    <a:lstStyle/>
+                    <a:p>
+                      <a:pPr>
+                        <a:lnSpc>
+                          <a:spcPts val="1600"/>
+                        </a:lnSpc>
+                        <a:spcAft>
+                          <a:spcPts val="0"/>
+                        </a:spcAft>
+                        <a:defRPr sz="1200" b="0">
+                          <a:solidFill>
+                            <a:srgbClr val="21243A"/>
+                          </a:solidFill>
+                          <a:latin typeface="Arial"/>
+                        </a:defRPr>
+                      </a:pPr>
+                      <a:r>
+                        <a:t>Analysis lens</a:t>
+                      </a:r>
+                    </a:p>
+                  </a:txBody>
+                  <a:tcPr marL="82296" marR="82296" marT="64008" marB="64008">
+                    <a:solidFill>
+                      <a:srgbClr val="F1F7F7"/>
+                    </a:solidFill>
+                  </a:tcPr>
+                </a:tc>
+                <a:tc>
+                  <a:txBody>
+                    <a:bodyPr wrap="none"/>
+                    <a:lstStyle/>
+                    <a:p>
+                      <a:pPr>
+                        <a:lnSpc>
+                          <a:spcPts val="1600"/>
+                        </a:lnSpc>
+                        <a:spcAft>
+                          <a:spcPts val="0"/>
+                        </a:spcAft>
+                        <a:defRPr sz="1200" b="0">
+                          <a:solidFill>
+                            <a:srgbClr val="21243A"/>
+                          </a:solidFill>
+                          <a:latin typeface="Arial"/>
+                        </a:defRPr>
+                      </a:pPr>
+                      <a:r>
+                        <a:t>general</a:t>
+                      </a:r>
+                    </a:p>
+                  </a:txBody>
+                  <a:tcPr marL="82296" marR="82296" marT="64008" marB="64008">
+                    <a:solidFill>
+                      <a:srgbClr val="F1F7F7"/>
+                    </a:solidFill>
+                  </a:tcPr>
+                </a:tc>
+              </a:tr>
+            </a:tbl>
+          </a:graphicData>
+        </a:graphic>
+      </p:graphicFrame>
+      <p:graphicFrame>
+        <p:nvGraphicFramePr>
+          <p:cNvPr id="14" name="Table 13"/>
+          <p:cNvGraphicFramePr>
+            <a:graphicFrameLocks noGrp="1"/>
+          </p:cNvGraphicFramePr>
+          <p:nvPr/>
+        </p:nvGraphicFramePr>
+        <p:xfrm>
+          <a:off x="365760" y="4147312"/>
+          <a:ext cx="8412479" cy="349504"/>
+        </p:xfrm>
+        <a:graphic>
+          <a:graphicData uri="http://schemas.openxmlformats.org/drawingml/2006/table">
+            <a:tbl>
+              <a:tblPr firstRow="1" bandRow="1">
+                <a:tableStyleId>{5C22544A-7EE6-4342-B048-85BDC9FD1C3A}</a:tableStyleId>
+              </a:tblPr>
+              <a:tblGrid>
+                <a:gridCol w="2271369"/>
+                <a:gridCol w="6141110"/>
+              </a:tblGrid>
+              <a:tr h="349504">
+                <a:tc>
+                  <a:txBody>
+                    <a:bodyPr wrap="none"/>
+                    <a:lstStyle/>
+                    <a:p>
+                      <a:pPr>
+                        <a:lnSpc>
+                          <a:spcPts val="1600"/>
+                        </a:lnSpc>
+                        <a:spcAft>
+                          <a:spcPts val="0"/>
+                        </a:spcAft>
+                        <a:defRPr sz="1200" b="0">
+                          <a:solidFill>
+                            <a:srgbClr val="21243A"/>
+                          </a:solidFill>
+                          <a:latin typeface="Arial"/>
+                        </a:defRPr>
+                      </a:pPr>
+                      <a:r>
+                        <a:t>Original SHA-256</a:t>
+                      </a:r>
+                    </a:p>
+                  </a:txBody>
+                  <a:tcPr marL="82296" marR="82296" marT="64008" marB="64008">
+                    <a:solidFill>
+                      <a:srgbClr val="FFFFFF"/>
+                    </a:solidFill>
+                  </a:tcPr>
+                </a:tc>
+                <a:tc>
+                  <a:txBody>
+                    <a:bodyPr wrap="none"/>
+                    <a:lstStyle/>
+                    <a:p>
+                      <a:pPr>
+                        <a:lnSpc>
+                          <a:spcPts val="1600"/>
+                        </a:lnSpc>
+                        <a:spcAft>
+                          <a:spcPts val="0"/>
+                        </a:spcAft>
+                        <a:defRPr sz="1200" b="0">
+                          <a:solidFill>
+                            <a:srgbClr val="21243A"/>
+                          </a:solidFill>
+                          <a:latin typeface="Arial"/>
+                        </a:defRPr>
+                      </a:pPr>
+                      <a:r>
+                        <a:t>58663a6a9e4b634bdb703ead0aaa7cd6dce7fbf97e70c3c1cc61b3311b94c0b4</a:t>
+                      </a:r>
+                    </a:p>
+                  </a:txBody>
+                  <a:tcPr marL="82296" marR="82296" marT="64008" marB="64008">
+                    <a:solidFill>
+                      <a:srgbClr val="FFFFFF"/>
+                    </a:solidFill>
+                  </a:tcPr>
+                </a:tc>
+              </a:tr>
+            </a:tbl>
+          </a:graphicData>
+        </a:graphic>
+      </p:graphicFrame>
+      <p:graphicFrame>
+        <p:nvGraphicFramePr>
+          <p:cNvPr id="15" name="Table 14"/>
+          <p:cNvGraphicFramePr>
+            <a:graphicFrameLocks noGrp="1"/>
+          </p:cNvGraphicFramePr>
+          <p:nvPr/>
+        </p:nvGraphicFramePr>
+        <p:xfrm>
+          <a:off x="365760" y="4496816"/>
+          <a:ext cx="8412479" cy="349504"/>
+        </p:xfrm>
+        <a:graphic>
+          <a:graphicData uri="http://schemas.openxmlformats.org/drawingml/2006/table">
+            <a:tbl>
+              <a:tblPr firstRow="1" bandRow="1">
+                <a:tableStyleId>{5C22544A-7EE6-4342-B048-85BDC9FD1C3A}</a:tableStyleId>
+              </a:tblPr>
+              <a:tblGrid>
+                <a:gridCol w="2271369"/>
+                <a:gridCol w="6141110"/>
+              </a:tblGrid>
+              <a:tr h="349504">
+                <a:tc>
+                  <a:txBody>
+                    <a:bodyPr wrap="none"/>
+                    <a:lstStyle/>
+                    <a:p>
+                      <a:pPr>
+                        <a:lnSpc>
+                          <a:spcPts val="1600"/>
+                        </a:lnSpc>
+                        <a:spcAft>
+                          <a:spcPts val="0"/>
+                        </a:spcAft>
+                        <a:defRPr sz="1200" b="0">
+                          <a:solidFill>
+                            <a:srgbClr val="21243A"/>
+                          </a:solidFill>
+                          <a:latin typeface="Arial"/>
+                        </a:defRPr>
+                      </a:pPr>
+                      <a:r>
+                        <a:t>Ingestion note 1</a:t>
+                      </a:r>
+                    </a:p>
+                  </a:txBody>
+                  <a:tcPr marL="82296" marR="82296" marT="64008" marB="64008">
+                    <a:solidFill>
+                      <a:srgbClr val="F1F7F7"/>
+                    </a:solidFill>
+                  </a:tcPr>
+                </a:tc>
+                <a:tc>
+                  <a:txBody>
+                    <a:bodyPr wrap="none"/>
+                    <a:lstStyle/>
+                    <a:p>
+                      <a:pPr>
+                        <a:lnSpc>
+                          <a:spcPts val="1600"/>
+                        </a:lnSpc>
+                        <a:spcAft>
+                          <a:spcPts val="0"/>
+                        </a:spcAft>
+                        <a:defRPr sz="1200" b="0">
+                          <a:solidFill>
+                            <a:srgbClr val="21243A"/>
+                          </a:solidFill>
+                          <a:latin typeface="Arial"/>
+                        </a:defRPr>
+                      </a:pPr>
+                      <a:r>
+                        <a:t>Transcoded to 5737 KB mono 16 kHz (≤1800s).</a:t>
+                      </a:r>
+                    </a:p>
+                  </a:txBody>
+                  <a:tcPr marL="82296" marR="82296" marT="64008" marB="64008">
+                    <a:solidFill>
+                      <a:srgbClr val="F1F7F7"/>
+                    </a:solidFill>
+                  </a:tcPr>
+                </a:tc>
+              </a:tr>
+            </a:tbl>
+          </a:graphicData>
+        </a:graphic>
+      </p:graphicFrame>
+      <p:graphicFrame>
+        <p:nvGraphicFramePr>
+          <p:cNvPr id="16" name="Table 15"/>
+          <p:cNvGraphicFramePr>
+            <a:graphicFrameLocks noGrp="1"/>
+          </p:cNvGraphicFramePr>
+          <p:nvPr/>
+        </p:nvGraphicFramePr>
+        <p:xfrm>
+          <a:off x="365760" y="4846320"/>
+          <a:ext cx="8412479" cy="349504"/>
+        </p:xfrm>
+        <a:graphic>
+          <a:graphicData uri="http://schemas.openxmlformats.org/drawingml/2006/table">
+            <a:tbl>
+              <a:tblPr firstRow="1" bandRow="1">
+                <a:tableStyleId>{5C22544A-7EE6-4342-B048-85BDC9FD1C3A}</a:tableStyleId>
+              </a:tblPr>
+              <a:tblGrid>
+                <a:gridCol w="2271369"/>
+                <a:gridCol w="6141110"/>
+              </a:tblGrid>
+              <a:tr h="349504">
+                <a:tc>
+                  <a:txBody>
+                    <a:bodyPr wrap="none"/>
+                    <a:lstStyle/>
+                    <a:p>
+                      <a:pPr>
+                        <a:lnSpc>
+                          <a:spcPts val="1600"/>
+                        </a:lnSpc>
+                        <a:spcAft>
+                          <a:spcPts val="0"/>
+                        </a:spcAft>
+                        <a:defRPr sz="1200" b="0">
+                          <a:solidFill>
+                            <a:srgbClr val="21243A"/>
+                          </a:solidFill>
+                          <a:latin typeface="Arial"/>
+                        </a:defRPr>
+                      </a:pPr>
+                      <a:r>
+                        <a:t>Ingestion note 2</a:t>
+                      </a:r>
+                    </a:p>
+                  </a:txBody>
+                  <a:tcPr marL="82296" marR="82296" marT="64008" marB="64008">
+                    <a:solidFill>
+                      <a:srgbClr val="FFFFFF"/>
+                    </a:solidFill>
+                  </a:tcPr>
+                </a:tc>
+                <a:tc>
+                  <a:txBody>
+                    <a:bodyPr wrap="none"/>
+                    <a:lstStyle/>
+                    <a:p>
+                      <a:pPr>
+                        <a:lnSpc>
+                          <a:spcPts val="1600"/>
+                        </a:lnSpc>
+                        <a:spcAft>
+                          <a:spcPts val="0"/>
+                        </a:spcAft>
+                        <a:defRPr sz="1200" b="0">
+                          <a:solidFill>
+                            <a:srgbClr val="21243A"/>
+                          </a:solidFill>
+                          <a:latin typeface="Arial"/>
+                        </a:defRPr>
+                      </a:pPr>
+                      <a:r>
+                        <a:t>Transcribed with Gemini.</a:t>
+                      </a:r>
+                    </a:p>
+                  </a:txBody>
+                  <a:tcPr marL="82296" marR="82296" marT="64008" marB="64008">
+                    <a:solidFill>
+                      <a:srgbClr val="FFFFFF"/>
+                    </a:solidFill>
+                  </a:tcPr>
+                </a:tc>
+              </a:tr>
+            </a:tbl>
+          </a:graphicData>
+        </a:graphic>
+      </p:graphicFrame>
+      <p:graphicFrame>
+        <p:nvGraphicFramePr>
+          <p:cNvPr id="17" name="Table 16"/>
+          <p:cNvGraphicFramePr>
+            <a:graphicFrameLocks noGrp="1"/>
+          </p:cNvGraphicFramePr>
+          <p:nvPr/>
+        </p:nvGraphicFramePr>
+        <p:xfrm>
+          <a:off x="365760" y="5195824"/>
+          <a:ext cx="8412479" cy="755904"/>
+        </p:xfrm>
+        <a:graphic>
+          <a:graphicData uri="http://schemas.openxmlformats.org/drawingml/2006/table">
+            <a:tbl>
+              <a:tblPr firstRow="1" bandRow="1">
+                <a:tableStyleId>{5C22544A-7EE6-4342-B048-85BDC9FD1C3A}</a:tableStyleId>
+              </a:tblPr>
+              <a:tblGrid>
+                <a:gridCol w="2271369"/>
+                <a:gridCol w="6141110"/>
+              </a:tblGrid>
+              <a:tr h="755904">
+                <a:tc>
+                  <a:txBody>
+                    <a:bodyPr wrap="none"/>
+                    <a:lstStyle/>
+                    <a:p>
+                      <a:pPr>
+                        <a:lnSpc>
+                          <a:spcPts val="1600"/>
+                        </a:lnSpc>
+                        <a:spcAft>
+                          <a:spcPts val="0"/>
+                        </a:spcAft>
+                        <a:defRPr sz="1200" b="0">
+                          <a:solidFill>
+                            <a:srgbClr val="21243A"/>
+                          </a:solidFill>
+                          <a:latin typeface="Arial"/>
+                        </a:defRPr>
+                      </a:pPr>
+                      <a:r>
+                        <a:t>Ingestion note 3</a:t>
+                      </a:r>
+                    </a:p>
+                  </a:txBody>
+                  <a:tcPr marL="82296" marR="82296" marT="64008" marB="64008">
+                    <a:solidFill>
+                      <a:srgbClr val="F1F7F7"/>
+                    </a:solidFill>
+                  </a:tcPr>
+                </a:tc>
+                <a:tc>
+                  <a:txBody>
+                    <a:bodyPr wrap="none"/>
+                    <a:lstStyle/>
+                    <a:p>
+                      <a:pPr>
+                        <a:lnSpc>
+                          <a:spcPts val="1600"/>
+                        </a:lnSpc>
+                        <a:spcAft>
+                          <a:spcPts val="0"/>
+                        </a:spcAft>
+                        <a:defRPr sz="1200" b="0">
+                          <a:solidFill>
+                            <a:srgbClr val="21243A"/>
+                          </a:solidFill>
+                          <a:latin typeface="Arial"/>
+                        </a:defRPr>
+                      </a:pPr>
+                      <a:r>
+                        <a:t>Standalone-audio content assessment covers the transcript. AI-origin detection</a:t>
+                      </a:r>
+                    </a:p>
+                    <a:p>
+                      <a:pPr>
+                        <a:lnSpc>
+                          <a:spcPts val="1600"/>
+                        </a:lnSpc>
+                        <a:spcAft>
+                          <a:spcPts val="0"/>
+                        </a:spcAft>
+                        <a:defRPr sz="1200" b="0">
+                          <a:solidFill>
+                            <a:srgbClr val="21243A"/>
+                          </a:solidFill>
+                          <a:latin typeface="Arial"/>
+                        </a:defRPr>
+                      </a:pPr>
+                      <a:r>
+                        <a:t>from sound is outside this assessment. Original-file C2PA was checked before</a:t>
+                      </a:r>
+                    </a:p>
+                    <a:p>
+                      <a:pPr>
+                        <a:lnSpc>
+                          <a:spcPts val="1600"/>
+                        </a:lnSpc>
+                        <a:spcAft>
+                          <a:spcPts val="0"/>
+                        </a:spcAft>
+                        <a:defRPr sz="1200" b="0">
+                          <a:solidFill>
+                            <a:srgbClr val="21243A"/>
+                          </a:solidFill>
+                          <a:latin typeface="Arial"/>
+                        </a:defRPr>
+                      </a:pPr>
+                      <a:r>
+                        <a:t>transcription and is reported separately.</a:t>
+                      </a:r>
+                    </a:p>
+                  </a:txBody>
+                  <a:tcPr marL="82296" marR="82296" marT="64008" marB="64008">
+                    <a:solidFill>
+                      <a:srgbClr val="F1F7F7"/>
+                    </a:solidFill>
+                  </a:tcPr>
+                </a:tc>
+              </a:tr>
+            </a:tbl>
+          </a:graphicData>
+        </a:graphic>
+      </p:graphicFrame>
+    </p:spTree>
+  </p:cSld>
+  <p:clrMapOvr>
+    <a:masterClrMapping/>
+  </p:clrMapOvr>
+</p:sld>
+</file>
+
+<file path=ppt/slides/slide25.xml><?xml version="1.0" encoding="utf-8"?>
+<p:sld xmlns:a="http://schemas.openxmlformats.org/drawingml/2006/main" xmlns:p="http://schemas.openxmlformats.org/presentationml/2006/main" xmlns:r="http://schemas.openxmlformats.org/officeDocument/2006/relationships">
+  <p:cSld>
+    <p:spTree>
+      <p:nvGrpSpPr>
+        <p:cNvPr id="1" name=""/>
+        <p:cNvGrpSpPr/>
+        <p:nvPr/>
+      </p:nvGrpSpPr>
+      <p:grpSpPr/>
+      <p:sp>
+        <p:nvSpPr>
+          <p:cNvPr id="2" name="TextBox 1"/>
+          <p:cNvSpPr txBox="1"/>
+          <p:nvPr/>
+        </p:nvSpPr>
+        <p:spPr>
+          <a:xfrm>
+            <a:off x="365760" y="219456"/>
+            <a:ext cx="8412480" cy="228600"/>
+          </a:xfrm>
+          <a:prstGeom prst="rect">
+            <a:avLst/>
+          </a:prstGeom>
+          <a:noFill/>
+        </p:spPr>
+        <p:txBody>
+          <a:bodyPr wrap="square" lIns="0" rIns="0" tIns="0" bIns="0">
+            <a:spAutoFit/>
+          </a:bodyPr>
+          <a:lstStyle/>
+          <a:p>
+            <a:pPr>
+              <a:lnSpc>
+                <a:spcPct val="115000"/>
+              </a:lnSpc>
+              <a:spcAft>
+                <a:spcPts val="0"/>
+              </a:spcAft>
+              <a:defRPr sz="1100" b="1">
+                <a:solidFill>
+                  <a:srgbClr val="C5006A"/>
+                </a:solidFill>
+                <a:latin typeface="Arial"/>
+              </a:defRPr>
+            </a:pPr>
+            <a:r>
+              <a:t>SDA VISION / RESEARCH REPORT</a:t>
+            </a:r>
+          </a:p>
+        </p:txBody>
+      </p:sp>
+      <p:sp>
+        <p:nvSpPr>
+          <p:cNvPr id="3" name="TextBox 2"/>
+          <p:cNvSpPr txBox="1"/>
+          <p:nvPr/>
+        </p:nvSpPr>
+        <p:spPr>
+          <a:xfrm>
+            <a:off x="365760" y="658368"/>
+            <a:ext cx="8412480" cy="612648"/>
+          </a:xfrm>
+          <a:prstGeom prst="rect">
+            <a:avLst/>
+          </a:prstGeom>
+          <a:noFill/>
+        </p:spPr>
+        <p:txBody>
+          <a:bodyPr wrap="square" lIns="0" rIns="0" tIns="0" bIns="0">
+            <a:spAutoFit/>
+          </a:bodyPr>
+          <a:lstStyle/>
+          <a:p>
+            <a:pPr>
+              <a:lnSpc>
+                <a:spcPct val="115000"/>
+              </a:lnSpc>
+              <a:spcAft>
+                <a:spcPts val="0"/>
+              </a:spcAft>
+              <a:defRPr sz="2200" b="1">
+                <a:solidFill>
+                  <a:srgbClr val="21243A"/>
+                </a:solidFill>
+                <a:latin typeface="Arial"/>
+              </a:defRPr>
+            </a:pPr>
+            <a:r>
+              <a:t>File and analysis record (continued)</a:t>
+            </a:r>
+          </a:p>
+        </p:txBody>
+      </p:sp>
+      <p:sp>
+        <p:nvSpPr>
+          <p:cNvPr id="4" name="TextBox 3"/>
+          <p:cNvSpPr txBox="1"/>
+          <p:nvPr/>
+        </p:nvSpPr>
+        <p:spPr>
+          <a:xfrm>
+            <a:off x="365760" y="6291072"/>
+            <a:ext cx="8001000" cy="365760"/>
+          </a:xfrm>
+          <a:prstGeom prst="rect">
+            <a:avLst/>
+          </a:prstGeom>
+          <a:noFill/>
+        </p:spPr>
+        <p:txBody>
+          <a:bodyPr wrap="square" lIns="0" rIns="0" tIns="0" bIns="0">
+            <a:spAutoFit/>
+          </a:bodyPr>
+          <a:lstStyle/>
+          <a:p>
+            <a:pPr>
+              <a:lnSpc>
+                <a:spcPct val="115000"/>
+              </a:lnSpc>
+              <a:spcAft>
+                <a:spcPts val="0"/>
+              </a:spcAft>
+              <a:defRPr sz="800" b="0">
+                <a:solidFill>
+                  <a:srgbClr val="545B6D"/>
+                </a:solidFill>
+                <a:latin typeface="Arial"/>
+              </a:defRPr>
+            </a:pPr>
+            <a:r>
+              <a:t>Research assessment. Ratings are not calibrated probabilities. Acoustic AI-origin detection: outside scope.</a:t>
+            </a:r>
+          </a:p>
+        </p:txBody>
+      </p:sp>
+      <p:sp>
+        <p:nvSpPr>
+          <p:cNvPr id="5" name="TextBox 4"/>
+          <p:cNvSpPr txBox="1"/>
+          <p:nvPr/>
+        </p:nvSpPr>
+        <p:spPr>
+          <a:xfrm>
+            <a:off x="8394192" y="6318504"/>
+            <a:ext cx="365760" cy="228600"/>
+          </a:xfrm>
+          <a:prstGeom prst="rect">
+            <a:avLst/>
+          </a:prstGeom>
+          <a:noFill/>
+        </p:spPr>
+        <p:txBody>
+          <a:bodyPr wrap="square" lIns="0" rIns="0" tIns="0" bIns="0">
+            <a:spAutoFit/>
+          </a:bodyPr>
+          <a:lstStyle/>
+          <a:p>
+            <a:pPr>
+              <a:lnSpc>
+                <a:spcPct val="115000"/>
+              </a:lnSpc>
+              <a:spcAft>
+                <a:spcPts val="0"/>
+              </a:spcAft>
+              <a:defRPr sz="900" b="0">
+                <a:solidFill>
+                  <a:srgbClr val="545B6D"/>
+                </a:solidFill>
+                <a:latin typeface="Arial"/>
+              </a:defRPr>
+            </a:pPr>
+            <a:r>
+              <a:t>25</a:t>
             </a:r>
           </a:p>
         </p:txBody>

--- a/site/showcase/exports/podcast.pptx
+++ b/site/showcase/exports/podcast.pptx
@@ -2051,7 +2051,7 @@
           </a:p>
           <a:p>
             <a:r>
-              <a:t>Software (Harvard) | Martin, S. (2026) SDA Vision: Synthetic-media Discourse Analysis (version 0.1.0) [Computer software]. Manchester Metropolitan University. Available at: https://sdavision.io/</a:t>
+              <a:t>Software citation | Martin, S. (2026) SDA Vision: Synthetic-media Discourse Analysis (version 0.1.0) [Computer software]. Manchester Metropolitan University. Available at: https://sdavision.io/</a:t>
             </a:r>
           </a:p>
           <a:p>
@@ -17070,7 +17070,7 @@
                         </a:defRPr>
                       </a:pPr>
                       <a:r>
-                        <a:t>Software (Harvard)</a:t>
+                        <a:t>Software citation</a:t>
                       </a:r>
                     </a:p>
                   </a:txBody>

--- a/site/showcase/exports/podcast.pptx
+++ b/site/showcase/exports/podcast.pptx
@@ -29,7 +29,6 @@
     <p:sldId id="277" r:id="rId29"/>
     <p:sldId id="278" r:id="rId30"/>
     <p:sldId id="279" r:id="rId31"/>
-    <p:sldId id="280" r:id="rId32"/>
   </p:sldIdLst>
   <p:sldSz cx="9144000" cy="6858000" type="screen4x3"/>
   <p:notesSz cx="6858000" cy="9144000"/>
@@ -2046,27 +2045,82 @@
           </a:p>
           <a:p>
             <a:r>
-              <a:t>Cite this analysis</a:t>
-            </a:r>
-          </a:p>
-          <a:p>
-            <a:r>
-              <a:t>Software citation | Martin, S. (2026) SDA Vision: Synthetic-media Discourse Analysis (version 0.1.0) [Computer software]. Manchester Metropolitan University. Available at: https://sdavision.io/</a:t>
-            </a:r>
-          </a:p>
-          <a:p>
-            <a:r>
-              <a:t>Software creator | Dr Sam Martin, Smart Data Research UK (UKRI) Fellow, Manchester Metropolitan University (MMU). ORCID: https://orcid.org/0000-0002-4466-8374.</a:t>
-            </a:r>
-          </a:p>
-          <a:p>
-            <a:r>
-              <a:t>Funding acknowledgement | This work was supported by Smart Data Research UK, a UKRI investment; Grant number UKRI4010.</a:t>
-            </a:r>
-          </a:p>
-          <a:p>
-            <a:r>
-              <a:t>Analysis record | File: podcast.m4a; media type: audio; recorded at: 2026-09-26T22:31:07+00:00; models: claude-opus-5-5, gemini-3.8-flash, gpt-6-astra.</a:t>
+              <a:t>File and analysis record</a:t>
+            </a:r>
+          </a:p>
+          <a:p>
+            <a:r>
+              <a:t>File | podcast.m4a</a:t>
+            </a:r>
+          </a:p>
+          <a:p>
+            <a:r>
+              <a:t>Analysis ID | 7e1a6917-52a1-453d-8dda-9c4842232f31</a:t>
+            </a:r>
+          </a:p>
+          <a:p>
+            <a:r>
+              <a:t>Generated | 2026-09-26T22:31:07+00:00</a:t>
+            </a:r>
+          </a:p>
+          <a:p>
+            <a:r>
+              <a:t>Tool | SDA Vision 0.1.0</a:t>
+            </a:r>
+          </a:p>
+          <a:p>
+            <a:r>
+              <a:t>Models | claude-opus-5-5, gemini-3.8-flash, gpt-6-astra</a:t>
+            </a:r>
+          </a:p>
+          <a:p>
+            <a:r>
+              <a:t>Method version | pdf-preparation-2026-09-26.1</a:t>
+            </a:r>
+          </a:p>
+          <a:p>
+            <a:r>
+              <a:t>Analysis lens | general</a:t>
+            </a:r>
+          </a:p>
+          <a:p>
+            <a:r>
+              <a:t>Original SHA-256 | 58663a6a9e4b634bdb703ead0aaa7cd6dce7fbf97e70c3c1cc61b3311b94c0b4</a:t>
+            </a:r>
+          </a:p>
+          <a:p>
+            <a:r>
+              <a:t>Ingestion note 1 | Transcoded to 5737 KB mono 16 kHz (≤1800s).</a:t>
+            </a:r>
+          </a:p>
+          <a:p>
+            <a:r>
+              <a:t>Ingestion note 2 | Transcribed with Gemini.</a:t>
+            </a:r>
+          </a:p>
+          <a:p>
+            <a:r>
+              <a:t>Ingestion note 3 | Standalone-audio content assessment covers the transcript. AI-origin detection from sound is outside this assessment. Original-file C2PA was checked before transcription and is reported separately.</a:t>
+            </a:r>
+          </a:p>
+          <a:p>
+            <a:r>
+              <a:t>Ingestion note 4 | Audio tracks inspected locally. Soundtrack uploads require a separate optional check; AI-origin detection from sound is outside this workflow.</a:t>
+            </a:r>
+          </a:p>
+          <a:p>
+            <a:r>
+              <a:t>Ingestion note 5 | Fresh provider replies acquired for eleven-examples-refresh-20260926-r1; report assembled locally from the saved responses without further API calls.</a:t>
+            </a:r>
+          </a:p>
+          <a:p>
+            <a:r>
+              <a:t>Ingestion note 6 | Transcript analysis used the first 12000 characters of a fresh 25985-character transcription; this report retains its first 4000 characters. Sound-origin detection is outside this check.</a:t>
+            </a:r>
+          </a:p>
+          <a:p>
+            <a:r>
+              <a:t>Ingestion note 7 | Provider latency values are restored from the acquisition receipts (maximum sampled-frame latency per provider); raw replies and assessment results are unchanged by this bookkeeping step.</a:t>
             </a:r>
           </a:p>
         </p:txBody>
@@ -2092,156 +2146,6 @@
 </file>
 
 <file path=ppt/notesSlides/notesSlide24.xml><?xml version="1.0" encoding="utf-8"?>
-<p:notes xmlns:a="http://schemas.openxmlformats.org/drawingml/2006/main" xmlns:p="http://schemas.openxmlformats.org/presentationml/2006/main" xmlns:r="http://schemas.openxmlformats.org/officeDocument/2006/relationships">
-  <p:cSld>
-    <p:spTree>
-      <p:nvGrpSpPr>
-        <p:cNvPr id="1" name=""/>
-        <p:cNvGrpSpPr/>
-        <p:nvPr/>
-      </p:nvGrpSpPr>
-      <p:grpSpPr>
-        <a:xfrm>
-          <a:off x="0" y="0"/>
-          <a:ext cx="0" cy="0"/>
-          <a:chOff x="0" y="0"/>
-          <a:chExt cx="0" cy="0"/>
-        </a:xfrm>
-      </p:grpSpPr>
-      <p:sp>
-        <p:nvSpPr>
-          <p:cNvPr id="2" name="Slide Image Placeholder 1"/>
-          <p:cNvSpPr>
-            <a:spLocks noGrp="1"/>
-          </p:cNvSpPr>
-          <p:nvPr>
-            <p:ph type="sldImg" idx="2"/>
-          </p:nvPr>
-        </p:nvSpPr>
-        <p:spPr/>
-      </p:sp>
-      <p:sp>
-        <p:nvSpPr>
-          <p:cNvPr id="3" name="Notes Placeholder 2"/>
-          <p:cNvSpPr>
-            <a:spLocks noGrp="1"/>
-          </p:cNvSpPr>
-          <p:nvPr>
-            <p:ph type="body" idx="3" sz="quarter"/>
-          </p:nvPr>
-        </p:nvSpPr>
-        <p:spPr/>
-        <p:txBody>
-          <a:bodyPr/>
-          <a:lstStyle/>
-          <a:p>
-            <a:r>
-              <a:t>podcast.m4a</a:t>
-            </a:r>
-          </a:p>
-          <a:p>
-            <a:r>
-              <a:t>File and analysis record</a:t>
-            </a:r>
-          </a:p>
-          <a:p>
-            <a:r>
-              <a:t>File | podcast.m4a</a:t>
-            </a:r>
-          </a:p>
-          <a:p>
-            <a:r>
-              <a:t>Analysis ID | 7e1a6917-52a1-453d-8dda-9c4842232f31</a:t>
-            </a:r>
-          </a:p>
-          <a:p>
-            <a:r>
-              <a:t>Generated | 2026-09-26T22:31:07+00:00</a:t>
-            </a:r>
-          </a:p>
-          <a:p>
-            <a:r>
-              <a:t>Tool | SDA Vision 0.1.0</a:t>
-            </a:r>
-          </a:p>
-          <a:p>
-            <a:r>
-              <a:t>Models | claude-opus-5-5, gemini-3.8-flash, gpt-6-astra</a:t>
-            </a:r>
-          </a:p>
-          <a:p>
-            <a:r>
-              <a:t>Method version | pdf-preparation-2026-09-26.1</a:t>
-            </a:r>
-          </a:p>
-          <a:p>
-            <a:r>
-              <a:t>Analysis lens | general</a:t>
-            </a:r>
-          </a:p>
-          <a:p>
-            <a:r>
-              <a:t>Original SHA-256 | 58663a6a9e4b634bdb703ead0aaa7cd6dce7fbf97e70c3c1cc61b3311b94c0b4</a:t>
-            </a:r>
-          </a:p>
-          <a:p>
-            <a:r>
-              <a:t>Ingestion note 1 | Transcoded to 5737 KB mono 16 kHz (≤1800s).</a:t>
-            </a:r>
-          </a:p>
-          <a:p>
-            <a:r>
-              <a:t>Ingestion note 2 | Transcribed with Gemini.</a:t>
-            </a:r>
-          </a:p>
-          <a:p>
-            <a:r>
-              <a:t>Ingestion note 3 | Standalone-audio content assessment covers the transcript. AI-origin detection from sound is outside this assessment. Original-file C2PA was checked before transcription and is reported separately.</a:t>
-            </a:r>
-          </a:p>
-          <a:p>
-            <a:r>
-              <a:t>Ingestion note 4 | Audio tracks inspected locally. Soundtrack uploads require a separate optional check; AI-origin detection from sound is outside this workflow.</a:t>
-            </a:r>
-          </a:p>
-          <a:p>
-            <a:r>
-              <a:t>Ingestion note 5 | Fresh provider replies acquired for eleven-examples-refresh-20260926-r1; report assembled locally from the saved responses without further API calls.</a:t>
-            </a:r>
-          </a:p>
-          <a:p>
-            <a:r>
-              <a:t>Ingestion note 6 | Transcript analysis used the first 12000 characters of a fresh 25985-character transcription; this report retains its first 4000 characters. Sound-origin detection is outside this check.</a:t>
-            </a:r>
-          </a:p>
-          <a:p>
-            <a:r>
-              <a:t>Ingestion note 7 | Provider latency values are restored from the acquisition receipts (maximum sampled-frame latency per provider); raw replies and assessment results are unchanged by this bookkeeping step.</a:t>
-            </a:r>
-          </a:p>
-        </p:txBody>
-      </p:sp>
-      <p:sp>
-        <p:nvSpPr>
-          <p:cNvPr id="4" name="Slide Number Placeholder 3"/>
-          <p:cNvSpPr>
-            <a:spLocks noGrp="1"/>
-          </p:cNvSpPr>
-          <p:nvPr>
-            <p:ph type="sldNum" idx="5" sz="quarter"/>
-          </p:nvPr>
-        </p:nvSpPr>
-        <p:spPr/>
-      </p:sp>
-    </p:spTree>
-  </p:cSld>
-  <p:clrMapOvr>
-    <a:masterClrMapping/>
-  </p:clrMapOvr>
-</p:notes>
-</file>
-
-<file path=ppt/notesSlides/notesSlide25.xml><?xml version="1.0" encoding="utf-8"?>
 <p:notes xmlns:a="http://schemas.openxmlformats.org/drawingml/2006/main" xmlns:p="http://schemas.openxmlformats.org/presentationml/2006/main" xmlns:r="http://schemas.openxmlformats.org/officeDocument/2006/relationships">
   <p:cSld>
     <p:spTree>
@@ -16850,7 +16754,7 @@
               </a:defRPr>
             </a:pPr>
             <a:r>
-              <a:t>Cite this analysis</a:t>
+              <a:t>File and analysis record</a:t>
             </a:r>
           </a:p>
         </p:txBody>
@@ -17037,7 +16941,7 @@
         </p:nvGraphicFramePr>
         <p:xfrm>
           <a:off x="365760" y="1700784"/>
-          <a:ext cx="8412479" cy="755904"/>
+          <a:ext cx="8412479" cy="349504"/>
         </p:xfrm>
         <a:graphic>
           <a:graphicData uri="http://schemas.openxmlformats.org/drawingml/2006/table">
@@ -17049,28 +16953,28 @@
                 <a:gridCol w="2271369"/>
                 <a:gridCol w="6141110"/>
               </a:tblGrid>
-              <a:tr h="755904">
-                <a:tc>
-                  <a:txBody>
-                    <a:bodyPr wrap="none"/>
-                    <a:lstStyle/>
-                    <a:p>
-                      <a:pPr>
-                        <a:lnSpc>
-                          <a:spcPts val="1600"/>
-                        </a:lnSpc>
-                        <a:spcAft>
-                          <a:spcPts val="0"/>
-                        </a:spcAft>
-                        <a:defRPr sz="1200" b="0">
-                          <a:solidFill>
-                            <a:srgbClr val="21243A"/>
-                          </a:solidFill>
-                          <a:latin typeface="Arial"/>
-                        </a:defRPr>
-                      </a:pPr>
-                      <a:r>
-                        <a:t>Software citation</a:t>
+              <a:tr h="349504">
+                <a:tc>
+                  <a:txBody>
+                    <a:bodyPr wrap="none"/>
+                    <a:lstStyle/>
+                    <a:p>
+                      <a:pPr>
+                        <a:lnSpc>
+                          <a:spcPts val="1600"/>
+                        </a:lnSpc>
+                        <a:spcAft>
+                          <a:spcPts val="0"/>
+                        </a:spcAft>
+                        <a:defRPr sz="1200" b="0">
+                          <a:solidFill>
+                            <a:srgbClr val="21243A"/>
+                          </a:solidFill>
+                          <a:latin typeface="Arial"/>
+                        </a:defRPr>
+                      </a:pPr>
+                      <a:r>
+                        <a:t>File</a:t>
                       </a:r>
                     </a:p>
                   </a:txBody>
@@ -17100,45 +17004,7 @@
                         </a:defRPr>
                       </a:pPr>
                       <a:r>
-                        <a:t>Martin, S. (2026) SDA Vision: Synthetic-media Discourse Analysis (version 0.1.0)</a:t>
-                      </a:r>
-                    </a:p>
-                    <a:p>
-                      <a:pPr>
-                        <a:lnSpc>
-                          <a:spcPts val="1600"/>
-                        </a:lnSpc>
-                        <a:spcAft>
-                          <a:spcPts val="0"/>
-                        </a:spcAft>
-                        <a:defRPr sz="1200" b="0">
-                          <a:solidFill>
-                            <a:srgbClr val="21243A"/>
-                          </a:solidFill>
-                          <a:latin typeface="Arial"/>
-                        </a:defRPr>
-                      </a:pPr>
-                      <a:r>
-                        <a:t>[Computer software]. Manchester Metropolitan University. Available at:</a:t>
-                      </a:r>
-                    </a:p>
-                    <a:p>
-                      <a:pPr>
-                        <a:lnSpc>
-                          <a:spcPts val="1600"/>
-                        </a:lnSpc>
-                        <a:spcAft>
-                          <a:spcPts val="0"/>
-                        </a:spcAft>
-                        <a:defRPr sz="1200" b="0">
-                          <a:solidFill>
-                            <a:srgbClr val="21243A"/>
-                          </a:solidFill>
-                          <a:latin typeface="Arial"/>
-                        </a:defRPr>
-                      </a:pPr>
-                      <a:r>
-                        <a:t>https://sdavision.io/</a:t>
+                        <a:t>podcast.m4a</a:t>
                       </a:r>
                     </a:p>
                   </a:txBody>
@@ -17162,8 +17028,8 @@
           <p:nvPr/>
         </p:nvGraphicFramePr>
         <p:xfrm>
-          <a:off x="365760" y="2456688"/>
-          <a:ext cx="8412479" cy="552704"/>
+          <a:off x="365760" y="2050288"/>
+          <a:ext cx="8412479" cy="349504"/>
         </p:xfrm>
         <a:graphic>
           <a:graphicData uri="http://schemas.openxmlformats.org/drawingml/2006/table">
@@ -17175,28 +17041,28 @@
                 <a:gridCol w="2271369"/>
                 <a:gridCol w="6141110"/>
               </a:tblGrid>
-              <a:tr h="552704">
-                <a:tc>
-                  <a:txBody>
-                    <a:bodyPr wrap="none"/>
-                    <a:lstStyle/>
-                    <a:p>
-                      <a:pPr>
-                        <a:lnSpc>
-                          <a:spcPts val="1600"/>
-                        </a:lnSpc>
-                        <a:spcAft>
-                          <a:spcPts val="0"/>
-                        </a:spcAft>
-                        <a:defRPr sz="1200" b="0">
-                          <a:solidFill>
-                            <a:srgbClr val="21243A"/>
-                          </a:solidFill>
-                          <a:latin typeface="Arial"/>
-                        </a:defRPr>
-                      </a:pPr>
-                      <a:r>
-                        <a:t>Software creator</a:t>
+              <a:tr h="349504">
+                <a:tc>
+                  <a:txBody>
+                    <a:bodyPr wrap="none"/>
+                    <a:lstStyle/>
+                    <a:p>
+                      <a:pPr>
+                        <a:lnSpc>
+                          <a:spcPts val="1600"/>
+                        </a:lnSpc>
+                        <a:spcAft>
+                          <a:spcPts val="0"/>
+                        </a:spcAft>
+                        <a:defRPr sz="1200" b="0">
+                          <a:solidFill>
+                            <a:srgbClr val="21243A"/>
+                          </a:solidFill>
+                          <a:latin typeface="Arial"/>
+                        </a:defRPr>
+                      </a:pPr>
+                      <a:r>
+                        <a:t>Analysis ID</a:t>
                       </a:r>
                     </a:p>
                   </a:txBody>
@@ -17226,26 +17092,7 @@
                         </a:defRPr>
                       </a:pPr>
                       <a:r>
-                        <a:t>Dr Sam Martin, Smart Data Research UK (UKRI) Fellow, Manchester Metropolitan</a:t>
-                      </a:r>
-                    </a:p>
-                    <a:p>
-                      <a:pPr>
-                        <a:lnSpc>
-                          <a:spcPts val="1600"/>
-                        </a:lnSpc>
-                        <a:spcAft>
-                          <a:spcPts val="0"/>
-                        </a:spcAft>
-                        <a:defRPr sz="1200" b="0">
-                          <a:solidFill>
-                            <a:srgbClr val="21243A"/>
-                          </a:solidFill>
-                          <a:latin typeface="Arial"/>
-                        </a:defRPr>
-                      </a:pPr>
-                      <a:r>
-                        <a:t>University (MMU). ORCID: https://orcid.org/0000-0002-4466-8374.</a:t>
+                        <a:t>7e1a6917-52a1-453d-8dda-9c4842232f31</a:t>
                       </a:r>
                     </a:p>
                   </a:txBody>
@@ -17269,8 +17116,8 @@
           <p:nvPr/>
         </p:nvGraphicFramePr>
         <p:xfrm>
-          <a:off x="365760" y="3009392"/>
-          <a:ext cx="8412479" cy="552704"/>
+          <a:off x="365760" y="2399792"/>
+          <a:ext cx="8412479" cy="349504"/>
         </p:xfrm>
         <a:graphic>
           <a:graphicData uri="http://schemas.openxmlformats.org/drawingml/2006/table">
@@ -17282,28 +17129,28 @@
                 <a:gridCol w="2271369"/>
                 <a:gridCol w="6141110"/>
               </a:tblGrid>
-              <a:tr h="552704">
-                <a:tc>
-                  <a:txBody>
-                    <a:bodyPr wrap="none"/>
-                    <a:lstStyle/>
-                    <a:p>
-                      <a:pPr>
-                        <a:lnSpc>
-                          <a:spcPts val="1600"/>
-                        </a:lnSpc>
-                        <a:spcAft>
-                          <a:spcPts val="0"/>
-                        </a:spcAft>
-                        <a:defRPr sz="1200" b="0">
-                          <a:solidFill>
-                            <a:srgbClr val="21243A"/>
-                          </a:solidFill>
-                          <a:latin typeface="Arial"/>
-                        </a:defRPr>
-                      </a:pPr>
-                      <a:r>
-                        <a:t>Funding acknowledgement</a:t>
+              <a:tr h="349504">
+                <a:tc>
+                  <a:txBody>
+                    <a:bodyPr wrap="none"/>
+                    <a:lstStyle/>
+                    <a:p>
+                      <a:pPr>
+                        <a:lnSpc>
+                          <a:spcPts val="1600"/>
+                        </a:lnSpc>
+                        <a:spcAft>
+                          <a:spcPts val="0"/>
+                        </a:spcAft>
+                        <a:defRPr sz="1200" b="0">
+                          <a:solidFill>
+                            <a:srgbClr val="21243A"/>
+                          </a:solidFill>
+                          <a:latin typeface="Arial"/>
+                        </a:defRPr>
+                      </a:pPr>
+                      <a:r>
+                        <a:t>Generated</a:t>
                       </a:r>
                     </a:p>
                   </a:txBody>
@@ -17333,26 +17180,7 @@
                         </a:defRPr>
                       </a:pPr>
                       <a:r>
-                        <a:t>This work was supported by Smart Data Research UK, a UKRI investment; Grant</a:t>
-                      </a:r>
-                    </a:p>
-                    <a:p>
-                      <a:pPr>
-                        <a:lnSpc>
-                          <a:spcPts val="1600"/>
-                        </a:lnSpc>
-                        <a:spcAft>
-                          <a:spcPts val="0"/>
-                        </a:spcAft>
-                        <a:defRPr sz="1200" b="0">
-                          <a:solidFill>
-                            <a:srgbClr val="21243A"/>
-                          </a:solidFill>
-                          <a:latin typeface="Arial"/>
-                        </a:defRPr>
-                      </a:pPr>
-                      <a:r>
-                        <a:t>number UKRI4010.</a:t>
+                        <a:t>2026-09-26T22:31:07+00:00</a:t>
                       </a:r>
                     </a:p>
                   </a:txBody>
@@ -17376,8 +17204,8 @@
           <p:nvPr/>
         </p:nvGraphicFramePr>
         <p:xfrm>
-          <a:off x="365760" y="3562095"/>
-          <a:ext cx="8412479" cy="552704"/>
+          <a:off x="365760" y="2749296"/>
+          <a:ext cx="8412479" cy="349504"/>
         </p:xfrm>
         <a:graphic>
           <a:graphicData uri="http://schemas.openxmlformats.org/drawingml/2006/table">
@@ -17389,28 +17217,28 @@
                 <a:gridCol w="2271369"/>
                 <a:gridCol w="6141110"/>
               </a:tblGrid>
-              <a:tr h="552704">
-                <a:tc>
-                  <a:txBody>
-                    <a:bodyPr wrap="none"/>
-                    <a:lstStyle/>
-                    <a:p>
-                      <a:pPr>
-                        <a:lnSpc>
-                          <a:spcPts val="1600"/>
-                        </a:lnSpc>
-                        <a:spcAft>
-                          <a:spcPts val="0"/>
-                        </a:spcAft>
-                        <a:defRPr sz="1200" b="0">
-                          <a:solidFill>
-                            <a:srgbClr val="21243A"/>
-                          </a:solidFill>
-                          <a:latin typeface="Arial"/>
-                        </a:defRPr>
-                      </a:pPr>
-                      <a:r>
-                        <a:t>Analysis record</a:t>
+              <a:tr h="349504">
+                <a:tc>
+                  <a:txBody>
+                    <a:bodyPr wrap="none"/>
+                    <a:lstStyle/>
+                    <a:p>
+                      <a:pPr>
+                        <a:lnSpc>
+                          <a:spcPts val="1600"/>
+                        </a:lnSpc>
+                        <a:spcAft>
+                          <a:spcPts val="0"/>
+                        </a:spcAft>
+                        <a:defRPr sz="1200" b="0">
+                          <a:solidFill>
+                            <a:srgbClr val="21243A"/>
+                          </a:solidFill>
+                          <a:latin typeface="Arial"/>
+                        </a:defRPr>
+                      </a:pPr>
+                      <a:r>
+                        <a:t>Tool</a:t>
                       </a:r>
                     </a:p>
                   </a:txBody>
@@ -17440,32 +17268,667 @@
                         </a:defRPr>
                       </a:pPr>
                       <a:r>
-                        <a:t>File: podcast.m4a; media type: audio; recorded at: 2026-09-26T22:31:07+00:00;</a:t>
-                      </a:r>
-                    </a:p>
-                    <a:p>
-                      <a:pPr>
-                        <a:lnSpc>
-                          <a:spcPts val="1600"/>
-                        </a:lnSpc>
-                        <a:spcAft>
-                          <a:spcPts val="0"/>
-                        </a:spcAft>
-                        <a:defRPr sz="1200" b="0">
-                          <a:solidFill>
-                            <a:srgbClr val="21243A"/>
-                          </a:solidFill>
-                          <a:latin typeface="Arial"/>
-                        </a:defRPr>
-                      </a:pPr>
-                      <a:r>
-                        <a:t>models: claude-opus-5-5, gemini-3.8-flash, gpt-6-astra.</a:t>
+                        <a:t>SDA Vision 0.1.0</a:t>
                       </a:r>
                     </a:p>
                   </a:txBody>
                   <a:tcPr marL="82296" marR="82296" marT="64008" marB="64008">
                     <a:solidFill>
                       <a:srgbClr val="FFFFFF"/>
+                    </a:solidFill>
+                  </a:tcPr>
+                </a:tc>
+              </a:tr>
+            </a:tbl>
+          </a:graphicData>
+        </a:graphic>
+      </p:graphicFrame>
+      <p:graphicFrame>
+        <p:nvGraphicFramePr>
+          <p:cNvPr id="11" name="Table 10"/>
+          <p:cNvGraphicFramePr>
+            <a:graphicFrameLocks noGrp="1"/>
+          </p:cNvGraphicFramePr>
+          <p:nvPr/>
+        </p:nvGraphicFramePr>
+        <p:xfrm>
+          <a:off x="365760" y="3098800"/>
+          <a:ext cx="8412479" cy="349504"/>
+        </p:xfrm>
+        <a:graphic>
+          <a:graphicData uri="http://schemas.openxmlformats.org/drawingml/2006/table">
+            <a:tbl>
+              <a:tblPr firstRow="1" bandRow="1">
+                <a:tableStyleId>{5C22544A-7EE6-4342-B048-85BDC9FD1C3A}</a:tableStyleId>
+              </a:tblPr>
+              <a:tblGrid>
+                <a:gridCol w="2271369"/>
+                <a:gridCol w="6141110"/>
+              </a:tblGrid>
+              <a:tr h="349504">
+                <a:tc>
+                  <a:txBody>
+                    <a:bodyPr wrap="none"/>
+                    <a:lstStyle/>
+                    <a:p>
+                      <a:pPr>
+                        <a:lnSpc>
+                          <a:spcPts val="1600"/>
+                        </a:lnSpc>
+                        <a:spcAft>
+                          <a:spcPts val="0"/>
+                        </a:spcAft>
+                        <a:defRPr sz="1200" b="0">
+                          <a:solidFill>
+                            <a:srgbClr val="21243A"/>
+                          </a:solidFill>
+                          <a:latin typeface="Arial"/>
+                        </a:defRPr>
+                      </a:pPr>
+                      <a:r>
+                        <a:t>Models</a:t>
+                      </a:r>
+                    </a:p>
+                  </a:txBody>
+                  <a:tcPr marL="82296" marR="82296" marT="64008" marB="64008">
+                    <a:solidFill>
+                      <a:srgbClr val="F1F7F7"/>
+                    </a:solidFill>
+                  </a:tcPr>
+                </a:tc>
+                <a:tc>
+                  <a:txBody>
+                    <a:bodyPr wrap="none"/>
+                    <a:lstStyle/>
+                    <a:p>
+                      <a:pPr>
+                        <a:lnSpc>
+                          <a:spcPts val="1600"/>
+                        </a:lnSpc>
+                        <a:spcAft>
+                          <a:spcPts val="0"/>
+                        </a:spcAft>
+                        <a:defRPr sz="1200" b="0">
+                          <a:solidFill>
+                            <a:srgbClr val="21243A"/>
+                          </a:solidFill>
+                          <a:latin typeface="Arial"/>
+                        </a:defRPr>
+                      </a:pPr>
+                      <a:r>
+                        <a:t>claude-opus-5-5, gemini-3.8-flash, gpt-6-astra</a:t>
+                      </a:r>
+                    </a:p>
+                  </a:txBody>
+                  <a:tcPr marL="82296" marR="82296" marT="64008" marB="64008">
+                    <a:solidFill>
+                      <a:srgbClr val="F1F7F7"/>
+                    </a:solidFill>
+                  </a:tcPr>
+                </a:tc>
+              </a:tr>
+            </a:tbl>
+          </a:graphicData>
+        </a:graphic>
+      </p:graphicFrame>
+      <p:graphicFrame>
+        <p:nvGraphicFramePr>
+          <p:cNvPr id="12" name="Table 11"/>
+          <p:cNvGraphicFramePr>
+            <a:graphicFrameLocks noGrp="1"/>
+          </p:cNvGraphicFramePr>
+          <p:nvPr/>
+        </p:nvGraphicFramePr>
+        <p:xfrm>
+          <a:off x="365760" y="3448304"/>
+          <a:ext cx="8412479" cy="349504"/>
+        </p:xfrm>
+        <a:graphic>
+          <a:graphicData uri="http://schemas.openxmlformats.org/drawingml/2006/table">
+            <a:tbl>
+              <a:tblPr firstRow="1" bandRow="1">
+                <a:tableStyleId>{5C22544A-7EE6-4342-B048-85BDC9FD1C3A}</a:tableStyleId>
+              </a:tblPr>
+              <a:tblGrid>
+                <a:gridCol w="2271369"/>
+                <a:gridCol w="6141110"/>
+              </a:tblGrid>
+              <a:tr h="349504">
+                <a:tc>
+                  <a:txBody>
+                    <a:bodyPr wrap="none"/>
+                    <a:lstStyle/>
+                    <a:p>
+                      <a:pPr>
+                        <a:lnSpc>
+                          <a:spcPts val="1600"/>
+                        </a:lnSpc>
+                        <a:spcAft>
+                          <a:spcPts val="0"/>
+                        </a:spcAft>
+                        <a:defRPr sz="1200" b="0">
+                          <a:solidFill>
+                            <a:srgbClr val="21243A"/>
+                          </a:solidFill>
+                          <a:latin typeface="Arial"/>
+                        </a:defRPr>
+                      </a:pPr>
+                      <a:r>
+                        <a:t>Method version</a:t>
+                      </a:r>
+                    </a:p>
+                  </a:txBody>
+                  <a:tcPr marL="82296" marR="82296" marT="64008" marB="64008">
+                    <a:solidFill>
+                      <a:srgbClr val="FFFFFF"/>
+                    </a:solidFill>
+                  </a:tcPr>
+                </a:tc>
+                <a:tc>
+                  <a:txBody>
+                    <a:bodyPr wrap="none"/>
+                    <a:lstStyle/>
+                    <a:p>
+                      <a:pPr>
+                        <a:lnSpc>
+                          <a:spcPts val="1600"/>
+                        </a:lnSpc>
+                        <a:spcAft>
+                          <a:spcPts val="0"/>
+                        </a:spcAft>
+                        <a:defRPr sz="1200" b="0">
+                          <a:solidFill>
+                            <a:srgbClr val="21243A"/>
+                          </a:solidFill>
+                          <a:latin typeface="Arial"/>
+                        </a:defRPr>
+                      </a:pPr>
+                      <a:r>
+                        <a:t>pdf-preparation-2026-09-26.1</a:t>
+                      </a:r>
+                    </a:p>
+                  </a:txBody>
+                  <a:tcPr marL="82296" marR="82296" marT="64008" marB="64008">
+                    <a:solidFill>
+                      <a:srgbClr val="FFFFFF"/>
+                    </a:solidFill>
+                  </a:tcPr>
+                </a:tc>
+              </a:tr>
+            </a:tbl>
+          </a:graphicData>
+        </a:graphic>
+      </p:graphicFrame>
+      <p:graphicFrame>
+        <p:nvGraphicFramePr>
+          <p:cNvPr id="13" name="Table 12"/>
+          <p:cNvGraphicFramePr>
+            <a:graphicFrameLocks noGrp="1"/>
+          </p:cNvGraphicFramePr>
+          <p:nvPr/>
+        </p:nvGraphicFramePr>
+        <p:xfrm>
+          <a:off x="365760" y="3797808"/>
+          <a:ext cx="8412479" cy="349504"/>
+        </p:xfrm>
+        <a:graphic>
+          <a:graphicData uri="http://schemas.openxmlformats.org/drawingml/2006/table">
+            <a:tbl>
+              <a:tblPr firstRow="1" bandRow="1">
+                <a:tableStyleId>{5C22544A-7EE6-4342-B048-85BDC9FD1C3A}</a:tableStyleId>
+              </a:tblPr>
+              <a:tblGrid>
+                <a:gridCol w="2271369"/>
+                <a:gridCol w="6141110"/>
+              </a:tblGrid>
+              <a:tr h="349504">
+                <a:tc>
+                  <a:txBody>
+                    <a:bodyPr wrap="none"/>
+                    <a:lstStyle/>
+                    <a:p>
+                      <a:pPr>
+                        <a:lnSpc>
+                          <a:spcPts val="1600"/>
+                        </a:lnSpc>
+                        <a:spcAft>
+                          <a:spcPts val="0"/>
+                        </a:spcAft>
+                        <a:defRPr sz="1200" b="0">
+                          <a:solidFill>
+                            <a:srgbClr val="21243A"/>
+                          </a:solidFill>
+                          <a:latin typeface="Arial"/>
+                        </a:defRPr>
+                      </a:pPr>
+                      <a:r>
+                        <a:t>Analysis lens</a:t>
+                      </a:r>
+                    </a:p>
+                  </a:txBody>
+                  <a:tcPr marL="82296" marR="82296" marT="64008" marB="64008">
+                    <a:solidFill>
+                      <a:srgbClr val="F1F7F7"/>
+                    </a:solidFill>
+                  </a:tcPr>
+                </a:tc>
+                <a:tc>
+                  <a:txBody>
+                    <a:bodyPr wrap="none"/>
+                    <a:lstStyle/>
+                    <a:p>
+                      <a:pPr>
+                        <a:lnSpc>
+                          <a:spcPts val="1600"/>
+                        </a:lnSpc>
+                        <a:spcAft>
+                          <a:spcPts val="0"/>
+                        </a:spcAft>
+                        <a:defRPr sz="1200" b="0">
+                          <a:solidFill>
+                            <a:srgbClr val="21243A"/>
+                          </a:solidFill>
+                          <a:latin typeface="Arial"/>
+                        </a:defRPr>
+                      </a:pPr>
+                      <a:r>
+                        <a:t>general</a:t>
+                      </a:r>
+                    </a:p>
+                  </a:txBody>
+                  <a:tcPr marL="82296" marR="82296" marT="64008" marB="64008">
+                    <a:solidFill>
+                      <a:srgbClr val="F1F7F7"/>
+                    </a:solidFill>
+                  </a:tcPr>
+                </a:tc>
+              </a:tr>
+            </a:tbl>
+          </a:graphicData>
+        </a:graphic>
+      </p:graphicFrame>
+      <p:graphicFrame>
+        <p:nvGraphicFramePr>
+          <p:cNvPr id="14" name="Table 13"/>
+          <p:cNvGraphicFramePr>
+            <a:graphicFrameLocks noGrp="1"/>
+          </p:cNvGraphicFramePr>
+          <p:nvPr/>
+        </p:nvGraphicFramePr>
+        <p:xfrm>
+          <a:off x="365760" y="4147312"/>
+          <a:ext cx="8412479" cy="349504"/>
+        </p:xfrm>
+        <a:graphic>
+          <a:graphicData uri="http://schemas.openxmlformats.org/drawingml/2006/table">
+            <a:tbl>
+              <a:tblPr firstRow="1" bandRow="1">
+                <a:tableStyleId>{5C22544A-7EE6-4342-B048-85BDC9FD1C3A}</a:tableStyleId>
+              </a:tblPr>
+              <a:tblGrid>
+                <a:gridCol w="2271369"/>
+                <a:gridCol w="6141110"/>
+              </a:tblGrid>
+              <a:tr h="349504">
+                <a:tc>
+                  <a:txBody>
+                    <a:bodyPr wrap="none"/>
+                    <a:lstStyle/>
+                    <a:p>
+                      <a:pPr>
+                        <a:lnSpc>
+                          <a:spcPts val="1600"/>
+                        </a:lnSpc>
+                        <a:spcAft>
+                          <a:spcPts val="0"/>
+                        </a:spcAft>
+                        <a:defRPr sz="1200" b="0">
+                          <a:solidFill>
+                            <a:srgbClr val="21243A"/>
+                          </a:solidFill>
+                          <a:latin typeface="Arial"/>
+                        </a:defRPr>
+                      </a:pPr>
+                      <a:r>
+                        <a:t>Original SHA-256</a:t>
+                      </a:r>
+                    </a:p>
+                  </a:txBody>
+                  <a:tcPr marL="82296" marR="82296" marT="64008" marB="64008">
+                    <a:solidFill>
+                      <a:srgbClr val="FFFFFF"/>
+                    </a:solidFill>
+                  </a:tcPr>
+                </a:tc>
+                <a:tc>
+                  <a:txBody>
+                    <a:bodyPr wrap="none"/>
+                    <a:lstStyle/>
+                    <a:p>
+                      <a:pPr>
+                        <a:lnSpc>
+                          <a:spcPts val="1600"/>
+                        </a:lnSpc>
+                        <a:spcAft>
+                          <a:spcPts val="0"/>
+                        </a:spcAft>
+                        <a:defRPr sz="1200" b="0">
+                          <a:solidFill>
+                            <a:srgbClr val="21243A"/>
+                          </a:solidFill>
+                          <a:latin typeface="Arial"/>
+                        </a:defRPr>
+                      </a:pPr>
+                      <a:r>
+                        <a:t>58663a6a9e4b634bdb703ead0aaa7cd6dce7fbf97e70c3c1cc61b3311b94c0b4</a:t>
+                      </a:r>
+                    </a:p>
+                  </a:txBody>
+                  <a:tcPr marL="82296" marR="82296" marT="64008" marB="64008">
+                    <a:solidFill>
+                      <a:srgbClr val="FFFFFF"/>
+                    </a:solidFill>
+                  </a:tcPr>
+                </a:tc>
+              </a:tr>
+            </a:tbl>
+          </a:graphicData>
+        </a:graphic>
+      </p:graphicFrame>
+      <p:graphicFrame>
+        <p:nvGraphicFramePr>
+          <p:cNvPr id="15" name="Table 14"/>
+          <p:cNvGraphicFramePr>
+            <a:graphicFrameLocks noGrp="1"/>
+          </p:cNvGraphicFramePr>
+          <p:nvPr/>
+        </p:nvGraphicFramePr>
+        <p:xfrm>
+          <a:off x="365760" y="4496816"/>
+          <a:ext cx="8412479" cy="349504"/>
+        </p:xfrm>
+        <a:graphic>
+          <a:graphicData uri="http://schemas.openxmlformats.org/drawingml/2006/table">
+            <a:tbl>
+              <a:tblPr firstRow="1" bandRow="1">
+                <a:tableStyleId>{5C22544A-7EE6-4342-B048-85BDC9FD1C3A}</a:tableStyleId>
+              </a:tblPr>
+              <a:tblGrid>
+                <a:gridCol w="2271369"/>
+                <a:gridCol w="6141110"/>
+              </a:tblGrid>
+              <a:tr h="349504">
+                <a:tc>
+                  <a:txBody>
+                    <a:bodyPr wrap="none"/>
+                    <a:lstStyle/>
+                    <a:p>
+                      <a:pPr>
+                        <a:lnSpc>
+                          <a:spcPts val="1600"/>
+                        </a:lnSpc>
+                        <a:spcAft>
+                          <a:spcPts val="0"/>
+                        </a:spcAft>
+                        <a:defRPr sz="1200" b="0">
+                          <a:solidFill>
+                            <a:srgbClr val="21243A"/>
+                          </a:solidFill>
+                          <a:latin typeface="Arial"/>
+                        </a:defRPr>
+                      </a:pPr>
+                      <a:r>
+                        <a:t>Ingestion note 1</a:t>
+                      </a:r>
+                    </a:p>
+                  </a:txBody>
+                  <a:tcPr marL="82296" marR="82296" marT="64008" marB="64008">
+                    <a:solidFill>
+                      <a:srgbClr val="F1F7F7"/>
+                    </a:solidFill>
+                  </a:tcPr>
+                </a:tc>
+                <a:tc>
+                  <a:txBody>
+                    <a:bodyPr wrap="none"/>
+                    <a:lstStyle/>
+                    <a:p>
+                      <a:pPr>
+                        <a:lnSpc>
+                          <a:spcPts val="1600"/>
+                        </a:lnSpc>
+                        <a:spcAft>
+                          <a:spcPts val="0"/>
+                        </a:spcAft>
+                        <a:defRPr sz="1200" b="0">
+                          <a:solidFill>
+                            <a:srgbClr val="21243A"/>
+                          </a:solidFill>
+                          <a:latin typeface="Arial"/>
+                        </a:defRPr>
+                      </a:pPr>
+                      <a:r>
+                        <a:t>Transcoded to 5737 KB mono 16 kHz (≤1800s).</a:t>
+                      </a:r>
+                    </a:p>
+                  </a:txBody>
+                  <a:tcPr marL="82296" marR="82296" marT="64008" marB="64008">
+                    <a:solidFill>
+                      <a:srgbClr val="F1F7F7"/>
+                    </a:solidFill>
+                  </a:tcPr>
+                </a:tc>
+              </a:tr>
+            </a:tbl>
+          </a:graphicData>
+        </a:graphic>
+      </p:graphicFrame>
+      <p:graphicFrame>
+        <p:nvGraphicFramePr>
+          <p:cNvPr id="16" name="Table 15"/>
+          <p:cNvGraphicFramePr>
+            <a:graphicFrameLocks noGrp="1"/>
+          </p:cNvGraphicFramePr>
+          <p:nvPr/>
+        </p:nvGraphicFramePr>
+        <p:xfrm>
+          <a:off x="365760" y="4846320"/>
+          <a:ext cx="8412479" cy="349504"/>
+        </p:xfrm>
+        <a:graphic>
+          <a:graphicData uri="http://schemas.openxmlformats.org/drawingml/2006/table">
+            <a:tbl>
+              <a:tblPr firstRow="1" bandRow="1">
+                <a:tableStyleId>{5C22544A-7EE6-4342-B048-85BDC9FD1C3A}</a:tableStyleId>
+              </a:tblPr>
+              <a:tblGrid>
+                <a:gridCol w="2271369"/>
+                <a:gridCol w="6141110"/>
+              </a:tblGrid>
+              <a:tr h="349504">
+                <a:tc>
+                  <a:txBody>
+                    <a:bodyPr wrap="none"/>
+                    <a:lstStyle/>
+                    <a:p>
+                      <a:pPr>
+                        <a:lnSpc>
+                          <a:spcPts val="1600"/>
+                        </a:lnSpc>
+                        <a:spcAft>
+                          <a:spcPts val="0"/>
+                        </a:spcAft>
+                        <a:defRPr sz="1200" b="0">
+                          <a:solidFill>
+                            <a:srgbClr val="21243A"/>
+                          </a:solidFill>
+                          <a:latin typeface="Arial"/>
+                        </a:defRPr>
+                      </a:pPr>
+                      <a:r>
+                        <a:t>Ingestion note 2</a:t>
+                      </a:r>
+                    </a:p>
+                  </a:txBody>
+                  <a:tcPr marL="82296" marR="82296" marT="64008" marB="64008">
+                    <a:solidFill>
+                      <a:srgbClr val="FFFFFF"/>
+                    </a:solidFill>
+                  </a:tcPr>
+                </a:tc>
+                <a:tc>
+                  <a:txBody>
+                    <a:bodyPr wrap="none"/>
+                    <a:lstStyle/>
+                    <a:p>
+                      <a:pPr>
+                        <a:lnSpc>
+                          <a:spcPts val="1600"/>
+                        </a:lnSpc>
+                        <a:spcAft>
+                          <a:spcPts val="0"/>
+                        </a:spcAft>
+                        <a:defRPr sz="1200" b="0">
+                          <a:solidFill>
+                            <a:srgbClr val="21243A"/>
+                          </a:solidFill>
+                          <a:latin typeface="Arial"/>
+                        </a:defRPr>
+                      </a:pPr>
+                      <a:r>
+                        <a:t>Transcribed with Gemini.</a:t>
+                      </a:r>
+                    </a:p>
+                  </a:txBody>
+                  <a:tcPr marL="82296" marR="82296" marT="64008" marB="64008">
+                    <a:solidFill>
+                      <a:srgbClr val="FFFFFF"/>
+                    </a:solidFill>
+                  </a:tcPr>
+                </a:tc>
+              </a:tr>
+            </a:tbl>
+          </a:graphicData>
+        </a:graphic>
+      </p:graphicFrame>
+      <p:graphicFrame>
+        <p:nvGraphicFramePr>
+          <p:cNvPr id="17" name="Table 16"/>
+          <p:cNvGraphicFramePr>
+            <a:graphicFrameLocks noGrp="1"/>
+          </p:cNvGraphicFramePr>
+          <p:nvPr/>
+        </p:nvGraphicFramePr>
+        <p:xfrm>
+          <a:off x="365760" y="5195824"/>
+          <a:ext cx="8412479" cy="755904"/>
+        </p:xfrm>
+        <a:graphic>
+          <a:graphicData uri="http://schemas.openxmlformats.org/drawingml/2006/table">
+            <a:tbl>
+              <a:tblPr firstRow="1" bandRow="1">
+                <a:tableStyleId>{5C22544A-7EE6-4342-B048-85BDC9FD1C3A}</a:tableStyleId>
+              </a:tblPr>
+              <a:tblGrid>
+                <a:gridCol w="2271369"/>
+                <a:gridCol w="6141110"/>
+              </a:tblGrid>
+              <a:tr h="755904">
+                <a:tc>
+                  <a:txBody>
+                    <a:bodyPr wrap="none"/>
+                    <a:lstStyle/>
+                    <a:p>
+                      <a:pPr>
+                        <a:lnSpc>
+                          <a:spcPts val="1600"/>
+                        </a:lnSpc>
+                        <a:spcAft>
+                          <a:spcPts val="0"/>
+                        </a:spcAft>
+                        <a:defRPr sz="1200" b="0">
+                          <a:solidFill>
+                            <a:srgbClr val="21243A"/>
+                          </a:solidFill>
+                          <a:latin typeface="Arial"/>
+                        </a:defRPr>
+                      </a:pPr>
+                      <a:r>
+                        <a:t>Ingestion note 3</a:t>
+                      </a:r>
+                    </a:p>
+                  </a:txBody>
+                  <a:tcPr marL="82296" marR="82296" marT="64008" marB="64008">
+                    <a:solidFill>
+                      <a:srgbClr val="F1F7F7"/>
+                    </a:solidFill>
+                  </a:tcPr>
+                </a:tc>
+                <a:tc>
+                  <a:txBody>
+                    <a:bodyPr wrap="none"/>
+                    <a:lstStyle/>
+                    <a:p>
+                      <a:pPr>
+                        <a:lnSpc>
+                          <a:spcPts val="1600"/>
+                        </a:lnSpc>
+                        <a:spcAft>
+                          <a:spcPts val="0"/>
+                        </a:spcAft>
+                        <a:defRPr sz="1200" b="0">
+                          <a:solidFill>
+                            <a:srgbClr val="21243A"/>
+                          </a:solidFill>
+                          <a:latin typeface="Arial"/>
+                        </a:defRPr>
+                      </a:pPr>
+                      <a:r>
+                        <a:t>Standalone-audio content assessment covers the transcript. AI-origin detection</a:t>
+                      </a:r>
+                    </a:p>
+                    <a:p>
+                      <a:pPr>
+                        <a:lnSpc>
+                          <a:spcPts val="1600"/>
+                        </a:lnSpc>
+                        <a:spcAft>
+                          <a:spcPts val="0"/>
+                        </a:spcAft>
+                        <a:defRPr sz="1200" b="0">
+                          <a:solidFill>
+                            <a:srgbClr val="21243A"/>
+                          </a:solidFill>
+                          <a:latin typeface="Arial"/>
+                        </a:defRPr>
+                      </a:pPr>
+                      <a:r>
+                        <a:t>from sound is outside this assessment. Original-file C2PA was checked before</a:t>
+                      </a:r>
+                    </a:p>
+                    <a:p>
+                      <a:pPr>
+                        <a:lnSpc>
+                          <a:spcPts val="1600"/>
+                        </a:lnSpc>
+                        <a:spcAft>
+                          <a:spcPts val="0"/>
+                        </a:spcAft>
+                        <a:defRPr sz="1200" b="0">
+                          <a:solidFill>
+                            <a:srgbClr val="21243A"/>
+                          </a:solidFill>
+                          <a:latin typeface="Arial"/>
+                        </a:defRPr>
+                      </a:pPr>
+                      <a:r>
+                        <a:t>transcription and is reported separately.</a:t>
+                      </a:r>
+                    </a:p>
+                  </a:txBody>
+                  <a:tcPr marL="82296" marR="82296" marT="64008" marB="64008">
+                    <a:solidFill>
+                      <a:srgbClr val="F1F7F7"/>
                     </a:solidFill>
                   </a:tcPr>
                 </a:tc>
@@ -17571,7 +18034,7 @@
               </a:defRPr>
             </a:pPr>
             <a:r>
-              <a:t>File and analysis record</a:t>
+              <a:t>File and analysis record (continued)</a:t>
             </a:r>
           </a:p>
         </p:txBody>
@@ -17656,1286 +18119,6 @@
             </a:pPr>
             <a:r>
               <a:t>24</a:t>
-            </a:r>
-          </a:p>
-        </p:txBody>
-      </p:sp>
-      <p:graphicFrame>
-        <p:nvGraphicFramePr>
-          <p:cNvPr id="6" name="Table 5"/>
-          <p:cNvGraphicFramePr>
-            <a:graphicFrameLocks noGrp="1"/>
-          </p:cNvGraphicFramePr>
-          <p:nvPr/>
-        </p:nvGraphicFramePr>
-        <p:xfrm>
-          <a:off x="365760" y="1353312"/>
-          <a:ext cx="8412479" cy="347472"/>
-        </p:xfrm>
-        <a:graphic>
-          <a:graphicData uri="http://schemas.openxmlformats.org/drawingml/2006/table">
-            <a:tbl>
-              <a:tblPr firstRow="1" bandRow="1">
-                <a:tableStyleId>{5C22544A-7EE6-4342-B048-85BDC9FD1C3A}</a:tableStyleId>
-              </a:tblPr>
-              <a:tblGrid>
-                <a:gridCol w="2271369"/>
-                <a:gridCol w="6141110"/>
-              </a:tblGrid>
-              <a:tr h="347472">
-                <a:tc>
-                  <a:txBody>
-                    <a:bodyPr wrap="none"/>
-                    <a:lstStyle/>
-                    <a:p>
-                      <a:pPr>
-                        <a:lnSpc>
-                          <a:spcPts val="1600"/>
-                        </a:lnSpc>
-                        <a:spcAft>
-                          <a:spcPts val="0"/>
-                        </a:spcAft>
-                        <a:defRPr sz="1200" b="1">
-                          <a:solidFill>
-                            <a:srgbClr val="FFFFFF"/>
-                          </a:solidFill>
-                          <a:latin typeface="Arial"/>
-                        </a:defRPr>
-                      </a:pPr>
-                      <a:r>
-                        <a:t>Field</a:t>
-                      </a:r>
-                    </a:p>
-                  </a:txBody>
-                  <a:tcPr marL="82296" marR="82296" marT="64008" marB="64008">
-                    <a:solidFill>
-                      <a:srgbClr val="16787C"/>
-                    </a:solidFill>
-                  </a:tcPr>
-                </a:tc>
-                <a:tc>
-                  <a:txBody>
-                    <a:bodyPr wrap="none"/>
-                    <a:lstStyle/>
-                    <a:p>
-                      <a:pPr>
-                        <a:lnSpc>
-                          <a:spcPts val="1600"/>
-                        </a:lnSpc>
-                        <a:spcAft>
-                          <a:spcPts val="0"/>
-                        </a:spcAft>
-                        <a:defRPr sz="1200" b="1">
-                          <a:solidFill>
-                            <a:srgbClr val="FFFFFF"/>
-                          </a:solidFill>
-                          <a:latin typeface="Arial"/>
-                        </a:defRPr>
-                      </a:pPr>
-                      <a:r>
-                        <a:t>Recorded detail</a:t>
-                      </a:r>
-                    </a:p>
-                  </a:txBody>
-                  <a:tcPr marL="82296" marR="82296" marT="64008" marB="64008">
-                    <a:solidFill>
-                      <a:srgbClr val="16787C"/>
-                    </a:solidFill>
-                  </a:tcPr>
-                </a:tc>
-              </a:tr>
-            </a:tbl>
-          </a:graphicData>
-        </a:graphic>
-      </p:graphicFrame>
-      <p:graphicFrame>
-        <p:nvGraphicFramePr>
-          <p:cNvPr id="7" name="Table 6"/>
-          <p:cNvGraphicFramePr>
-            <a:graphicFrameLocks noGrp="1"/>
-          </p:cNvGraphicFramePr>
-          <p:nvPr/>
-        </p:nvGraphicFramePr>
-        <p:xfrm>
-          <a:off x="365760" y="1700784"/>
-          <a:ext cx="8412479" cy="349504"/>
-        </p:xfrm>
-        <a:graphic>
-          <a:graphicData uri="http://schemas.openxmlformats.org/drawingml/2006/table">
-            <a:tbl>
-              <a:tblPr firstRow="1" bandRow="1">
-                <a:tableStyleId>{5C22544A-7EE6-4342-B048-85BDC9FD1C3A}</a:tableStyleId>
-              </a:tblPr>
-              <a:tblGrid>
-                <a:gridCol w="2271369"/>
-                <a:gridCol w="6141110"/>
-              </a:tblGrid>
-              <a:tr h="349504">
-                <a:tc>
-                  <a:txBody>
-                    <a:bodyPr wrap="none"/>
-                    <a:lstStyle/>
-                    <a:p>
-                      <a:pPr>
-                        <a:lnSpc>
-                          <a:spcPts val="1600"/>
-                        </a:lnSpc>
-                        <a:spcAft>
-                          <a:spcPts val="0"/>
-                        </a:spcAft>
-                        <a:defRPr sz="1200" b="0">
-                          <a:solidFill>
-                            <a:srgbClr val="21243A"/>
-                          </a:solidFill>
-                          <a:latin typeface="Arial"/>
-                        </a:defRPr>
-                      </a:pPr>
-                      <a:r>
-                        <a:t>File</a:t>
-                      </a:r>
-                    </a:p>
-                  </a:txBody>
-                  <a:tcPr marL="82296" marR="82296" marT="64008" marB="64008">
-                    <a:solidFill>
-                      <a:srgbClr val="F1F7F7"/>
-                    </a:solidFill>
-                  </a:tcPr>
-                </a:tc>
-                <a:tc>
-                  <a:txBody>
-                    <a:bodyPr wrap="none"/>
-                    <a:lstStyle/>
-                    <a:p>
-                      <a:pPr>
-                        <a:lnSpc>
-                          <a:spcPts val="1600"/>
-                        </a:lnSpc>
-                        <a:spcAft>
-                          <a:spcPts val="0"/>
-                        </a:spcAft>
-                        <a:defRPr sz="1200" b="0">
-                          <a:solidFill>
-                            <a:srgbClr val="21243A"/>
-                          </a:solidFill>
-                          <a:latin typeface="Arial"/>
-                        </a:defRPr>
-                      </a:pPr>
-                      <a:r>
-                        <a:t>podcast.m4a</a:t>
-                      </a:r>
-                    </a:p>
-                  </a:txBody>
-                  <a:tcPr marL="82296" marR="82296" marT="64008" marB="64008">
-                    <a:solidFill>
-                      <a:srgbClr val="F1F7F7"/>
-                    </a:solidFill>
-                  </a:tcPr>
-                </a:tc>
-              </a:tr>
-            </a:tbl>
-          </a:graphicData>
-        </a:graphic>
-      </p:graphicFrame>
-      <p:graphicFrame>
-        <p:nvGraphicFramePr>
-          <p:cNvPr id="8" name="Table 7"/>
-          <p:cNvGraphicFramePr>
-            <a:graphicFrameLocks noGrp="1"/>
-          </p:cNvGraphicFramePr>
-          <p:nvPr/>
-        </p:nvGraphicFramePr>
-        <p:xfrm>
-          <a:off x="365760" y="2050288"/>
-          <a:ext cx="8412479" cy="349504"/>
-        </p:xfrm>
-        <a:graphic>
-          <a:graphicData uri="http://schemas.openxmlformats.org/drawingml/2006/table">
-            <a:tbl>
-              <a:tblPr firstRow="1" bandRow="1">
-                <a:tableStyleId>{5C22544A-7EE6-4342-B048-85BDC9FD1C3A}</a:tableStyleId>
-              </a:tblPr>
-              <a:tblGrid>
-                <a:gridCol w="2271369"/>
-                <a:gridCol w="6141110"/>
-              </a:tblGrid>
-              <a:tr h="349504">
-                <a:tc>
-                  <a:txBody>
-                    <a:bodyPr wrap="none"/>
-                    <a:lstStyle/>
-                    <a:p>
-                      <a:pPr>
-                        <a:lnSpc>
-                          <a:spcPts val="1600"/>
-                        </a:lnSpc>
-                        <a:spcAft>
-                          <a:spcPts val="0"/>
-                        </a:spcAft>
-                        <a:defRPr sz="1200" b="0">
-                          <a:solidFill>
-                            <a:srgbClr val="21243A"/>
-                          </a:solidFill>
-                          <a:latin typeface="Arial"/>
-                        </a:defRPr>
-                      </a:pPr>
-                      <a:r>
-                        <a:t>Analysis ID</a:t>
-                      </a:r>
-                    </a:p>
-                  </a:txBody>
-                  <a:tcPr marL="82296" marR="82296" marT="64008" marB="64008">
-                    <a:solidFill>
-                      <a:srgbClr val="FFFFFF"/>
-                    </a:solidFill>
-                  </a:tcPr>
-                </a:tc>
-                <a:tc>
-                  <a:txBody>
-                    <a:bodyPr wrap="none"/>
-                    <a:lstStyle/>
-                    <a:p>
-                      <a:pPr>
-                        <a:lnSpc>
-                          <a:spcPts val="1600"/>
-                        </a:lnSpc>
-                        <a:spcAft>
-                          <a:spcPts val="0"/>
-                        </a:spcAft>
-                        <a:defRPr sz="1200" b="0">
-                          <a:solidFill>
-                            <a:srgbClr val="21243A"/>
-                          </a:solidFill>
-                          <a:latin typeface="Arial"/>
-                        </a:defRPr>
-                      </a:pPr>
-                      <a:r>
-                        <a:t>7e1a6917-52a1-453d-8dda-9c4842232f31</a:t>
-                      </a:r>
-                    </a:p>
-                  </a:txBody>
-                  <a:tcPr marL="82296" marR="82296" marT="64008" marB="64008">
-                    <a:solidFill>
-                      <a:srgbClr val="FFFFFF"/>
-                    </a:solidFill>
-                  </a:tcPr>
-                </a:tc>
-              </a:tr>
-            </a:tbl>
-          </a:graphicData>
-        </a:graphic>
-      </p:graphicFrame>
-      <p:graphicFrame>
-        <p:nvGraphicFramePr>
-          <p:cNvPr id="9" name="Table 8"/>
-          <p:cNvGraphicFramePr>
-            <a:graphicFrameLocks noGrp="1"/>
-          </p:cNvGraphicFramePr>
-          <p:nvPr/>
-        </p:nvGraphicFramePr>
-        <p:xfrm>
-          <a:off x="365760" y="2399792"/>
-          <a:ext cx="8412479" cy="349504"/>
-        </p:xfrm>
-        <a:graphic>
-          <a:graphicData uri="http://schemas.openxmlformats.org/drawingml/2006/table">
-            <a:tbl>
-              <a:tblPr firstRow="1" bandRow="1">
-                <a:tableStyleId>{5C22544A-7EE6-4342-B048-85BDC9FD1C3A}</a:tableStyleId>
-              </a:tblPr>
-              <a:tblGrid>
-                <a:gridCol w="2271369"/>
-                <a:gridCol w="6141110"/>
-              </a:tblGrid>
-              <a:tr h="349504">
-                <a:tc>
-                  <a:txBody>
-                    <a:bodyPr wrap="none"/>
-                    <a:lstStyle/>
-                    <a:p>
-                      <a:pPr>
-                        <a:lnSpc>
-                          <a:spcPts val="1600"/>
-                        </a:lnSpc>
-                        <a:spcAft>
-                          <a:spcPts val="0"/>
-                        </a:spcAft>
-                        <a:defRPr sz="1200" b="0">
-                          <a:solidFill>
-                            <a:srgbClr val="21243A"/>
-                          </a:solidFill>
-                          <a:latin typeface="Arial"/>
-                        </a:defRPr>
-                      </a:pPr>
-                      <a:r>
-                        <a:t>Generated</a:t>
-                      </a:r>
-                    </a:p>
-                  </a:txBody>
-                  <a:tcPr marL="82296" marR="82296" marT="64008" marB="64008">
-                    <a:solidFill>
-                      <a:srgbClr val="F1F7F7"/>
-                    </a:solidFill>
-                  </a:tcPr>
-                </a:tc>
-                <a:tc>
-                  <a:txBody>
-                    <a:bodyPr wrap="none"/>
-                    <a:lstStyle/>
-                    <a:p>
-                      <a:pPr>
-                        <a:lnSpc>
-                          <a:spcPts val="1600"/>
-                        </a:lnSpc>
-                        <a:spcAft>
-                          <a:spcPts val="0"/>
-                        </a:spcAft>
-                        <a:defRPr sz="1200" b="0">
-                          <a:solidFill>
-                            <a:srgbClr val="21243A"/>
-                          </a:solidFill>
-                          <a:latin typeface="Arial"/>
-                        </a:defRPr>
-                      </a:pPr>
-                      <a:r>
-                        <a:t>2026-09-26T22:31:07+00:00</a:t>
-                      </a:r>
-                    </a:p>
-                  </a:txBody>
-                  <a:tcPr marL="82296" marR="82296" marT="64008" marB="64008">
-                    <a:solidFill>
-                      <a:srgbClr val="F1F7F7"/>
-                    </a:solidFill>
-                  </a:tcPr>
-                </a:tc>
-              </a:tr>
-            </a:tbl>
-          </a:graphicData>
-        </a:graphic>
-      </p:graphicFrame>
-      <p:graphicFrame>
-        <p:nvGraphicFramePr>
-          <p:cNvPr id="10" name="Table 9"/>
-          <p:cNvGraphicFramePr>
-            <a:graphicFrameLocks noGrp="1"/>
-          </p:cNvGraphicFramePr>
-          <p:nvPr/>
-        </p:nvGraphicFramePr>
-        <p:xfrm>
-          <a:off x="365760" y="2749296"/>
-          <a:ext cx="8412479" cy="349504"/>
-        </p:xfrm>
-        <a:graphic>
-          <a:graphicData uri="http://schemas.openxmlformats.org/drawingml/2006/table">
-            <a:tbl>
-              <a:tblPr firstRow="1" bandRow="1">
-                <a:tableStyleId>{5C22544A-7EE6-4342-B048-85BDC9FD1C3A}</a:tableStyleId>
-              </a:tblPr>
-              <a:tblGrid>
-                <a:gridCol w="2271369"/>
-                <a:gridCol w="6141110"/>
-              </a:tblGrid>
-              <a:tr h="349504">
-                <a:tc>
-                  <a:txBody>
-                    <a:bodyPr wrap="none"/>
-                    <a:lstStyle/>
-                    <a:p>
-                      <a:pPr>
-                        <a:lnSpc>
-                          <a:spcPts val="1600"/>
-                        </a:lnSpc>
-                        <a:spcAft>
-                          <a:spcPts val="0"/>
-                        </a:spcAft>
-                        <a:defRPr sz="1200" b="0">
-                          <a:solidFill>
-                            <a:srgbClr val="21243A"/>
-                          </a:solidFill>
-                          <a:latin typeface="Arial"/>
-                        </a:defRPr>
-                      </a:pPr>
-                      <a:r>
-                        <a:t>Tool</a:t>
-                      </a:r>
-                    </a:p>
-                  </a:txBody>
-                  <a:tcPr marL="82296" marR="82296" marT="64008" marB="64008">
-                    <a:solidFill>
-                      <a:srgbClr val="FFFFFF"/>
-                    </a:solidFill>
-                  </a:tcPr>
-                </a:tc>
-                <a:tc>
-                  <a:txBody>
-                    <a:bodyPr wrap="none"/>
-                    <a:lstStyle/>
-                    <a:p>
-                      <a:pPr>
-                        <a:lnSpc>
-                          <a:spcPts val="1600"/>
-                        </a:lnSpc>
-                        <a:spcAft>
-                          <a:spcPts val="0"/>
-                        </a:spcAft>
-                        <a:defRPr sz="1200" b="0">
-                          <a:solidFill>
-                            <a:srgbClr val="21243A"/>
-                          </a:solidFill>
-                          <a:latin typeface="Arial"/>
-                        </a:defRPr>
-                      </a:pPr>
-                      <a:r>
-                        <a:t>SDA Vision 0.1.0</a:t>
-                      </a:r>
-                    </a:p>
-                  </a:txBody>
-                  <a:tcPr marL="82296" marR="82296" marT="64008" marB="64008">
-                    <a:solidFill>
-                      <a:srgbClr val="FFFFFF"/>
-                    </a:solidFill>
-                  </a:tcPr>
-                </a:tc>
-              </a:tr>
-            </a:tbl>
-          </a:graphicData>
-        </a:graphic>
-      </p:graphicFrame>
-      <p:graphicFrame>
-        <p:nvGraphicFramePr>
-          <p:cNvPr id="11" name="Table 10"/>
-          <p:cNvGraphicFramePr>
-            <a:graphicFrameLocks noGrp="1"/>
-          </p:cNvGraphicFramePr>
-          <p:nvPr/>
-        </p:nvGraphicFramePr>
-        <p:xfrm>
-          <a:off x="365760" y="3098800"/>
-          <a:ext cx="8412479" cy="349504"/>
-        </p:xfrm>
-        <a:graphic>
-          <a:graphicData uri="http://schemas.openxmlformats.org/drawingml/2006/table">
-            <a:tbl>
-              <a:tblPr firstRow="1" bandRow="1">
-                <a:tableStyleId>{5C22544A-7EE6-4342-B048-85BDC9FD1C3A}</a:tableStyleId>
-              </a:tblPr>
-              <a:tblGrid>
-                <a:gridCol w="2271369"/>
-                <a:gridCol w="6141110"/>
-              </a:tblGrid>
-              <a:tr h="349504">
-                <a:tc>
-                  <a:txBody>
-                    <a:bodyPr wrap="none"/>
-                    <a:lstStyle/>
-                    <a:p>
-                      <a:pPr>
-                        <a:lnSpc>
-                          <a:spcPts val="1600"/>
-                        </a:lnSpc>
-                        <a:spcAft>
-                          <a:spcPts val="0"/>
-                        </a:spcAft>
-                        <a:defRPr sz="1200" b="0">
-                          <a:solidFill>
-                            <a:srgbClr val="21243A"/>
-                          </a:solidFill>
-                          <a:latin typeface="Arial"/>
-                        </a:defRPr>
-                      </a:pPr>
-                      <a:r>
-                        <a:t>Models</a:t>
-                      </a:r>
-                    </a:p>
-                  </a:txBody>
-                  <a:tcPr marL="82296" marR="82296" marT="64008" marB="64008">
-                    <a:solidFill>
-                      <a:srgbClr val="F1F7F7"/>
-                    </a:solidFill>
-                  </a:tcPr>
-                </a:tc>
-                <a:tc>
-                  <a:txBody>
-                    <a:bodyPr wrap="none"/>
-                    <a:lstStyle/>
-                    <a:p>
-                      <a:pPr>
-                        <a:lnSpc>
-                          <a:spcPts val="1600"/>
-                        </a:lnSpc>
-                        <a:spcAft>
-                          <a:spcPts val="0"/>
-                        </a:spcAft>
-                        <a:defRPr sz="1200" b="0">
-                          <a:solidFill>
-                            <a:srgbClr val="21243A"/>
-                          </a:solidFill>
-                          <a:latin typeface="Arial"/>
-                        </a:defRPr>
-                      </a:pPr>
-                      <a:r>
-                        <a:t>claude-opus-5-5, gemini-3.8-flash, gpt-6-astra</a:t>
-                      </a:r>
-                    </a:p>
-                  </a:txBody>
-                  <a:tcPr marL="82296" marR="82296" marT="64008" marB="64008">
-                    <a:solidFill>
-                      <a:srgbClr val="F1F7F7"/>
-                    </a:solidFill>
-                  </a:tcPr>
-                </a:tc>
-              </a:tr>
-            </a:tbl>
-          </a:graphicData>
-        </a:graphic>
-      </p:graphicFrame>
-      <p:graphicFrame>
-        <p:nvGraphicFramePr>
-          <p:cNvPr id="12" name="Table 11"/>
-          <p:cNvGraphicFramePr>
-            <a:graphicFrameLocks noGrp="1"/>
-          </p:cNvGraphicFramePr>
-          <p:nvPr/>
-        </p:nvGraphicFramePr>
-        <p:xfrm>
-          <a:off x="365760" y="3448304"/>
-          <a:ext cx="8412479" cy="349504"/>
-        </p:xfrm>
-        <a:graphic>
-          <a:graphicData uri="http://schemas.openxmlformats.org/drawingml/2006/table">
-            <a:tbl>
-              <a:tblPr firstRow="1" bandRow="1">
-                <a:tableStyleId>{5C22544A-7EE6-4342-B048-85BDC9FD1C3A}</a:tableStyleId>
-              </a:tblPr>
-              <a:tblGrid>
-                <a:gridCol w="2271369"/>
-                <a:gridCol w="6141110"/>
-              </a:tblGrid>
-              <a:tr h="349504">
-                <a:tc>
-                  <a:txBody>
-                    <a:bodyPr wrap="none"/>
-                    <a:lstStyle/>
-                    <a:p>
-                      <a:pPr>
-                        <a:lnSpc>
-                          <a:spcPts val="1600"/>
-                        </a:lnSpc>
-                        <a:spcAft>
-                          <a:spcPts val="0"/>
-                        </a:spcAft>
-                        <a:defRPr sz="1200" b="0">
-                          <a:solidFill>
-                            <a:srgbClr val="21243A"/>
-                          </a:solidFill>
-                          <a:latin typeface="Arial"/>
-                        </a:defRPr>
-                      </a:pPr>
-                      <a:r>
-                        <a:t>Method version</a:t>
-                      </a:r>
-                    </a:p>
-                  </a:txBody>
-                  <a:tcPr marL="82296" marR="82296" marT="64008" marB="64008">
-                    <a:solidFill>
-                      <a:srgbClr val="FFFFFF"/>
-                    </a:solidFill>
-                  </a:tcPr>
-                </a:tc>
-                <a:tc>
-                  <a:txBody>
-                    <a:bodyPr wrap="none"/>
-                    <a:lstStyle/>
-                    <a:p>
-                      <a:pPr>
-                        <a:lnSpc>
-                          <a:spcPts val="1600"/>
-                        </a:lnSpc>
-                        <a:spcAft>
-                          <a:spcPts val="0"/>
-                        </a:spcAft>
-                        <a:defRPr sz="1200" b="0">
-                          <a:solidFill>
-                            <a:srgbClr val="21243A"/>
-                          </a:solidFill>
-                          <a:latin typeface="Arial"/>
-                        </a:defRPr>
-                      </a:pPr>
-                      <a:r>
-                        <a:t>pdf-preparation-2026-09-26.1</a:t>
-                      </a:r>
-                    </a:p>
-                  </a:txBody>
-                  <a:tcPr marL="82296" marR="82296" marT="64008" marB="64008">
-                    <a:solidFill>
-                      <a:srgbClr val="FFFFFF"/>
-                    </a:solidFill>
-                  </a:tcPr>
-                </a:tc>
-              </a:tr>
-            </a:tbl>
-          </a:graphicData>
-        </a:graphic>
-      </p:graphicFrame>
-      <p:graphicFrame>
-        <p:nvGraphicFramePr>
-          <p:cNvPr id="13" name="Table 12"/>
-          <p:cNvGraphicFramePr>
-            <a:graphicFrameLocks noGrp="1"/>
-          </p:cNvGraphicFramePr>
-          <p:nvPr/>
-        </p:nvGraphicFramePr>
-        <p:xfrm>
-          <a:off x="365760" y="3797808"/>
-          <a:ext cx="8412479" cy="349504"/>
-        </p:xfrm>
-        <a:graphic>
-          <a:graphicData uri="http://schemas.openxmlformats.org/drawingml/2006/table">
-            <a:tbl>
-              <a:tblPr firstRow="1" bandRow="1">
-                <a:tableStyleId>{5C22544A-7EE6-4342-B048-85BDC9FD1C3A}</a:tableStyleId>
-              </a:tblPr>
-              <a:tblGrid>
-                <a:gridCol w="2271369"/>
-                <a:gridCol w="6141110"/>
-              </a:tblGrid>
-              <a:tr h="349504">
-                <a:tc>
-                  <a:txBody>
-                    <a:bodyPr wrap="none"/>
-                    <a:lstStyle/>
-                    <a:p>
-                      <a:pPr>
-                        <a:lnSpc>
-                          <a:spcPts val="1600"/>
-                        </a:lnSpc>
-                        <a:spcAft>
-                          <a:spcPts val="0"/>
-                        </a:spcAft>
-                        <a:defRPr sz="1200" b="0">
-                          <a:solidFill>
-                            <a:srgbClr val="21243A"/>
-                          </a:solidFill>
-                          <a:latin typeface="Arial"/>
-                        </a:defRPr>
-                      </a:pPr>
-                      <a:r>
-                        <a:t>Analysis lens</a:t>
-                      </a:r>
-                    </a:p>
-                  </a:txBody>
-                  <a:tcPr marL="82296" marR="82296" marT="64008" marB="64008">
-                    <a:solidFill>
-                      <a:srgbClr val="F1F7F7"/>
-                    </a:solidFill>
-                  </a:tcPr>
-                </a:tc>
-                <a:tc>
-                  <a:txBody>
-                    <a:bodyPr wrap="none"/>
-                    <a:lstStyle/>
-                    <a:p>
-                      <a:pPr>
-                        <a:lnSpc>
-                          <a:spcPts val="1600"/>
-                        </a:lnSpc>
-                        <a:spcAft>
-                          <a:spcPts val="0"/>
-                        </a:spcAft>
-                        <a:defRPr sz="1200" b="0">
-                          <a:solidFill>
-                            <a:srgbClr val="21243A"/>
-                          </a:solidFill>
-                          <a:latin typeface="Arial"/>
-                        </a:defRPr>
-                      </a:pPr>
-                      <a:r>
-                        <a:t>general</a:t>
-                      </a:r>
-                    </a:p>
-                  </a:txBody>
-                  <a:tcPr marL="82296" marR="82296" marT="64008" marB="64008">
-                    <a:solidFill>
-                      <a:srgbClr val="F1F7F7"/>
-                    </a:solidFill>
-                  </a:tcPr>
-                </a:tc>
-              </a:tr>
-            </a:tbl>
-          </a:graphicData>
-        </a:graphic>
-      </p:graphicFrame>
-      <p:graphicFrame>
-        <p:nvGraphicFramePr>
-          <p:cNvPr id="14" name="Table 13"/>
-          <p:cNvGraphicFramePr>
-            <a:graphicFrameLocks noGrp="1"/>
-          </p:cNvGraphicFramePr>
-          <p:nvPr/>
-        </p:nvGraphicFramePr>
-        <p:xfrm>
-          <a:off x="365760" y="4147312"/>
-          <a:ext cx="8412479" cy="349504"/>
-        </p:xfrm>
-        <a:graphic>
-          <a:graphicData uri="http://schemas.openxmlformats.org/drawingml/2006/table">
-            <a:tbl>
-              <a:tblPr firstRow="1" bandRow="1">
-                <a:tableStyleId>{5C22544A-7EE6-4342-B048-85BDC9FD1C3A}</a:tableStyleId>
-              </a:tblPr>
-              <a:tblGrid>
-                <a:gridCol w="2271369"/>
-                <a:gridCol w="6141110"/>
-              </a:tblGrid>
-              <a:tr h="349504">
-                <a:tc>
-                  <a:txBody>
-                    <a:bodyPr wrap="none"/>
-                    <a:lstStyle/>
-                    <a:p>
-                      <a:pPr>
-                        <a:lnSpc>
-                          <a:spcPts val="1600"/>
-                        </a:lnSpc>
-                        <a:spcAft>
-                          <a:spcPts val="0"/>
-                        </a:spcAft>
-                        <a:defRPr sz="1200" b="0">
-                          <a:solidFill>
-                            <a:srgbClr val="21243A"/>
-                          </a:solidFill>
-                          <a:latin typeface="Arial"/>
-                        </a:defRPr>
-                      </a:pPr>
-                      <a:r>
-                        <a:t>Original SHA-256</a:t>
-                      </a:r>
-                    </a:p>
-                  </a:txBody>
-                  <a:tcPr marL="82296" marR="82296" marT="64008" marB="64008">
-                    <a:solidFill>
-                      <a:srgbClr val="FFFFFF"/>
-                    </a:solidFill>
-                  </a:tcPr>
-                </a:tc>
-                <a:tc>
-                  <a:txBody>
-                    <a:bodyPr wrap="none"/>
-                    <a:lstStyle/>
-                    <a:p>
-                      <a:pPr>
-                        <a:lnSpc>
-                          <a:spcPts val="1600"/>
-                        </a:lnSpc>
-                        <a:spcAft>
-                          <a:spcPts val="0"/>
-                        </a:spcAft>
-                        <a:defRPr sz="1200" b="0">
-                          <a:solidFill>
-                            <a:srgbClr val="21243A"/>
-                          </a:solidFill>
-                          <a:latin typeface="Arial"/>
-                        </a:defRPr>
-                      </a:pPr>
-                      <a:r>
-                        <a:t>58663a6a9e4b634bdb703ead0aaa7cd6dce7fbf97e70c3c1cc61b3311b94c0b4</a:t>
-                      </a:r>
-                    </a:p>
-                  </a:txBody>
-                  <a:tcPr marL="82296" marR="82296" marT="64008" marB="64008">
-                    <a:solidFill>
-                      <a:srgbClr val="FFFFFF"/>
-                    </a:solidFill>
-                  </a:tcPr>
-                </a:tc>
-              </a:tr>
-            </a:tbl>
-          </a:graphicData>
-        </a:graphic>
-      </p:graphicFrame>
-      <p:graphicFrame>
-        <p:nvGraphicFramePr>
-          <p:cNvPr id="15" name="Table 14"/>
-          <p:cNvGraphicFramePr>
-            <a:graphicFrameLocks noGrp="1"/>
-          </p:cNvGraphicFramePr>
-          <p:nvPr/>
-        </p:nvGraphicFramePr>
-        <p:xfrm>
-          <a:off x="365760" y="4496816"/>
-          <a:ext cx="8412479" cy="349504"/>
-        </p:xfrm>
-        <a:graphic>
-          <a:graphicData uri="http://schemas.openxmlformats.org/drawingml/2006/table">
-            <a:tbl>
-              <a:tblPr firstRow="1" bandRow="1">
-                <a:tableStyleId>{5C22544A-7EE6-4342-B048-85BDC9FD1C3A}</a:tableStyleId>
-              </a:tblPr>
-              <a:tblGrid>
-                <a:gridCol w="2271369"/>
-                <a:gridCol w="6141110"/>
-              </a:tblGrid>
-              <a:tr h="349504">
-                <a:tc>
-                  <a:txBody>
-                    <a:bodyPr wrap="none"/>
-                    <a:lstStyle/>
-                    <a:p>
-                      <a:pPr>
-                        <a:lnSpc>
-                          <a:spcPts val="1600"/>
-                        </a:lnSpc>
-                        <a:spcAft>
-                          <a:spcPts val="0"/>
-                        </a:spcAft>
-                        <a:defRPr sz="1200" b="0">
-                          <a:solidFill>
-                            <a:srgbClr val="21243A"/>
-                          </a:solidFill>
-                          <a:latin typeface="Arial"/>
-                        </a:defRPr>
-                      </a:pPr>
-                      <a:r>
-                        <a:t>Ingestion note 1</a:t>
-                      </a:r>
-                    </a:p>
-                  </a:txBody>
-                  <a:tcPr marL="82296" marR="82296" marT="64008" marB="64008">
-                    <a:solidFill>
-                      <a:srgbClr val="F1F7F7"/>
-                    </a:solidFill>
-                  </a:tcPr>
-                </a:tc>
-                <a:tc>
-                  <a:txBody>
-                    <a:bodyPr wrap="none"/>
-                    <a:lstStyle/>
-                    <a:p>
-                      <a:pPr>
-                        <a:lnSpc>
-                          <a:spcPts val="1600"/>
-                        </a:lnSpc>
-                        <a:spcAft>
-                          <a:spcPts val="0"/>
-                        </a:spcAft>
-                        <a:defRPr sz="1200" b="0">
-                          <a:solidFill>
-                            <a:srgbClr val="21243A"/>
-                          </a:solidFill>
-                          <a:latin typeface="Arial"/>
-                        </a:defRPr>
-                      </a:pPr>
-                      <a:r>
-                        <a:t>Transcoded to 5737 KB mono 16 kHz (≤1800s).</a:t>
-                      </a:r>
-                    </a:p>
-                  </a:txBody>
-                  <a:tcPr marL="82296" marR="82296" marT="64008" marB="64008">
-                    <a:solidFill>
-                      <a:srgbClr val="F1F7F7"/>
-                    </a:solidFill>
-                  </a:tcPr>
-                </a:tc>
-              </a:tr>
-            </a:tbl>
-          </a:graphicData>
-        </a:graphic>
-      </p:graphicFrame>
-      <p:graphicFrame>
-        <p:nvGraphicFramePr>
-          <p:cNvPr id="16" name="Table 15"/>
-          <p:cNvGraphicFramePr>
-            <a:graphicFrameLocks noGrp="1"/>
-          </p:cNvGraphicFramePr>
-          <p:nvPr/>
-        </p:nvGraphicFramePr>
-        <p:xfrm>
-          <a:off x="365760" y="4846320"/>
-          <a:ext cx="8412479" cy="349504"/>
-        </p:xfrm>
-        <a:graphic>
-          <a:graphicData uri="http://schemas.openxmlformats.org/drawingml/2006/table">
-            <a:tbl>
-              <a:tblPr firstRow="1" bandRow="1">
-                <a:tableStyleId>{5C22544A-7EE6-4342-B048-85BDC9FD1C3A}</a:tableStyleId>
-              </a:tblPr>
-              <a:tblGrid>
-                <a:gridCol w="2271369"/>
-                <a:gridCol w="6141110"/>
-              </a:tblGrid>
-              <a:tr h="349504">
-                <a:tc>
-                  <a:txBody>
-                    <a:bodyPr wrap="none"/>
-                    <a:lstStyle/>
-                    <a:p>
-                      <a:pPr>
-                        <a:lnSpc>
-                          <a:spcPts val="1600"/>
-                        </a:lnSpc>
-                        <a:spcAft>
-                          <a:spcPts val="0"/>
-                        </a:spcAft>
-                        <a:defRPr sz="1200" b="0">
-                          <a:solidFill>
-                            <a:srgbClr val="21243A"/>
-                          </a:solidFill>
-                          <a:latin typeface="Arial"/>
-                        </a:defRPr>
-                      </a:pPr>
-                      <a:r>
-                        <a:t>Ingestion note 2</a:t>
-                      </a:r>
-                    </a:p>
-                  </a:txBody>
-                  <a:tcPr marL="82296" marR="82296" marT="64008" marB="64008">
-                    <a:solidFill>
-                      <a:srgbClr val="FFFFFF"/>
-                    </a:solidFill>
-                  </a:tcPr>
-                </a:tc>
-                <a:tc>
-                  <a:txBody>
-                    <a:bodyPr wrap="none"/>
-                    <a:lstStyle/>
-                    <a:p>
-                      <a:pPr>
-                        <a:lnSpc>
-                          <a:spcPts val="1600"/>
-                        </a:lnSpc>
-                        <a:spcAft>
-                          <a:spcPts val="0"/>
-                        </a:spcAft>
-                        <a:defRPr sz="1200" b="0">
-                          <a:solidFill>
-                            <a:srgbClr val="21243A"/>
-                          </a:solidFill>
-                          <a:latin typeface="Arial"/>
-                        </a:defRPr>
-                      </a:pPr>
-                      <a:r>
-                        <a:t>Transcribed with Gemini.</a:t>
-                      </a:r>
-                    </a:p>
-                  </a:txBody>
-                  <a:tcPr marL="82296" marR="82296" marT="64008" marB="64008">
-                    <a:solidFill>
-                      <a:srgbClr val="FFFFFF"/>
-                    </a:solidFill>
-                  </a:tcPr>
-                </a:tc>
-              </a:tr>
-            </a:tbl>
-          </a:graphicData>
-        </a:graphic>
-      </p:graphicFrame>
-      <p:graphicFrame>
-        <p:nvGraphicFramePr>
-          <p:cNvPr id="17" name="Table 16"/>
-          <p:cNvGraphicFramePr>
-            <a:graphicFrameLocks noGrp="1"/>
-          </p:cNvGraphicFramePr>
-          <p:nvPr/>
-        </p:nvGraphicFramePr>
-        <p:xfrm>
-          <a:off x="365760" y="5195824"/>
-          <a:ext cx="8412479" cy="755904"/>
-        </p:xfrm>
-        <a:graphic>
-          <a:graphicData uri="http://schemas.openxmlformats.org/drawingml/2006/table">
-            <a:tbl>
-              <a:tblPr firstRow="1" bandRow="1">
-                <a:tableStyleId>{5C22544A-7EE6-4342-B048-85BDC9FD1C3A}</a:tableStyleId>
-              </a:tblPr>
-              <a:tblGrid>
-                <a:gridCol w="2271369"/>
-                <a:gridCol w="6141110"/>
-              </a:tblGrid>
-              <a:tr h="755904">
-                <a:tc>
-                  <a:txBody>
-                    <a:bodyPr wrap="none"/>
-                    <a:lstStyle/>
-                    <a:p>
-                      <a:pPr>
-                        <a:lnSpc>
-                          <a:spcPts val="1600"/>
-                        </a:lnSpc>
-                        <a:spcAft>
-                          <a:spcPts val="0"/>
-                        </a:spcAft>
-                        <a:defRPr sz="1200" b="0">
-                          <a:solidFill>
-                            <a:srgbClr val="21243A"/>
-                          </a:solidFill>
-                          <a:latin typeface="Arial"/>
-                        </a:defRPr>
-                      </a:pPr>
-                      <a:r>
-                        <a:t>Ingestion note 3</a:t>
-                      </a:r>
-                    </a:p>
-                  </a:txBody>
-                  <a:tcPr marL="82296" marR="82296" marT="64008" marB="64008">
-                    <a:solidFill>
-                      <a:srgbClr val="F1F7F7"/>
-                    </a:solidFill>
-                  </a:tcPr>
-                </a:tc>
-                <a:tc>
-                  <a:txBody>
-                    <a:bodyPr wrap="none"/>
-                    <a:lstStyle/>
-                    <a:p>
-                      <a:pPr>
-                        <a:lnSpc>
-                          <a:spcPts val="1600"/>
-                        </a:lnSpc>
-                        <a:spcAft>
-                          <a:spcPts val="0"/>
-                        </a:spcAft>
-                        <a:defRPr sz="1200" b="0">
-                          <a:solidFill>
-                            <a:srgbClr val="21243A"/>
-                          </a:solidFill>
-                          <a:latin typeface="Arial"/>
-                        </a:defRPr>
-                      </a:pPr>
-                      <a:r>
-                        <a:t>Standalone-audio content assessment covers the transcript. AI-origin detection</a:t>
-                      </a:r>
-                    </a:p>
-                    <a:p>
-                      <a:pPr>
-                        <a:lnSpc>
-                          <a:spcPts val="1600"/>
-                        </a:lnSpc>
-                        <a:spcAft>
-                          <a:spcPts val="0"/>
-                        </a:spcAft>
-                        <a:defRPr sz="1200" b="0">
-                          <a:solidFill>
-                            <a:srgbClr val="21243A"/>
-                          </a:solidFill>
-                          <a:latin typeface="Arial"/>
-                        </a:defRPr>
-                      </a:pPr>
-                      <a:r>
-                        <a:t>from sound is outside this assessment. Original-file C2PA was checked before</a:t>
-                      </a:r>
-                    </a:p>
-                    <a:p>
-                      <a:pPr>
-                        <a:lnSpc>
-                          <a:spcPts val="1600"/>
-                        </a:lnSpc>
-                        <a:spcAft>
-                          <a:spcPts val="0"/>
-                        </a:spcAft>
-                        <a:defRPr sz="1200" b="0">
-                          <a:solidFill>
-                            <a:srgbClr val="21243A"/>
-                          </a:solidFill>
-                          <a:latin typeface="Arial"/>
-                        </a:defRPr>
-                      </a:pPr>
-                      <a:r>
-                        <a:t>transcription and is reported separately.</a:t>
-                      </a:r>
-                    </a:p>
-                  </a:txBody>
-                  <a:tcPr marL="82296" marR="82296" marT="64008" marB="64008">
-                    <a:solidFill>
-                      <a:srgbClr val="F1F7F7"/>
-                    </a:solidFill>
-                  </a:tcPr>
-                </a:tc>
-              </a:tr>
-            </a:tbl>
-          </a:graphicData>
-        </a:graphic>
-      </p:graphicFrame>
-    </p:spTree>
-  </p:cSld>
-  <p:clrMapOvr>
-    <a:masterClrMapping/>
-  </p:clrMapOvr>
-</p:sld>
-</file>
-
-<file path=ppt/slides/slide25.xml><?xml version="1.0" encoding="utf-8"?>
-<p:sld xmlns:a="http://schemas.openxmlformats.org/drawingml/2006/main" xmlns:p="http://schemas.openxmlformats.org/presentationml/2006/main" xmlns:r="http://schemas.openxmlformats.org/officeDocument/2006/relationships">
-  <p:cSld>
-    <p:spTree>
-      <p:nvGrpSpPr>
-        <p:cNvPr id="1" name=""/>
-        <p:cNvGrpSpPr/>
-        <p:nvPr/>
-      </p:nvGrpSpPr>
-      <p:grpSpPr/>
-      <p:sp>
-        <p:nvSpPr>
-          <p:cNvPr id="2" name="TextBox 1"/>
-          <p:cNvSpPr txBox="1"/>
-          <p:nvPr/>
-        </p:nvSpPr>
-        <p:spPr>
-          <a:xfrm>
-            <a:off x="365760" y="219456"/>
-            <a:ext cx="8412480" cy="228600"/>
-          </a:xfrm>
-          <a:prstGeom prst="rect">
-            <a:avLst/>
-          </a:prstGeom>
-          <a:noFill/>
-        </p:spPr>
-        <p:txBody>
-          <a:bodyPr wrap="square" lIns="0" rIns="0" tIns="0" bIns="0">
-            <a:spAutoFit/>
-          </a:bodyPr>
-          <a:lstStyle/>
-          <a:p>
-            <a:pPr>
-              <a:lnSpc>
-                <a:spcPct val="115000"/>
-              </a:lnSpc>
-              <a:spcAft>
-                <a:spcPts val="0"/>
-              </a:spcAft>
-              <a:defRPr sz="1100" b="1">
-                <a:solidFill>
-                  <a:srgbClr val="C5006A"/>
-                </a:solidFill>
-                <a:latin typeface="Arial"/>
-              </a:defRPr>
-            </a:pPr>
-            <a:r>
-              <a:t>SDA VISION / RESEARCH REPORT</a:t>
-            </a:r>
-          </a:p>
-        </p:txBody>
-      </p:sp>
-      <p:sp>
-        <p:nvSpPr>
-          <p:cNvPr id="3" name="TextBox 2"/>
-          <p:cNvSpPr txBox="1"/>
-          <p:nvPr/>
-        </p:nvSpPr>
-        <p:spPr>
-          <a:xfrm>
-            <a:off x="365760" y="658368"/>
-            <a:ext cx="8412480" cy="612648"/>
-          </a:xfrm>
-          <a:prstGeom prst="rect">
-            <a:avLst/>
-          </a:prstGeom>
-          <a:noFill/>
-        </p:spPr>
-        <p:txBody>
-          <a:bodyPr wrap="square" lIns="0" rIns="0" tIns="0" bIns="0">
-            <a:spAutoFit/>
-          </a:bodyPr>
-          <a:lstStyle/>
-          <a:p>
-            <a:pPr>
-              <a:lnSpc>
-                <a:spcPct val="115000"/>
-              </a:lnSpc>
-              <a:spcAft>
-                <a:spcPts val="0"/>
-              </a:spcAft>
-              <a:defRPr sz="2200" b="1">
-                <a:solidFill>
-                  <a:srgbClr val="21243A"/>
-                </a:solidFill>
-                <a:latin typeface="Arial"/>
-              </a:defRPr>
-            </a:pPr>
-            <a:r>
-              <a:t>File and analysis record (continued)</a:t>
-            </a:r>
-          </a:p>
-        </p:txBody>
-      </p:sp>
-      <p:sp>
-        <p:nvSpPr>
-          <p:cNvPr id="4" name="TextBox 3"/>
-          <p:cNvSpPr txBox="1"/>
-          <p:nvPr/>
-        </p:nvSpPr>
-        <p:spPr>
-          <a:xfrm>
-            <a:off x="365760" y="6291072"/>
-            <a:ext cx="8001000" cy="365760"/>
-          </a:xfrm>
-          <a:prstGeom prst="rect">
-            <a:avLst/>
-          </a:prstGeom>
-          <a:noFill/>
-        </p:spPr>
-        <p:txBody>
-          <a:bodyPr wrap="square" lIns="0" rIns="0" tIns="0" bIns="0">
-            <a:spAutoFit/>
-          </a:bodyPr>
-          <a:lstStyle/>
-          <a:p>
-            <a:pPr>
-              <a:lnSpc>
-                <a:spcPct val="115000"/>
-              </a:lnSpc>
-              <a:spcAft>
-                <a:spcPts val="0"/>
-              </a:spcAft>
-              <a:defRPr sz="800" b="0">
-                <a:solidFill>
-                  <a:srgbClr val="545B6D"/>
-                </a:solidFill>
-                <a:latin typeface="Arial"/>
-              </a:defRPr>
-            </a:pPr>
-            <a:r>
-              <a:t>Research assessment. Ratings are not calibrated probabilities. Acoustic AI-origin detection: outside scope.</a:t>
-            </a:r>
-          </a:p>
-        </p:txBody>
-      </p:sp>
-      <p:sp>
-        <p:nvSpPr>
-          <p:cNvPr id="5" name="TextBox 4"/>
-          <p:cNvSpPr txBox="1"/>
-          <p:nvPr/>
-        </p:nvSpPr>
-        <p:spPr>
-          <a:xfrm>
-            <a:off x="8394192" y="6318504"/>
-            <a:ext cx="365760" cy="228600"/>
-          </a:xfrm>
-          <a:prstGeom prst="rect">
-            <a:avLst/>
-          </a:prstGeom>
-          <a:noFill/>
-        </p:spPr>
-        <p:txBody>
-          <a:bodyPr wrap="square" lIns="0" rIns="0" tIns="0" bIns="0">
-            <a:spAutoFit/>
-          </a:bodyPr>
-          <a:lstStyle/>
-          <a:p>
-            <a:pPr>
-              <a:lnSpc>
-                <a:spcPct val="115000"/>
-              </a:lnSpc>
-              <a:spcAft>
-                <a:spcPts val="0"/>
-              </a:spcAft>
-              <a:defRPr sz="900" b="0">
-                <a:solidFill>
-                  <a:srgbClr val="545B6D"/>
-                </a:solidFill>
-                <a:latin typeface="Arial"/>
-              </a:defRPr>
-            </a:pPr>
-            <a:r>
-              <a:t>25</a:t>
             </a:r>
           </a:p>
         </p:txBody>
